--- a/docs/report/Theta_Pen_Plotter_Summer_Progress_Update.pptx
+++ b/docs/report/Theta_Pen_Plotter_Summer_Progress_Update.pptx
@@ -2538,64 +2538,22 @@
       </p:pic>
       <p:sp>
         <p:nvSpPr>
-          <p:cNvPr id="7" name="Rectangle: Rounded Corners 6">
-            <a:extLst>
-              <a:ext uri="{FF2B5EF4-FFF2-40B4-BE49-F238E27FC236}">
-                <a16:creationId xmlns:a16="http://schemas.microsoft.com/office/drawing/2014/main" id="{288213A0-7735-4712-A466-0BAF35E8CDFE}"/>
-              </a:ext>
-            </a:extLst>
-          </p:cNvPr>
-          <p:cNvSpPr>
-            <a:spLocks noGrp="1"/>
-          </p:cNvSpPr>
-          <p:nvPr/>
-        </p:nvSpPr>
-        <p:spPr>
-          <a:xfrm>
-            <a:off x="8572500" y="1847850"/>
-            <a:ext cx="2857500" cy="3371850"/>
-          </a:xfrm>
-          <a:prstGeom prst="roundRect">
-            <a:avLst>
-              <a:gd name="adj" fmla="val 2667"/>
-            </a:avLst>
-          </a:prstGeom>
-          <a:solidFill>
-            <a:srgbClr val="EAF5FB"/>
-          </a:solidFill>
-          <a:ln w="9525">
-            <a:solidFill>
-              <a:srgbClr val="3D8DFF"/>
-            </a:solidFill>
-            <a:prstDash val="solid"/>
-          </a:ln>
-        </p:spPr>
-        <p:txBody>
-          <a:bodyPr/>
-          <a:lstStyle/>
-          <a:p>
-            <a:endParaRPr lang="en-US"/>
-          </a:p>
-        </p:txBody>
-      </p:sp>
-      <p:sp>
-        <p:nvSpPr>
-          <p:cNvPr id="8" name="Rectangle 7">
-            <a:extLst>
-              <a:ext uri="{FF2B5EF4-FFF2-40B4-BE49-F238E27FC236}">
-                <a16:creationId xmlns:a16="http://schemas.microsoft.com/office/drawing/2014/main" id="{2711C4FE-BB95-49F0-875A-79973572DB57}"/>
-              </a:ext>
-            </a:extLst>
-          </p:cNvPr>
-          <p:cNvSpPr>
-            <a:spLocks noGrp="1"/>
-          </p:cNvSpPr>
-          <p:nvPr/>
-        </p:nvSpPr>
-        <p:spPr>
-          <a:xfrm>
-            <a:off x="8839200" y="2152650"/>
-            <a:ext cx="2324100" cy="323850"/>
+          <p:cNvPr id="10" name="Rectangle 9">
+            <a:extLst>
+              <a:ext uri="{FF2B5EF4-FFF2-40B4-BE49-F238E27FC236}">
+                <a16:creationId xmlns:a16="http://schemas.microsoft.com/office/drawing/2014/main" id="{96D81758-CD88-4EF5-A7F6-B3CD03B93DBF}"/>
+              </a:ext>
+            </a:extLst>
+          </p:cNvPr>
+          <p:cNvSpPr>
+            <a:spLocks noGrp="1"/>
+          </p:cNvSpPr>
+          <p:nvPr/>
+        </p:nvSpPr>
+        <p:spPr>
+          <a:xfrm>
+            <a:off x="8572500" y="3238500"/>
+            <a:ext cx="2540000" cy="508000"/>
           </a:xfrm>
           <a:prstGeom prst="rect">
             <a:avLst/>
@@ -2613,9 +2571,9 @@
           <a:lstStyle/>
           <a:p>
             <a:pPr algn="l">
-              <a:defRPr sz="1650" b="1">
-                <a:solidFill>
-                  <a:srgbClr val="000000"/>
+              <a:defRPr sz="1050" b="0">
+                <a:solidFill>
+                  <a:srgbClr val="59616B"/>
                 </a:solidFill>
                 <a:latin typeface="Helvetica Neue"/>
                 <a:ea typeface="Helvetica Neue"/>
@@ -2623,155 +2581,19 @@
               </a:defRPr>
             </a:pPr>
             <a:r>
-              <a:rPr lang="en-US" sz="1650" b="1">
-                <a:solidFill>
-                  <a:srgbClr val="000000"/>
+              <a:rPr lang="en-US" sz="1100" b="0">
+                <a:solidFill>
+                  <a:srgbClr val="80726B"/>
                 </a:solidFill>
                 <a:latin typeface="Helvetica Neue"/>
                 <a:ea typeface="Helvetica Neue"/>
                 <a:cs typeface="Helvetica Neue"/>
               </a:rPr>
-              <a:t>Step 5 — Per-run touch check</a:t>
-            </a:r>
-            <a:endParaRPr sz="1650" b="1">
+              <a:t>Detail shown inside the map. Hover or click another process to compare.</a:t>
+            </a:r>
+            <a:endParaRPr sz="1100" b="0">
               <a:solidFill>
-                <a:srgbClr val="000000"/>
-              </a:solidFill>
-              <a:latin typeface="Helvetica Neue"/>
-              <a:ea typeface="Helvetica Neue"/>
-              <a:cs typeface="Helvetica Neue"/>
-            </a:endParaRPr>
-          </a:p>
-        </p:txBody>
-      </p:sp>
-      <p:sp>
-        <p:nvSpPr>
-          <p:cNvPr id="9" name="Rectangle 8">
-            <a:extLst>
-              <a:ext uri="{FF2B5EF4-FFF2-40B4-BE49-F238E27FC236}">
-                <a16:creationId xmlns:a16="http://schemas.microsoft.com/office/drawing/2014/main" id="{D332E2B0-B79D-428E-A109-130D654AAF30}"/>
-              </a:ext>
-            </a:extLst>
-          </p:cNvPr>
-          <p:cNvSpPr>
-            <a:spLocks noGrp="1"/>
-          </p:cNvSpPr>
-          <p:nvPr/>
-        </p:nvSpPr>
-        <p:spPr>
-          <a:xfrm>
-            <a:off x="8839200" y="2724150"/>
-            <a:ext cx="2247900" cy="1981200"/>
-          </a:xfrm>
-          <a:prstGeom prst="rect">
-            <a:avLst/>
-          </a:prstGeom>
-          <a:noFill/>
-          <a:ln w="0">
-            <a:noFill/>
-            <a:prstDash val="solid"/>
-          </a:ln>
-        </p:spPr>
-        <p:txBody>
-          <a:bodyPr lIns="0" tIns="0" rIns="0" bIns="0" anchor="t">
-            <a:normAutofit/>
-          </a:bodyPr>
-          <a:lstStyle/>
-          <a:p>
-            <a:pPr algn="l">
-              <a:defRPr sz="1350" b="0">
-                <a:solidFill>
-                  <a:srgbClr val="000000"/>
-                </a:solidFill>
-                <a:latin typeface="Helvetica Neue"/>
-                <a:ea typeface="Helvetica Neue"/>
-                <a:cs typeface="Helvetica Neue"/>
-              </a:defRPr>
-            </a:pPr>
-            <a:r>
-              <a:rPr lang="en-US" sz="1350" b="0">
-                <a:solidFill>
-                  <a:srgbClr val="000000"/>
-                </a:solidFill>
-                <a:latin typeface="Helvetica Neue"/>
-                <a:ea typeface="Helvetica Neue"/>
-                <a:cs typeface="Helvetica Neue"/>
-              </a:rPr>
-              <a:t>M3
-Pro Micro seeks down until the load cell reaches the contact threshold.
-M5
-The pen releases, then receives a bounded clearance pulse.
-Failure to touch, release, or clear stops the run.</a:t>
-            </a:r>
-            <a:endParaRPr sz="1350" b="0">
-              <a:solidFill>
-                <a:srgbClr val="000000"/>
-              </a:solidFill>
-              <a:latin typeface="Helvetica Neue"/>
-              <a:ea typeface="Helvetica Neue"/>
-              <a:cs typeface="Helvetica Neue"/>
-            </a:endParaRPr>
-          </a:p>
-        </p:txBody>
-      </p:sp>
-      <p:sp>
-        <p:nvSpPr>
-          <p:cNvPr id="10" name="Rectangle 9">
-            <a:extLst>
-              <a:ext uri="{FF2B5EF4-FFF2-40B4-BE49-F238E27FC236}">
-                <a16:creationId xmlns:a16="http://schemas.microsoft.com/office/drawing/2014/main" id="{96D81758-CD88-4EF5-A7F6-B3CD03B93DBF}"/>
-              </a:ext>
-            </a:extLst>
-          </p:cNvPr>
-          <p:cNvSpPr>
-            <a:spLocks noGrp="1"/>
-          </p:cNvSpPr>
-          <p:nvPr/>
-        </p:nvSpPr>
-        <p:spPr>
-          <a:xfrm>
-            <a:off x="8572500" y="5448300"/>
-            <a:ext cx="2857500" cy="457200"/>
-          </a:xfrm>
-          <a:prstGeom prst="rect">
-            <a:avLst/>
-          </a:prstGeom>
-          <a:noFill/>
-          <a:ln w="0">
-            <a:noFill/>
-            <a:prstDash val="solid"/>
-          </a:ln>
-        </p:spPr>
-        <p:txBody>
-          <a:bodyPr lIns="0" tIns="0" rIns="0" bIns="0" anchor="t">
-            <a:normAutofit/>
-          </a:bodyPr>
-          <a:lstStyle/>
-          <a:p>
-            <a:pPr algn="l">
-              <a:defRPr sz="1050" b="0">
-                <a:solidFill>
-                  <a:srgbClr val="59616B"/>
-                </a:solidFill>
-                <a:latin typeface="Helvetica Neue"/>
-                <a:ea typeface="Helvetica Neue"/>
-                <a:cs typeface="Helvetica Neue"/>
-              </a:defRPr>
-            </a:pPr>
-            <a:r>
-              <a:rPr lang="en-US" sz="1050" b="0">
-                <a:solidFill>
-                  <a:srgbClr val="59616B"/>
-                </a:solidFill>
-                <a:latin typeface="Helvetica Neue"/>
-                <a:ea typeface="Helvetica Neue"/>
-                <a:cs typeface="Helvetica Neue"/>
-              </a:rPr>
-              <a:t>Hover or click another process in the map, or click BACK to return to the overview.</a:t>
-            </a:r>
-            <a:endParaRPr sz="1050" b="0">
-              <a:solidFill>
-                <a:srgbClr val="59616B"/>
+                <a:srgbClr val="80726B"/>
               </a:solidFill>
               <a:latin typeface="Helvetica Neue"/>
               <a:ea typeface="Helvetica Neue"/>
@@ -3316,6 +3138,145 @@
           <a:p>
             <a:pPr algn="ctr"/>
             <a:endParaRPr lang="en-US"/>
+          </a:p>
+        </p:txBody>
+      </p:sp>
+      <p:sp>
+        <p:nvSpPr>
+          <p:cNvPr id="20" name="Matching P100 Map Detail Background">
+            <a:extLst>
+              <a:ext uri="{FF2B5EF4-FFF2-40B4-BE49-F238E27FC236}">
+                <a16:creationId xmlns:a16="http://schemas.microsoft.com/office/drawing/2014/main" id="{89FE897F-04BC-FA43-95EF-FD5AA8ADA80D}"/>
+              </a:ext>
+            </a:extLst>
+          </p:cNvPr>
+          <p:cNvSpPr/>
+          <p:nvPr/>
+        </p:nvSpPr>
+        <p:spPr>
+          <a:xfrm>
+            <a:off x="4953000" y="2552700"/>
+            <a:ext cx="2159000" cy="1574800"/>
+          </a:xfrm>
+          <a:prstGeom prst="rect">
+            <a:avLst/>
+          </a:prstGeom>
+          <a:solidFill>
+            <a:srgbClr val="2B251F"/>
+          </a:solidFill>
+          <a:ln w="8890">
+            <a:solidFill>
+              <a:srgbClr val="6E6052"/>
+            </a:solidFill>
+          </a:ln>
+        </p:spPr>
+        <p:style>
+          <a:lnRef idx="2">
+            <a:schemeClr val="accent1">
+              <a:shade val="15000"/>
+            </a:schemeClr>
+          </a:lnRef>
+          <a:fillRef idx="1">
+            <a:schemeClr val="accent1"/>
+          </a:fillRef>
+          <a:effectRef idx="0">
+            <a:schemeClr val="accent1"/>
+          </a:effectRef>
+          <a:fontRef idx="minor">
+            <a:schemeClr val="lt1"/>
+          </a:fontRef>
+        </p:style>
+        <p:txBody>
+          <a:bodyPr rtlCol="0" anchor="ctr"/>
+          <a:lstStyle/>
+          <a:p>
+            <a:pPr algn="ctr"/>
+            <a:endParaRPr lang="en-US"/>
+          </a:p>
+        </p:txBody>
+      </p:sp>
+      <p:sp>
+        <p:nvSpPr>
+          <p:cNvPr id="21" name="Matching P100 Map Detail Title">
+            <a:extLst>
+              <a:ext uri="{FF2B5EF4-FFF2-40B4-BE49-F238E27FC236}">
+                <a16:creationId xmlns:a16="http://schemas.microsoft.com/office/drawing/2014/main" id="{52103310-A1E3-00CA-D853-899611B9D158}"/>
+              </a:ext>
+            </a:extLst>
+          </p:cNvPr>
+          <p:cNvSpPr txBox="1"/>
+          <p:nvPr/>
+        </p:nvSpPr>
+        <p:spPr>
+          <a:xfrm>
+            <a:off x="5067300" y="2667000"/>
+            <a:ext cx="1930400" cy="115416"/>
+          </a:xfrm>
+          <a:prstGeom prst="rect">
+            <a:avLst/>
+          </a:prstGeom>
+          <a:noFill/>
+        </p:spPr>
+        <p:txBody>
+          <a:bodyPr vert="horz" lIns="0" tIns="0" rIns="0" bIns="0" rtlCol="0">
+            <a:spAutoFit/>
+          </a:bodyPr>
+          <a:lstStyle/>
+          <a:p>
+            <a:r>
+              <a:rPr lang="en-US" sz="750" b="1">
+                <a:solidFill>
+                  <a:srgbClr val="FFCC66"/>
+                </a:solidFill>
+                <a:latin typeface="Aptos" panose="020B0004020202020204" pitchFamily="34" charset="0"/>
+              </a:rPr>
+              <a:t>5. Per-run touch check</a:t>
+            </a:r>
+          </a:p>
+        </p:txBody>
+      </p:sp>
+      <p:sp>
+        <p:nvSpPr>
+          <p:cNvPr id="22" name="Matching P100 Map Detail Body">
+            <a:extLst>
+              <a:ext uri="{FF2B5EF4-FFF2-40B4-BE49-F238E27FC236}">
+                <a16:creationId xmlns:a16="http://schemas.microsoft.com/office/drawing/2014/main" id="{CA9E2D01-1BF7-F06A-80BF-59E1B3A5FA6D}"/>
+              </a:ext>
+            </a:extLst>
+          </p:cNvPr>
+          <p:cNvSpPr txBox="1"/>
+          <p:nvPr/>
+        </p:nvSpPr>
+        <p:spPr>
+          <a:xfrm>
+            <a:off x="5067300" y="2870200"/>
+            <a:ext cx="1930400" cy="787908"/>
+          </a:xfrm>
+          <a:prstGeom prst="rect">
+            <a:avLst/>
+          </a:prstGeom>
+          <a:noFill/>
+        </p:spPr>
+        <p:txBody>
+          <a:bodyPr vert="horz" lIns="0" tIns="0" rIns="0" bIns="0" rtlCol="0">
+            <a:spAutoFit/>
+          </a:bodyPr>
+          <a:lstStyle/>
+          <a:p>
+            <a:r>
+              <a:rPr lang="en-US" sz="640">
+                <a:solidFill>
+                  <a:srgbClr val="F7F4F0"/>
+                </a:solidFill>
+                <a:latin typeface="Aptos" panose="020B0004020202020204" pitchFamily="34" charset="0"/>
+              </a:rPr>
+              <a:t>M3
+Seek down to the load-cell contact threshold.
+M5
+Release, then make a bounded clearance pulse.
+Abort
+Fail to touch, release, or clear.</a:t>
+            </a:r>
           </a:p>
         </p:txBody>
       </p:sp>
@@ -3653,64 +3614,22 @@
       </p:pic>
       <p:sp>
         <p:nvSpPr>
-          <p:cNvPr id="7" name="Rectangle: Rounded Corners 6">
-            <a:extLst>
-              <a:ext uri="{FF2B5EF4-FFF2-40B4-BE49-F238E27FC236}">
-                <a16:creationId xmlns:a16="http://schemas.microsoft.com/office/drawing/2014/main" id="{288213A0-7735-4712-A466-0BAF35E8CDFE}"/>
-              </a:ext>
-            </a:extLst>
-          </p:cNvPr>
-          <p:cNvSpPr>
-            <a:spLocks noGrp="1"/>
-          </p:cNvSpPr>
-          <p:nvPr/>
-        </p:nvSpPr>
-        <p:spPr>
-          <a:xfrm>
-            <a:off x="8572500" y="1847850"/>
-            <a:ext cx="2857500" cy="3371850"/>
-          </a:xfrm>
-          <a:prstGeom prst="roundRect">
-            <a:avLst>
-              <a:gd name="adj" fmla="val 2667"/>
-            </a:avLst>
-          </a:prstGeom>
-          <a:solidFill>
-            <a:srgbClr val="EAF5FB"/>
-          </a:solidFill>
-          <a:ln w="9525">
-            <a:solidFill>
-              <a:srgbClr val="3D8DFF"/>
-            </a:solidFill>
-            <a:prstDash val="solid"/>
-          </a:ln>
-        </p:spPr>
-        <p:txBody>
-          <a:bodyPr/>
-          <a:lstStyle/>
-          <a:p>
-            <a:endParaRPr lang="en-US"/>
-          </a:p>
-        </p:txBody>
-      </p:sp>
-      <p:sp>
-        <p:nvSpPr>
-          <p:cNvPr id="8" name="Rectangle 7">
-            <a:extLst>
-              <a:ext uri="{FF2B5EF4-FFF2-40B4-BE49-F238E27FC236}">
-                <a16:creationId xmlns:a16="http://schemas.microsoft.com/office/drawing/2014/main" id="{2711C4FE-BB95-49F0-875A-79973572DB57}"/>
-              </a:ext>
-            </a:extLst>
-          </p:cNvPr>
-          <p:cNvSpPr>
-            <a:spLocks noGrp="1"/>
-          </p:cNvSpPr>
-          <p:nvPr/>
-        </p:nvSpPr>
-        <p:spPr>
-          <a:xfrm>
-            <a:off x="8839200" y="2152650"/>
-            <a:ext cx="2324100" cy="323850"/>
+          <p:cNvPr id="10" name="Rectangle 9">
+            <a:extLst>
+              <a:ext uri="{FF2B5EF4-FFF2-40B4-BE49-F238E27FC236}">
+                <a16:creationId xmlns:a16="http://schemas.microsoft.com/office/drawing/2014/main" id="{96D81758-CD88-4EF5-A7F6-B3CD03B93DBF}"/>
+              </a:ext>
+            </a:extLst>
+          </p:cNvPr>
+          <p:cNvSpPr>
+            <a:spLocks noGrp="1"/>
+          </p:cNvSpPr>
+          <p:nvPr/>
+        </p:nvSpPr>
+        <p:spPr>
+          <a:xfrm>
+            <a:off x="8572500" y="3238500"/>
+            <a:ext cx="2540000" cy="508000"/>
           </a:xfrm>
           <a:prstGeom prst="rect">
             <a:avLst/>
@@ -3728,9 +3647,9 @@
           <a:lstStyle/>
           <a:p>
             <a:pPr algn="l">
-              <a:defRPr sz="1650" b="1">
-                <a:solidFill>
-                  <a:srgbClr val="000000"/>
+              <a:defRPr sz="1050" b="0">
+                <a:solidFill>
+                  <a:srgbClr val="59616B"/>
                 </a:solidFill>
                 <a:latin typeface="Helvetica Neue"/>
                 <a:ea typeface="Helvetica Neue"/>
@@ -3738,154 +3657,19 @@
               </a:defRPr>
             </a:pPr>
             <a:r>
-              <a:rPr lang="en-US" sz="1650" b="1">
-                <a:solidFill>
-                  <a:srgbClr val="000000"/>
+              <a:rPr lang="en-US" sz="1100" b="0">
+                <a:solidFill>
+                  <a:srgbClr val="80726B"/>
                 </a:solidFill>
                 <a:latin typeface="Helvetica Neue"/>
                 <a:ea typeface="Helvetica Neue"/>
                 <a:cs typeface="Helvetica Neue"/>
               </a:rPr>
-              <a:t>Step 6 — Ready state</a:t>
-            </a:r>
-            <a:endParaRPr sz="1650" b="1">
+              <a:t>Detail shown inside the map. Hover or click another process to compare.</a:t>
+            </a:r>
+            <a:endParaRPr sz="1100" b="0">
               <a:solidFill>
-                <a:srgbClr val="000000"/>
-              </a:solidFill>
-              <a:latin typeface="Helvetica Neue"/>
-              <a:ea typeface="Helvetica Neue"/>
-              <a:cs typeface="Helvetica Neue"/>
-            </a:endParaRPr>
-          </a:p>
-        </p:txBody>
-      </p:sp>
-      <p:sp>
-        <p:nvSpPr>
-          <p:cNvPr id="9" name="Rectangle 8">
-            <a:extLst>
-              <a:ext uri="{FF2B5EF4-FFF2-40B4-BE49-F238E27FC236}">
-                <a16:creationId xmlns:a16="http://schemas.microsoft.com/office/drawing/2014/main" id="{D332E2B0-B79D-428E-A109-130D654AAF30}"/>
-              </a:ext>
-            </a:extLst>
-          </p:cNvPr>
-          <p:cNvSpPr>
-            <a:spLocks noGrp="1"/>
-          </p:cNvSpPr>
-          <p:nvPr/>
-        </p:nvSpPr>
-        <p:spPr>
-          <a:xfrm>
-            <a:off x="8839200" y="2724150"/>
-            <a:ext cx="2247900" cy="1981200"/>
-          </a:xfrm>
-          <a:prstGeom prst="rect">
-            <a:avLst/>
-          </a:prstGeom>
-          <a:noFill/>
-          <a:ln w="0">
-            <a:noFill/>
-            <a:prstDash val="solid"/>
-          </a:ln>
-        </p:spPr>
-        <p:txBody>
-          <a:bodyPr lIns="0" tIns="0" rIns="0" bIns="0" anchor="t">
-            <a:normAutofit/>
-          </a:bodyPr>
-          <a:lstStyle/>
-          <a:p>
-            <a:pPr algn="l">
-              <a:defRPr sz="1350" b="0">
-                <a:solidFill>
-                  <a:srgbClr val="000000"/>
-                </a:solidFill>
-                <a:latin typeface="Helvetica Neue"/>
-                <a:ea typeface="Helvetica Neue"/>
-                <a:cs typeface="Helvetica Neue"/>
-              </a:defRPr>
-            </a:pPr>
-            <a:r>
-              <a:rPr lang="en-US" sz="1350" b="0">
-                <a:solidFill>
-                  <a:srgbClr val="000000"/>
-                </a:solidFill>
-                <a:latin typeface="Helvetica Neue"/>
-                <a:ea typeface="Helvetica Neue"/>
-                <a:cs typeface="Helvetica Neue"/>
-              </a:rPr>
-              <a:t>Ready condition
-G54 is registered and the pen is clear of the paper.
-ioSender may stream the drawing.
-M3 writes; M5 releases and travels without reaching GP2.</a:t>
-            </a:r>
-            <a:endParaRPr sz="1350" b="0">
-              <a:solidFill>
-                <a:srgbClr val="000000"/>
-              </a:solidFill>
-              <a:latin typeface="Helvetica Neue"/>
-              <a:ea typeface="Helvetica Neue"/>
-              <a:cs typeface="Helvetica Neue"/>
-            </a:endParaRPr>
-          </a:p>
-        </p:txBody>
-      </p:sp>
-      <p:sp>
-        <p:nvSpPr>
-          <p:cNvPr id="10" name="Rectangle 9">
-            <a:extLst>
-              <a:ext uri="{FF2B5EF4-FFF2-40B4-BE49-F238E27FC236}">
-                <a16:creationId xmlns:a16="http://schemas.microsoft.com/office/drawing/2014/main" id="{96D81758-CD88-4EF5-A7F6-B3CD03B93DBF}"/>
-              </a:ext>
-            </a:extLst>
-          </p:cNvPr>
-          <p:cNvSpPr>
-            <a:spLocks noGrp="1"/>
-          </p:cNvSpPr>
-          <p:nvPr/>
-        </p:nvSpPr>
-        <p:spPr>
-          <a:xfrm>
-            <a:off x="8572500" y="5448300"/>
-            <a:ext cx="2857500" cy="457200"/>
-          </a:xfrm>
-          <a:prstGeom prst="rect">
-            <a:avLst/>
-          </a:prstGeom>
-          <a:noFill/>
-          <a:ln w="0">
-            <a:noFill/>
-            <a:prstDash val="solid"/>
-          </a:ln>
-        </p:spPr>
-        <p:txBody>
-          <a:bodyPr lIns="0" tIns="0" rIns="0" bIns="0" anchor="t">
-            <a:normAutofit/>
-          </a:bodyPr>
-          <a:lstStyle/>
-          <a:p>
-            <a:pPr algn="l">
-              <a:defRPr sz="1050" b="0">
-                <a:solidFill>
-                  <a:srgbClr val="59616B"/>
-                </a:solidFill>
-                <a:latin typeface="Helvetica Neue"/>
-                <a:ea typeface="Helvetica Neue"/>
-                <a:cs typeface="Helvetica Neue"/>
-              </a:defRPr>
-            </a:pPr>
-            <a:r>
-              <a:rPr lang="en-US" sz="1050" b="0">
-                <a:solidFill>
-                  <a:srgbClr val="59616B"/>
-                </a:solidFill>
-                <a:latin typeface="Helvetica Neue"/>
-                <a:ea typeface="Helvetica Neue"/>
-                <a:cs typeface="Helvetica Neue"/>
-              </a:rPr>
-              <a:t>Hover or click another process in the map, or click BACK to return to the overview.</a:t>
-            </a:r>
-            <a:endParaRPr sz="1050" b="0">
-              <a:solidFill>
-                <a:srgbClr val="59616B"/>
+                <a:srgbClr val="80726B"/>
               </a:solidFill>
               <a:latin typeface="Helvetica Neue"/>
               <a:ea typeface="Helvetica Neue"/>
@@ -4430,6 +4214,144 @@
           <a:p>
             <a:pPr algn="ctr"/>
             <a:endParaRPr lang="en-US"/>
+          </a:p>
+        </p:txBody>
+      </p:sp>
+      <p:sp>
+        <p:nvSpPr>
+          <p:cNvPr id="20" name="Matching P100 Map Detail Background">
+            <a:extLst>
+              <a:ext uri="{FF2B5EF4-FFF2-40B4-BE49-F238E27FC236}">
+                <a16:creationId xmlns:a16="http://schemas.microsoft.com/office/drawing/2014/main" id="{96A6C59A-8EFD-8E9A-98CA-807B25989EF4}"/>
+              </a:ext>
+            </a:extLst>
+          </p:cNvPr>
+          <p:cNvSpPr/>
+          <p:nvPr/>
+        </p:nvSpPr>
+        <p:spPr>
+          <a:xfrm>
+            <a:off x="4953000" y="2552700"/>
+            <a:ext cx="2159000" cy="1574800"/>
+          </a:xfrm>
+          <a:prstGeom prst="rect">
+            <a:avLst/>
+          </a:prstGeom>
+          <a:solidFill>
+            <a:srgbClr val="2B251F"/>
+          </a:solidFill>
+          <a:ln w="8890">
+            <a:solidFill>
+              <a:srgbClr val="6E6052"/>
+            </a:solidFill>
+          </a:ln>
+        </p:spPr>
+        <p:style>
+          <a:lnRef idx="2">
+            <a:schemeClr val="accent1">
+              <a:shade val="15000"/>
+            </a:schemeClr>
+          </a:lnRef>
+          <a:fillRef idx="1">
+            <a:schemeClr val="accent1"/>
+          </a:fillRef>
+          <a:effectRef idx="0">
+            <a:schemeClr val="accent1"/>
+          </a:effectRef>
+          <a:fontRef idx="minor">
+            <a:schemeClr val="lt1"/>
+          </a:fontRef>
+        </p:style>
+        <p:txBody>
+          <a:bodyPr rtlCol="0" anchor="ctr"/>
+          <a:lstStyle/>
+          <a:p>
+            <a:pPr algn="ctr"/>
+            <a:endParaRPr lang="en-US"/>
+          </a:p>
+        </p:txBody>
+      </p:sp>
+      <p:sp>
+        <p:nvSpPr>
+          <p:cNvPr id="21" name="Matching P100 Map Detail Title">
+            <a:extLst>
+              <a:ext uri="{FF2B5EF4-FFF2-40B4-BE49-F238E27FC236}">
+                <a16:creationId xmlns:a16="http://schemas.microsoft.com/office/drawing/2014/main" id="{79B1B7FA-F6B4-12FF-24AF-F35EF601677B}"/>
+              </a:ext>
+            </a:extLst>
+          </p:cNvPr>
+          <p:cNvSpPr txBox="1"/>
+          <p:nvPr/>
+        </p:nvSpPr>
+        <p:spPr>
+          <a:xfrm>
+            <a:off x="5067300" y="2667000"/>
+            <a:ext cx="1930400" cy="115416"/>
+          </a:xfrm>
+          <a:prstGeom prst="rect">
+            <a:avLst/>
+          </a:prstGeom>
+          <a:noFill/>
+        </p:spPr>
+        <p:txBody>
+          <a:bodyPr vert="horz" lIns="0" tIns="0" rIns="0" bIns="0" rtlCol="0">
+            <a:spAutoFit/>
+          </a:bodyPr>
+          <a:lstStyle/>
+          <a:p>
+            <a:r>
+              <a:rPr lang="en-US" sz="750" b="1">
+                <a:solidFill>
+                  <a:srgbClr val="FFCC66"/>
+                </a:solidFill>
+                <a:latin typeface="Aptos" panose="020B0004020202020204" pitchFamily="34" charset="0"/>
+              </a:rPr>
+              <a:t>6. Ready state</a:t>
+            </a:r>
+          </a:p>
+        </p:txBody>
+      </p:sp>
+      <p:sp>
+        <p:nvSpPr>
+          <p:cNvPr id="22" name="Matching P100 Map Detail Body">
+            <a:extLst>
+              <a:ext uri="{FF2B5EF4-FFF2-40B4-BE49-F238E27FC236}">
+                <a16:creationId xmlns:a16="http://schemas.microsoft.com/office/drawing/2014/main" id="{FC948654-D1C0-901A-42AD-B9C9346D71C8}"/>
+              </a:ext>
+            </a:extLst>
+          </p:cNvPr>
+          <p:cNvSpPr txBox="1"/>
+          <p:nvPr/>
+        </p:nvSpPr>
+        <p:spPr>
+          <a:xfrm>
+            <a:off x="5067300" y="2870200"/>
+            <a:ext cx="1930400" cy="689420"/>
+          </a:xfrm>
+          <a:prstGeom prst="rect">
+            <a:avLst/>
+          </a:prstGeom>
+          <a:noFill/>
+        </p:spPr>
+        <p:txBody>
+          <a:bodyPr vert="horz" lIns="0" tIns="0" rIns="0" bIns="0" rtlCol="0">
+            <a:spAutoFit/>
+          </a:bodyPr>
+          <a:lstStyle/>
+          <a:p>
+            <a:r>
+              <a:rPr lang="en-US" sz="640">
+                <a:solidFill>
+                  <a:srgbClr val="F7F4F0"/>
+                </a:solidFill>
+                <a:latin typeface="Aptos" panose="020B0004020202020204" pitchFamily="34" charset="0"/>
+              </a:rPr>
+              <a:t>Ready
+G54 registered; pen clear of paper.
+Drawing
+M3 writes. M5 releases and travels.
+GP2 is not used for each lift.</a:t>
+            </a:r>
           </a:p>
         </p:txBody>
       </p:sp>
@@ -12642,64 +12564,22 @@
       </p:pic>
       <p:sp>
         <p:nvSpPr>
-          <p:cNvPr id="7" name="Rectangle: Rounded Corners 6">
-            <a:extLst>
-              <a:ext uri="{FF2B5EF4-FFF2-40B4-BE49-F238E27FC236}">
-                <a16:creationId xmlns:a16="http://schemas.microsoft.com/office/drawing/2014/main" id="{288213A0-7735-4712-A466-0BAF35E8CDFE}"/>
-              </a:ext>
-            </a:extLst>
-          </p:cNvPr>
-          <p:cNvSpPr>
-            <a:spLocks noGrp="1"/>
-          </p:cNvSpPr>
-          <p:nvPr/>
-        </p:nvSpPr>
-        <p:spPr>
-          <a:xfrm>
-            <a:off x="8572500" y="1847850"/>
-            <a:ext cx="2857500" cy="3371850"/>
-          </a:xfrm>
-          <a:prstGeom prst="roundRect">
-            <a:avLst>
-              <a:gd name="adj" fmla="val 2667"/>
-            </a:avLst>
-          </a:prstGeom>
-          <a:solidFill>
-            <a:srgbClr val="EAF5FB"/>
-          </a:solidFill>
-          <a:ln w="9525">
-            <a:solidFill>
-              <a:srgbClr val="3D8DFF"/>
-            </a:solidFill>
-            <a:prstDash val="solid"/>
-          </a:ln>
-        </p:spPr>
-        <p:txBody>
-          <a:bodyPr/>
-          <a:lstStyle/>
-          <a:p>
-            <a:endParaRPr lang="en-US"/>
-          </a:p>
-        </p:txBody>
-      </p:sp>
-      <p:sp>
-        <p:nvSpPr>
-          <p:cNvPr id="8" name="Rectangle 7">
-            <a:extLst>
-              <a:ext uri="{FF2B5EF4-FFF2-40B4-BE49-F238E27FC236}">
-                <a16:creationId xmlns:a16="http://schemas.microsoft.com/office/drawing/2014/main" id="{2711C4FE-BB95-49F0-875A-79973572DB57}"/>
-              </a:ext>
-            </a:extLst>
-          </p:cNvPr>
-          <p:cNvSpPr>
-            <a:spLocks noGrp="1"/>
-          </p:cNvSpPr>
-          <p:nvPr/>
-        </p:nvSpPr>
-        <p:spPr>
-          <a:xfrm>
-            <a:off x="8839200" y="2152650"/>
-            <a:ext cx="2324100" cy="323850"/>
+          <p:cNvPr id="10" name="Rectangle 9">
+            <a:extLst>
+              <a:ext uri="{FF2B5EF4-FFF2-40B4-BE49-F238E27FC236}">
+                <a16:creationId xmlns:a16="http://schemas.microsoft.com/office/drawing/2014/main" id="{96D81758-CD88-4EF5-A7F6-B3CD03B93DBF}"/>
+              </a:ext>
+            </a:extLst>
+          </p:cNvPr>
+          <p:cNvSpPr>
+            <a:spLocks noGrp="1"/>
+          </p:cNvSpPr>
+          <p:nvPr/>
+        </p:nvSpPr>
+        <p:spPr>
+          <a:xfrm>
+            <a:off x="8572500" y="3238500"/>
+            <a:ext cx="2540000" cy="508000"/>
           </a:xfrm>
           <a:prstGeom prst="rect">
             <a:avLst/>
@@ -12717,9 +12597,9 @@
           <a:lstStyle/>
           <a:p>
             <a:pPr algn="l">
-              <a:defRPr sz="1650" b="1">
-                <a:solidFill>
-                  <a:srgbClr val="000000"/>
+              <a:defRPr sz="1050" b="0">
+                <a:solidFill>
+                  <a:srgbClr val="59616B"/>
                 </a:solidFill>
                 <a:latin typeface="Helvetica Neue"/>
                 <a:ea typeface="Helvetica Neue"/>
@@ -12727,155 +12607,19 @@
               </a:defRPr>
             </a:pPr>
             <a:r>
-              <a:rPr lang="en-US" sz="1650" b="1">
-                <a:solidFill>
-                  <a:srgbClr val="000000"/>
+              <a:rPr lang="en-US" sz="1100" b="0">
+                <a:solidFill>
+                  <a:srgbClr val="80726B"/>
                 </a:solidFill>
                 <a:latin typeface="Helvetica Neue"/>
                 <a:ea typeface="Helvetica Neue"/>
                 <a:cs typeface="Helvetica Neue"/>
               </a:rPr>
-              <a:t>Step 1 — Start command</a:t>
-            </a:r>
-            <a:endParaRPr sz="1650" b="1">
+              <a:t>Detail shown inside the map. Hover or click another process to compare.</a:t>
+            </a:r>
+            <a:endParaRPr sz="1100" b="0">
               <a:solidFill>
-                <a:srgbClr val="000000"/>
-              </a:solidFill>
-              <a:latin typeface="Helvetica Neue"/>
-              <a:ea typeface="Helvetica Neue"/>
-              <a:cs typeface="Helvetica Neue"/>
-            </a:endParaRPr>
-          </a:p>
-        </p:txBody>
-      </p:sp>
-      <p:sp>
-        <p:nvSpPr>
-          <p:cNvPr id="9" name="Rectangle 8">
-            <a:extLst>
-              <a:ext uri="{FF2B5EF4-FFF2-40B4-BE49-F238E27FC236}">
-                <a16:creationId xmlns:a16="http://schemas.microsoft.com/office/drawing/2014/main" id="{D332E2B0-B79D-428E-A109-130D654AAF30}"/>
-              </a:ext>
-            </a:extLst>
-          </p:cNvPr>
-          <p:cNvSpPr>
-            <a:spLocks noGrp="1"/>
-          </p:cNvSpPr>
-          <p:nvPr/>
-        </p:nvSpPr>
-        <p:spPr>
-          <a:xfrm>
-            <a:off x="8839200" y="2724150"/>
-            <a:ext cx="2247900" cy="1981200"/>
-          </a:xfrm>
-          <a:prstGeom prst="rect">
-            <a:avLst/>
-          </a:prstGeom>
-          <a:noFill/>
-          <a:ln w="0">
-            <a:noFill/>
-            <a:prstDash val="solid"/>
-          </a:ln>
-        </p:spPr>
-        <p:txBody>
-          <a:bodyPr lIns="0" tIns="0" rIns="0" bIns="0" anchor="t">
-            <a:normAutofit/>
-          </a:bodyPr>
-          <a:lstStyle/>
-          <a:p>
-            <a:pPr algn="l">
-              <a:defRPr sz="1350" b="0">
-                <a:solidFill>
-                  <a:srgbClr val="000000"/>
-                </a:solidFill>
-                <a:latin typeface="Helvetica Neue"/>
-                <a:ea typeface="Helvetica Neue"/>
-                <a:cs typeface="Helvetica Neue"/>
-              </a:defRPr>
-            </a:pPr>
-            <a:r>
-              <a:rPr lang="en-US" sz="1350" b="0">
-                <a:solidFill>
-                  <a:srgbClr val="000000"/>
-                </a:solidFill>
-                <a:latin typeface="Helvetica Neue"/>
-                <a:ea typeface="Helvetica Neue"/>
-                <a:cs typeface="Helvetica Neue"/>
-              </a:rPr>
-              <a:t>Command
-ioSender sends: G65 P100 Q0
-Decision owner
-RP23CNC / grblHAL starts P100 locally.
-No toolhead force samples leave the Pro Micro.</a:t>
-            </a:r>
-            <a:endParaRPr sz="1350" b="0">
-              <a:solidFill>
-                <a:srgbClr val="000000"/>
-              </a:solidFill>
-              <a:latin typeface="Helvetica Neue"/>
-              <a:ea typeface="Helvetica Neue"/>
-              <a:cs typeface="Helvetica Neue"/>
-            </a:endParaRPr>
-          </a:p>
-        </p:txBody>
-      </p:sp>
-      <p:sp>
-        <p:nvSpPr>
-          <p:cNvPr id="10" name="Rectangle 9">
-            <a:extLst>
-              <a:ext uri="{FF2B5EF4-FFF2-40B4-BE49-F238E27FC236}">
-                <a16:creationId xmlns:a16="http://schemas.microsoft.com/office/drawing/2014/main" id="{96D81758-CD88-4EF5-A7F6-B3CD03B93DBF}"/>
-              </a:ext>
-            </a:extLst>
-          </p:cNvPr>
-          <p:cNvSpPr>
-            <a:spLocks noGrp="1"/>
-          </p:cNvSpPr>
-          <p:nvPr/>
-        </p:nvSpPr>
-        <p:spPr>
-          <a:xfrm>
-            <a:off x="8572500" y="5448300"/>
-            <a:ext cx="2857500" cy="457200"/>
-          </a:xfrm>
-          <a:prstGeom prst="rect">
-            <a:avLst/>
-          </a:prstGeom>
-          <a:noFill/>
-          <a:ln w="0">
-            <a:noFill/>
-            <a:prstDash val="solid"/>
-          </a:ln>
-        </p:spPr>
-        <p:txBody>
-          <a:bodyPr lIns="0" tIns="0" rIns="0" bIns="0" anchor="t">
-            <a:normAutofit/>
-          </a:bodyPr>
-          <a:lstStyle/>
-          <a:p>
-            <a:pPr algn="l">
-              <a:defRPr sz="1050" b="0">
-                <a:solidFill>
-                  <a:srgbClr val="59616B"/>
-                </a:solidFill>
-                <a:latin typeface="Helvetica Neue"/>
-                <a:ea typeface="Helvetica Neue"/>
-                <a:cs typeface="Helvetica Neue"/>
-              </a:defRPr>
-            </a:pPr>
-            <a:r>
-              <a:rPr lang="en-US" sz="1050" b="0">
-                <a:solidFill>
-                  <a:srgbClr val="59616B"/>
-                </a:solidFill>
-                <a:latin typeface="Helvetica Neue"/>
-                <a:ea typeface="Helvetica Neue"/>
-                <a:cs typeface="Helvetica Neue"/>
-              </a:rPr>
-              <a:t>Hover or click another process in the map, or click BACK to return to the overview.</a:t>
-            </a:r>
-            <a:endParaRPr sz="1050" b="0">
-              <a:solidFill>
-                <a:srgbClr val="59616B"/>
+                <a:srgbClr val="80726B"/>
               </a:solidFill>
               <a:latin typeface="Helvetica Neue"/>
               <a:ea typeface="Helvetica Neue"/>
@@ -13420,6 +13164,145 @@
           <a:p>
             <a:pPr algn="ctr"/>
             <a:endParaRPr lang="en-US"/>
+          </a:p>
+        </p:txBody>
+      </p:sp>
+      <p:sp>
+        <p:nvSpPr>
+          <p:cNvPr id="20" name="Matching P100 Map Detail Background">
+            <a:extLst>
+              <a:ext uri="{FF2B5EF4-FFF2-40B4-BE49-F238E27FC236}">
+                <a16:creationId xmlns:a16="http://schemas.microsoft.com/office/drawing/2014/main" id="{5CEF202E-B754-A271-22D6-351167702F2F}"/>
+              </a:ext>
+            </a:extLst>
+          </p:cNvPr>
+          <p:cNvSpPr/>
+          <p:nvPr/>
+        </p:nvSpPr>
+        <p:spPr>
+          <a:xfrm>
+            <a:off x="4953000" y="2552700"/>
+            <a:ext cx="2159000" cy="1574800"/>
+          </a:xfrm>
+          <a:prstGeom prst="rect">
+            <a:avLst/>
+          </a:prstGeom>
+          <a:solidFill>
+            <a:srgbClr val="2B251F"/>
+          </a:solidFill>
+          <a:ln w="8890">
+            <a:solidFill>
+              <a:srgbClr val="6E6052"/>
+            </a:solidFill>
+          </a:ln>
+        </p:spPr>
+        <p:style>
+          <a:lnRef idx="2">
+            <a:schemeClr val="accent1">
+              <a:shade val="15000"/>
+            </a:schemeClr>
+          </a:lnRef>
+          <a:fillRef idx="1">
+            <a:schemeClr val="accent1"/>
+          </a:fillRef>
+          <a:effectRef idx="0">
+            <a:schemeClr val="accent1"/>
+          </a:effectRef>
+          <a:fontRef idx="minor">
+            <a:schemeClr val="lt1"/>
+          </a:fontRef>
+        </p:style>
+        <p:txBody>
+          <a:bodyPr rtlCol="0" anchor="ctr"/>
+          <a:lstStyle/>
+          <a:p>
+            <a:pPr algn="ctr"/>
+            <a:endParaRPr lang="en-US"/>
+          </a:p>
+        </p:txBody>
+      </p:sp>
+      <p:sp>
+        <p:nvSpPr>
+          <p:cNvPr id="21" name="Matching P100 Map Detail Title">
+            <a:extLst>
+              <a:ext uri="{FF2B5EF4-FFF2-40B4-BE49-F238E27FC236}">
+                <a16:creationId xmlns:a16="http://schemas.microsoft.com/office/drawing/2014/main" id="{AD756550-ED54-A3C6-39A3-0CF332046ED4}"/>
+              </a:ext>
+            </a:extLst>
+          </p:cNvPr>
+          <p:cNvSpPr txBox="1"/>
+          <p:nvPr/>
+        </p:nvSpPr>
+        <p:spPr>
+          <a:xfrm>
+            <a:off x="5067300" y="2667000"/>
+            <a:ext cx="1930400" cy="115416"/>
+          </a:xfrm>
+          <a:prstGeom prst="rect">
+            <a:avLst/>
+          </a:prstGeom>
+          <a:noFill/>
+        </p:spPr>
+        <p:txBody>
+          <a:bodyPr vert="horz" lIns="0" tIns="0" rIns="0" bIns="0" rtlCol="0">
+            <a:spAutoFit/>
+          </a:bodyPr>
+          <a:lstStyle/>
+          <a:p>
+            <a:r>
+              <a:rPr lang="en-US" sz="750" b="1">
+                <a:solidFill>
+                  <a:srgbClr val="FFCC66"/>
+                </a:solidFill>
+                <a:latin typeface="Aptos" panose="020B0004020202020204" pitchFamily="34" charset="0"/>
+              </a:rPr>
+              <a:t>1. Start command</a:t>
+            </a:r>
+          </a:p>
+        </p:txBody>
+      </p:sp>
+      <p:sp>
+        <p:nvSpPr>
+          <p:cNvPr id="22" name="Matching P100 Map Detail Body">
+            <a:extLst>
+              <a:ext uri="{FF2B5EF4-FFF2-40B4-BE49-F238E27FC236}">
+                <a16:creationId xmlns:a16="http://schemas.microsoft.com/office/drawing/2014/main" id="{8B807CB2-EC82-3A18-09AF-01ADA23DEF0C}"/>
+              </a:ext>
+            </a:extLst>
+          </p:cNvPr>
+          <p:cNvSpPr txBox="1"/>
+          <p:nvPr/>
+        </p:nvSpPr>
+        <p:spPr>
+          <a:xfrm>
+            <a:off x="5067300" y="2870200"/>
+            <a:ext cx="1930400" cy="886397"/>
+          </a:xfrm>
+          <a:prstGeom prst="rect">
+            <a:avLst/>
+          </a:prstGeom>
+          <a:noFill/>
+        </p:spPr>
+        <p:txBody>
+          <a:bodyPr vert="horz" lIns="0" tIns="0" rIns="0" bIns="0" rtlCol="0">
+            <a:spAutoFit/>
+          </a:bodyPr>
+          <a:lstStyle/>
+          <a:p>
+            <a:r>
+              <a:rPr lang="en-US" sz="640">
+                <a:solidFill>
+                  <a:srgbClr val="F7F4F0"/>
+                </a:solidFill>
+                <a:latin typeface="Aptos" panose="020B0004020202020204" pitchFamily="34" charset="0"/>
+              </a:rPr>
+              <a:t>Command
+ioSender → RP23CNC: G65 P100 Q0
+Decision owner
+RP23CNC / grblHAL starts P100 locally.
+Not moved
+HX711 force samples stay inside the Pro Micro toolhead.</a:t>
+            </a:r>
           </a:p>
         </p:txBody>
       </p:sp>
@@ -13757,64 +13640,22 @@
       </p:pic>
       <p:sp>
         <p:nvSpPr>
-          <p:cNvPr id="7" name="Rectangle: Rounded Corners 6">
-            <a:extLst>
-              <a:ext uri="{FF2B5EF4-FFF2-40B4-BE49-F238E27FC236}">
-                <a16:creationId xmlns:a16="http://schemas.microsoft.com/office/drawing/2014/main" id="{288213A0-7735-4712-A466-0BAF35E8CDFE}"/>
-              </a:ext>
-            </a:extLst>
-          </p:cNvPr>
-          <p:cNvSpPr>
-            <a:spLocks noGrp="1"/>
-          </p:cNvSpPr>
-          <p:nvPr/>
-        </p:nvSpPr>
-        <p:spPr>
-          <a:xfrm>
-            <a:off x="8572500" y="1847850"/>
-            <a:ext cx="2857500" cy="3371850"/>
-          </a:xfrm>
-          <a:prstGeom prst="roundRect">
-            <a:avLst>
-              <a:gd name="adj" fmla="val 2667"/>
-            </a:avLst>
-          </a:prstGeom>
-          <a:solidFill>
-            <a:srgbClr val="EAF5FB"/>
-          </a:solidFill>
-          <a:ln w="9525">
-            <a:solidFill>
-              <a:srgbClr val="3D8DFF"/>
-            </a:solidFill>
-            <a:prstDash val="solid"/>
-          </a:ln>
-        </p:spPr>
-        <p:txBody>
-          <a:bodyPr/>
-          <a:lstStyle/>
-          <a:p>
-            <a:endParaRPr lang="en-US"/>
-          </a:p>
-        </p:txBody>
-      </p:sp>
-      <p:sp>
-        <p:nvSpPr>
-          <p:cNvPr id="8" name="Rectangle 7">
-            <a:extLst>
-              <a:ext uri="{FF2B5EF4-FFF2-40B4-BE49-F238E27FC236}">
-                <a16:creationId xmlns:a16="http://schemas.microsoft.com/office/drawing/2014/main" id="{2711C4FE-BB95-49F0-875A-79973572DB57}"/>
-              </a:ext>
-            </a:extLst>
-          </p:cNvPr>
-          <p:cNvSpPr>
-            <a:spLocks noGrp="1"/>
-          </p:cNvSpPr>
-          <p:nvPr/>
-        </p:nvSpPr>
-        <p:spPr>
-          <a:xfrm>
-            <a:off x="8839200" y="2152650"/>
-            <a:ext cx="2324100" cy="323850"/>
+          <p:cNvPr id="10" name="Rectangle 9">
+            <a:extLst>
+              <a:ext uri="{FF2B5EF4-FFF2-40B4-BE49-F238E27FC236}">
+                <a16:creationId xmlns:a16="http://schemas.microsoft.com/office/drawing/2014/main" id="{96D81758-CD88-4EF5-A7F6-B3CD03B93DBF}"/>
+              </a:ext>
+            </a:extLst>
+          </p:cNvPr>
+          <p:cNvSpPr>
+            <a:spLocks noGrp="1"/>
+          </p:cNvSpPr>
+          <p:nvPr/>
+        </p:nvSpPr>
+        <p:spPr>
+          <a:xfrm>
+            <a:off x="8572500" y="3238500"/>
+            <a:ext cx="2540000" cy="508000"/>
           </a:xfrm>
           <a:prstGeom prst="rect">
             <a:avLst/>
@@ -13832,9 +13673,9 @@
           <a:lstStyle/>
           <a:p>
             <a:pPr algn="l">
-              <a:defRPr sz="1650" b="1">
-                <a:solidFill>
-                  <a:srgbClr val="000000"/>
+              <a:defRPr sz="1050" b="0">
+                <a:solidFill>
+                  <a:srgbClr val="59616B"/>
                 </a:solidFill>
                 <a:latin typeface="Helvetica Neue"/>
                 <a:ea typeface="Helvetica Neue"/>
@@ -13842,156 +13683,19 @@
               </a:defRPr>
             </a:pPr>
             <a:r>
-              <a:rPr lang="en-US" sz="1650" b="1">
-                <a:solidFill>
-                  <a:srgbClr val="000000"/>
+              <a:rPr lang="en-US" sz="1100" b="0">
+                <a:solidFill>
+                  <a:srgbClr val="80726B"/>
                 </a:solidFill>
                 <a:latin typeface="Helvetica Neue"/>
                 <a:ea typeface="Helvetica Neue"/>
                 <a:cs typeface="Helvetica Neue"/>
               </a:rPr>
-              <a:t>Step 2 — Toolhead home</a:t>
-            </a:r>
-            <a:endParaRPr sz="1650" b="1">
+              <a:t>Detail shown inside the map. Hover or click another process to compare.</a:t>
+            </a:r>
+            <a:endParaRPr sz="1100" b="0">
               <a:solidFill>
-                <a:srgbClr val="000000"/>
-              </a:solidFill>
-              <a:latin typeface="Helvetica Neue"/>
-              <a:ea typeface="Helvetica Neue"/>
-              <a:cs typeface="Helvetica Neue"/>
-            </a:endParaRPr>
-          </a:p>
-        </p:txBody>
-      </p:sp>
-      <p:sp>
-        <p:nvSpPr>
-          <p:cNvPr id="9" name="Rectangle 8">
-            <a:extLst>
-              <a:ext uri="{FF2B5EF4-FFF2-40B4-BE49-F238E27FC236}">
-                <a16:creationId xmlns:a16="http://schemas.microsoft.com/office/drawing/2014/main" id="{D332E2B0-B79D-428E-A109-130D654AAF30}"/>
-              </a:ext>
-            </a:extLst>
-          </p:cNvPr>
-          <p:cNvSpPr>
-            <a:spLocks noGrp="1"/>
-          </p:cNvSpPr>
-          <p:nvPr/>
-        </p:nvSpPr>
-        <p:spPr>
-          <a:xfrm>
-            <a:off x="8839200" y="2724150"/>
-            <a:ext cx="2247900" cy="1981200"/>
-          </a:xfrm>
-          <a:prstGeom prst="rect">
-            <a:avLst/>
-          </a:prstGeom>
-          <a:noFill/>
-          <a:ln w="0">
-            <a:noFill/>
-            <a:prstDash val="solid"/>
-          </a:ln>
-        </p:spPr>
-        <p:txBody>
-          <a:bodyPr lIns="0" tIns="0" rIns="0" bIns="0" anchor="t">
-            <a:normAutofit/>
-          </a:bodyPr>
-          <a:lstStyle/>
-          <a:p>
-            <a:pPr algn="l">
-              <a:defRPr sz="1350" b="0">
-                <a:solidFill>
-                  <a:srgbClr val="000000"/>
-                </a:solidFill>
-                <a:latin typeface="Helvetica Neue"/>
-                <a:ea typeface="Helvetica Neue"/>
-                <a:cs typeface="Helvetica Neue"/>
-              </a:defRPr>
-            </a:pPr>
-            <a:r>
-              <a:rPr lang="en-US" sz="1350" b="0">
-                <a:solidFill>
-                  <a:srgbClr val="000000"/>
-                </a:solidFill>
-                <a:latin typeface="Helvetica Neue"/>
-                <a:ea typeface="Helvetica Neue"/>
-                <a:cs typeface="Helvetica Neue"/>
-              </a:rPr>
-              <a:t>Request
-P100 asserts the existing GP28 request.
-Pro Micro action
-N20 retracts until GP2 confirms LIFT_HOME.
-Reply
-GP27 returns ready or a timeout becomes a fault.</a:t>
-            </a:r>
-            <a:endParaRPr sz="1350" b="0">
-              <a:solidFill>
-                <a:srgbClr val="000000"/>
-              </a:solidFill>
-              <a:latin typeface="Helvetica Neue"/>
-              <a:ea typeface="Helvetica Neue"/>
-              <a:cs typeface="Helvetica Neue"/>
-            </a:endParaRPr>
-          </a:p>
-        </p:txBody>
-      </p:sp>
-      <p:sp>
-        <p:nvSpPr>
-          <p:cNvPr id="10" name="Rectangle 9">
-            <a:extLst>
-              <a:ext uri="{FF2B5EF4-FFF2-40B4-BE49-F238E27FC236}">
-                <a16:creationId xmlns:a16="http://schemas.microsoft.com/office/drawing/2014/main" id="{96D81758-CD88-4EF5-A7F6-B3CD03B93DBF}"/>
-              </a:ext>
-            </a:extLst>
-          </p:cNvPr>
-          <p:cNvSpPr>
-            <a:spLocks noGrp="1"/>
-          </p:cNvSpPr>
-          <p:nvPr/>
-        </p:nvSpPr>
-        <p:spPr>
-          <a:xfrm>
-            <a:off x="8572500" y="5448300"/>
-            <a:ext cx="2857500" cy="457200"/>
-          </a:xfrm>
-          <a:prstGeom prst="rect">
-            <a:avLst/>
-          </a:prstGeom>
-          <a:noFill/>
-          <a:ln w="0">
-            <a:noFill/>
-            <a:prstDash val="solid"/>
-          </a:ln>
-        </p:spPr>
-        <p:txBody>
-          <a:bodyPr lIns="0" tIns="0" rIns="0" bIns="0" anchor="t">
-            <a:normAutofit/>
-          </a:bodyPr>
-          <a:lstStyle/>
-          <a:p>
-            <a:pPr algn="l">
-              <a:defRPr sz="1050" b="0">
-                <a:solidFill>
-                  <a:srgbClr val="59616B"/>
-                </a:solidFill>
-                <a:latin typeface="Helvetica Neue"/>
-                <a:ea typeface="Helvetica Neue"/>
-                <a:cs typeface="Helvetica Neue"/>
-              </a:defRPr>
-            </a:pPr>
-            <a:r>
-              <a:rPr lang="en-US" sz="1050" b="0">
-                <a:solidFill>
-                  <a:srgbClr val="59616B"/>
-                </a:solidFill>
-                <a:latin typeface="Helvetica Neue"/>
-                <a:ea typeface="Helvetica Neue"/>
-                <a:cs typeface="Helvetica Neue"/>
-              </a:rPr>
-              <a:t>Hover or click another process in the map, or click BACK to return to the overview.</a:t>
-            </a:r>
-            <a:endParaRPr sz="1050" b="0">
-              <a:solidFill>
-                <a:srgbClr val="59616B"/>
+                <a:srgbClr val="80726B"/>
               </a:solidFill>
               <a:latin typeface="Helvetica Neue"/>
               <a:ea typeface="Helvetica Neue"/>
@@ -14536,6 +14240,145 @@
           <a:p>
             <a:pPr algn="ctr"/>
             <a:endParaRPr lang="en-US"/>
+          </a:p>
+        </p:txBody>
+      </p:sp>
+      <p:sp>
+        <p:nvSpPr>
+          <p:cNvPr id="20" name="Matching P100 Map Detail Background">
+            <a:extLst>
+              <a:ext uri="{FF2B5EF4-FFF2-40B4-BE49-F238E27FC236}">
+                <a16:creationId xmlns:a16="http://schemas.microsoft.com/office/drawing/2014/main" id="{DB4135CC-F384-E5B7-5CBA-F519475E9B21}"/>
+              </a:ext>
+            </a:extLst>
+          </p:cNvPr>
+          <p:cNvSpPr/>
+          <p:nvPr/>
+        </p:nvSpPr>
+        <p:spPr>
+          <a:xfrm>
+            <a:off x="4953000" y="2552700"/>
+            <a:ext cx="2159000" cy="1574800"/>
+          </a:xfrm>
+          <a:prstGeom prst="rect">
+            <a:avLst/>
+          </a:prstGeom>
+          <a:solidFill>
+            <a:srgbClr val="2B251F"/>
+          </a:solidFill>
+          <a:ln w="8890">
+            <a:solidFill>
+              <a:srgbClr val="6E6052"/>
+            </a:solidFill>
+          </a:ln>
+        </p:spPr>
+        <p:style>
+          <a:lnRef idx="2">
+            <a:schemeClr val="accent1">
+              <a:shade val="15000"/>
+            </a:schemeClr>
+          </a:lnRef>
+          <a:fillRef idx="1">
+            <a:schemeClr val="accent1"/>
+          </a:fillRef>
+          <a:effectRef idx="0">
+            <a:schemeClr val="accent1"/>
+          </a:effectRef>
+          <a:fontRef idx="minor">
+            <a:schemeClr val="lt1"/>
+          </a:fontRef>
+        </p:style>
+        <p:txBody>
+          <a:bodyPr rtlCol="0" anchor="ctr"/>
+          <a:lstStyle/>
+          <a:p>
+            <a:pPr algn="ctr"/>
+            <a:endParaRPr lang="en-US"/>
+          </a:p>
+        </p:txBody>
+      </p:sp>
+      <p:sp>
+        <p:nvSpPr>
+          <p:cNvPr id="21" name="Matching P100 Map Detail Title">
+            <a:extLst>
+              <a:ext uri="{FF2B5EF4-FFF2-40B4-BE49-F238E27FC236}">
+                <a16:creationId xmlns:a16="http://schemas.microsoft.com/office/drawing/2014/main" id="{8344B0EB-E729-240C-B272-5DC27A7A0657}"/>
+              </a:ext>
+            </a:extLst>
+          </p:cNvPr>
+          <p:cNvSpPr txBox="1"/>
+          <p:nvPr/>
+        </p:nvSpPr>
+        <p:spPr>
+          <a:xfrm>
+            <a:off x="5067300" y="2667000"/>
+            <a:ext cx="1930400" cy="115416"/>
+          </a:xfrm>
+          <a:prstGeom prst="rect">
+            <a:avLst/>
+          </a:prstGeom>
+          <a:noFill/>
+        </p:spPr>
+        <p:txBody>
+          <a:bodyPr vert="horz" lIns="0" tIns="0" rIns="0" bIns="0" rtlCol="0">
+            <a:spAutoFit/>
+          </a:bodyPr>
+          <a:lstStyle/>
+          <a:p>
+            <a:r>
+              <a:rPr lang="en-US" sz="750" b="1">
+                <a:solidFill>
+                  <a:srgbClr val="FFCC66"/>
+                </a:solidFill>
+                <a:latin typeface="Aptos" panose="020B0004020202020204" pitchFamily="34" charset="0"/>
+              </a:rPr>
+              <a:t>2. Toolhead home</a:t>
+            </a:r>
+          </a:p>
+        </p:txBody>
+      </p:sp>
+      <p:sp>
+        <p:nvSpPr>
+          <p:cNvPr id="22" name="Matching P100 Map Detail Body">
+            <a:extLst>
+              <a:ext uri="{FF2B5EF4-FFF2-40B4-BE49-F238E27FC236}">
+                <a16:creationId xmlns:a16="http://schemas.microsoft.com/office/drawing/2014/main" id="{8382FCCD-CCED-A0F4-474A-19C33B23658D}"/>
+              </a:ext>
+            </a:extLst>
+          </p:cNvPr>
+          <p:cNvSpPr txBox="1"/>
+          <p:nvPr/>
+        </p:nvSpPr>
+        <p:spPr>
+          <a:xfrm>
+            <a:off x="5067300" y="2870200"/>
+            <a:ext cx="1930400" cy="787908"/>
+          </a:xfrm>
+          <a:prstGeom prst="rect">
+            <a:avLst/>
+          </a:prstGeom>
+          <a:noFill/>
+        </p:spPr>
+        <p:txBody>
+          <a:bodyPr vert="horz" lIns="0" tIns="0" rIns="0" bIns="0" rtlCol="0">
+            <a:spAutoFit/>
+          </a:bodyPr>
+          <a:lstStyle/>
+          <a:p>
+            <a:r>
+              <a:rPr lang="en-US" sz="640">
+                <a:solidFill>
+                  <a:srgbClr val="F7F4F0"/>
+                </a:solidFill>
+                <a:latin typeface="Aptos" panose="020B0004020202020204" pitchFamily="34" charset="0"/>
+              </a:rPr>
+              <a:t>Request
+P100 asserts GP28.
+Pro Micro action
+N20 retracts until GP2 confirms LIFT_HOME.
+Reply
+GP27 ready, or a timeout becomes a fault.</a:t>
+            </a:r>
           </a:p>
         </p:txBody>
       </p:sp>
@@ -14873,64 +14716,22 @@
       </p:pic>
       <p:sp>
         <p:nvSpPr>
-          <p:cNvPr id="7" name="Rectangle: Rounded Corners 6">
-            <a:extLst>
-              <a:ext uri="{FF2B5EF4-FFF2-40B4-BE49-F238E27FC236}">
-                <a16:creationId xmlns:a16="http://schemas.microsoft.com/office/drawing/2014/main" id="{288213A0-7735-4712-A466-0BAF35E8CDFE}"/>
-              </a:ext>
-            </a:extLst>
-          </p:cNvPr>
-          <p:cNvSpPr>
-            <a:spLocks noGrp="1"/>
-          </p:cNvSpPr>
-          <p:nvPr/>
-        </p:nvSpPr>
-        <p:spPr>
-          <a:xfrm>
-            <a:off x="8572500" y="1847850"/>
-            <a:ext cx="2857500" cy="3371850"/>
-          </a:xfrm>
-          <a:prstGeom prst="roundRect">
-            <a:avLst>
-              <a:gd name="adj" fmla="val 2667"/>
-            </a:avLst>
-          </a:prstGeom>
-          <a:solidFill>
-            <a:srgbClr val="EAF5FB"/>
-          </a:solidFill>
-          <a:ln w="9525">
-            <a:solidFill>
-              <a:srgbClr val="3D8DFF"/>
-            </a:solidFill>
-            <a:prstDash val="solid"/>
-          </a:ln>
-        </p:spPr>
-        <p:txBody>
-          <a:bodyPr/>
-          <a:lstStyle/>
-          <a:p>
-            <a:endParaRPr lang="en-US"/>
-          </a:p>
-        </p:txBody>
-      </p:sp>
-      <p:sp>
-        <p:nvSpPr>
-          <p:cNvPr id="8" name="Rectangle 7">
-            <a:extLst>
-              <a:ext uri="{FF2B5EF4-FFF2-40B4-BE49-F238E27FC236}">
-                <a16:creationId xmlns:a16="http://schemas.microsoft.com/office/drawing/2014/main" id="{2711C4FE-BB95-49F0-875A-79973572DB57}"/>
-              </a:ext>
-            </a:extLst>
-          </p:cNvPr>
-          <p:cNvSpPr>
-            <a:spLocks noGrp="1"/>
-          </p:cNvSpPr>
-          <p:nvPr/>
-        </p:nvSpPr>
-        <p:spPr>
-          <a:xfrm>
-            <a:off x="8839200" y="2152650"/>
-            <a:ext cx="2324100" cy="323850"/>
+          <p:cNvPr id="10" name="Rectangle 9">
+            <a:extLst>
+              <a:ext uri="{FF2B5EF4-FFF2-40B4-BE49-F238E27FC236}">
+                <a16:creationId xmlns:a16="http://schemas.microsoft.com/office/drawing/2014/main" id="{96D81758-CD88-4EF5-A7F6-B3CD03B93DBF}"/>
+              </a:ext>
+            </a:extLst>
+          </p:cNvPr>
+          <p:cNvSpPr>
+            <a:spLocks noGrp="1"/>
+          </p:cNvSpPr>
+          <p:nvPr/>
+        </p:nvSpPr>
+        <p:spPr>
+          <a:xfrm>
+            <a:off x="8572500" y="3238500"/>
+            <a:ext cx="2540000" cy="508000"/>
           </a:xfrm>
           <a:prstGeom prst="rect">
             <a:avLst/>
@@ -14948,9 +14749,9 @@
           <a:lstStyle/>
           <a:p>
             <a:pPr algn="l">
-              <a:defRPr sz="1650" b="1">
-                <a:solidFill>
-                  <a:srgbClr val="000000"/>
+              <a:defRPr sz="1050" b="0">
+                <a:solidFill>
+                  <a:srgbClr val="59616B"/>
                 </a:solidFill>
                 <a:latin typeface="Helvetica Neue"/>
                 <a:ea typeface="Helvetica Neue"/>
@@ -14958,155 +14759,19 @@
               </a:defRPr>
             </a:pPr>
             <a:r>
-              <a:rPr lang="en-US" sz="1650" b="1">
-                <a:solidFill>
-                  <a:srgbClr val="000000"/>
+              <a:rPr lang="en-US" sz="1100" b="0">
+                <a:solidFill>
+                  <a:srgbClr val="80726B"/>
                 </a:solidFill>
                 <a:latin typeface="Helvetica Neue"/>
                 <a:ea typeface="Helvetica Neue"/>
                 <a:cs typeface="Helvetica Neue"/>
               </a:rPr>
-              <a:t>Step 3 — Machine home</a:t>
-            </a:r>
-            <a:endParaRPr sz="1650" b="1">
+              <a:t>Detail shown inside the map. Hover or click another process to compare.</a:t>
+            </a:r>
+            <a:endParaRPr sz="1100" b="0">
               <a:solidFill>
-                <a:srgbClr val="000000"/>
-              </a:solidFill>
-              <a:latin typeface="Helvetica Neue"/>
-              <a:ea typeface="Helvetica Neue"/>
-              <a:cs typeface="Helvetica Neue"/>
-            </a:endParaRPr>
-          </a:p>
-        </p:txBody>
-      </p:sp>
-      <p:sp>
-        <p:nvSpPr>
-          <p:cNvPr id="9" name="Rectangle 8">
-            <a:extLst>
-              <a:ext uri="{FF2B5EF4-FFF2-40B4-BE49-F238E27FC236}">
-                <a16:creationId xmlns:a16="http://schemas.microsoft.com/office/drawing/2014/main" id="{D332E2B0-B79D-428E-A109-130D654AAF30}"/>
-              </a:ext>
-            </a:extLst>
-          </p:cNvPr>
-          <p:cNvSpPr>
-            <a:spLocks noGrp="1"/>
-          </p:cNvSpPr>
-          <p:nvPr/>
-        </p:nvSpPr>
-        <p:spPr>
-          <a:xfrm>
-            <a:off x="8839200" y="2724150"/>
-            <a:ext cx="2247900" cy="1981200"/>
-          </a:xfrm>
-          <a:prstGeom prst="rect">
-            <a:avLst/>
-          </a:prstGeom>
-          <a:noFill/>
-          <a:ln w="0">
-            <a:noFill/>
-            <a:prstDash val="solid"/>
-          </a:ln>
-        </p:spPr>
-        <p:txBody>
-          <a:bodyPr lIns="0" tIns="0" rIns="0" bIns="0" anchor="t">
-            <a:normAutofit/>
-          </a:bodyPr>
-          <a:lstStyle/>
-          <a:p>
-            <a:pPr algn="l">
-              <a:defRPr sz="1350" b="0">
-                <a:solidFill>
-                  <a:srgbClr val="000000"/>
-                </a:solidFill>
-                <a:latin typeface="Helvetica Neue"/>
-                <a:ea typeface="Helvetica Neue"/>
-                <a:cs typeface="Helvetica Neue"/>
-              </a:defRPr>
-            </a:pPr>
-            <a:r>
-              <a:rPr lang="en-US" sz="1350" b="0">
-                <a:solidFill>
-                  <a:srgbClr val="000000"/>
-                </a:solidFill>
-                <a:latin typeface="Helvetica Neue"/>
-                <a:ea typeface="Helvetica Neue"/>
-                <a:cs typeface="Helvetica Neue"/>
-              </a:rPr>
-              <a:t>Command
-RP23CNC runs the normal X/Y home sequence.
-Result
-Physical X/Y switches establish gantry coordinates.
-The toolhead stays at its safe LIFT_HOME state.</a:t>
-            </a:r>
-            <a:endParaRPr sz="1350" b="0">
-              <a:solidFill>
-                <a:srgbClr val="000000"/>
-              </a:solidFill>
-              <a:latin typeface="Helvetica Neue"/>
-              <a:ea typeface="Helvetica Neue"/>
-              <a:cs typeface="Helvetica Neue"/>
-            </a:endParaRPr>
-          </a:p>
-        </p:txBody>
-      </p:sp>
-      <p:sp>
-        <p:nvSpPr>
-          <p:cNvPr id="10" name="Rectangle 9">
-            <a:extLst>
-              <a:ext uri="{FF2B5EF4-FFF2-40B4-BE49-F238E27FC236}">
-                <a16:creationId xmlns:a16="http://schemas.microsoft.com/office/drawing/2014/main" id="{96D81758-CD88-4EF5-A7F6-B3CD03B93DBF}"/>
-              </a:ext>
-            </a:extLst>
-          </p:cNvPr>
-          <p:cNvSpPr>
-            <a:spLocks noGrp="1"/>
-          </p:cNvSpPr>
-          <p:nvPr/>
-        </p:nvSpPr>
-        <p:spPr>
-          <a:xfrm>
-            <a:off x="8572500" y="5448300"/>
-            <a:ext cx="2857500" cy="457200"/>
-          </a:xfrm>
-          <a:prstGeom prst="rect">
-            <a:avLst/>
-          </a:prstGeom>
-          <a:noFill/>
-          <a:ln w="0">
-            <a:noFill/>
-            <a:prstDash val="solid"/>
-          </a:ln>
-        </p:spPr>
-        <p:txBody>
-          <a:bodyPr lIns="0" tIns="0" rIns="0" bIns="0" anchor="t">
-            <a:normAutofit/>
-          </a:bodyPr>
-          <a:lstStyle/>
-          <a:p>
-            <a:pPr algn="l">
-              <a:defRPr sz="1050" b="0">
-                <a:solidFill>
-                  <a:srgbClr val="59616B"/>
-                </a:solidFill>
-                <a:latin typeface="Helvetica Neue"/>
-                <a:ea typeface="Helvetica Neue"/>
-                <a:cs typeface="Helvetica Neue"/>
-              </a:defRPr>
-            </a:pPr>
-            <a:r>
-              <a:rPr lang="en-US" sz="1050" b="0">
-                <a:solidFill>
-                  <a:srgbClr val="59616B"/>
-                </a:solidFill>
-                <a:latin typeface="Helvetica Neue"/>
-                <a:ea typeface="Helvetica Neue"/>
-                <a:cs typeface="Helvetica Neue"/>
-              </a:rPr>
-              <a:t>Hover or click another process in the map, or click BACK to return to the overview.</a:t>
-            </a:r>
-            <a:endParaRPr sz="1050" b="0">
-              <a:solidFill>
-                <a:srgbClr val="59616B"/>
+                <a:srgbClr val="80726B"/>
               </a:solidFill>
               <a:latin typeface="Helvetica Neue"/>
               <a:ea typeface="Helvetica Neue"/>
@@ -15651,6 +15316,144 @@
           <a:p>
             <a:pPr algn="ctr"/>
             <a:endParaRPr lang="en-US"/>
+          </a:p>
+        </p:txBody>
+      </p:sp>
+      <p:sp>
+        <p:nvSpPr>
+          <p:cNvPr id="20" name="Matching P100 Map Detail Background">
+            <a:extLst>
+              <a:ext uri="{FF2B5EF4-FFF2-40B4-BE49-F238E27FC236}">
+                <a16:creationId xmlns:a16="http://schemas.microsoft.com/office/drawing/2014/main" id="{F716E644-4D7F-57F9-C447-5F26B4D7EA2B}"/>
+              </a:ext>
+            </a:extLst>
+          </p:cNvPr>
+          <p:cNvSpPr/>
+          <p:nvPr/>
+        </p:nvSpPr>
+        <p:spPr>
+          <a:xfrm>
+            <a:off x="4953000" y="2552700"/>
+            <a:ext cx="2159000" cy="1574800"/>
+          </a:xfrm>
+          <a:prstGeom prst="rect">
+            <a:avLst/>
+          </a:prstGeom>
+          <a:solidFill>
+            <a:srgbClr val="2B251F"/>
+          </a:solidFill>
+          <a:ln w="8890">
+            <a:solidFill>
+              <a:srgbClr val="6E6052"/>
+            </a:solidFill>
+          </a:ln>
+        </p:spPr>
+        <p:style>
+          <a:lnRef idx="2">
+            <a:schemeClr val="accent1">
+              <a:shade val="15000"/>
+            </a:schemeClr>
+          </a:lnRef>
+          <a:fillRef idx="1">
+            <a:schemeClr val="accent1"/>
+          </a:fillRef>
+          <a:effectRef idx="0">
+            <a:schemeClr val="accent1"/>
+          </a:effectRef>
+          <a:fontRef idx="minor">
+            <a:schemeClr val="lt1"/>
+          </a:fontRef>
+        </p:style>
+        <p:txBody>
+          <a:bodyPr rtlCol="0" anchor="ctr"/>
+          <a:lstStyle/>
+          <a:p>
+            <a:pPr algn="ctr"/>
+            <a:endParaRPr lang="en-US"/>
+          </a:p>
+        </p:txBody>
+      </p:sp>
+      <p:sp>
+        <p:nvSpPr>
+          <p:cNvPr id="21" name="Matching P100 Map Detail Title">
+            <a:extLst>
+              <a:ext uri="{FF2B5EF4-FFF2-40B4-BE49-F238E27FC236}">
+                <a16:creationId xmlns:a16="http://schemas.microsoft.com/office/drawing/2014/main" id="{44103440-044D-FE0D-28C4-DF8B7A91468B}"/>
+              </a:ext>
+            </a:extLst>
+          </p:cNvPr>
+          <p:cNvSpPr txBox="1"/>
+          <p:nvPr/>
+        </p:nvSpPr>
+        <p:spPr>
+          <a:xfrm>
+            <a:off x="5067300" y="2667000"/>
+            <a:ext cx="1930400" cy="115416"/>
+          </a:xfrm>
+          <a:prstGeom prst="rect">
+            <a:avLst/>
+          </a:prstGeom>
+          <a:noFill/>
+        </p:spPr>
+        <p:txBody>
+          <a:bodyPr vert="horz" lIns="0" tIns="0" rIns="0" bIns="0" rtlCol="0">
+            <a:spAutoFit/>
+          </a:bodyPr>
+          <a:lstStyle/>
+          <a:p>
+            <a:r>
+              <a:rPr lang="en-US" sz="750" b="1">
+                <a:solidFill>
+                  <a:srgbClr val="FFCC66"/>
+                </a:solidFill>
+                <a:latin typeface="Aptos" panose="020B0004020202020204" pitchFamily="34" charset="0"/>
+              </a:rPr>
+              <a:t>3. Machine home</a:t>
+            </a:r>
+          </a:p>
+        </p:txBody>
+      </p:sp>
+      <p:sp>
+        <p:nvSpPr>
+          <p:cNvPr id="22" name="Matching P100 Map Detail Body">
+            <a:extLst>
+              <a:ext uri="{FF2B5EF4-FFF2-40B4-BE49-F238E27FC236}">
+                <a16:creationId xmlns:a16="http://schemas.microsoft.com/office/drawing/2014/main" id="{3B504EB3-11C8-5707-6204-5B06E0033E18}"/>
+              </a:ext>
+            </a:extLst>
+          </p:cNvPr>
+          <p:cNvSpPr txBox="1"/>
+          <p:nvPr/>
+        </p:nvSpPr>
+        <p:spPr>
+          <a:xfrm>
+            <a:off x="5067300" y="2870200"/>
+            <a:ext cx="1930400" cy="689420"/>
+          </a:xfrm>
+          <a:prstGeom prst="rect">
+            <a:avLst/>
+          </a:prstGeom>
+          <a:noFill/>
+        </p:spPr>
+        <p:txBody>
+          <a:bodyPr vert="horz" lIns="0" tIns="0" rIns="0" bIns="0" rtlCol="0">
+            <a:spAutoFit/>
+          </a:bodyPr>
+          <a:lstStyle/>
+          <a:p>
+            <a:r>
+              <a:rPr lang="en-US" sz="640">
+                <a:solidFill>
+                  <a:srgbClr val="F7F4F0"/>
+                </a:solidFill>
+                <a:latin typeface="Aptos" panose="020B0004020202020204" pitchFamily="34" charset="0"/>
+              </a:rPr>
+              <a:t>Command
+RP23CNC runs .
+Result
+Physical X/Y switches establish gantry coordinates.
+Toolhead stays at LIFT_HOME.</a:t>
+            </a:r>
           </a:p>
         </p:txBody>
       </p:sp>
@@ -15988,64 +15791,22 @@
       </p:pic>
       <p:sp>
         <p:nvSpPr>
-          <p:cNvPr id="7" name="Rectangle: Rounded Corners 6">
-            <a:extLst>
-              <a:ext uri="{FF2B5EF4-FFF2-40B4-BE49-F238E27FC236}">
-                <a16:creationId xmlns:a16="http://schemas.microsoft.com/office/drawing/2014/main" id="{288213A0-7735-4712-A466-0BAF35E8CDFE}"/>
-              </a:ext>
-            </a:extLst>
-          </p:cNvPr>
-          <p:cNvSpPr>
-            <a:spLocks noGrp="1"/>
-          </p:cNvSpPr>
-          <p:nvPr/>
-        </p:nvSpPr>
-        <p:spPr>
-          <a:xfrm>
-            <a:off x="8572500" y="1847850"/>
-            <a:ext cx="2857500" cy="3371850"/>
-          </a:xfrm>
-          <a:prstGeom prst="roundRect">
-            <a:avLst>
-              <a:gd name="adj" fmla="val 2667"/>
-            </a:avLst>
-          </a:prstGeom>
-          <a:solidFill>
-            <a:srgbClr val="EAF5FB"/>
-          </a:solidFill>
-          <a:ln w="9525">
-            <a:solidFill>
-              <a:srgbClr val="3D8DFF"/>
-            </a:solidFill>
-            <a:prstDash val="solid"/>
-          </a:ln>
-        </p:spPr>
-        <p:txBody>
-          <a:bodyPr/>
-          <a:lstStyle/>
-          <a:p>
-            <a:endParaRPr lang="en-US"/>
-          </a:p>
-        </p:txBody>
-      </p:sp>
-      <p:sp>
-        <p:nvSpPr>
-          <p:cNvPr id="8" name="Rectangle 7">
-            <a:extLst>
-              <a:ext uri="{FF2B5EF4-FFF2-40B4-BE49-F238E27FC236}">
-                <a16:creationId xmlns:a16="http://schemas.microsoft.com/office/drawing/2014/main" id="{2711C4FE-BB95-49F0-875A-79973572DB57}"/>
-              </a:ext>
-            </a:extLst>
-          </p:cNvPr>
-          <p:cNvSpPr>
-            <a:spLocks noGrp="1"/>
-          </p:cNvSpPr>
-          <p:nvPr/>
-        </p:nvSpPr>
-        <p:spPr>
-          <a:xfrm>
-            <a:off x="8839200" y="2152650"/>
-            <a:ext cx="2324100" cy="323850"/>
+          <p:cNvPr id="10" name="Rectangle 9">
+            <a:extLst>
+              <a:ext uri="{FF2B5EF4-FFF2-40B4-BE49-F238E27FC236}">
+                <a16:creationId xmlns:a16="http://schemas.microsoft.com/office/drawing/2014/main" id="{96D81758-CD88-4EF5-A7F6-B3CD03B93DBF}"/>
+              </a:ext>
+            </a:extLst>
+          </p:cNvPr>
+          <p:cNvSpPr>
+            <a:spLocks noGrp="1"/>
+          </p:cNvSpPr>
+          <p:nvPr/>
+        </p:nvSpPr>
+        <p:spPr>
+          <a:xfrm>
+            <a:off x="8572500" y="3238500"/>
+            <a:ext cx="2540000" cy="508000"/>
           </a:xfrm>
           <a:prstGeom prst="rect">
             <a:avLst/>
@@ -16063,9 +15824,9 @@
           <a:lstStyle/>
           <a:p>
             <a:pPr algn="l">
-              <a:defRPr sz="1650" b="1">
-                <a:solidFill>
-                  <a:srgbClr val="000000"/>
+              <a:defRPr sz="1050" b="0">
+                <a:solidFill>
+                  <a:srgbClr val="59616B"/>
                 </a:solidFill>
                 <a:latin typeface="Helvetica Neue"/>
                 <a:ea typeface="Helvetica Neue"/>
@@ -16073,155 +15834,19 @@
               </a:defRPr>
             </a:pPr>
             <a:r>
-              <a:rPr lang="en-US" sz="1650" b="1">
-                <a:solidFill>
-                  <a:srgbClr val="000000"/>
+              <a:rPr lang="en-US" sz="1100" b="0">
+                <a:solidFill>
+                  <a:srgbClr val="80726B"/>
                 </a:solidFill>
                 <a:latin typeface="Helvetica Neue"/>
                 <a:ea typeface="Helvetica Neue"/>
                 <a:cs typeface="Helvetica Neue"/>
               </a:rPr>
-              <a:t>Step 4 — Magnetic registration</a:t>
-            </a:r>
-            <a:endParaRPr sz="1650" b="1">
+              <a:t>Detail shown inside the map. Hover or click another process to compare.</a:t>
+            </a:r>
+            <a:endParaRPr sz="1100" b="0">
               <a:solidFill>
-                <a:srgbClr val="000000"/>
-              </a:solidFill>
-              <a:latin typeface="Helvetica Neue"/>
-              <a:ea typeface="Helvetica Neue"/>
-              <a:cs typeface="Helvetica Neue"/>
-            </a:endParaRPr>
-          </a:p>
-        </p:txBody>
-      </p:sp>
-      <p:sp>
-        <p:nvSpPr>
-          <p:cNvPr id="9" name="Rectangle 8">
-            <a:extLst>
-              <a:ext uri="{FF2B5EF4-FFF2-40B4-BE49-F238E27FC236}">
-                <a16:creationId xmlns:a16="http://schemas.microsoft.com/office/drawing/2014/main" id="{D332E2B0-B79D-428E-A109-130D654AAF30}"/>
-              </a:ext>
-            </a:extLst>
-          </p:cNvPr>
-          <p:cNvSpPr>
-            <a:spLocks noGrp="1"/>
-          </p:cNvSpPr>
-          <p:nvPr/>
-        </p:nvSpPr>
-        <p:spPr>
-          <a:xfrm>
-            <a:off x="8839200" y="2724150"/>
-            <a:ext cx="2247900" cy="1981200"/>
-          </a:xfrm>
-          <a:prstGeom prst="rect">
-            <a:avLst/>
-          </a:prstGeom>
-          <a:noFill/>
-          <a:ln w="0">
-            <a:noFill/>
-            <a:prstDash val="solid"/>
-          </a:ln>
-        </p:spPr>
-        <p:txBody>
-          <a:bodyPr lIns="0" tIns="0" rIns="0" bIns="0" anchor="t">
-            <a:normAutofit/>
-          </a:bodyPr>
-          <a:lstStyle/>
-          <a:p>
-            <a:pPr algn="l">
-              <a:defRPr sz="1350" b="0">
-                <a:solidFill>
-                  <a:srgbClr val="000000"/>
-                </a:solidFill>
-                <a:latin typeface="Helvetica Neue"/>
-                <a:ea typeface="Helvetica Neue"/>
-                <a:cs typeface="Helvetica Neue"/>
-              </a:defRPr>
-            </a:pPr>
-            <a:r>
-              <a:rPr lang="en-US" sz="1350" b="0">
-                <a:solidFill>
-                  <a:srgbClr val="000000"/>
-                </a:solidFill>
-                <a:latin typeface="Helvetica Neue"/>
-                <a:ea typeface="Helvetica Neue"/>
-                <a:cs typeface="Helvetica Neue"/>
-              </a:rPr>
-              <a:t>Request / reply
-GP28 requests the scan; GP27 reports the magnetic result.
-Result
-Center magnet sets G54 X/Y zero.
-Outer magnet sets A zero.</a:t>
-            </a:r>
-            <a:endParaRPr sz="1350" b="0">
-              <a:solidFill>
-                <a:srgbClr val="000000"/>
-              </a:solidFill>
-              <a:latin typeface="Helvetica Neue"/>
-              <a:ea typeface="Helvetica Neue"/>
-              <a:cs typeface="Helvetica Neue"/>
-            </a:endParaRPr>
-          </a:p>
-        </p:txBody>
-      </p:sp>
-      <p:sp>
-        <p:nvSpPr>
-          <p:cNvPr id="10" name="Rectangle 9">
-            <a:extLst>
-              <a:ext uri="{FF2B5EF4-FFF2-40B4-BE49-F238E27FC236}">
-                <a16:creationId xmlns:a16="http://schemas.microsoft.com/office/drawing/2014/main" id="{96D81758-CD88-4EF5-A7F6-B3CD03B93DBF}"/>
-              </a:ext>
-            </a:extLst>
-          </p:cNvPr>
-          <p:cNvSpPr>
-            <a:spLocks noGrp="1"/>
-          </p:cNvSpPr>
-          <p:nvPr/>
-        </p:nvSpPr>
-        <p:spPr>
-          <a:xfrm>
-            <a:off x="8572500" y="5448300"/>
-            <a:ext cx="2857500" cy="457200"/>
-          </a:xfrm>
-          <a:prstGeom prst="rect">
-            <a:avLst/>
-          </a:prstGeom>
-          <a:noFill/>
-          <a:ln w="0">
-            <a:noFill/>
-            <a:prstDash val="solid"/>
-          </a:ln>
-        </p:spPr>
-        <p:txBody>
-          <a:bodyPr lIns="0" tIns="0" rIns="0" bIns="0" anchor="t">
-            <a:normAutofit/>
-          </a:bodyPr>
-          <a:lstStyle/>
-          <a:p>
-            <a:pPr algn="l">
-              <a:defRPr sz="1050" b="0">
-                <a:solidFill>
-                  <a:srgbClr val="59616B"/>
-                </a:solidFill>
-                <a:latin typeface="Helvetica Neue"/>
-                <a:ea typeface="Helvetica Neue"/>
-                <a:cs typeface="Helvetica Neue"/>
-              </a:defRPr>
-            </a:pPr>
-            <a:r>
-              <a:rPr lang="en-US" sz="1050" b="0">
-                <a:solidFill>
-                  <a:srgbClr val="59616B"/>
-                </a:solidFill>
-                <a:latin typeface="Helvetica Neue"/>
-                <a:ea typeface="Helvetica Neue"/>
-                <a:cs typeface="Helvetica Neue"/>
-              </a:rPr>
-              <a:t>Hover or click another process in the map, or click BACK to return to the overview.</a:t>
-            </a:r>
-            <a:endParaRPr sz="1050" b="0">
-              <a:solidFill>
-                <a:srgbClr val="59616B"/>
+                <a:srgbClr val="80726B"/>
               </a:solidFill>
               <a:latin typeface="Helvetica Neue"/>
               <a:ea typeface="Helvetica Neue"/>
@@ -16766,6 +16391,144 @@
           <a:p>
             <a:pPr algn="ctr"/>
             <a:endParaRPr lang="en-US"/>
+          </a:p>
+        </p:txBody>
+      </p:sp>
+      <p:sp>
+        <p:nvSpPr>
+          <p:cNvPr id="20" name="Matching P100 Map Detail Background">
+            <a:extLst>
+              <a:ext uri="{FF2B5EF4-FFF2-40B4-BE49-F238E27FC236}">
+                <a16:creationId xmlns:a16="http://schemas.microsoft.com/office/drawing/2014/main" id="{5F1B77DF-9D79-05EF-5F40-16D2A8667562}"/>
+              </a:ext>
+            </a:extLst>
+          </p:cNvPr>
+          <p:cNvSpPr/>
+          <p:nvPr/>
+        </p:nvSpPr>
+        <p:spPr>
+          <a:xfrm>
+            <a:off x="4953000" y="2552700"/>
+            <a:ext cx="2159000" cy="1574800"/>
+          </a:xfrm>
+          <a:prstGeom prst="rect">
+            <a:avLst/>
+          </a:prstGeom>
+          <a:solidFill>
+            <a:srgbClr val="2B251F"/>
+          </a:solidFill>
+          <a:ln w="8890">
+            <a:solidFill>
+              <a:srgbClr val="6E6052"/>
+            </a:solidFill>
+          </a:ln>
+        </p:spPr>
+        <p:style>
+          <a:lnRef idx="2">
+            <a:schemeClr val="accent1">
+              <a:shade val="15000"/>
+            </a:schemeClr>
+          </a:lnRef>
+          <a:fillRef idx="1">
+            <a:schemeClr val="accent1"/>
+          </a:fillRef>
+          <a:effectRef idx="0">
+            <a:schemeClr val="accent1"/>
+          </a:effectRef>
+          <a:fontRef idx="minor">
+            <a:schemeClr val="lt1"/>
+          </a:fontRef>
+        </p:style>
+        <p:txBody>
+          <a:bodyPr rtlCol="0" anchor="ctr"/>
+          <a:lstStyle/>
+          <a:p>
+            <a:pPr algn="ctr"/>
+            <a:endParaRPr lang="en-US"/>
+          </a:p>
+        </p:txBody>
+      </p:sp>
+      <p:sp>
+        <p:nvSpPr>
+          <p:cNvPr id="21" name="Matching P100 Map Detail Title">
+            <a:extLst>
+              <a:ext uri="{FF2B5EF4-FFF2-40B4-BE49-F238E27FC236}">
+                <a16:creationId xmlns:a16="http://schemas.microsoft.com/office/drawing/2014/main" id="{55434FDA-96C4-A8CC-98E6-504B3F8E5A5A}"/>
+              </a:ext>
+            </a:extLst>
+          </p:cNvPr>
+          <p:cNvSpPr txBox="1"/>
+          <p:nvPr/>
+        </p:nvSpPr>
+        <p:spPr>
+          <a:xfrm>
+            <a:off x="5067300" y="2667000"/>
+            <a:ext cx="1930400" cy="115416"/>
+          </a:xfrm>
+          <a:prstGeom prst="rect">
+            <a:avLst/>
+          </a:prstGeom>
+          <a:noFill/>
+        </p:spPr>
+        <p:txBody>
+          <a:bodyPr vert="horz" lIns="0" tIns="0" rIns="0" bIns="0" rtlCol="0">
+            <a:spAutoFit/>
+          </a:bodyPr>
+          <a:lstStyle/>
+          <a:p>
+            <a:r>
+              <a:rPr lang="en-US" sz="750" b="1">
+                <a:solidFill>
+                  <a:srgbClr val="FFCC66"/>
+                </a:solidFill>
+                <a:latin typeface="Aptos" panose="020B0004020202020204" pitchFamily="34" charset="0"/>
+              </a:rPr>
+              <a:t>4. Magnetic registration</a:t>
+            </a:r>
+          </a:p>
+        </p:txBody>
+      </p:sp>
+      <p:sp>
+        <p:nvSpPr>
+          <p:cNvPr id="22" name="Matching P100 Map Detail Body">
+            <a:extLst>
+              <a:ext uri="{FF2B5EF4-FFF2-40B4-BE49-F238E27FC236}">
+                <a16:creationId xmlns:a16="http://schemas.microsoft.com/office/drawing/2014/main" id="{156CB25D-77C0-DA0C-4FEB-87867AF2EDB9}"/>
+              </a:ext>
+            </a:extLst>
+          </p:cNvPr>
+          <p:cNvSpPr txBox="1"/>
+          <p:nvPr/>
+        </p:nvSpPr>
+        <p:spPr>
+          <a:xfrm>
+            <a:off x="5067300" y="2870200"/>
+            <a:ext cx="1930400" cy="590931"/>
+          </a:xfrm>
+          <a:prstGeom prst="rect">
+            <a:avLst/>
+          </a:prstGeom>
+          <a:noFill/>
+        </p:spPr>
+        <p:txBody>
+          <a:bodyPr vert="horz" lIns="0" tIns="0" rIns="0" bIns="0" rtlCol="0">
+            <a:spAutoFit/>
+          </a:bodyPr>
+          <a:lstStyle/>
+          <a:p>
+            <a:r>
+              <a:rPr lang="en-US" sz="640">
+                <a:solidFill>
+                  <a:srgbClr val="F7F4F0"/>
+                </a:solidFill>
+                <a:latin typeface="Aptos" panose="020B0004020202020204" pitchFamily="34" charset="0"/>
+              </a:rPr>
+              <a:t>Request / reply
+GP28 requests the scan; GP27 reports TMAG.
+Result
+Center magnet sets G54 X/Y zero.
+Outer magnet sets A zero.</a:t>
+            </a:r>
           </a:p>
         </p:txBody>
       </p:sp>

--- a/docs/report/Theta_Pen_Plotter_Summer_Progress_Update.pptx
+++ b/docs/report/Theta_Pen_Plotter_Summer_Progress_Update.pptx
@@ -2223,7 +2223,7 @@
     <p:bg>
       <p:bgPr>
         <a:solidFill>
-          <a:srgbClr val="FFFFFF"/>
+          <a:srgbClr val="141A20"/>
         </a:solidFill>
         <a:effectLst/>
       </p:bgPr>
@@ -2242,278 +2242,6 @@
           <a:chExt cx="0" cy="0"/>
         </a:xfrm>
       </p:grpSpPr>
-      <p:sp>
-        <p:nvSpPr>
-          <p:cNvPr id="11" name="Rectangle 10">
-            <a:extLst>
-              <a:ext uri="{FF2B5EF4-FFF2-40B4-BE49-F238E27FC236}">
-                <a16:creationId xmlns:a16="http://schemas.microsoft.com/office/drawing/2014/main" id="{6E709A68-3D0F-4C65-A32B-A1E7C3547699}"/>
-              </a:ext>
-            </a:extLst>
-          </p:cNvPr>
-          <p:cNvSpPr>
-            <a:spLocks noGrp="1"/>
-          </p:cNvSpPr>
-          <p:nvPr/>
-        </p:nvSpPr>
-        <p:spPr>
-          <a:xfrm>
-            <a:off x="400050" y="342900"/>
-            <a:ext cx="5334000" cy="228600"/>
-          </a:xfrm>
-          <a:prstGeom prst="rect">
-            <a:avLst/>
-          </a:prstGeom>
-          <a:noFill/>
-          <a:ln w="0">
-            <a:noFill/>
-            <a:prstDash val="solid"/>
-          </a:ln>
-        </p:spPr>
-        <p:txBody>
-          <a:bodyPr lIns="0" tIns="0" rIns="0" bIns="0" anchor="t">
-            <a:normAutofit/>
-          </a:bodyPr>
-          <a:lstStyle/>
-          <a:p>
-            <a:pPr algn="l">
-              <a:defRPr sz="1050" b="1">
-                <a:solidFill>
-                  <a:srgbClr val="3D8DFF"/>
-                </a:solidFill>
-                <a:latin typeface="Helvetica Neue"/>
-                <a:ea typeface="Helvetica Neue"/>
-                <a:cs typeface="Helvetica Neue"/>
-              </a:defRPr>
-            </a:pPr>
-            <a:r>
-              <a:rPr sz="1050" b="1">
-                <a:solidFill>
-                  <a:srgbClr val="3D8DFF"/>
-                </a:solidFill>
-                <a:latin typeface="Helvetica Neue"/>
-                <a:ea typeface="Helvetica Neue"/>
-                <a:cs typeface="Helvetica Neue"/>
-              </a:rPr>
-              <a:t>P100 PROCESS MAP</a:t>
-            </a:r>
-          </a:p>
-        </p:txBody>
-      </p:sp>
-      <p:sp>
-        <p:nvSpPr>
-          <p:cNvPr id="2" name="Rectangle 1">
-            <a:extLst>
-              <a:ext uri="{FF2B5EF4-FFF2-40B4-BE49-F238E27FC236}">
-                <a16:creationId xmlns:a16="http://schemas.microsoft.com/office/drawing/2014/main" id="{E2B39075-10DC-4D61-AB16-D8458CE12055}"/>
-              </a:ext>
-            </a:extLst>
-          </p:cNvPr>
-          <p:cNvSpPr>
-            <a:spLocks noGrp="1"/>
-          </p:cNvSpPr>
-          <p:nvPr/>
-        </p:nvSpPr>
-        <p:spPr>
-          <a:xfrm>
-            <a:off x="400050" y="685800"/>
-            <a:ext cx="10668000" cy="590550"/>
-          </a:xfrm>
-          <a:prstGeom prst="rect">
-            <a:avLst/>
-          </a:prstGeom>
-          <a:noFill/>
-          <a:ln w="0">
-            <a:noFill/>
-            <a:prstDash val="solid"/>
-          </a:ln>
-        </p:spPr>
-        <p:txBody>
-          <a:bodyPr lIns="0" tIns="0" rIns="0" bIns="0" anchor="t">
-            <a:normAutofit/>
-          </a:bodyPr>
-          <a:lstStyle/>
-          <a:p>
-            <a:pPr algn="l">
-              <a:defRPr sz="2700" b="1">
-                <a:solidFill>
-                  <a:srgbClr val="000000"/>
-                </a:solidFill>
-                <a:latin typeface="Helvetica Neue"/>
-                <a:ea typeface="Helvetica Neue"/>
-                <a:cs typeface="Helvetica Neue"/>
-              </a:defRPr>
-            </a:pPr>
-            <a:r>
-              <a:rPr sz="2700" b="1">
-                <a:solidFill>
-                  <a:srgbClr val="000000"/>
-                </a:solidFill>
-                <a:latin typeface="Helvetica Neue"/>
-                <a:ea typeface="Helvetica Neue"/>
-                <a:cs typeface="Helvetica Neue"/>
-              </a:rPr>
-              <a:t>P100 is the repeatable startup routine before a drawing begins</a:t>
-            </a:r>
-          </a:p>
-        </p:txBody>
-      </p:sp>
-      <p:sp>
-        <p:nvSpPr>
-          <p:cNvPr id="3" name="Rectangle 2">
-            <a:extLst>
-              <a:ext uri="{FF2B5EF4-FFF2-40B4-BE49-F238E27FC236}">
-                <a16:creationId xmlns:a16="http://schemas.microsoft.com/office/drawing/2014/main" id="{4ACC2074-F48C-4553-A601-F6B254548577}"/>
-              </a:ext>
-            </a:extLst>
-          </p:cNvPr>
-          <p:cNvSpPr>
-            <a:spLocks noGrp="1"/>
-          </p:cNvSpPr>
-          <p:nvPr/>
-        </p:nvSpPr>
-        <p:spPr>
-          <a:xfrm>
-            <a:off x="400050" y="6343650"/>
-            <a:ext cx="11391900" cy="9525"/>
-          </a:xfrm>
-          <a:prstGeom prst="rect">
-            <a:avLst/>
-          </a:prstGeom>
-          <a:solidFill>
-            <a:srgbClr val="B8BCC4"/>
-          </a:solidFill>
-          <a:ln w="0">
-            <a:solidFill>
-              <a:srgbClr val="B8BCC4"/>
-            </a:solidFill>
-            <a:prstDash val="solid"/>
-          </a:ln>
-        </p:spPr>
-        <p:txBody>
-          <a:bodyPr/>
-          <a:lstStyle/>
-          <a:p>
-            <a:endParaRPr lang="en-US"/>
-          </a:p>
-        </p:txBody>
-      </p:sp>
-      <p:sp>
-        <p:nvSpPr>
-          <p:cNvPr id="4" name="Rectangle 3">
-            <a:extLst>
-              <a:ext uri="{FF2B5EF4-FFF2-40B4-BE49-F238E27FC236}">
-                <a16:creationId xmlns:a16="http://schemas.microsoft.com/office/drawing/2014/main" id="{6A21AB0F-01B7-4655-B05E-1D59444D1E2F}"/>
-              </a:ext>
-            </a:extLst>
-          </p:cNvPr>
-          <p:cNvSpPr>
-            <a:spLocks noGrp="1"/>
-          </p:cNvSpPr>
-          <p:nvPr/>
-        </p:nvSpPr>
-        <p:spPr>
-          <a:xfrm>
-            <a:off x="400050" y="6477000"/>
-            <a:ext cx="6191250" cy="171450"/>
-          </a:xfrm>
-          <a:prstGeom prst="rect">
-            <a:avLst/>
-          </a:prstGeom>
-          <a:noFill/>
-          <a:ln w="0">
-            <a:noFill/>
-            <a:prstDash val="solid"/>
-          </a:ln>
-        </p:spPr>
-        <p:txBody>
-          <a:bodyPr lIns="0" tIns="0" rIns="0" bIns="0" anchor="t">
-            <a:normAutofit/>
-          </a:bodyPr>
-          <a:lstStyle/>
-          <a:p>
-            <a:pPr algn="l">
-              <a:defRPr sz="900" b="0">
-                <a:solidFill>
-                  <a:srgbClr val="59616B"/>
-                </a:solidFill>
-                <a:latin typeface="Helvetica Neue"/>
-                <a:ea typeface="Helvetica Neue"/>
-                <a:cs typeface="Helvetica Neue"/>
-              </a:defRPr>
-            </a:pPr>
-            <a:r>
-              <a:rPr sz="900" b="0">
-                <a:solidFill>
-                  <a:srgbClr val="59616B"/>
-                </a:solidFill>
-                <a:latin typeface="Helvetica Neue"/>
-                <a:ea typeface="Helvetica Neue"/>
-                <a:cs typeface="Helvetica Neue"/>
-              </a:rPr>
-              <a:t>THETA PEN PLOTTER  •  SUMMER PROGRESS UPDATE</a:t>
-            </a:r>
-          </a:p>
-        </p:txBody>
-      </p:sp>
-      <p:sp>
-        <p:nvSpPr>
-          <p:cNvPr id="5" name="Rectangle 4">
-            <a:extLst>
-              <a:ext uri="{FF2B5EF4-FFF2-40B4-BE49-F238E27FC236}">
-                <a16:creationId xmlns:a16="http://schemas.microsoft.com/office/drawing/2014/main" id="{38C47507-02D7-4895-8794-10C0666EFEA1}"/>
-              </a:ext>
-            </a:extLst>
-          </p:cNvPr>
-          <p:cNvSpPr>
-            <a:spLocks noGrp="1"/>
-          </p:cNvSpPr>
-          <p:nvPr/>
-        </p:nvSpPr>
-        <p:spPr>
-          <a:xfrm>
-            <a:off x="11287125" y="6477000"/>
-            <a:ext cx="495300" cy="171450"/>
-          </a:xfrm>
-          <a:prstGeom prst="rect">
-            <a:avLst/>
-          </a:prstGeom>
-          <a:noFill/>
-          <a:ln w="0">
-            <a:noFill/>
-            <a:prstDash val="solid"/>
-          </a:ln>
-        </p:spPr>
-        <p:txBody>
-          <a:bodyPr lIns="0" tIns="0" rIns="0" bIns="0" anchor="t">
-            <a:normAutofit/>
-          </a:bodyPr>
-          <a:lstStyle/>
-          <a:p>
-            <a:pPr algn="r">
-              <a:defRPr sz="900" b="0">
-                <a:solidFill>
-                  <a:srgbClr val="59616B"/>
-                </a:solidFill>
-                <a:latin typeface="Helvetica Neue"/>
-                <a:ea typeface="Helvetica Neue"/>
-                <a:cs typeface="Helvetica Neue"/>
-              </a:defRPr>
-            </a:pPr>
-            <a:r>
-              <a:rPr sz="900" b="0">
-                <a:solidFill>
-                  <a:srgbClr val="59616B"/>
-                </a:solidFill>
-                <a:latin typeface="Helvetica Neue"/>
-                <a:ea typeface="Helvetica Neue"/>
-                <a:cs typeface="Helvetica Neue"/>
-              </a:rPr>
-              <a:t>5</a:t>
-            </a:r>
-          </a:p>
-        </p:txBody>
-      </p:sp>
       <p:pic>
         <p:nvPicPr>
           <p:cNvPr id="16" name="Picture 15"/>
@@ -2528,8 +2256,8 @@
         </p:blipFill>
         <p:spPr>
           <a:xfrm>
-            <a:off x="951442" y="1381125"/>
-            <a:ext cx="6841067" cy="4810125"/>
+            <a:off x="-1" y="-1"/>
+            <a:ext cx="9753600" cy="6858000"/>
           </a:xfrm>
           <a:prstGeom prst="rect">
             <a:avLst/>
@@ -2538,72 +2266,6 @@
       </p:pic>
       <p:sp>
         <p:nvSpPr>
-          <p:cNvPr id="10" name="Rectangle 9">
-            <a:extLst>
-              <a:ext uri="{FF2B5EF4-FFF2-40B4-BE49-F238E27FC236}">
-                <a16:creationId xmlns:a16="http://schemas.microsoft.com/office/drawing/2014/main" id="{96D81758-CD88-4EF5-A7F6-B3CD03B93DBF}"/>
-              </a:ext>
-            </a:extLst>
-          </p:cNvPr>
-          <p:cNvSpPr>
-            <a:spLocks noGrp="1"/>
-          </p:cNvSpPr>
-          <p:nvPr/>
-        </p:nvSpPr>
-        <p:spPr>
-          <a:xfrm>
-            <a:off x="8572500" y="3238500"/>
-            <a:ext cx="2540000" cy="508000"/>
-          </a:xfrm>
-          <a:prstGeom prst="rect">
-            <a:avLst/>
-          </a:prstGeom>
-          <a:noFill/>
-          <a:ln w="0">
-            <a:noFill/>
-            <a:prstDash val="solid"/>
-          </a:ln>
-        </p:spPr>
-        <p:txBody>
-          <a:bodyPr lIns="0" tIns="0" rIns="0" bIns="0" anchor="t">
-            <a:normAutofit/>
-          </a:bodyPr>
-          <a:lstStyle/>
-          <a:p>
-            <a:pPr algn="l">
-              <a:defRPr sz="1050" b="0">
-                <a:solidFill>
-                  <a:srgbClr val="59616B"/>
-                </a:solidFill>
-                <a:latin typeface="Helvetica Neue"/>
-                <a:ea typeface="Helvetica Neue"/>
-                <a:cs typeface="Helvetica Neue"/>
-              </a:defRPr>
-            </a:pPr>
-            <a:r>
-              <a:rPr lang="en-US" sz="1100" b="0">
-                <a:solidFill>
-                  <a:srgbClr val="80726B"/>
-                </a:solidFill>
-                <a:latin typeface="Helvetica Neue"/>
-                <a:ea typeface="Helvetica Neue"/>
-                <a:cs typeface="Helvetica Neue"/>
-              </a:rPr>
-              <a:t>Detail shown inside the map. Hover or click another process to compare.</a:t>
-            </a:r>
-            <a:endParaRPr sz="1100" b="0">
-              <a:solidFill>
-                <a:srgbClr val="80726B"/>
-              </a:solidFill>
-              <a:latin typeface="Helvetica Neue"/>
-              <a:ea typeface="Helvetica Neue"/>
-              <a:cs typeface="Helvetica Neue"/>
-            </a:endParaRPr>
-          </a:p>
-        </p:txBody>
-      </p:sp>
-      <p:sp>
-        <p:nvSpPr>
           <p:cNvPr id="6" name="P100 Step 5 Highlight">
             <a:extLst>
               <a:ext uri="{FF2B5EF4-FFF2-40B4-BE49-F238E27FC236}">
@@ -2616,8 +2278,8 @@
         </p:nvSpPr>
         <p:spPr>
           <a:xfrm>
-            <a:off x="1628775" y="4876800"/>
-            <a:ext cx="3238500" cy="400050"/>
+            <a:off x="964194" y="4983933"/>
+            <a:ext cx="4617267" cy="570368"/>
           </a:xfrm>
           <a:prstGeom prst="rect">
             <a:avLst/>
@@ -2654,18 +2316,18 @@
           <a:lstStyle/>
           <a:p>
             <a:pPr algn="ctr"/>
-            <a:endParaRPr lang="en-US"/>
-          </a:p>
-        </p:txBody>
-      </p:sp>
-      <p:sp>
-        <p:nvSpPr>
-          <p:cNvPr id="12" name="P100 Back Button">
+            <a:endParaRPr lang="en-US" sz="2566"/>
+          </a:p>
+        </p:txBody>
+      </p:sp>
+      <p:sp>
+        <p:nvSpPr>
+          <p:cNvPr id="13" name="P100 Step 1 Hit Area">
             <a:hlinkClick r:id="rId4" action="ppaction://hlinksldjump"/>
             <a:hlinkHover r:id="rId4" action="ppaction://hlinksldjump"/>
             <a:extLst>
               <a:ext uri="{FF2B5EF4-FFF2-40B4-BE49-F238E27FC236}">
-                <a16:creationId xmlns:a16="http://schemas.microsoft.com/office/drawing/2014/main" id="{8491433C-D8AF-F235-C94D-480B1C032693}"/>
+                <a16:creationId xmlns:a16="http://schemas.microsoft.com/office/drawing/2014/main" id="{7895C82C-98CE-0F30-1E8A-3268F7E34339}"/>
               </a:ext>
             </a:extLst>
           </p:cNvPr>
@@ -2674,20 +2336,34 @@
         </p:nvSpPr>
         <p:spPr>
           <a:xfrm>
-            <a:off x="9429750" y="5905500"/>
-            <a:ext cx="2000250" cy="285750"/>
-          </a:xfrm>
-          <a:prstGeom prst="roundRect">
+            <a:off x="964194" y="1616044"/>
+            <a:ext cx="4617267" cy="570368"/>
+          </a:xfrm>
+          <a:prstGeom prst="rect">
             <a:avLst/>
           </a:prstGeom>
           <a:solidFill>
-            <a:srgbClr val="FFF9F3"/>
+            <a:schemeClr val="accent1">
+              <a:alpha val="0"/>
+            </a:schemeClr>
           </a:solidFill>
-          <a:ln w="12700">
-            <a:solidFill>
-              <a:srgbClr val="FF8833"/>
-            </a:solidFill>
-          </a:ln>
+          <a:ln w="19050">
+            <a:noFill/>
+            <a:prstDash val="solid"/>
+          </a:ln>
+          <a:effectLst/>
+          <a:extLst>
+            <a:ext uri="{91240B29-F687-4F45-9708-019B960494DF}">
+              <a14:hiddenLine xmlns:a14="http://schemas.microsoft.com/office/drawing/2010/main" w="19050">
+                <a:solidFill>
+                  <a:schemeClr val="accent1">
+                    <a:shade val="15000"/>
+                  </a:schemeClr>
+                </a:solidFill>
+                <a:prstDash val="solid"/>
+              </a14:hiddenLine>
+            </a:ext>
+          </a:extLst>
         </p:spPr>
         <p:style>
           <a:lnRef idx="2">
@@ -2710,25 +2386,18 @@
           <a:lstStyle/>
           <a:p>
             <a:pPr algn="ctr"/>
-            <a:r>
-              <a:rPr lang="en-US" sz="1200" b="1">
-                <a:solidFill>
-                  <a:srgbClr val="FF8833"/>
-                </a:solidFill>
-              </a:rPr>
-              <a:t>BACK TO OVERVIEW</a:t>
-            </a:r>
-          </a:p>
-        </p:txBody>
-      </p:sp>
-      <p:sp>
-        <p:nvSpPr>
-          <p:cNvPr id="13" name="P100 Step 1 Hit Area">
+            <a:endParaRPr lang="en-US" sz="2566"/>
+          </a:p>
+        </p:txBody>
+      </p:sp>
+      <p:sp>
+        <p:nvSpPr>
+          <p:cNvPr id="14" name="P100 Step 2 Hit Area">
             <a:hlinkClick r:id="rId5" action="ppaction://hlinksldjump"/>
             <a:hlinkHover r:id="rId5" action="ppaction://hlinksldjump"/>
             <a:extLst>
               <a:ext uri="{FF2B5EF4-FFF2-40B4-BE49-F238E27FC236}">
-                <a16:creationId xmlns:a16="http://schemas.microsoft.com/office/drawing/2014/main" id="{7895C82C-98CE-0F30-1E8A-3268F7E34339}"/>
+                <a16:creationId xmlns:a16="http://schemas.microsoft.com/office/drawing/2014/main" id="{AE98F383-9A0E-B31D-98D9-113904BCB0AB}"/>
               </a:ext>
             </a:extLst>
           </p:cNvPr>
@@ -2737,8 +2406,8 @@
         </p:nvSpPr>
         <p:spPr>
           <a:xfrm>
-            <a:off x="1628775" y="2514600"/>
-            <a:ext cx="3238500" cy="400050"/>
+            <a:off x="964194" y="2458016"/>
+            <a:ext cx="4617267" cy="570368"/>
           </a:xfrm>
           <a:prstGeom prst="rect">
             <a:avLst/>
@@ -2787,18 +2456,18 @@
           <a:lstStyle/>
           <a:p>
             <a:pPr algn="ctr"/>
-            <a:endParaRPr lang="en-US"/>
-          </a:p>
-        </p:txBody>
-      </p:sp>
-      <p:sp>
-        <p:nvSpPr>
-          <p:cNvPr id="14" name="P100 Step 2 Hit Area">
+            <a:endParaRPr lang="en-US" sz="2566"/>
+          </a:p>
+        </p:txBody>
+      </p:sp>
+      <p:sp>
+        <p:nvSpPr>
+          <p:cNvPr id="15" name="P100 Step 3 Hit Area">
             <a:hlinkClick r:id="rId6" action="ppaction://hlinksldjump"/>
             <a:hlinkHover r:id="rId6" action="ppaction://hlinksldjump"/>
             <a:extLst>
               <a:ext uri="{FF2B5EF4-FFF2-40B4-BE49-F238E27FC236}">
-                <a16:creationId xmlns:a16="http://schemas.microsoft.com/office/drawing/2014/main" id="{AE98F383-9A0E-B31D-98D9-113904BCB0AB}"/>
+                <a16:creationId xmlns:a16="http://schemas.microsoft.com/office/drawing/2014/main" id="{7BD3113B-C884-0799-BFAE-1057EBD0EA3F}"/>
               </a:ext>
             </a:extLst>
           </p:cNvPr>
@@ -2807,8 +2476,8 @@
         </p:nvSpPr>
         <p:spPr>
           <a:xfrm>
-            <a:off x="1628775" y="3105150"/>
-            <a:ext cx="3238500" cy="400050"/>
+            <a:off x="964194" y="3299988"/>
+            <a:ext cx="4617267" cy="570368"/>
           </a:xfrm>
           <a:prstGeom prst="rect">
             <a:avLst/>
@@ -2857,18 +2526,18 @@
           <a:lstStyle/>
           <a:p>
             <a:pPr algn="ctr"/>
-            <a:endParaRPr lang="en-US"/>
-          </a:p>
-        </p:txBody>
-      </p:sp>
-      <p:sp>
-        <p:nvSpPr>
-          <p:cNvPr id="15" name="P100 Step 3 Hit Area">
+            <a:endParaRPr lang="en-US" sz="2566"/>
+          </a:p>
+        </p:txBody>
+      </p:sp>
+      <p:sp>
+        <p:nvSpPr>
+          <p:cNvPr id="17" name="P100 Step 4 Hit Area">
             <a:hlinkClick r:id="rId7" action="ppaction://hlinksldjump"/>
             <a:hlinkHover r:id="rId7" action="ppaction://hlinksldjump"/>
             <a:extLst>
               <a:ext uri="{FF2B5EF4-FFF2-40B4-BE49-F238E27FC236}">
-                <a16:creationId xmlns:a16="http://schemas.microsoft.com/office/drawing/2014/main" id="{7BD3113B-C884-0799-BFAE-1057EBD0EA3F}"/>
+                <a16:creationId xmlns:a16="http://schemas.microsoft.com/office/drawing/2014/main" id="{E907B343-AF07-68E8-F5B5-30101A27197D}"/>
               </a:ext>
             </a:extLst>
           </p:cNvPr>
@@ -2877,8 +2546,8 @@
         </p:nvSpPr>
         <p:spPr>
           <a:xfrm>
-            <a:off x="1628775" y="3695700"/>
-            <a:ext cx="3238500" cy="400050"/>
+            <a:off x="964194" y="4141960"/>
+            <a:ext cx="4617267" cy="570368"/>
           </a:xfrm>
           <a:prstGeom prst="rect">
             <a:avLst/>
@@ -2927,18 +2596,18 @@
           <a:lstStyle/>
           <a:p>
             <a:pPr algn="ctr"/>
-            <a:endParaRPr lang="en-US"/>
-          </a:p>
-        </p:txBody>
-      </p:sp>
-      <p:sp>
-        <p:nvSpPr>
-          <p:cNvPr id="17" name="P100 Step 4 Hit Area">
+            <a:endParaRPr lang="en-US" sz="2566"/>
+          </a:p>
+        </p:txBody>
+      </p:sp>
+      <p:sp>
+        <p:nvSpPr>
+          <p:cNvPr id="18" name="P100 Step 5 Hit Area">
             <a:hlinkClick r:id="rId8" action="ppaction://hlinksldjump"/>
             <a:hlinkHover r:id="rId8" action="ppaction://hlinksldjump"/>
             <a:extLst>
               <a:ext uri="{FF2B5EF4-FFF2-40B4-BE49-F238E27FC236}">
-                <a16:creationId xmlns:a16="http://schemas.microsoft.com/office/drawing/2014/main" id="{E907B343-AF07-68E8-F5B5-30101A27197D}"/>
+                <a16:creationId xmlns:a16="http://schemas.microsoft.com/office/drawing/2014/main" id="{579E2DB0-94AB-7406-C44A-389EBAC7562D}"/>
               </a:ext>
             </a:extLst>
           </p:cNvPr>
@@ -2947,8 +2616,8 @@
         </p:nvSpPr>
         <p:spPr>
           <a:xfrm>
-            <a:off x="1628775" y="4286250"/>
-            <a:ext cx="3238500" cy="400050"/>
+            <a:off x="964194" y="4983933"/>
+            <a:ext cx="4617267" cy="570368"/>
           </a:xfrm>
           <a:prstGeom prst="rect">
             <a:avLst/>
@@ -2997,18 +2666,18 @@
           <a:lstStyle/>
           <a:p>
             <a:pPr algn="ctr"/>
-            <a:endParaRPr lang="en-US"/>
-          </a:p>
-        </p:txBody>
-      </p:sp>
-      <p:sp>
-        <p:nvSpPr>
-          <p:cNvPr id="18" name="P100 Step 5 Hit Area">
+            <a:endParaRPr lang="en-US" sz="2566"/>
+          </a:p>
+        </p:txBody>
+      </p:sp>
+      <p:sp>
+        <p:nvSpPr>
+          <p:cNvPr id="19" name="P100 Step 6 Hit Area">
             <a:hlinkClick r:id="rId9" action="ppaction://hlinksldjump"/>
             <a:hlinkHover r:id="rId9" action="ppaction://hlinksldjump"/>
             <a:extLst>
               <a:ext uri="{FF2B5EF4-FFF2-40B4-BE49-F238E27FC236}">
-                <a16:creationId xmlns:a16="http://schemas.microsoft.com/office/drawing/2014/main" id="{579E2DB0-94AB-7406-C44A-389EBAC7562D}"/>
+                <a16:creationId xmlns:a16="http://schemas.microsoft.com/office/drawing/2014/main" id="{156C76C4-903A-B573-DA1E-E62B0DA2A219}"/>
               </a:ext>
             </a:extLst>
           </p:cNvPr>
@@ -3017,8 +2686,8 @@
         </p:nvSpPr>
         <p:spPr>
           <a:xfrm>
-            <a:off x="1628775" y="4876800"/>
-            <a:ext cx="3238500" cy="400050"/>
+            <a:off x="964194" y="5825905"/>
+            <a:ext cx="4617267" cy="570368"/>
           </a:xfrm>
           <a:prstGeom prst="rect">
             <a:avLst/>
@@ -3067,18 +2736,16 @@
           <a:lstStyle/>
           <a:p>
             <a:pPr algn="ctr"/>
-            <a:endParaRPr lang="en-US"/>
-          </a:p>
-        </p:txBody>
-      </p:sp>
-      <p:sp>
-        <p:nvSpPr>
-          <p:cNvPr id="19" name="P100 Step 6 Hit Area">
-            <a:hlinkClick r:id="rId10" action="ppaction://hlinksldjump"/>
-            <a:hlinkHover r:id="rId10" action="ppaction://hlinksldjump"/>
-            <a:extLst>
-              <a:ext uri="{FF2B5EF4-FFF2-40B4-BE49-F238E27FC236}">
-                <a16:creationId xmlns:a16="http://schemas.microsoft.com/office/drawing/2014/main" id="{156C76C4-903A-B573-DA1E-E62B0DA2A219}"/>
+            <a:endParaRPr lang="en-US" sz="2566"/>
+          </a:p>
+        </p:txBody>
+      </p:sp>
+      <p:sp>
+        <p:nvSpPr>
+          <p:cNvPr id="20" name="Matching P100 Map Detail Background">
+            <a:extLst>
+              <a:ext uri="{FF2B5EF4-FFF2-40B4-BE49-F238E27FC236}">
+                <a16:creationId xmlns:a16="http://schemas.microsoft.com/office/drawing/2014/main" id="{89FE897F-04BC-FA43-95EF-FD5AA8ADA80D}"/>
               </a:ext>
             </a:extLst>
           </p:cNvPr>
@@ -3087,34 +2754,20 @@
         </p:nvSpPr>
         <p:spPr>
           <a:xfrm>
-            <a:off x="1628775" y="5467350"/>
-            <a:ext cx="3238500" cy="400050"/>
+            <a:off x="5703683" y="1670364"/>
+            <a:ext cx="3078178" cy="2245259"/>
           </a:xfrm>
           <a:prstGeom prst="rect">
             <a:avLst/>
           </a:prstGeom>
           <a:solidFill>
-            <a:schemeClr val="accent1">
-              <a:alpha val="0"/>
-            </a:schemeClr>
+            <a:srgbClr val="2B251F"/>
           </a:solidFill>
-          <a:ln w="19050">
-            <a:noFill/>
-            <a:prstDash val="solid"/>
-          </a:ln>
-          <a:effectLst/>
-          <a:extLst>
-            <a:ext uri="{91240B29-F687-4F45-9708-019B960494DF}">
-              <a14:hiddenLine xmlns:a14="http://schemas.microsoft.com/office/drawing/2010/main" w="19050">
-                <a:solidFill>
-                  <a:schemeClr val="accent1">
-                    <a:shade val="15000"/>
-                  </a:schemeClr>
-                </a:solidFill>
-                <a:prstDash val="solid"/>
-              </a14:hiddenLine>
-            </a:ext>
-          </a:extLst>
+          <a:ln w="8890">
+            <a:solidFill>
+              <a:srgbClr val="6E6052"/>
+            </a:solidFill>
+          </a:ln>
         </p:spPr>
         <p:style>
           <a:lnRef idx="2">
@@ -3137,16 +2790,103 @@
           <a:lstStyle/>
           <a:p>
             <a:pPr algn="ctr"/>
-            <a:endParaRPr lang="en-US"/>
-          </a:p>
-        </p:txBody>
-      </p:sp>
-      <p:sp>
-        <p:nvSpPr>
-          <p:cNvPr id="20" name="Matching P100 Map Detail Background">
-            <a:extLst>
-              <a:ext uri="{FF2B5EF4-FFF2-40B4-BE49-F238E27FC236}">
-                <a16:creationId xmlns:a16="http://schemas.microsoft.com/office/drawing/2014/main" id="{89FE897F-04BC-FA43-95EF-FD5AA8ADA80D}"/>
+            <a:endParaRPr lang="en-US" sz="2566"/>
+          </a:p>
+        </p:txBody>
+      </p:sp>
+      <p:sp>
+        <p:nvSpPr>
+          <p:cNvPr id="21" name="Matching P100 Map Detail Title">
+            <a:extLst>
+              <a:ext uri="{FF2B5EF4-FFF2-40B4-BE49-F238E27FC236}">
+                <a16:creationId xmlns:a16="http://schemas.microsoft.com/office/drawing/2014/main" id="{52103310-A1E3-00CA-D853-899611B9D158}"/>
+              </a:ext>
+            </a:extLst>
+          </p:cNvPr>
+          <p:cNvSpPr txBox="1"/>
+          <p:nvPr/>
+        </p:nvSpPr>
+        <p:spPr>
+          <a:xfrm>
+            <a:off x="5866645" y="1833327"/>
+            <a:ext cx="2752254" cy="164554"/>
+          </a:xfrm>
+          <a:prstGeom prst="rect">
+            <a:avLst/>
+          </a:prstGeom>
+          <a:noFill/>
+        </p:spPr>
+        <p:txBody>
+          <a:bodyPr vert="horz" lIns="0" tIns="0" rIns="0" bIns="0" rtlCol="0">
+            <a:spAutoFit/>
+          </a:bodyPr>
+          <a:lstStyle/>
+          <a:p>
+            <a:r>
+              <a:rPr lang="en-US" sz="1069" b="1">
+                <a:solidFill>
+                  <a:srgbClr val="FFCC66"/>
+                </a:solidFill>
+                <a:latin typeface="Aptos" panose="020B0004020202020204" pitchFamily="34" charset="0"/>
+              </a:rPr>
+              <a:t>5. Per-run touch check</a:t>
+            </a:r>
+          </a:p>
+        </p:txBody>
+      </p:sp>
+      <p:sp>
+        <p:nvSpPr>
+          <p:cNvPr id="22" name="Matching P100 Map Detail Body">
+            <a:extLst>
+              <a:ext uri="{FF2B5EF4-FFF2-40B4-BE49-F238E27FC236}">
+                <a16:creationId xmlns:a16="http://schemas.microsoft.com/office/drawing/2014/main" id="{CA9E2D01-1BF7-F06A-80BF-59E1B3A5FA6D}"/>
+              </a:ext>
+            </a:extLst>
+          </p:cNvPr>
+          <p:cNvSpPr txBox="1"/>
+          <p:nvPr/>
+        </p:nvSpPr>
+        <p:spPr>
+          <a:xfrm>
+            <a:off x="5866645" y="2123038"/>
+            <a:ext cx="2752254" cy="1123354"/>
+          </a:xfrm>
+          <a:prstGeom prst="rect">
+            <a:avLst/>
+          </a:prstGeom>
+          <a:noFill/>
+        </p:spPr>
+        <p:txBody>
+          <a:bodyPr vert="horz" lIns="0" tIns="0" rIns="0" bIns="0" rtlCol="0">
+            <a:spAutoFit/>
+          </a:bodyPr>
+          <a:lstStyle/>
+          <a:p>
+            <a:r>
+              <a:rPr lang="en-US" sz="912">
+                <a:solidFill>
+                  <a:srgbClr val="F7F4F0"/>
+                </a:solidFill>
+                <a:latin typeface="Aptos" panose="020B0004020202020204" pitchFamily="34" charset="0"/>
+              </a:rPr>
+              <a:t>M3
+Seek down to the load-cell contact threshold.
+M5
+Release, then make a bounded clearance pulse.
+Abort
+Fail to touch, release, or clear.</a:t>
+            </a:r>
+          </a:p>
+        </p:txBody>
+      </p:sp>
+      <p:sp>
+        <p:nvSpPr>
+          <p:cNvPr id="7" name="P100 Back Button">
+            <a:hlinkClick r:id="rId10" action="ppaction://hlinksldjump"/>
+            <a:hlinkHover r:id="rId10" action="ppaction://hlinksldjump"/>
+            <a:extLst>
+              <a:ext uri="{FF2B5EF4-FFF2-40B4-BE49-F238E27FC236}">
+                <a16:creationId xmlns:a16="http://schemas.microsoft.com/office/drawing/2014/main" id="{35959FFA-F53B-CA42-A932-B1A9960B530B}"/>
               </a:ext>
             </a:extLst>
           </p:cNvPr>
@@ -3155,18 +2895,18 @@
         </p:nvSpPr>
         <p:spPr>
           <a:xfrm>
-            <a:off x="4953000" y="2552700"/>
-            <a:ext cx="2159000" cy="1574800"/>
-          </a:xfrm>
-          <a:prstGeom prst="rect">
+            <a:off x="10058400" y="6172200"/>
+            <a:ext cx="1714500" cy="304800"/>
+          </a:xfrm>
+          <a:prstGeom prst="roundRect">
             <a:avLst/>
           </a:prstGeom>
           <a:solidFill>
-            <a:srgbClr val="2B251F"/>
+            <a:srgbClr val="F4F4F4"/>
           </a:solidFill>
-          <a:ln w="8890">
+          <a:ln w="12700">
             <a:solidFill>
-              <a:srgbClr val="6E6052"/>
+              <a:srgbClr val="FFA533"/>
             </a:solidFill>
           </a:ln>
         </p:spPr>
@@ -3191,91 +2931,14 @@
           <a:lstStyle/>
           <a:p>
             <a:pPr algn="ctr"/>
-            <a:endParaRPr lang="en-US"/>
-          </a:p>
-        </p:txBody>
-      </p:sp>
-      <p:sp>
-        <p:nvSpPr>
-          <p:cNvPr id="21" name="Matching P100 Map Detail Title">
-            <a:extLst>
-              <a:ext uri="{FF2B5EF4-FFF2-40B4-BE49-F238E27FC236}">
-                <a16:creationId xmlns:a16="http://schemas.microsoft.com/office/drawing/2014/main" id="{52103310-A1E3-00CA-D853-899611B9D158}"/>
-              </a:ext>
-            </a:extLst>
-          </p:cNvPr>
-          <p:cNvSpPr txBox="1"/>
-          <p:nvPr/>
-        </p:nvSpPr>
-        <p:spPr>
-          <a:xfrm>
-            <a:off x="5067300" y="2667000"/>
-            <a:ext cx="1930400" cy="115416"/>
-          </a:xfrm>
-          <a:prstGeom prst="rect">
-            <a:avLst/>
-          </a:prstGeom>
-          <a:noFill/>
-        </p:spPr>
-        <p:txBody>
-          <a:bodyPr vert="horz" lIns="0" tIns="0" rIns="0" bIns="0" rtlCol="0">
-            <a:spAutoFit/>
-          </a:bodyPr>
-          <a:lstStyle/>
-          <a:p>
-            <a:r>
-              <a:rPr lang="en-US" sz="750" b="1">
-                <a:solidFill>
-                  <a:srgbClr val="FFCC66"/>
+            <a:r>
+              <a:rPr lang="en-US" sz="1000" b="1">
+                <a:solidFill>
+                  <a:srgbClr val="FFA533"/>
                 </a:solidFill>
                 <a:latin typeface="Aptos" panose="020B0004020202020204" pitchFamily="34" charset="0"/>
               </a:rPr>
-              <a:t>5. Per-run touch check</a:t>
-            </a:r>
-          </a:p>
-        </p:txBody>
-      </p:sp>
-      <p:sp>
-        <p:nvSpPr>
-          <p:cNvPr id="22" name="Matching P100 Map Detail Body">
-            <a:extLst>
-              <a:ext uri="{FF2B5EF4-FFF2-40B4-BE49-F238E27FC236}">
-                <a16:creationId xmlns:a16="http://schemas.microsoft.com/office/drawing/2014/main" id="{CA9E2D01-1BF7-F06A-80BF-59E1B3A5FA6D}"/>
-              </a:ext>
-            </a:extLst>
-          </p:cNvPr>
-          <p:cNvSpPr txBox="1"/>
-          <p:nvPr/>
-        </p:nvSpPr>
-        <p:spPr>
-          <a:xfrm>
-            <a:off x="5067300" y="2870200"/>
-            <a:ext cx="1930400" cy="787908"/>
-          </a:xfrm>
-          <a:prstGeom prst="rect">
-            <a:avLst/>
-          </a:prstGeom>
-          <a:noFill/>
-        </p:spPr>
-        <p:txBody>
-          <a:bodyPr vert="horz" lIns="0" tIns="0" rIns="0" bIns="0" rtlCol="0">
-            <a:spAutoFit/>
-          </a:bodyPr>
-          <a:lstStyle/>
-          <a:p>
-            <a:r>
-              <a:rPr lang="en-US" sz="640">
-                <a:solidFill>
-                  <a:srgbClr val="F7F4F0"/>
-                </a:solidFill>
-                <a:latin typeface="Aptos" panose="020B0004020202020204" pitchFamily="34" charset="0"/>
-              </a:rPr>
-              <a:t>M3
-Seek down to the load-cell contact threshold.
-M5
-Release, then make a bounded clearance pulse.
-Abort
-Fail to touch, release, or clear.</a:t>
+              <a:t>BACK</a:t>
             </a:r>
           </a:p>
         </p:txBody>
@@ -3299,7 +2962,7 @@
     <p:bg>
       <p:bgPr>
         <a:solidFill>
-          <a:srgbClr val="FFFFFF"/>
+          <a:srgbClr val="141A20"/>
         </a:solidFill>
         <a:effectLst/>
       </p:bgPr>
@@ -3318,278 +2981,6 @@
           <a:chExt cx="0" cy="0"/>
         </a:xfrm>
       </p:grpSpPr>
-      <p:sp>
-        <p:nvSpPr>
-          <p:cNvPr id="11" name="Rectangle 10">
-            <a:extLst>
-              <a:ext uri="{FF2B5EF4-FFF2-40B4-BE49-F238E27FC236}">
-                <a16:creationId xmlns:a16="http://schemas.microsoft.com/office/drawing/2014/main" id="{6E709A68-3D0F-4C65-A32B-A1E7C3547699}"/>
-              </a:ext>
-            </a:extLst>
-          </p:cNvPr>
-          <p:cNvSpPr>
-            <a:spLocks noGrp="1"/>
-          </p:cNvSpPr>
-          <p:nvPr/>
-        </p:nvSpPr>
-        <p:spPr>
-          <a:xfrm>
-            <a:off x="400050" y="342900"/>
-            <a:ext cx="5334000" cy="228600"/>
-          </a:xfrm>
-          <a:prstGeom prst="rect">
-            <a:avLst/>
-          </a:prstGeom>
-          <a:noFill/>
-          <a:ln w="0">
-            <a:noFill/>
-            <a:prstDash val="solid"/>
-          </a:ln>
-        </p:spPr>
-        <p:txBody>
-          <a:bodyPr lIns="0" tIns="0" rIns="0" bIns="0" anchor="t">
-            <a:normAutofit/>
-          </a:bodyPr>
-          <a:lstStyle/>
-          <a:p>
-            <a:pPr algn="l">
-              <a:defRPr sz="1050" b="1">
-                <a:solidFill>
-                  <a:srgbClr val="3D8DFF"/>
-                </a:solidFill>
-                <a:latin typeface="Helvetica Neue"/>
-                <a:ea typeface="Helvetica Neue"/>
-                <a:cs typeface="Helvetica Neue"/>
-              </a:defRPr>
-            </a:pPr>
-            <a:r>
-              <a:rPr sz="1050" b="1">
-                <a:solidFill>
-                  <a:srgbClr val="3D8DFF"/>
-                </a:solidFill>
-                <a:latin typeface="Helvetica Neue"/>
-                <a:ea typeface="Helvetica Neue"/>
-                <a:cs typeface="Helvetica Neue"/>
-              </a:rPr>
-              <a:t>P100 PROCESS MAP</a:t>
-            </a:r>
-          </a:p>
-        </p:txBody>
-      </p:sp>
-      <p:sp>
-        <p:nvSpPr>
-          <p:cNvPr id="2" name="Rectangle 1">
-            <a:extLst>
-              <a:ext uri="{FF2B5EF4-FFF2-40B4-BE49-F238E27FC236}">
-                <a16:creationId xmlns:a16="http://schemas.microsoft.com/office/drawing/2014/main" id="{E2B39075-10DC-4D61-AB16-D8458CE12055}"/>
-              </a:ext>
-            </a:extLst>
-          </p:cNvPr>
-          <p:cNvSpPr>
-            <a:spLocks noGrp="1"/>
-          </p:cNvSpPr>
-          <p:nvPr/>
-        </p:nvSpPr>
-        <p:spPr>
-          <a:xfrm>
-            <a:off x="400050" y="685800"/>
-            <a:ext cx="10668000" cy="590550"/>
-          </a:xfrm>
-          <a:prstGeom prst="rect">
-            <a:avLst/>
-          </a:prstGeom>
-          <a:noFill/>
-          <a:ln w="0">
-            <a:noFill/>
-            <a:prstDash val="solid"/>
-          </a:ln>
-        </p:spPr>
-        <p:txBody>
-          <a:bodyPr lIns="0" tIns="0" rIns="0" bIns="0" anchor="t">
-            <a:normAutofit/>
-          </a:bodyPr>
-          <a:lstStyle/>
-          <a:p>
-            <a:pPr algn="l">
-              <a:defRPr sz="2700" b="1">
-                <a:solidFill>
-                  <a:srgbClr val="000000"/>
-                </a:solidFill>
-                <a:latin typeface="Helvetica Neue"/>
-                <a:ea typeface="Helvetica Neue"/>
-                <a:cs typeface="Helvetica Neue"/>
-              </a:defRPr>
-            </a:pPr>
-            <a:r>
-              <a:rPr sz="2700" b="1">
-                <a:solidFill>
-                  <a:srgbClr val="000000"/>
-                </a:solidFill>
-                <a:latin typeface="Helvetica Neue"/>
-                <a:ea typeface="Helvetica Neue"/>
-                <a:cs typeface="Helvetica Neue"/>
-              </a:rPr>
-              <a:t>P100 is the repeatable startup routine before a drawing begins</a:t>
-            </a:r>
-          </a:p>
-        </p:txBody>
-      </p:sp>
-      <p:sp>
-        <p:nvSpPr>
-          <p:cNvPr id="3" name="Rectangle 2">
-            <a:extLst>
-              <a:ext uri="{FF2B5EF4-FFF2-40B4-BE49-F238E27FC236}">
-                <a16:creationId xmlns:a16="http://schemas.microsoft.com/office/drawing/2014/main" id="{4ACC2074-F48C-4553-A601-F6B254548577}"/>
-              </a:ext>
-            </a:extLst>
-          </p:cNvPr>
-          <p:cNvSpPr>
-            <a:spLocks noGrp="1"/>
-          </p:cNvSpPr>
-          <p:nvPr/>
-        </p:nvSpPr>
-        <p:spPr>
-          <a:xfrm>
-            <a:off x="400050" y="6343650"/>
-            <a:ext cx="11391900" cy="9525"/>
-          </a:xfrm>
-          <a:prstGeom prst="rect">
-            <a:avLst/>
-          </a:prstGeom>
-          <a:solidFill>
-            <a:srgbClr val="B8BCC4"/>
-          </a:solidFill>
-          <a:ln w="0">
-            <a:solidFill>
-              <a:srgbClr val="B8BCC4"/>
-            </a:solidFill>
-            <a:prstDash val="solid"/>
-          </a:ln>
-        </p:spPr>
-        <p:txBody>
-          <a:bodyPr/>
-          <a:lstStyle/>
-          <a:p>
-            <a:endParaRPr lang="en-US"/>
-          </a:p>
-        </p:txBody>
-      </p:sp>
-      <p:sp>
-        <p:nvSpPr>
-          <p:cNvPr id="4" name="Rectangle 3">
-            <a:extLst>
-              <a:ext uri="{FF2B5EF4-FFF2-40B4-BE49-F238E27FC236}">
-                <a16:creationId xmlns:a16="http://schemas.microsoft.com/office/drawing/2014/main" id="{6A21AB0F-01B7-4655-B05E-1D59444D1E2F}"/>
-              </a:ext>
-            </a:extLst>
-          </p:cNvPr>
-          <p:cNvSpPr>
-            <a:spLocks noGrp="1"/>
-          </p:cNvSpPr>
-          <p:nvPr/>
-        </p:nvSpPr>
-        <p:spPr>
-          <a:xfrm>
-            <a:off x="400050" y="6477000"/>
-            <a:ext cx="6191250" cy="171450"/>
-          </a:xfrm>
-          <a:prstGeom prst="rect">
-            <a:avLst/>
-          </a:prstGeom>
-          <a:noFill/>
-          <a:ln w="0">
-            <a:noFill/>
-            <a:prstDash val="solid"/>
-          </a:ln>
-        </p:spPr>
-        <p:txBody>
-          <a:bodyPr lIns="0" tIns="0" rIns="0" bIns="0" anchor="t">
-            <a:normAutofit/>
-          </a:bodyPr>
-          <a:lstStyle/>
-          <a:p>
-            <a:pPr algn="l">
-              <a:defRPr sz="900" b="0">
-                <a:solidFill>
-                  <a:srgbClr val="59616B"/>
-                </a:solidFill>
-                <a:latin typeface="Helvetica Neue"/>
-                <a:ea typeface="Helvetica Neue"/>
-                <a:cs typeface="Helvetica Neue"/>
-              </a:defRPr>
-            </a:pPr>
-            <a:r>
-              <a:rPr sz="900" b="0">
-                <a:solidFill>
-                  <a:srgbClr val="59616B"/>
-                </a:solidFill>
-                <a:latin typeface="Helvetica Neue"/>
-                <a:ea typeface="Helvetica Neue"/>
-                <a:cs typeface="Helvetica Neue"/>
-              </a:rPr>
-              <a:t>THETA PEN PLOTTER  •  SUMMER PROGRESS UPDATE</a:t>
-            </a:r>
-          </a:p>
-        </p:txBody>
-      </p:sp>
-      <p:sp>
-        <p:nvSpPr>
-          <p:cNvPr id="5" name="Rectangle 4">
-            <a:extLst>
-              <a:ext uri="{FF2B5EF4-FFF2-40B4-BE49-F238E27FC236}">
-                <a16:creationId xmlns:a16="http://schemas.microsoft.com/office/drawing/2014/main" id="{38C47507-02D7-4895-8794-10C0666EFEA1}"/>
-              </a:ext>
-            </a:extLst>
-          </p:cNvPr>
-          <p:cNvSpPr>
-            <a:spLocks noGrp="1"/>
-          </p:cNvSpPr>
-          <p:nvPr/>
-        </p:nvSpPr>
-        <p:spPr>
-          <a:xfrm>
-            <a:off x="11287125" y="6477000"/>
-            <a:ext cx="495300" cy="171450"/>
-          </a:xfrm>
-          <a:prstGeom prst="rect">
-            <a:avLst/>
-          </a:prstGeom>
-          <a:noFill/>
-          <a:ln w="0">
-            <a:noFill/>
-            <a:prstDash val="solid"/>
-          </a:ln>
-        </p:spPr>
-        <p:txBody>
-          <a:bodyPr lIns="0" tIns="0" rIns="0" bIns="0" anchor="t">
-            <a:normAutofit/>
-          </a:bodyPr>
-          <a:lstStyle/>
-          <a:p>
-            <a:pPr algn="r">
-              <a:defRPr sz="900" b="0">
-                <a:solidFill>
-                  <a:srgbClr val="59616B"/>
-                </a:solidFill>
-                <a:latin typeface="Helvetica Neue"/>
-                <a:ea typeface="Helvetica Neue"/>
-                <a:cs typeface="Helvetica Neue"/>
-              </a:defRPr>
-            </a:pPr>
-            <a:r>
-              <a:rPr sz="900" b="0">
-                <a:solidFill>
-                  <a:srgbClr val="59616B"/>
-                </a:solidFill>
-                <a:latin typeface="Helvetica Neue"/>
-                <a:ea typeface="Helvetica Neue"/>
-                <a:cs typeface="Helvetica Neue"/>
-              </a:rPr>
-              <a:t>5</a:t>
-            </a:r>
-          </a:p>
-        </p:txBody>
-      </p:sp>
       <p:pic>
         <p:nvPicPr>
           <p:cNvPr id="16" name="Picture 15"/>
@@ -3604,8 +2995,8 @@
         </p:blipFill>
         <p:spPr>
           <a:xfrm>
-            <a:off x="951442" y="1381125"/>
-            <a:ext cx="6841067" cy="4810125"/>
+            <a:off x="-1" y="-1"/>
+            <a:ext cx="9753600" cy="6858000"/>
           </a:xfrm>
           <a:prstGeom prst="rect">
             <a:avLst/>
@@ -3614,72 +3005,6 @@
       </p:pic>
       <p:sp>
         <p:nvSpPr>
-          <p:cNvPr id="10" name="Rectangle 9">
-            <a:extLst>
-              <a:ext uri="{FF2B5EF4-FFF2-40B4-BE49-F238E27FC236}">
-                <a16:creationId xmlns:a16="http://schemas.microsoft.com/office/drawing/2014/main" id="{96D81758-CD88-4EF5-A7F6-B3CD03B93DBF}"/>
-              </a:ext>
-            </a:extLst>
-          </p:cNvPr>
-          <p:cNvSpPr>
-            <a:spLocks noGrp="1"/>
-          </p:cNvSpPr>
-          <p:nvPr/>
-        </p:nvSpPr>
-        <p:spPr>
-          <a:xfrm>
-            <a:off x="8572500" y="3238500"/>
-            <a:ext cx="2540000" cy="508000"/>
-          </a:xfrm>
-          <a:prstGeom prst="rect">
-            <a:avLst/>
-          </a:prstGeom>
-          <a:noFill/>
-          <a:ln w="0">
-            <a:noFill/>
-            <a:prstDash val="solid"/>
-          </a:ln>
-        </p:spPr>
-        <p:txBody>
-          <a:bodyPr lIns="0" tIns="0" rIns="0" bIns="0" anchor="t">
-            <a:normAutofit/>
-          </a:bodyPr>
-          <a:lstStyle/>
-          <a:p>
-            <a:pPr algn="l">
-              <a:defRPr sz="1050" b="0">
-                <a:solidFill>
-                  <a:srgbClr val="59616B"/>
-                </a:solidFill>
-                <a:latin typeface="Helvetica Neue"/>
-                <a:ea typeface="Helvetica Neue"/>
-                <a:cs typeface="Helvetica Neue"/>
-              </a:defRPr>
-            </a:pPr>
-            <a:r>
-              <a:rPr lang="en-US" sz="1100" b="0">
-                <a:solidFill>
-                  <a:srgbClr val="80726B"/>
-                </a:solidFill>
-                <a:latin typeface="Helvetica Neue"/>
-                <a:ea typeface="Helvetica Neue"/>
-                <a:cs typeface="Helvetica Neue"/>
-              </a:rPr>
-              <a:t>Detail shown inside the map. Hover or click another process to compare.</a:t>
-            </a:r>
-            <a:endParaRPr sz="1100" b="0">
-              <a:solidFill>
-                <a:srgbClr val="80726B"/>
-              </a:solidFill>
-              <a:latin typeface="Helvetica Neue"/>
-              <a:ea typeface="Helvetica Neue"/>
-              <a:cs typeface="Helvetica Neue"/>
-            </a:endParaRPr>
-          </a:p>
-        </p:txBody>
-      </p:sp>
-      <p:sp>
-        <p:nvSpPr>
           <p:cNvPr id="6" name="P100 Step 6 Highlight">
             <a:extLst>
               <a:ext uri="{FF2B5EF4-FFF2-40B4-BE49-F238E27FC236}">
@@ -3692,8 +3017,8 @@
         </p:nvSpPr>
         <p:spPr>
           <a:xfrm>
-            <a:off x="1628775" y="5467350"/>
-            <a:ext cx="3238500" cy="400050"/>
+            <a:off x="964194" y="5825905"/>
+            <a:ext cx="4617267" cy="570368"/>
           </a:xfrm>
           <a:prstGeom prst="rect">
             <a:avLst/>
@@ -3730,18 +3055,18 @@
           <a:lstStyle/>
           <a:p>
             <a:pPr algn="ctr"/>
-            <a:endParaRPr lang="en-US"/>
-          </a:p>
-        </p:txBody>
-      </p:sp>
-      <p:sp>
-        <p:nvSpPr>
-          <p:cNvPr id="12" name="P100 Back Button">
+            <a:endParaRPr lang="en-US" sz="2566"/>
+          </a:p>
+        </p:txBody>
+      </p:sp>
+      <p:sp>
+        <p:nvSpPr>
+          <p:cNvPr id="13" name="P100 Step 1 Hit Area">
             <a:hlinkClick r:id="rId4" action="ppaction://hlinksldjump"/>
             <a:hlinkHover r:id="rId4" action="ppaction://hlinksldjump"/>
             <a:extLst>
               <a:ext uri="{FF2B5EF4-FFF2-40B4-BE49-F238E27FC236}">
-                <a16:creationId xmlns:a16="http://schemas.microsoft.com/office/drawing/2014/main" id="{BB60EF3B-7F5B-A140-57ED-BEEF0AC42C09}"/>
+                <a16:creationId xmlns:a16="http://schemas.microsoft.com/office/drawing/2014/main" id="{224FCB21-0124-F8FC-9344-93F9F0588C5E}"/>
               </a:ext>
             </a:extLst>
           </p:cNvPr>
@@ -3750,20 +3075,34 @@
         </p:nvSpPr>
         <p:spPr>
           <a:xfrm>
-            <a:off x="9429750" y="5905500"/>
-            <a:ext cx="2000250" cy="285750"/>
-          </a:xfrm>
-          <a:prstGeom prst="roundRect">
+            <a:off x="964194" y="1616044"/>
+            <a:ext cx="4617267" cy="570368"/>
+          </a:xfrm>
+          <a:prstGeom prst="rect">
             <a:avLst/>
           </a:prstGeom>
           <a:solidFill>
-            <a:srgbClr val="FFF9F3"/>
+            <a:schemeClr val="accent1">
+              <a:alpha val="0"/>
+            </a:schemeClr>
           </a:solidFill>
-          <a:ln w="12700">
-            <a:solidFill>
-              <a:srgbClr val="FF8833"/>
-            </a:solidFill>
-          </a:ln>
+          <a:ln w="19050">
+            <a:noFill/>
+            <a:prstDash val="solid"/>
+          </a:ln>
+          <a:effectLst/>
+          <a:extLst>
+            <a:ext uri="{91240B29-F687-4F45-9708-019B960494DF}">
+              <a14:hiddenLine xmlns:a14="http://schemas.microsoft.com/office/drawing/2010/main" w="19050">
+                <a:solidFill>
+                  <a:schemeClr val="accent1">
+                    <a:shade val="15000"/>
+                  </a:schemeClr>
+                </a:solidFill>
+                <a:prstDash val="solid"/>
+              </a14:hiddenLine>
+            </a:ext>
+          </a:extLst>
         </p:spPr>
         <p:style>
           <a:lnRef idx="2">
@@ -3786,25 +3125,18 @@
           <a:lstStyle/>
           <a:p>
             <a:pPr algn="ctr"/>
-            <a:r>
-              <a:rPr lang="en-US" sz="1200" b="1">
-                <a:solidFill>
-                  <a:srgbClr val="FF8833"/>
-                </a:solidFill>
-              </a:rPr>
-              <a:t>BACK TO OVERVIEW</a:t>
-            </a:r>
-          </a:p>
-        </p:txBody>
-      </p:sp>
-      <p:sp>
-        <p:nvSpPr>
-          <p:cNvPr id="13" name="P100 Step 1 Hit Area">
+            <a:endParaRPr lang="en-US" sz="2566"/>
+          </a:p>
+        </p:txBody>
+      </p:sp>
+      <p:sp>
+        <p:nvSpPr>
+          <p:cNvPr id="14" name="P100 Step 2 Hit Area">
             <a:hlinkClick r:id="rId5" action="ppaction://hlinksldjump"/>
             <a:hlinkHover r:id="rId5" action="ppaction://hlinksldjump"/>
             <a:extLst>
               <a:ext uri="{FF2B5EF4-FFF2-40B4-BE49-F238E27FC236}">
-                <a16:creationId xmlns:a16="http://schemas.microsoft.com/office/drawing/2014/main" id="{224FCB21-0124-F8FC-9344-93F9F0588C5E}"/>
+                <a16:creationId xmlns:a16="http://schemas.microsoft.com/office/drawing/2014/main" id="{45F1FD27-CDC5-22DA-9824-F1CE42A9046F}"/>
               </a:ext>
             </a:extLst>
           </p:cNvPr>
@@ -3813,8 +3145,8 @@
         </p:nvSpPr>
         <p:spPr>
           <a:xfrm>
-            <a:off x="1628775" y="2514600"/>
-            <a:ext cx="3238500" cy="400050"/>
+            <a:off x="964194" y="2458016"/>
+            <a:ext cx="4617267" cy="570368"/>
           </a:xfrm>
           <a:prstGeom prst="rect">
             <a:avLst/>
@@ -3863,18 +3195,18 @@
           <a:lstStyle/>
           <a:p>
             <a:pPr algn="ctr"/>
-            <a:endParaRPr lang="en-US"/>
-          </a:p>
-        </p:txBody>
-      </p:sp>
-      <p:sp>
-        <p:nvSpPr>
-          <p:cNvPr id="14" name="P100 Step 2 Hit Area">
+            <a:endParaRPr lang="en-US" sz="2566"/>
+          </a:p>
+        </p:txBody>
+      </p:sp>
+      <p:sp>
+        <p:nvSpPr>
+          <p:cNvPr id="15" name="P100 Step 3 Hit Area">
             <a:hlinkClick r:id="rId6" action="ppaction://hlinksldjump"/>
             <a:hlinkHover r:id="rId6" action="ppaction://hlinksldjump"/>
             <a:extLst>
               <a:ext uri="{FF2B5EF4-FFF2-40B4-BE49-F238E27FC236}">
-                <a16:creationId xmlns:a16="http://schemas.microsoft.com/office/drawing/2014/main" id="{45F1FD27-CDC5-22DA-9824-F1CE42A9046F}"/>
+                <a16:creationId xmlns:a16="http://schemas.microsoft.com/office/drawing/2014/main" id="{0ED9ADA3-0220-89D3-F7E2-49C7E37AAC6C}"/>
               </a:ext>
             </a:extLst>
           </p:cNvPr>
@@ -3883,8 +3215,8 @@
         </p:nvSpPr>
         <p:spPr>
           <a:xfrm>
-            <a:off x="1628775" y="3105150"/>
-            <a:ext cx="3238500" cy="400050"/>
+            <a:off x="964194" y="3299988"/>
+            <a:ext cx="4617267" cy="570368"/>
           </a:xfrm>
           <a:prstGeom prst="rect">
             <a:avLst/>
@@ -3933,18 +3265,18 @@
           <a:lstStyle/>
           <a:p>
             <a:pPr algn="ctr"/>
-            <a:endParaRPr lang="en-US"/>
-          </a:p>
-        </p:txBody>
-      </p:sp>
-      <p:sp>
-        <p:nvSpPr>
-          <p:cNvPr id="15" name="P100 Step 3 Hit Area">
+            <a:endParaRPr lang="en-US" sz="2566"/>
+          </a:p>
+        </p:txBody>
+      </p:sp>
+      <p:sp>
+        <p:nvSpPr>
+          <p:cNvPr id="17" name="P100 Step 4 Hit Area">
             <a:hlinkClick r:id="rId7" action="ppaction://hlinksldjump"/>
             <a:hlinkHover r:id="rId7" action="ppaction://hlinksldjump"/>
             <a:extLst>
               <a:ext uri="{FF2B5EF4-FFF2-40B4-BE49-F238E27FC236}">
-                <a16:creationId xmlns:a16="http://schemas.microsoft.com/office/drawing/2014/main" id="{0ED9ADA3-0220-89D3-F7E2-49C7E37AAC6C}"/>
+                <a16:creationId xmlns:a16="http://schemas.microsoft.com/office/drawing/2014/main" id="{D574CED1-A598-453D-7F70-1E9A5024B0A9}"/>
               </a:ext>
             </a:extLst>
           </p:cNvPr>
@@ -3953,8 +3285,8 @@
         </p:nvSpPr>
         <p:spPr>
           <a:xfrm>
-            <a:off x="1628775" y="3695700"/>
-            <a:ext cx="3238500" cy="400050"/>
+            <a:off x="964194" y="4141960"/>
+            <a:ext cx="4617267" cy="570368"/>
           </a:xfrm>
           <a:prstGeom prst="rect">
             <a:avLst/>
@@ -4003,18 +3335,18 @@
           <a:lstStyle/>
           <a:p>
             <a:pPr algn="ctr"/>
-            <a:endParaRPr lang="en-US"/>
-          </a:p>
-        </p:txBody>
-      </p:sp>
-      <p:sp>
-        <p:nvSpPr>
-          <p:cNvPr id="17" name="P100 Step 4 Hit Area">
+            <a:endParaRPr lang="en-US" sz="2566"/>
+          </a:p>
+        </p:txBody>
+      </p:sp>
+      <p:sp>
+        <p:nvSpPr>
+          <p:cNvPr id="18" name="P100 Step 5 Hit Area">
             <a:hlinkClick r:id="rId8" action="ppaction://hlinksldjump"/>
             <a:hlinkHover r:id="rId8" action="ppaction://hlinksldjump"/>
             <a:extLst>
               <a:ext uri="{FF2B5EF4-FFF2-40B4-BE49-F238E27FC236}">
-                <a16:creationId xmlns:a16="http://schemas.microsoft.com/office/drawing/2014/main" id="{D574CED1-A598-453D-7F70-1E9A5024B0A9}"/>
+                <a16:creationId xmlns:a16="http://schemas.microsoft.com/office/drawing/2014/main" id="{FE677328-B0F2-83E1-2AE2-ABA52B94DD58}"/>
               </a:ext>
             </a:extLst>
           </p:cNvPr>
@@ -4023,8 +3355,8 @@
         </p:nvSpPr>
         <p:spPr>
           <a:xfrm>
-            <a:off x="1628775" y="4286250"/>
-            <a:ext cx="3238500" cy="400050"/>
+            <a:off x="964194" y="4983933"/>
+            <a:ext cx="4617267" cy="570368"/>
           </a:xfrm>
           <a:prstGeom prst="rect">
             <a:avLst/>
@@ -4073,18 +3405,18 @@
           <a:lstStyle/>
           <a:p>
             <a:pPr algn="ctr"/>
-            <a:endParaRPr lang="en-US"/>
-          </a:p>
-        </p:txBody>
-      </p:sp>
-      <p:sp>
-        <p:nvSpPr>
-          <p:cNvPr id="18" name="P100 Step 5 Hit Area">
+            <a:endParaRPr lang="en-US" sz="2566"/>
+          </a:p>
+        </p:txBody>
+      </p:sp>
+      <p:sp>
+        <p:nvSpPr>
+          <p:cNvPr id="19" name="P100 Step 6 Hit Area">
             <a:hlinkClick r:id="rId9" action="ppaction://hlinksldjump"/>
             <a:hlinkHover r:id="rId9" action="ppaction://hlinksldjump"/>
             <a:extLst>
               <a:ext uri="{FF2B5EF4-FFF2-40B4-BE49-F238E27FC236}">
-                <a16:creationId xmlns:a16="http://schemas.microsoft.com/office/drawing/2014/main" id="{FE677328-B0F2-83E1-2AE2-ABA52B94DD58}"/>
+                <a16:creationId xmlns:a16="http://schemas.microsoft.com/office/drawing/2014/main" id="{4C4DA52B-092C-FEF2-6030-2E6DA7F83E7A}"/>
               </a:ext>
             </a:extLst>
           </p:cNvPr>
@@ -4093,8 +3425,8 @@
         </p:nvSpPr>
         <p:spPr>
           <a:xfrm>
-            <a:off x="1628775" y="4876800"/>
-            <a:ext cx="3238500" cy="400050"/>
+            <a:off x="964194" y="5825905"/>
+            <a:ext cx="4617267" cy="570368"/>
           </a:xfrm>
           <a:prstGeom prst="rect">
             <a:avLst/>
@@ -4143,18 +3475,16 @@
           <a:lstStyle/>
           <a:p>
             <a:pPr algn="ctr"/>
-            <a:endParaRPr lang="en-US"/>
-          </a:p>
-        </p:txBody>
-      </p:sp>
-      <p:sp>
-        <p:nvSpPr>
-          <p:cNvPr id="19" name="P100 Step 6 Hit Area">
-            <a:hlinkClick r:id="rId10" action="ppaction://hlinksldjump"/>
-            <a:hlinkHover r:id="rId10" action="ppaction://hlinksldjump"/>
-            <a:extLst>
-              <a:ext uri="{FF2B5EF4-FFF2-40B4-BE49-F238E27FC236}">
-                <a16:creationId xmlns:a16="http://schemas.microsoft.com/office/drawing/2014/main" id="{4C4DA52B-092C-FEF2-6030-2E6DA7F83E7A}"/>
+            <a:endParaRPr lang="en-US" sz="2566"/>
+          </a:p>
+        </p:txBody>
+      </p:sp>
+      <p:sp>
+        <p:nvSpPr>
+          <p:cNvPr id="20" name="Matching P100 Map Detail Background">
+            <a:extLst>
+              <a:ext uri="{FF2B5EF4-FFF2-40B4-BE49-F238E27FC236}">
+                <a16:creationId xmlns:a16="http://schemas.microsoft.com/office/drawing/2014/main" id="{96A6C59A-8EFD-8E9A-98CA-807B25989EF4}"/>
               </a:ext>
             </a:extLst>
           </p:cNvPr>
@@ -4163,34 +3493,20 @@
         </p:nvSpPr>
         <p:spPr>
           <a:xfrm>
-            <a:off x="1628775" y="5467350"/>
-            <a:ext cx="3238500" cy="400050"/>
+            <a:off x="5703683" y="1670364"/>
+            <a:ext cx="3078178" cy="2245259"/>
           </a:xfrm>
           <a:prstGeom prst="rect">
             <a:avLst/>
           </a:prstGeom>
           <a:solidFill>
-            <a:schemeClr val="accent1">
-              <a:alpha val="0"/>
-            </a:schemeClr>
+            <a:srgbClr val="2B251F"/>
           </a:solidFill>
-          <a:ln w="19050">
-            <a:noFill/>
-            <a:prstDash val="solid"/>
-          </a:ln>
-          <a:effectLst/>
-          <a:extLst>
-            <a:ext uri="{91240B29-F687-4F45-9708-019B960494DF}">
-              <a14:hiddenLine xmlns:a14="http://schemas.microsoft.com/office/drawing/2010/main" w="19050">
-                <a:solidFill>
-                  <a:schemeClr val="accent1">
-                    <a:shade val="15000"/>
-                  </a:schemeClr>
-                </a:solidFill>
-                <a:prstDash val="solid"/>
-              </a14:hiddenLine>
-            </a:ext>
-          </a:extLst>
+          <a:ln w="8890">
+            <a:solidFill>
+              <a:srgbClr val="6E6052"/>
+            </a:solidFill>
+          </a:ln>
         </p:spPr>
         <p:style>
           <a:lnRef idx="2">
@@ -4213,16 +3529,102 @@
           <a:lstStyle/>
           <a:p>
             <a:pPr algn="ctr"/>
-            <a:endParaRPr lang="en-US"/>
-          </a:p>
-        </p:txBody>
-      </p:sp>
-      <p:sp>
-        <p:nvSpPr>
-          <p:cNvPr id="20" name="Matching P100 Map Detail Background">
-            <a:extLst>
-              <a:ext uri="{FF2B5EF4-FFF2-40B4-BE49-F238E27FC236}">
-                <a16:creationId xmlns:a16="http://schemas.microsoft.com/office/drawing/2014/main" id="{96A6C59A-8EFD-8E9A-98CA-807B25989EF4}"/>
+            <a:endParaRPr lang="en-US" sz="2566"/>
+          </a:p>
+        </p:txBody>
+      </p:sp>
+      <p:sp>
+        <p:nvSpPr>
+          <p:cNvPr id="21" name="Matching P100 Map Detail Title">
+            <a:extLst>
+              <a:ext uri="{FF2B5EF4-FFF2-40B4-BE49-F238E27FC236}">
+                <a16:creationId xmlns:a16="http://schemas.microsoft.com/office/drawing/2014/main" id="{79B1B7FA-F6B4-12FF-24AF-F35EF601677B}"/>
+              </a:ext>
+            </a:extLst>
+          </p:cNvPr>
+          <p:cNvSpPr txBox="1"/>
+          <p:nvPr/>
+        </p:nvSpPr>
+        <p:spPr>
+          <a:xfrm>
+            <a:off x="5866645" y="1833327"/>
+            <a:ext cx="2752254" cy="164554"/>
+          </a:xfrm>
+          <a:prstGeom prst="rect">
+            <a:avLst/>
+          </a:prstGeom>
+          <a:noFill/>
+        </p:spPr>
+        <p:txBody>
+          <a:bodyPr vert="horz" lIns="0" tIns="0" rIns="0" bIns="0" rtlCol="0">
+            <a:spAutoFit/>
+          </a:bodyPr>
+          <a:lstStyle/>
+          <a:p>
+            <a:r>
+              <a:rPr lang="en-US" sz="1069" b="1">
+                <a:solidFill>
+                  <a:srgbClr val="FFCC66"/>
+                </a:solidFill>
+                <a:latin typeface="Aptos" panose="020B0004020202020204" pitchFamily="34" charset="0"/>
+              </a:rPr>
+              <a:t>6. Ready state</a:t>
+            </a:r>
+          </a:p>
+        </p:txBody>
+      </p:sp>
+      <p:sp>
+        <p:nvSpPr>
+          <p:cNvPr id="22" name="Matching P100 Map Detail Body">
+            <a:extLst>
+              <a:ext uri="{FF2B5EF4-FFF2-40B4-BE49-F238E27FC236}">
+                <a16:creationId xmlns:a16="http://schemas.microsoft.com/office/drawing/2014/main" id="{FC948654-D1C0-901A-42AD-B9C9346D71C8}"/>
+              </a:ext>
+            </a:extLst>
+          </p:cNvPr>
+          <p:cNvSpPr txBox="1"/>
+          <p:nvPr/>
+        </p:nvSpPr>
+        <p:spPr>
+          <a:xfrm>
+            <a:off x="5866645" y="2123038"/>
+            <a:ext cx="2752254" cy="982935"/>
+          </a:xfrm>
+          <a:prstGeom prst="rect">
+            <a:avLst/>
+          </a:prstGeom>
+          <a:noFill/>
+        </p:spPr>
+        <p:txBody>
+          <a:bodyPr vert="horz" lIns="0" tIns="0" rIns="0" bIns="0" rtlCol="0">
+            <a:spAutoFit/>
+          </a:bodyPr>
+          <a:lstStyle/>
+          <a:p>
+            <a:r>
+              <a:rPr lang="en-US" sz="912">
+                <a:solidFill>
+                  <a:srgbClr val="F7F4F0"/>
+                </a:solidFill>
+                <a:latin typeface="Aptos" panose="020B0004020202020204" pitchFamily="34" charset="0"/>
+              </a:rPr>
+              <a:t>Ready
+G54 registered; pen clear of paper.
+Drawing
+M3 writes. M5 releases and travels.
+GP2 is not used for each lift.</a:t>
+            </a:r>
+          </a:p>
+        </p:txBody>
+      </p:sp>
+      <p:sp>
+        <p:nvSpPr>
+          <p:cNvPr id="7" name="P100 Back Button">
+            <a:hlinkClick r:id="rId10" action="ppaction://hlinksldjump"/>
+            <a:hlinkHover r:id="rId10" action="ppaction://hlinksldjump"/>
+            <a:extLst>
+              <a:ext uri="{FF2B5EF4-FFF2-40B4-BE49-F238E27FC236}">
+                <a16:creationId xmlns:a16="http://schemas.microsoft.com/office/drawing/2014/main" id="{43817E0E-2D88-6DF8-F1C7-93B18E4DC589}"/>
               </a:ext>
             </a:extLst>
           </p:cNvPr>
@@ -4231,18 +3633,18 @@
         </p:nvSpPr>
         <p:spPr>
           <a:xfrm>
-            <a:off x="4953000" y="2552700"/>
-            <a:ext cx="2159000" cy="1574800"/>
-          </a:xfrm>
-          <a:prstGeom prst="rect">
+            <a:off x="10058400" y="6172200"/>
+            <a:ext cx="1714500" cy="304800"/>
+          </a:xfrm>
+          <a:prstGeom prst="roundRect">
             <a:avLst/>
           </a:prstGeom>
           <a:solidFill>
-            <a:srgbClr val="2B251F"/>
+            <a:srgbClr val="F4F4F4"/>
           </a:solidFill>
-          <a:ln w="8890">
+          <a:ln w="12700">
             <a:solidFill>
-              <a:srgbClr val="6E6052"/>
+              <a:srgbClr val="FFA533"/>
             </a:solidFill>
           </a:ln>
         </p:spPr>
@@ -4267,90 +3669,14 @@
           <a:lstStyle/>
           <a:p>
             <a:pPr algn="ctr"/>
-            <a:endParaRPr lang="en-US"/>
-          </a:p>
-        </p:txBody>
-      </p:sp>
-      <p:sp>
-        <p:nvSpPr>
-          <p:cNvPr id="21" name="Matching P100 Map Detail Title">
-            <a:extLst>
-              <a:ext uri="{FF2B5EF4-FFF2-40B4-BE49-F238E27FC236}">
-                <a16:creationId xmlns:a16="http://schemas.microsoft.com/office/drawing/2014/main" id="{79B1B7FA-F6B4-12FF-24AF-F35EF601677B}"/>
-              </a:ext>
-            </a:extLst>
-          </p:cNvPr>
-          <p:cNvSpPr txBox="1"/>
-          <p:nvPr/>
-        </p:nvSpPr>
-        <p:spPr>
-          <a:xfrm>
-            <a:off x="5067300" y="2667000"/>
-            <a:ext cx="1930400" cy="115416"/>
-          </a:xfrm>
-          <a:prstGeom prst="rect">
-            <a:avLst/>
-          </a:prstGeom>
-          <a:noFill/>
-        </p:spPr>
-        <p:txBody>
-          <a:bodyPr vert="horz" lIns="0" tIns="0" rIns="0" bIns="0" rtlCol="0">
-            <a:spAutoFit/>
-          </a:bodyPr>
-          <a:lstStyle/>
-          <a:p>
-            <a:r>
-              <a:rPr lang="en-US" sz="750" b="1">
-                <a:solidFill>
-                  <a:srgbClr val="FFCC66"/>
+            <a:r>
+              <a:rPr lang="en-US" sz="1000" b="1">
+                <a:solidFill>
+                  <a:srgbClr val="FFA533"/>
                 </a:solidFill>
                 <a:latin typeface="Aptos" panose="020B0004020202020204" pitchFamily="34" charset="0"/>
               </a:rPr>
-              <a:t>6. Ready state</a:t>
-            </a:r>
-          </a:p>
-        </p:txBody>
-      </p:sp>
-      <p:sp>
-        <p:nvSpPr>
-          <p:cNvPr id="22" name="Matching P100 Map Detail Body">
-            <a:extLst>
-              <a:ext uri="{FF2B5EF4-FFF2-40B4-BE49-F238E27FC236}">
-                <a16:creationId xmlns:a16="http://schemas.microsoft.com/office/drawing/2014/main" id="{FC948654-D1C0-901A-42AD-B9C9346D71C8}"/>
-              </a:ext>
-            </a:extLst>
-          </p:cNvPr>
-          <p:cNvSpPr txBox="1"/>
-          <p:nvPr/>
-        </p:nvSpPr>
-        <p:spPr>
-          <a:xfrm>
-            <a:off x="5067300" y="2870200"/>
-            <a:ext cx="1930400" cy="689420"/>
-          </a:xfrm>
-          <a:prstGeom prst="rect">
-            <a:avLst/>
-          </a:prstGeom>
-          <a:noFill/>
-        </p:spPr>
-        <p:txBody>
-          <a:bodyPr vert="horz" lIns="0" tIns="0" rIns="0" bIns="0" rtlCol="0">
-            <a:spAutoFit/>
-          </a:bodyPr>
-          <a:lstStyle/>
-          <a:p>
-            <a:r>
-              <a:rPr lang="en-US" sz="640">
-                <a:solidFill>
-                  <a:srgbClr val="F7F4F0"/>
-                </a:solidFill>
-                <a:latin typeface="Aptos" panose="020B0004020202020204" pitchFamily="34" charset="0"/>
-              </a:rPr>
-              <a:t>Ready
-G54 registered; pen clear of paper.
-Drawing
-M3 writes. M5 releases and travels.
-GP2 is not used for each lift.</a:t>
+              <a:t>BACK</a:t>
             </a:r>
           </a:p>
         </p:txBody>
@@ -11174,7 +10500,7 @@
     <p:bg>
       <p:bgPr>
         <a:solidFill>
-          <a:srgbClr val="FFFFFF"/>
+          <a:srgbClr val="141A20"/>
         </a:solidFill>
         <a:effectLst/>
       </p:bgPr>
@@ -11193,278 +10519,6 @@
           <a:chExt cx="0" cy="0"/>
         </a:xfrm>
       </p:grpSpPr>
-      <p:sp>
-        <p:nvSpPr>
-          <p:cNvPr id="11" name="Rectangle 10">
-            <a:extLst>
-              <a:ext uri="{FF2B5EF4-FFF2-40B4-BE49-F238E27FC236}">
-                <a16:creationId xmlns:a16="http://schemas.microsoft.com/office/drawing/2014/main" id="{6E709A68-3D0F-4C65-A32B-A1E7C3547699}"/>
-              </a:ext>
-            </a:extLst>
-          </p:cNvPr>
-          <p:cNvSpPr>
-            <a:spLocks noGrp="1"/>
-          </p:cNvSpPr>
-          <p:nvPr/>
-        </p:nvSpPr>
-        <p:spPr>
-          <a:xfrm>
-            <a:off x="400050" y="342900"/>
-            <a:ext cx="5334000" cy="228600"/>
-          </a:xfrm>
-          <a:prstGeom prst="rect">
-            <a:avLst/>
-          </a:prstGeom>
-          <a:noFill/>
-          <a:ln w="0">
-            <a:noFill/>
-            <a:prstDash val="solid"/>
-          </a:ln>
-        </p:spPr>
-        <p:txBody>
-          <a:bodyPr lIns="0" tIns="0" rIns="0" bIns="0" anchor="t">
-            <a:normAutofit/>
-          </a:bodyPr>
-          <a:lstStyle/>
-          <a:p>
-            <a:pPr algn="l">
-              <a:defRPr sz="1050" b="1">
-                <a:solidFill>
-                  <a:srgbClr val="3D8DFF"/>
-                </a:solidFill>
-                <a:latin typeface="Helvetica Neue"/>
-                <a:ea typeface="Helvetica Neue"/>
-                <a:cs typeface="Helvetica Neue"/>
-              </a:defRPr>
-            </a:pPr>
-            <a:r>
-              <a:rPr sz="1050" b="1">
-                <a:solidFill>
-                  <a:srgbClr val="3D8DFF"/>
-                </a:solidFill>
-                <a:latin typeface="Helvetica Neue"/>
-                <a:ea typeface="Helvetica Neue"/>
-                <a:cs typeface="Helvetica Neue"/>
-              </a:rPr>
-              <a:t>P100 PROCESS MAP</a:t>
-            </a:r>
-          </a:p>
-        </p:txBody>
-      </p:sp>
-      <p:sp>
-        <p:nvSpPr>
-          <p:cNvPr id="2" name="Rectangle 1">
-            <a:extLst>
-              <a:ext uri="{FF2B5EF4-FFF2-40B4-BE49-F238E27FC236}">
-                <a16:creationId xmlns:a16="http://schemas.microsoft.com/office/drawing/2014/main" id="{E2B39075-10DC-4D61-AB16-D8458CE12055}"/>
-              </a:ext>
-            </a:extLst>
-          </p:cNvPr>
-          <p:cNvSpPr>
-            <a:spLocks noGrp="1"/>
-          </p:cNvSpPr>
-          <p:nvPr/>
-        </p:nvSpPr>
-        <p:spPr>
-          <a:xfrm>
-            <a:off x="400050" y="685800"/>
-            <a:ext cx="10668000" cy="590550"/>
-          </a:xfrm>
-          <a:prstGeom prst="rect">
-            <a:avLst/>
-          </a:prstGeom>
-          <a:noFill/>
-          <a:ln w="0">
-            <a:noFill/>
-            <a:prstDash val="solid"/>
-          </a:ln>
-        </p:spPr>
-        <p:txBody>
-          <a:bodyPr lIns="0" tIns="0" rIns="0" bIns="0" anchor="t">
-            <a:normAutofit/>
-          </a:bodyPr>
-          <a:lstStyle/>
-          <a:p>
-            <a:pPr algn="l">
-              <a:defRPr sz="2700" b="1">
-                <a:solidFill>
-                  <a:srgbClr val="000000"/>
-                </a:solidFill>
-                <a:latin typeface="Helvetica Neue"/>
-                <a:ea typeface="Helvetica Neue"/>
-                <a:cs typeface="Helvetica Neue"/>
-              </a:defRPr>
-            </a:pPr>
-            <a:r>
-              <a:rPr sz="2700" b="1">
-                <a:solidFill>
-                  <a:srgbClr val="000000"/>
-                </a:solidFill>
-                <a:latin typeface="Helvetica Neue"/>
-                <a:ea typeface="Helvetica Neue"/>
-                <a:cs typeface="Helvetica Neue"/>
-              </a:rPr>
-              <a:t>P100 is the repeatable startup routine before a drawing begins</a:t>
-            </a:r>
-          </a:p>
-        </p:txBody>
-      </p:sp>
-      <p:sp>
-        <p:nvSpPr>
-          <p:cNvPr id="3" name="Rectangle 2">
-            <a:extLst>
-              <a:ext uri="{FF2B5EF4-FFF2-40B4-BE49-F238E27FC236}">
-                <a16:creationId xmlns:a16="http://schemas.microsoft.com/office/drawing/2014/main" id="{4ACC2074-F48C-4553-A601-F6B254548577}"/>
-              </a:ext>
-            </a:extLst>
-          </p:cNvPr>
-          <p:cNvSpPr>
-            <a:spLocks noGrp="1"/>
-          </p:cNvSpPr>
-          <p:nvPr/>
-        </p:nvSpPr>
-        <p:spPr>
-          <a:xfrm>
-            <a:off x="400050" y="6343650"/>
-            <a:ext cx="11391900" cy="9525"/>
-          </a:xfrm>
-          <a:prstGeom prst="rect">
-            <a:avLst/>
-          </a:prstGeom>
-          <a:solidFill>
-            <a:srgbClr val="B8BCC4"/>
-          </a:solidFill>
-          <a:ln w="0">
-            <a:solidFill>
-              <a:srgbClr val="B8BCC4"/>
-            </a:solidFill>
-            <a:prstDash val="solid"/>
-          </a:ln>
-        </p:spPr>
-        <p:txBody>
-          <a:bodyPr/>
-          <a:lstStyle/>
-          <a:p>
-            <a:endParaRPr lang="en-US"/>
-          </a:p>
-        </p:txBody>
-      </p:sp>
-      <p:sp>
-        <p:nvSpPr>
-          <p:cNvPr id="4" name="Rectangle 3">
-            <a:extLst>
-              <a:ext uri="{FF2B5EF4-FFF2-40B4-BE49-F238E27FC236}">
-                <a16:creationId xmlns:a16="http://schemas.microsoft.com/office/drawing/2014/main" id="{6A21AB0F-01B7-4655-B05E-1D59444D1E2F}"/>
-              </a:ext>
-            </a:extLst>
-          </p:cNvPr>
-          <p:cNvSpPr>
-            <a:spLocks noGrp="1"/>
-          </p:cNvSpPr>
-          <p:nvPr/>
-        </p:nvSpPr>
-        <p:spPr>
-          <a:xfrm>
-            <a:off x="400050" y="6477000"/>
-            <a:ext cx="6191250" cy="171450"/>
-          </a:xfrm>
-          <a:prstGeom prst="rect">
-            <a:avLst/>
-          </a:prstGeom>
-          <a:noFill/>
-          <a:ln w="0">
-            <a:noFill/>
-            <a:prstDash val="solid"/>
-          </a:ln>
-        </p:spPr>
-        <p:txBody>
-          <a:bodyPr lIns="0" tIns="0" rIns="0" bIns="0" anchor="t">
-            <a:normAutofit/>
-          </a:bodyPr>
-          <a:lstStyle/>
-          <a:p>
-            <a:pPr algn="l">
-              <a:defRPr sz="900" b="0">
-                <a:solidFill>
-                  <a:srgbClr val="59616B"/>
-                </a:solidFill>
-                <a:latin typeface="Helvetica Neue"/>
-                <a:ea typeface="Helvetica Neue"/>
-                <a:cs typeface="Helvetica Neue"/>
-              </a:defRPr>
-            </a:pPr>
-            <a:r>
-              <a:rPr sz="900" b="0">
-                <a:solidFill>
-                  <a:srgbClr val="59616B"/>
-                </a:solidFill>
-                <a:latin typeface="Helvetica Neue"/>
-                <a:ea typeface="Helvetica Neue"/>
-                <a:cs typeface="Helvetica Neue"/>
-              </a:rPr>
-              <a:t>THETA PEN PLOTTER  •  SUMMER PROGRESS UPDATE</a:t>
-            </a:r>
-          </a:p>
-        </p:txBody>
-      </p:sp>
-      <p:sp>
-        <p:nvSpPr>
-          <p:cNvPr id="5" name="Rectangle 4">
-            <a:extLst>
-              <a:ext uri="{FF2B5EF4-FFF2-40B4-BE49-F238E27FC236}">
-                <a16:creationId xmlns:a16="http://schemas.microsoft.com/office/drawing/2014/main" id="{38C47507-02D7-4895-8794-10C0666EFEA1}"/>
-              </a:ext>
-            </a:extLst>
-          </p:cNvPr>
-          <p:cNvSpPr>
-            <a:spLocks noGrp="1"/>
-          </p:cNvSpPr>
-          <p:nvPr/>
-        </p:nvSpPr>
-        <p:spPr>
-          <a:xfrm>
-            <a:off x="11287125" y="6477000"/>
-            <a:ext cx="495300" cy="171450"/>
-          </a:xfrm>
-          <a:prstGeom prst="rect">
-            <a:avLst/>
-          </a:prstGeom>
-          <a:noFill/>
-          <a:ln w="0">
-            <a:noFill/>
-            <a:prstDash val="solid"/>
-          </a:ln>
-        </p:spPr>
-        <p:txBody>
-          <a:bodyPr lIns="0" tIns="0" rIns="0" bIns="0" anchor="t">
-            <a:normAutofit/>
-          </a:bodyPr>
-          <a:lstStyle/>
-          <a:p>
-            <a:pPr algn="r">
-              <a:defRPr sz="900" b="0">
-                <a:solidFill>
-                  <a:srgbClr val="59616B"/>
-                </a:solidFill>
-                <a:latin typeface="Helvetica Neue"/>
-                <a:ea typeface="Helvetica Neue"/>
-                <a:cs typeface="Helvetica Neue"/>
-              </a:defRPr>
-            </a:pPr>
-            <a:r>
-              <a:rPr sz="900" b="0">
-                <a:solidFill>
-                  <a:srgbClr val="59616B"/>
-                </a:solidFill>
-                <a:latin typeface="Helvetica Neue"/>
-                <a:ea typeface="Helvetica Neue"/>
-                <a:cs typeface="Helvetica Neue"/>
-              </a:rPr>
-              <a:t>5</a:t>
-            </a:r>
-          </a:p>
-        </p:txBody>
-      </p:sp>
       <p:pic>
         <p:nvPicPr>
           <p:cNvPr id="16" name="Picture 15"/>
@@ -11479,337 +10533,14 @@
         </p:blipFill>
         <p:spPr>
           <a:xfrm>
-            <a:off x="951442" y="1381125"/>
-            <a:ext cx="6841067" cy="4810125"/>
+            <a:off x="-1" y="-1"/>
+            <a:ext cx="9753600" cy="6858000"/>
           </a:xfrm>
           <a:prstGeom prst="rect">
             <a:avLst/>
           </a:prstGeom>
         </p:spPr>
       </p:pic>
-      <p:sp>
-        <p:nvSpPr>
-          <p:cNvPr id="7" name="Rectangle: Rounded Corners 6">
-            <a:extLst>
-              <a:ext uri="{FF2B5EF4-FFF2-40B4-BE49-F238E27FC236}">
-                <a16:creationId xmlns:a16="http://schemas.microsoft.com/office/drawing/2014/main" id="{288213A0-7735-4712-A466-0BAF35E8CDFE}"/>
-              </a:ext>
-            </a:extLst>
-          </p:cNvPr>
-          <p:cNvSpPr>
-            <a:spLocks noGrp="1"/>
-          </p:cNvSpPr>
-          <p:nvPr/>
-        </p:nvSpPr>
-        <p:spPr>
-          <a:xfrm>
-            <a:off x="8572500" y="1847850"/>
-            <a:ext cx="2857500" cy="3371850"/>
-          </a:xfrm>
-          <a:prstGeom prst="roundRect">
-            <a:avLst>
-              <a:gd name="adj" fmla="val 2667"/>
-            </a:avLst>
-          </a:prstGeom>
-          <a:solidFill>
-            <a:srgbClr val="EAF5FB"/>
-          </a:solidFill>
-          <a:ln w="9525">
-            <a:solidFill>
-              <a:srgbClr val="3D8DFF"/>
-            </a:solidFill>
-            <a:prstDash val="solid"/>
-          </a:ln>
-        </p:spPr>
-        <p:txBody>
-          <a:bodyPr/>
-          <a:lstStyle/>
-          <a:p>
-            <a:endParaRPr lang="en-US"/>
-          </a:p>
-        </p:txBody>
-      </p:sp>
-      <p:sp>
-        <p:nvSpPr>
-          <p:cNvPr id="8" name="Rectangle 7">
-            <a:extLst>
-              <a:ext uri="{FF2B5EF4-FFF2-40B4-BE49-F238E27FC236}">
-                <a16:creationId xmlns:a16="http://schemas.microsoft.com/office/drawing/2014/main" id="{2711C4FE-BB95-49F0-875A-79973572DB57}"/>
-              </a:ext>
-            </a:extLst>
-          </p:cNvPr>
-          <p:cNvSpPr>
-            <a:spLocks noGrp="1"/>
-          </p:cNvSpPr>
-          <p:nvPr/>
-        </p:nvSpPr>
-        <p:spPr>
-          <a:xfrm>
-            <a:off x="8839200" y="2152650"/>
-            <a:ext cx="2324100" cy="323850"/>
-          </a:xfrm>
-          <a:prstGeom prst="rect">
-            <a:avLst/>
-          </a:prstGeom>
-          <a:noFill/>
-          <a:ln w="0">
-            <a:noFill/>
-            <a:prstDash val="solid"/>
-          </a:ln>
-        </p:spPr>
-        <p:txBody>
-          <a:bodyPr lIns="0" tIns="0" rIns="0" bIns="0" anchor="t">
-            <a:normAutofit/>
-          </a:bodyPr>
-          <a:lstStyle/>
-          <a:p>
-            <a:pPr algn="l">
-              <a:defRPr sz="1650" b="1">
-                <a:solidFill>
-                  <a:srgbClr val="000000"/>
-                </a:solidFill>
-                <a:latin typeface="Helvetica Neue"/>
-                <a:ea typeface="Helvetica Neue"/>
-                <a:cs typeface="Helvetica Neue"/>
-              </a:defRPr>
-            </a:pPr>
-            <a:r>
-              <a:rPr sz="1650" b="1">
-                <a:solidFill>
-                  <a:srgbClr val="000000"/>
-                </a:solidFill>
-                <a:latin typeface="Helvetica Neue"/>
-                <a:ea typeface="Helvetica Neue"/>
-                <a:cs typeface="Helvetica Neue"/>
-              </a:rPr>
-              <a:t>What P100 coordinates</a:t>
-            </a:r>
-          </a:p>
-        </p:txBody>
-      </p:sp>
-      <p:sp>
-        <p:nvSpPr>
-          <p:cNvPr id="9" name="Rectangle 8">
-            <a:extLst>
-              <a:ext uri="{FF2B5EF4-FFF2-40B4-BE49-F238E27FC236}">
-                <a16:creationId xmlns:a16="http://schemas.microsoft.com/office/drawing/2014/main" id="{D332E2B0-B79D-428E-A109-130D654AAF30}"/>
-              </a:ext>
-            </a:extLst>
-          </p:cNvPr>
-          <p:cNvSpPr>
-            <a:spLocks noGrp="1"/>
-          </p:cNvSpPr>
-          <p:nvPr/>
-        </p:nvSpPr>
-        <p:spPr>
-          <a:xfrm>
-            <a:off x="8839200" y="2724150"/>
-            <a:ext cx="2247900" cy="1981200"/>
-          </a:xfrm>
-          <a:prstGeom prst="rect">
-            <a:avLst/>
-          </a:prstGeom>
-          <a:noFill/>
-          <a:ln w="0">
-            <a:noFill/>
-            <a:prstDash val="solid"/>
-          </a:ln>
-        </p:spPr>
-        <p:txBody>
-          <a:bodyPr lIns="0" tIns="0" rIns="0" bIns="0" anchor="t">
-            <a:normAutofit/>
-          </a:bodyPr>
-          <a:lstStyle/>
-          <a:p>
-            <a:pPr algn="l">
-              <a:defRPr sz="1350" b="0">
-                <a:solidFill>
-                  <a:srgbClr val="000000"/>
-                </a:solidFill>
-                <a:latin typeface="Helvetica Neue"/>
-                <a:ea typeface="Helvetica Neue"/>
-                <a:cs typeface="Helvetica Neue"/>
-              </a:defRPr>
-            </a:pPr>
-            <a:r>
-              <a:rPr sz="1350" b="0">
-                <a:solidFill>
-                  <a:srgbClr val="000000"/>
-                </a:solidFill>
-                <a:latin typeface="Helvetica Neue"/>
-                <a:ea typeface="Helvetica Neue"/>
-                <a:cs typeface="Helvetica Neue"/>
-              </a:rPr>
-              <a:t>• Toolhead home verification</a:t>
-            </a:r>
-          </a:p>
-          <a:p>
-            <a:endParaRPr sz="1350" b="0">
-              <a:solidFill>
-                <a:srgbClr val="000000"/>
-              </a:solidFill>
-              <a:latin typeface="Helvetica Neue"/>
-              <a:ea typeface="Helvetica Neue"/>
-              <a:cs typeface="Helvetica Neue"/>
-            </a:endParaRPr>
-          </a:p>
-          <a:p>
-            <a:pPr algn="l">
-              <a:defRPr sz="1350" b="0">
-                <a:solidFill>
-                  <a:srgbClr val="000000"/>
-                </a:solidFill>
-                <a:latin typeface="Helvetica Neue"/>
-                <a:ea typeface="Helvetica Neue"/>
-                <a:cs typeface="Helvetica Neue"/>
-              </a:defRPr>
-            </a:pPr>
-            <a:r>
-              <a:rPr sz="1350" b="0">
-                <a:solidFill>
-                  <a:srgbClr val="000000"/>
-                </a:solidFill>
-                <a:latin typeface="Helvetica Neue"/>
-                <a:ea typeface="Helvetica Neue"/>
-                <a:cs typeface="Helvetica Neue"/>
-              </a:rPr>
-              <a:t>• X/Y physical homing</a:t>
-            </a:r>
-          </a:p>
-          <a:p>
-            <a:endParaRPr sz="1350" b="0">
-              <a:solidFill>
-                <a:srgbClr val="000000"/>
-              </a:solidFill>
-              <a:latin typeface="Helvetica Neue"/>
-              <a:ea typeface="Helvetica Neue"/>
-              <a:cs typeface="Helvetica Neue"/>
-            </a:endParaRPr>
-          </a:p>
-          <a:p>
-            <a:pPr algn="l">
-              <a:defRPr sz="1350" b="0">
-                <a:solidFill>
-                  <a:srgbClr val="000000"/>
-                </a:solidFill>
-                <a:latin typeface="Helvetica Neue"/>
-                <a:ea typeface="Helvetica Neue"/>
-                <a:cs typeface="Helvetica Neue"/>
-              </a:defRPr>
-            </a:pPr>
-            <a:r>
-              <a:rPr sz="1350" b="0">
-                <a:solidFill>
-                  <a:srgbClr val="000000"/>
-                </a:solidFill>
-                <a:latin typeface="Helvetica Neue"/>
-                <a:ea typeface="Helvetica Neue"/>
-                <a:cs typeface="Helvetica Neue"/>
-              </a:rPr>
-              <a:t>• Magnetic center and A-index registration</a:t>
-            </a:r>
-          </a:p>
-          <a:p>
-            <a:endParaRPr sz="1350" b="0">
-              <a:solidFill>
-                <a:srgbClr val="000000"/>
-              </a:solidFill>
-              <a:latin typeface="Helvetica Neue"/>
-              <a:ea typeface="Helvetica Neue"/>
-              <a:cs typeface="Helvetica Neue"/>
-            </a:endParaRPr>
-          </a:p>
-          <a:p>
-            <a:pPr algn="l">
-              <a:defRPr sz="1350" b="0">
-                <a:solidFill>
-                  <a:srgbClr val="000000"/>
-                </a:solidFill>
-                <a:latin typeface="Helvetica Neue"/>
-                <a:ea typeface="Helvetica Neue"/>
-                <a:cs typeface="Helvetica Neue"/>
-              </a:defRPr>
-            </a:pPr>
-            <a:r>
-              <a:rPr sz="1350" b="0">
-                <a:solidFill>
-                  <a:srgbClr val="000000"/>
-                </a:solidFill>
-                <a:latin typeface="Helvetica Neue"/>
-                <a:ea typeface="Helvetica Neue"/>
-                <a:cs typeface="Helvetica Neue"/>
-              </a:rPr>
-              <a:t>• Planned touch-and-clear check before every run</a:t>
-            </a:r>
-          </a:p>
-        </p:txBody>
-      </p:sp>
-      <p:sp>
-        <p:nvSpPr>
-          <p:cNvPr id="10" name="Rectangle 9">
-            <a:extLst>
-              <a:ext uri="{FF2B5EF4-FFF2-40B4-BE49-F238E27FC236}">
-                <a16:creationId xmlns:a16="http://schemas.microsoft.com/office/drawing/2014/main" id="{96D81758-CD88-4EF5-A7F6-B3CD03B93DBF}"/>
-              </a:ext>
-            </a:extLst>
-          </p:cNvPr>
-          <p:cNvSpPr>
-            <a:spLocks noGrp="1"/>
-          </p:cNvSpPr>
-          <p:nvPr/>
-        </p:nvSpPr>
-        <p:spPr>
-          <a:xfrm>
-            <a:off x="8572500" y="5448300"/>
-            <a:ext cx="2857500" cy="457200"/>
-          </a:xfrm>
-          <a:prstGeom prst="rect">
-            <a:avLst/>
-          </a:prstGeom>
-          <a:noFill/>
-          <a:ln w="0">
-            <a:noFill/>
-            <a:prstDash val="solid"/>
-          </a:ln>
-        </p:spPr>
-        <p:txBody>
-          <a:bodyPr lIns="0" tIns="0" rIns="0" bIns="0" anchor="t">
-            <a:normAutofit/>
-          </a:bodyPr>
-          <a:lstStyle/>
-          <a:p>
-            <a:pPr algn="l">
-              <a:defRPr sz="1050" b="0">
-                <a:solidFill>
-                  <a:srgbClr val="59616B"/>
-                </a:solidFill>
-                <a:latin typeface="Helvetica Neue"/>
-                <a:ea typeface="Helvetica Neue"/>
-                <a:cs typeface="Helvetica Neue"/>
-              </a:defRPr>
-            </a:pPr>
-            <a:r>
-              <a:rPr lang="en-US" sz="1050" b="0">
-                <a:solidFill>
-                  <a:srgbClr val="59616B"/>
-                </a:solidFill>
-                <a:latin typeface="Helvetica Neue"/>
-                <a:ea typeface="Helvetica Neue"/>
-                <a:cs typeface="Helvetica Neue"/>
-              </a:rPr>
-              <a:t>Hover or click a process in the map to reveal its data movement.</a:t>
-            </a:r>
-            <a:endParaRPr sz="1050" b="0">
-              <a:solidFill>
-                <a:srgbClr val="59616B"/>
-              </a:solidFill>
-              <a:latin typeface="Helvetica Neue"/>
-              <a:ea typeface="Helvetica Neue"/>
-              <a:cs typeface="Helvetica Neue"/>
-            </a:endParaRPr>
-          </a:p>
-        </p:txBody>
-      </p:sp>
       <p:sp>
         <p:nvSpPr>
           <p:cNvPr id="6" name="P100 Step 1 Hit Area">
@@ -11826,8 +10557,8 @@
         </p:nvSpPr>
         <p:spPr>
           <a:xfrm>
-            <a:off x="1628775" y="2514600"/>
-            <a:ext cx="3238500" cy="400050"/>
+            <a:off x="964194" y="1616044"/>
+            <a:ext cx="4617267" cy="570368"/>
           </a:xfrm>
           <a:prstGeom prst="rect">
             <a:avLst/>
@@ -11876,7 +10607,7 @@
           <a:lstStyle/>
           <a:p>
             <a:pPr algn="ctr"/>
-            <a:endParaRPr lang="en-US"/>
+            <a:endParaRPr lang="en-US" sz="2566"/>
           </a:p>
         </p:txBody>
       </p:sp>
@@ -11896,8 +10627,8 @@
         </p:nvSpPr>
         <p:spPr>
           <a:xfrm>
-            <a:off x="1628775" y="3105150"/>
-            <a:ext cx="3238500" cy="400050"/>
+            <a:off x="964194" y="2458016"/>
+            <a:ext cx="4617267" cy="570368"/>
           </a:xfrm>
           <a:prstGeom prst="rect">
             <a:avLst/>
@@ -11946,7 +10677,7 @@
           <a:lstStyle/>
           <a:p>
             <a:pPr algn="ctr"/>
-            <a:endParaRPr lang="en-US"/>
+            <a:endParaRPr lang="en-US" sz="2566"/>
           </a:p>
         </p:txBody>
       </p:sp>
@@ -11966,8 +10697,8 @@
         </p:nvSpPr>
         <p:spPr>
           <a:xfrm>
-            <a:off x="1628775" y="3695700"/>
-            <a:ext cx="3238500" cy="400050"/>
+            <a:off x="964194" y="3299988"/>
+            <a:ext cx="4617267" cy="570368"/>
           </a:xfrm>
           <a:prstGeom prst="rect">
             <a:avLst/>
@@ -12016,7 +10747,7 @@
           <a:lstStyle/>
           <a:p>
             <a:pPr algn="ctr"/>
-            <a:endParaRPr lang="en-US"/>
+            <a:endParaRPr lang="en-US" sz="2566"/>
           </a:p>
         </p:txBody>
       </p:sp>
@@ -12036,8 +10767,8 @@
         </p:nvSpPr>
         <p:spPr>
           <a:xfrm>
-            <a:off x="1628775" y="4286250"/>
-            <a:ext cx="3238500" cy="400050"/>
+            <a:off x="964194" y="4141960"/>
+            <a:ext cx="4617267" cy="570368"/>
           </a:xfrm>
           <a:prstGeom prst="rect">
             <a:avLst/>
@@ -12086,7 +10817,7 @@
           <a:lstStyle/>
           <a:p>
             <a:pPr algn="ctr"/>
-            <a:endParaRPr lang="en-US"/>
+            <a:endParaRPr lang="en-US" sz="2566"/>
           </a:p>
         </p:txBody>
       </p:sp>
@@ -12106,8 +10837,8 @@
         </p:nvSpPr>
         <p:spPr>
           <a:xfrm>
-            <a:off x="1628775" y="4876800"/>
-            <a:ext cx="3238500" cy="400050"/>
+            <a:off x="964194" y="4983933"/>
+            <a:ext cx="4617267" cy="570368"/>
           </a:xfrm>
           <a:prstGeom prst="rect">
             <a:avLst/>
@@ -12156,7 +10887,7 @@
           <a:lstStyle/>
           <a:p>
             <a:pPr algn="ctr"/>
-            <a:endParaRPr lang="en-US"/>
+            <a:endParaRPr lang="en-US" sz="2566"/>
           </a:p>
         </p:txBody>
       </p:sp>
@@ -12176,8 +10907,8 @@
         </p:nvSpPr>
         <p:spPr>
           <a:xfrm>
-            <a:off x="1628775" y="5467350"/>
-            <a:ext cx="3238500" cy="400050"/>
+            <a:off x="964194" y="5825905"/>
+            <a:ext cx="4617267" cy="570368"/>
           </a:xfrm>
           <a:prstGeom prst="rect">
             <a:avLst/>
@@ -12226,7 +10957,7 @@
           <a:lstStyle/>
           <a:p>
             <a:pPr algn="ctr"/>
-            <a:endParaRPr lang="en-US"/>
+            <a:endParaRPr lang="en-US" sz="2566"/>
           </a:p>
         </p:txBody>
       </p:sp>
@@ -12249,7 +10980,7 @@
     <p:bg>
       <p:bgPr>
         <a:solidFill>
-          <a:srgbClr val="FFFFFF"/>
+          <a:srgbClr val="141A20"/>
         </a:solidFill>
         <a:effectLst/>
       </p:bgPr>
@@ -12268,278 +10999,6 @@
           <a:chExt cx="0" cy="0"/>
         </a:xfrm>
       </p:grpSpPr>
-      <p:sp>
-        <p:nvSpPr>
-          <p:cNvPr id="11" name="Rectangle 10">
-            <a:extLst>
-              <a:ext uri="{FF2B5EF4-FFF2-40B4-BE49-F238E27FC236}">
-                <a16:creationId xmlns:a16="http://schemas.microsoft.com/office/drawing/2014/main" id="{6E709A68-3D0F-4C65-A32B-A1E7C3547699}"/>
-              </a:ext>
-            </a:extLst>
-          </p:cNvPr>
-          <p:cNvSpPr>
-            <a:spLocks noGrp="1"/>
-          </p:cNvSpPr>
-          <p:nvPr/>
-        </p:nvSpPr>
-        <p:spPr>
-          <a:xfrm>
-            <a:off x="400050" y="342900"/>
-            <a:ext cx="5334000" cy="228600"/>
-          </a:xfrm>
-          <a:prstGeom prst="rect">
-            <a:avLst/>
-          </a:prstGeom>
-          <a:noFill/>
-          <a:ln w="0">
-            <a:noFill/>
-            <a:prstDash val="solid"/>
-          </a:ln>
-        </p:spPr>
-        <p:txBody>
-          <a:bodyPr lIns="0" tIns="0" rIns="0" bIns="0" anchor="t">
-            <a:normAutofit/>
-          </a:bodyPr>
-          <a:lstStyle/>
-          <a:p>
-            <a:pPr algn="l">
-              <a:defRPr sz="1050" b="1">
-                <a:solidFill>
-                  <a:srgbClr val="3D8DFF"/>
-                </a:solidFill>
-                <a:latin typeface="Helvetica Neue"/>
-                <a:ea typeface="Helvetica Neue"/>
-                <a:cs typeface="Helvetica Neue"/>
-              </a:defRPr>
-            </a:pPr>
-            <a:r>
-              <a:rPr sz="1050" b="1">
-                <a:solidFill>
-                  <a:srgbClr val="3D8DFF"/>
-                </a:solidFill>
-                <a:latin typeface="Helvetica Neue"/>
-                <a:ea typeface="Helvetica Neue"/>
-                <a:cs typeface="Helvetica Neue"/>
-              </a:rPr>
-              <a:t>P100 PROCESS MAP</a:t>
-            </a:r>
-          </a:p>
-        </p:txBody>
-      </p:sp>
-      <p:sp>
-        <p:nvSpPr>
-          <p:cNvPr id="2" name="Rectangle 1">
-            <a:extLst>
-              <a:ext uri="{FF2B5EF4-FFF2-40B4-BE49-F238E27FC236}">
-                <a16:creationId xmlns:a16="http://schemas.microsoft.com/office/drawing/2014/main" id="{E2B39075-10DC-4D61-AB16-D8458CE12055}"/>
-              </a:ext>
-            </a:extLst>
-          </p:cNvPr>
-          <p:cNvSpPr>
-            <a:spLocks noGrp="1"/>
-          </p:cNvSpPr>
-          <p:nvPr/>
-        </p:nvSpPr>
-        <p:spPr>
-          <a:xfrm>
-            <a:off x="400050" y="685800"/>
-            <a:ext cx="10668000" cy="590550"/>
-          </a:xfrm>
-          <a:prstGeom prst="rect">
-            <a:avLst/>
-          </a:prstGeom>
-          <a:noFill/>
-          <a:ln w="0">
-            <a:noFill/>
-            <a:prstDash val="solid"/>
-          </a:ln>
-        </p:spPr>
-        <p:txBody>
-          <a:bodyPr lIns="0" tIns="0" rIns="0" bIns="0" anchor="t">
-            <a:normAutofit/>
-          </a:bodyPr>
-          <a:lstStyle/>
-          <a:p>
-            <a:pPr algn="l">
-              <a:defRPr sz="2700" b="1">
-                <a:solidFill>
-                  <a:srgbClr val="000000"/>
-                </a:solidFill>
-                <a:latin typeface="Helvetica Neue"/>
-                <a:ea typeface="Helvetica Neue"/>
-                <a:cs typeface="Helvetica Neue"/>
-              </a:defRPr>
-            </a:pPr>
-            <a:r>
-              <a:rPr sz="2700" b="1">
-                <a:solidFill>
-                  <a:srgbClr val="000000"/>
-                </a:solidFill>
-                <a:latin typeface="Helvetica Neue"/>
-                <a:ea typeface="Helvetica Neue"/>
-                <a:cs typeface="Helvetica Neue"/>
-              </a:rPr>
-              <a:t>P100 is the repeatable startup routine before a drawing begins</a:t>
-            </a:r>
-          </a:p>
-        </p:txBody>
-      </p:sp>
-      <p:sp>
-        <p:nvSpPr>
-          <p:cNvPr id="3" name="Rectangle 2">
-            <a:extLst>
-              <a:ext uri="{FF2B5EF4-FFF2-40B4-BE49-F238E27FC236}">
-                <a16:creationId xmlns:a16="http://schemas.microsoft.com/office/drawing/2014/main" id="{4ACC2074-F48C-4553-A601-F6B254548577}"/>
-              </a:ext>
-            </a:extLst>
-          </p:cNvPr>
-          <p:cNvSpPr>
-            <a:spLocks noGrp="1"/>
-          </p:cNvSpPr>
-          <p:nvPr/>
-        </p:nvSpPr>
-        <p:spPr>
-          <a:xfrm>
-            <a:off x="400050" y="6343650"/>
-            <a:ext cx="11391900" cy="9525"/>
-          </a:xfrm>
-          <a:prstGeom prst="rect">
-            <a:avLst/>
-          </a:prstGeom>
-          <a:solidFill>
-            <a:srgbClr val="B8BCC4"/>
-          </a:solidFill>
-          <a:ln w="0">
-            <a:solidFill>
-              <a:srgbClr val="B8BCC4"/>
-            </a:solidFill>
-            <a:prstDash val="solid"/>
-          </a:ln>
-        </p:spPr>
-        <p:txBody>
-          <a:bodyPr/>
-          <a:lstStyle/>
-          <a:p>
-            <a:endParaRPr lang="en-US"/>
-          </a:p>
-        </p:txBody>
-      </p:sp>
-      <p:sp>
-        <p:nvSpPr>
-          <p:cNvPr id="4" name="Rectangle 3">
-            <a:extLst>
-              <a:ext uri="{FF2B5EF4-FFF2-40B4-BE49-F238E27FC236}">
-                <a16:creationId xmlns:a16="http://schemas.microsoft.com/office/drawing/2014/main" id="{6A21AB0F-01B7-4655-B05E-1D59444D1E2F}"/>
-              </a:ext>
-            </a:extLst>
-          </p:cNvPr>
-          <p:cNvSpPr>
-            <a:spLocks noGrp="1"/>
-          </p:cNvSpPr>
-          <p:nvPr/>
-        </p:nvSpPr>
-        <p:spPr>
-          <a:xfrm>
-            <a:off x="400050" y="6477000"/>
-            <a:ext cx="6191250" cy="171450"/>
-          </a:xfrm>
-          <a:prstGeom prst="rect">
-            <a:avLst/>
-          </a:prstGeom>
-          <a:noFill/>
-          <a:ln w="0">
-            <a:noFill/>
-            <a:prstDash val="solid"/>
-          </a:ln>
-        </p:spPr>
-        <p:txBody>
-          <a:bodyPr lIns="0" tIns="0" rIns="0" bIns="0" anchor="t">
-            <a:normAutofit/>
-          </a:bodyPr>
-          <a:lstStyle/>
-          <a:p>
-            <a:pPr algn="l">
-              <a:defRPr sz="900" b="0">
-                <a:solidFill>
-                  <a:srgbClr val="59616B"/>
-                </a:solidFill>
-                <a:latin typeface="Helvetica Neue"/>
-                <a:ea typeface="Helvetica Neue"/>
-                <a:cs typeface="Helvetica Neue"/>
-              </a:defRPr>
-            </a:pPr>
-            <a:r>
-              <a:rPr sz="900" b="0">
-                <a:solidFill>
-                  <a:srgbClr val="59616B"/>
-                </a:solidFill>
-                <a:latin typeface="Helvetica Neue"/>
-                <a:ea typeface="Helvetica Neue"/>
-                <a:cs typeface="Helvetica Neue"/>
-              </a:rPr>
-              <a:t>THETA PEN PLOTTER  •  SUMMER PROGRESS UPDATE</a:t>
-            </a:r>
-          </a:p>
-        </p:txBody>
-      </p:sp>
-      <p:sp>
-        <p:nvSpPr>
-          <p:cNvPr id="5" name="Rectangle 4">
-            <a:extLst>
-              <a:ext uri="{FF2B5EF4-FFF2-40B4-BE49-F238E27FC236}">
-                <a16:creationId xmlns:a16="http://schemas.microsoft.com/office/drawing/2014/main" id="{38C47507-02D7-4895-8794-10C0666EFEA1}"/>
-              </a:ext>
-            </a:extLst>
-          </p:cNvPr>
-          <p:cNvSpPr>
-            <a:spLocks noGrp="1"/>
-          </p:cNvSpPr>
-          <p:nvPr/>
-        </p:nvSpPr>
-        <p:spPr>
-          <a:xfrm>
-            <a:off x="11287125" y="6477000"/>
-            <a:ext cx="495300" cy="171450"/>
-          </a:xfrm>
-          <a:prstGeom prst="rect">
-            <a:avLst/>
-          </a:prstGeom>
-          <a:noFill/>
-          <a:ln w="0">
-            <a:noFill/>
-            <a:prstDash val="solid"/>
-          </a:ln>
-        </p:spPr>
-        <p:txBody>
-          <a:bodyPr lIns="0" tIns="0" rIns="0" bIns="0" anchor="t">
-            <a:normAutofit/>
-          </a:bodyPr>
-          <a:lstStyle/>
-          <a:p>
-            <a:pPr algn="r">
-              <a:defRPr sz="900" b="0">
-                <a:solidFill>
-                  <a:srgbClr val="59616B"/>
-                </a:solidFill>
-                <a:latin typeface="Helvetica Neue"/>
-                <a:ea typeface="Helvetica Neue"/>
-                <a:cs typeface="Helvetica Neue"/>
-              </a:defRPr>
-            </a:pPr>
-            <a:r>
-              <a:rPr sz="900" b="0">
-                <a:solidFill>
-                  <a:srgbClr val="59616B"/>
-                </a:solidFill>
-                <a:latin typeface="Helvetica Neue"/>
-                <a:ea typeface="Helvetica Neue"/>
-                <a:cs typeface="Helvetica Neue"/>
-              </a:rPr>
-              <a:t>5</a:t>
-            </a:r>
-          </a:p>
-        </p:txBody>
-      </p:sp>
       <p:pic>
         <p:nvPicPr>
           <p:cNvPr id="16" name="Picture 15"/>
@@ -12554,8 +11013,8 @@
         </p:blipFill>
         <p:spPr>
           <a:xfrm>
-            <a:off x="951442" y="1381125"/>
-            <a:ext cx="6841067" cy="4810125"/>
+            <a:off x="-1" y="-1"/>
+            <a:ext cx="9753600" cy="6858000"/>
           </a:xfrm>
           <a:prstGeom prst="rect">
             <a:avLst/>
@@ -12564,72 +11023,6 @@
       </p:pic>
       <p:sp>
         <p:nvSpPr>
-          <p:cNvPr id="10" name="Rectangle 9">
-            <a:extLst>
-              <a:ext uri="{FF2B5EF4-FFF2-40B4-BE49-F238E27FC236}">
-                <a16:creationId xmlns:a16="http://schemas.microsoft.com/office/drawing/2014/main" id="{96D81758-CD88-4EF5-A7F6-B3CD03B93DBF}"/>
-              </a:ext>
-            </a:extLst>
-          </p:cNvPr>
-          <p:cNvSpPr>
-            <a:spLocks noGrp="1"/>
-          </p:cNvSpPr>
-          <p:nvPr/>
-        </p:nvSpPr>
-        <p:spPr>
-          <a:xfrm>
-            <a:off x="8572500" y="3238500"/>
-            <a:ext cx="2540000" cy="508000"/>
-          </a:xfrm>
-          <a:prstGeom prst="rect">
-            <a:avLst/>
-          </a:prstGeom>
-          <a:noFill/>
-          <a:ln w="0">
-            <a:noFill/>
-            <a:prstDash val="solid"/>
-          </a:ln>
-        </p:spPr>
-        <p:txBody>
-          <a:bodyPr lIns="0" tIns="0" rIns="0" bIns="0" anchor="t">
-            <a:normAutofit/>
-          </a:bodyPr>
-          <a:lstStyle/>
-          <a:p>
-            <a:pPr algn="l">
-              <a:defRPr sz="1050" b="0">
-                <a:solidFill>
-                  <a:srgbClr val="59616B"/>
-                </a:solidFill>
-                <a:latin typeface="Helvetica Neue"/>
-                <a:ea typeface="Helvetica Neue"/>
-                <a:cs typeface="Helvetica Neue"/>
-              </a:defRPr>
-            </a:pPr>
-            <a:r>
-              <a:rPr lang="en-US" sz="1100" b="0">
-                <a:solidFill>
-                  <a:srgbClr val="80726B"/>
-                </a:solidFill>
-                <a:latin typeface="Helvetica Neue"/>
-                <a:ea typeface="Helvetica Neue"/>
-                <a:cs typeface="Helvetica Neue"/>
-              </a:rPr>
-              <a:t>Detail shown inside the map. Hover or click another process to compare.</a:t>
-            </a:r>
-            <a:endParaRPr sz="1100" b="0">
-              <a:solidFill>
-                <a:srgbClr val="80726B"/>
-              </a:solidFill>
-              <a:latin typeface="Helvetica Neue"/>
-              <a:ea typeface="Helvetica Neue"/>
-              <a:cs typeface="Helvetica Neue"/>
-            </a:endParaRPr>
-          </a:p>
-        </p:txBody>
-      </p:sp>
-      <p:sp>
-        <p:nvSpPr>
           <p:cNvPr id="6" name="P100 Step 1 Highlight">
             <a:extLst>
               <a:ext uri="{FF2B5EF4-FFF2-40B4-BE49-F238E27FC236}">
@@ -12642,8 +11035,8 @@
         </p:nvSpPr>
         <p:spPr>
           <a:xfrm>
-            <a:off x="1628775" y="2514600"/>
-            <a:ext cx="3238500" cy="400050"/>
+            <a:off x="964194" y="1616044"/>
+            <a:ext cx="4617267" cy="570368"/>
           </a:xfrm>
           <a:prstGeom prst="rect">
             <a:avLst/>
@@ -12680,18 +11073,18 @@
           <a:lstStyle/>
           <a:p>
             <a:pPr algn="ctr"/>
-            <a:endParaRPr lang="en-US"/>
-          </a:p>
-        </p:txBody>
-      </p:sp>
-      <p:sp>
-        <p:nvSpPr>
-          <p:cNvPr id="12" name="P100 Back Button">
+            <a:endParaRPr lang="en-US" sz="2566"/>
+          </a:p>
+        </p:txBody>
+      </p:sp>
+      <p:sp>
+        <p:nvSpPr>
+          <p:cNvPr id="13" name="P100 Step 1 Hit Area">
             <a:hlinkClick r:id="rId4" action="ppaction://hlinksldjump"/>
             <a:hlinkHover r:id="rId4" action="ppaction://hlinksldjump"/>
             <a:extLst>
               <a:ext uri="{FF2B5EF4-FFF2-40B4-BE49-F238E27FC236}">
-                <a16:creationId xmlns:a16="http://schemas.microsoft.com/office/drawing/2014/main" id="{62FEE855-7395-9EE9-C792-6C8A76A2EE8D}"/>
+                <a16:creationId xmlns:a16="http://schemas.microsoft.com/office/drawing/2014/main" id="{247DC19F-CC0E-3DBD-AAFE-5BFC1F4C765F}"/>
               </a:ext>
             </a:extLst>
           </p:cNvPr>
@@ -12700,20 +11093,34 @@
         </p:nvSpPr>
         <p:spPr>
           <a:xfrm>
-            <a:off x="9429750" y="5905500"/>
-            <a:ext cx="2000250" cy="285750"/>
-          </a:xfrm>
-          <a:prstGeom prst="roundRect">
+            <a:off x="964194" y="1616044"/>
+            <a:ext cx="4617267" cy="570368"/>
+          </a:xfrm>
+          <a:prstGeom prst="rect">
             <a:avLst/>
           </a:prstGeom>
           <a:solidFill>
-            <a:srgbClr val="FFF9F3"/>
+            <a:schemeClr val="accent1">
+              <a:alpha val="0"/>
+            </a:schemeClr>
           </a:solidFill>
-          <a:ln w="12700">
-            <a:solidFill>
-              <a:srgbClr val="FF8833"/>
-            </a:solidFill>
-          </a:ln>
+          <a:ln w="19050">
+            <a:noFill/>
+            <a:prstDash val="solid"/>
+          </a:ln>
+          <a:effectLst/>
+          <a:extLst>
+            <a:ext uri="{91240B29-F687-4F45-9708-019B960494DF}">
+              <a14:hiddenLine xmlns:a14="http://schemas.microsoft.com/office/drawing/2010/main" w="19050">
+                <a:solidFill>
+                  <a:schemeClr val="accent1">
+                    <a:shade val="15000"/>
+                  </a:schemeClr>
+                </a:solidFill>
+                <a:prstDash val="solid"/>
+              </a14:hiddenLine>
+            </a:ext>
+          </a:extLst>
         </p:spPr>
         <p:style>
           <a:lnRef idx="2">
@@ -12736,25 +11143,18 @@
           <a:lstStyle/>
           <a:p>
             <a:pPr algn="ctr"/>
-            <a:r>
-              <a:rPr lang="en-US" sz="1200" b="1">
-                <a:solidFill>
-                  <a:srgbClr val="FF8833"/>
-                </a:solidFill>
-              </a:rPr>
-              <a:t>BACK TO OVERVIEW</a:t>
-            </a:r>
-          </a:p>
-        </p:txBody>
-      </p:sp>
-      <p:sp>
-        <p:nvSpPr>
-          <p:cNvPr id="13" name="P100 Step 1 Hit Area">
+            <a:endParaRPr lang="en-US" sz="2566"/>
+          </a:p>
+        </p:txBody>
+      </p:sp>
+      <p:sp>
+        <p:nvSpPr>
+          <p:cNvPr id="14" name="P100 Step 2 Hit Area">
             <a:hlinkClick r:id="rId5" action="ppaction://hlinksldjump"/>
             <a:hlinkHover r:id="rId5" action="ppaction://hlinksldjump"/>
             <a:extLst>
               <a:ext uri="{FF2B5EF4-FFF2-40B4-BE49-F238E27FC236}">
-                <a16:creationId xmlns:a16="http://schemas.microsoft.com/office/drawing/2014/main" id="{247DC19F-CC0E-3DBD-AAFE-5BFC1F4C765F}"/>
+                <a16:creationId xmlns:a16="http://schemas.microsoft.com/office/drawing/2014/main" id="{CCD6C85B-BC61-1159-A9EB-4DEE90BE5A82}"/>
               </a:ext>
             </a:extLst>
           </p:cNvPr>
@@ -12763,8 +11163,8 @@
         </p:nvSpPr>
         <p:spPr>
           <a:xfrm>
-            <a:off x="1628775" y="2514600"/>
-            <a:ext cx="3238500" cy="400050"/>
+            <a:off x="964194" y="2458016"/>
+            <a:ext cx="4617267" cy="570368"/>
           </a:xfrm>
           <a:prstGeom prst="rect">
             <a:avLst/>
@@ -12813,18 +11213,18 @@
           <a:lstStyle/>
           <a:p>
             <a:pPr algn="ctr"/>
-            <a:endParaRPr lang="en-US"/>
-          </a:p>
-        </p:txBody>
-      </p:sp>
-      <p:sp>
-        <p:nvSpPr>
-          <p:cNvPr id="14" name="P100 Step 2 Hit Area">
+            <a:endParaRPr lang="en-US" sz="2566"/>
+          </a:p>
+        </p:txBody>
+      </p:sp>
+      <p:sp>
+        <p:nvSpPr>
+          <p:cNvPr id="15" name="P100 Step 3 Hit Area">
             <a:hlinkClick r:id="rId6" action="ppaction://hlinksldjump"/>
             <a:hlinkHover r:id="rId6" action="ppaction://hlinksldjump"/>
             <a:extLst>
               <a:ext uri="{FF2B5EF4-FFF2-40B4-BE49-F238E27FC236}">
-                <a16:creationId xmlns:a16="http://schemas.microsoft.com/office/drawing/2014/main" id="{CCD6C85B-BC61-1159-A9EB-4DEE90BE5A82}"/>
+                <a16:creationId xmlns:a16="http://schemas.microsoft.com/office/drawing/2014/main" id="{DD9F42D5-7100-B65D-B3A2-9FC45CCA3778}"/>
               </a:ext>
             </a:extLst>
           </p:cNvPr>
@@ -12833,8 +11233,8 @@
         </p:nvSpPr>
         <p:spPr>
           <a:xfrm>
-            <a:off x="1628775" y="3105150"/>
-            <a:ext cx="3238500" cy="400050"/>
+            <a:off x="964194" y="3299988"/>
+            <a:ext cx="4617267" cy="570368"/>
           </a:xfrm>
           <a:prstGeom prst="rect">
             <a:avLst/>
@@ -12883,18 +11283,18 @@
           <a:lstStyle/>
           <a:p>
             <a:pPr algn="ctr"/>
-            <a:endParaRPr lang="en-US"/>
-          </a:p>
-        </p:txBody>
-      </p:sp>
-      <p:sp>
-        <p:nvSpPr>
-          <p:cNvPr id="15" name="P100 Step 3 Hit Area">
+            <a:endParaRPr lang="en-US" sz="2566"/>
+          </a:p>
+        </p:txBody>
+      </p:sp>
+      <p:sp>
+        <p:nvSpPr>
+          <p:cNvPr id="17" name="P100 Step 4 Hit Area">
             <a:hlinkClick r:id="rId7" action="ppaction://hlinksldjump"/>
             <a:hlinkHover r:id="rId7" action="ppaction://hlinksldjump"/>
             <a:extLst>
               <a:ext uri="{FF2B5EF4-FFF2-40B4-BE49-F238E27FC236}">
-                <a16:creationId xmlns:a16="http://schemas.microsoft.com/office/drawing/2014/main" id="{DD9F42D5-7100-B65D-B3A2-9FC45CCA3778}"/>
+                <a16:creationId xmlns:a16="http://schemas.microsoft.com/office/drawing/2014/main" id="{18B61BF8-E517-5508-FEBA-A73673F0BD60}"/>
               </a:ext>
             </a:extLst>
           </p:cNvPr>
@@ -12903,8 +11303,8 @@
         </p:nvSpPr>
         <p:spPr>
           <a:xfrm>
-            <a:off x="1628775" y="3695700"/>
-            <a:ext cx="3238500" cy="400050"/>
+            <a:off x="964194" y="4141960"/>
+            <a:ext cx="4617267" cy="570368"/>
           </a:xfrm>
           <a:prstGeom prst="rect">
             <a:avLst/>
@@ -12953,18 +11353,18 @@
           <a:lstStyle/>
           <a:p>
             <a:pPr algn="ctr"/>
-            <a:endParaRPr lang="en-US"/>
-          </a:p>
-        </p:txBody>
-      </p:sp>
-      <p:sp>
-        <p:nvSpPr>
-          <p:cNvPr id="17" name="P100 Step 4 Hit Area">
+            <a:endParaRPr lang="en-US" sz="2566"/>
+          </a:p>
+        </p:txBody>
+      </p:sp>
+      <p:sp>
+        <p:nvSpPr>
+          <p:cNvPr id="18" name="P100 Step 5 Hit Area">
             <a:hlinkClick r:id="rId8" action="ppaction://hlinksldjump"/>
             <a:hlinkHover r:id="rId8" action="ppaction://hlinksldjump"/>
             <a:extLst>
               <a:ext uri="{FF2B5EF4-FFF2-40B4-BE49-F238E27FC236}">
-                <a16:creationId xmlns:a16="http://schemas.microsoft.com/office/drawing/2014/main" id="{18B61BF8-E517-5508-FEBA-A73673F0BD60}"/>
+                <a16:creationId xmlns:a16="http://schemas.microsoft.com/office/drawing/2014/main" id="{D99E561C-28CC-633F-4985-D2725AA35AFE}"/>
               </a:ext>
             </a:extLst>
           </p:cNvPr>
@@ -12973,8 +11373,8 @@
         </p:nvSpPr>
         <p:spPr>
           <a:xfrm>
-            <a:off x="1628775" y="4286250"/>
-            <a:ext cx="3238500" cy="400050"/>
+            <a:off x="964194" y="4983933"/>
+            <a:ext cx="4617267" cy="570368"/>
           </a:xfrm>
           <a:prstGeom prst="rect">
             <a:avLst/>
@@ -13023,18 +11423,18 @@
           <a:lstStyle/>
           <a:p>
             <a:pPr algn="ctr"/>
-            <a:endParaRPr lang="en-US"/>
-          </a:p>
-        </p:txBody>
-      </p:sp>
-      <p:sp>
-        <p:nvSpPr>
-          <p:cNvPr id="18" name="P100 Step 5 Hit Area">
+            <a:endParaRPr lang="en-US" sz="2566"/>
+          </a:p>
+        </p:txBody>
+      </p:sp>
+      <p:sp>
+        <p:nvSpPr>
+          <p:cNvPr id="19" name="P100 Step 6 Hit Area">
             <a:hlinkClick r:id="rId9" action="ppaction://hlinksldjump"/>
             <a:hlinkHover r:id="rId9" action="ppaction://hlinksldjump"/>
             <a:extLst>
               <a:ext uri="{FF2B5EF4-FFF2-40B4-BE49-F238E27FC236}">
-                <a16:creationId xmlns:a16="http://schemas.microsoft.com/office/drawing/2014/main" id="{D99E561C-28CC-633F-4985-D2725AA35AFE}"/>
+                <a16:creationId xmlns:a16="http://schemas.microsoft.com/office/drawing/2014/main" id="{68401CD9-C7D3-3F82-3702-682FA40087B9}"/>
               </a:ext>
             </a:extLst>
           </p:cNvPr>
@@ -13043,8 +11443,8 @@
         </p:nvSpPr>
         <p:spPr>
           <a:xfrm>
-            <a:off x="1628775" y="4876800"/>
-            <a:ext cx="3238500" cy="400050"/>
+            <a:off x="964194" y="5825905"/>
+            <a:ext cx="4617267" cy="570368"/>
           </a:xfrm>
           <a:prstGeom prst="rect">
             <a:avLst/>
@@ -13093,18 +11493,16 @@
           <a:lstStyle/>
           <a:p>
             <a:pPr algn="ctr"/>
-            <a:endParaRPr lang="en-US"/>
-          </a:p>
-        </p:txBody>
-      </p:sp>
-      <p:sp>
-        <p:nvSpPr>
-          <p:cNvPr id="19" name="P100 Step 6 Hit Area">
-            <a:hlinkClick r:id="rId10" action="ppaction://hlinksldjump"/>
-            <a:hlinkHover r:id="rId10" action="ppaction://hlinksldjump"/>
-            <a:extLst>
-              <a:ext uri="{FF2B5EF4-FFF2-40B4-BE49-F238E27FC236}">
-                <a16:creationId xmlns:a16="http://schemas.microsoft.com/office/drawing/2014/main" id="{68401CD9-C7D3-3F82-3702-682FA40087B9}"/>
+            <a:endParaRPr lang="en-US" sz="2566"/>
+          </a:p>
+        </p:txBody>
+      </p:sp>
+      <p:sp>
+        <p:nvSpPr>
+          <p:cNvPr id="20" name="Matching P100 Map Detail Background">
+            <a:extLst>
+              <a:ext uri="{FF2B5EF4-FFF2-40B4-BE49-F238E27FC236}">
+                <a16:creationId xmlns:a16="http://schemas.microsoft.com/office/drawing/2014/main" id="{5CEF202E-B754-A271-22D6-351167702F2F}"/>
               </a:ext>
             </a:extLst>
           </p:cNvPr>
@@ -13113,34 +11511,20 @@
         </p:nvSpPr>
         <p:spPr>
           <a:xfrm>
-            <a:off x="1628775" y="5467350"/>
-            <a:ext cx="3238500" cy="400050"/>
+            <a:off x="5703683" y="1670364"/>
+            <a:ext cx="3078178" cy="2245259"/>
           </a:xfrm>
           <a:prstGeom prst="rect">
             <a:avLst/>
           </a:prstGeom>
           <a:solidFill>
-            <a:schemeClr val="accent1">
-              <a:alpha val="0"/>
-            </a:schemeClr>
+            <a:srgbClr val="2B251F"/>
           </a:solidFill>
-          <a:ln w="19050">
-            <a:noFill/>
-            <a:prstDash val="solid"/>
-          </a:ln>
-          <a:effectLst/>
-          <a:extLst>
-            <a:ext uri="{91240B29-F687-4F45-9708-019B960494DF}">
-              <a14:hiddenLine xmlns:a14="http://schemas.microsoft.com/office/drawing/2010/main" w="19050">
-                <a:solidFill>
-                  <a:schemeClr val="accent1">
-                    <a:shade val="15000"/>
-                  </a:schemeClr>
-                </a:solidFill>
-                <a:prstDash val="solid"/>
-              </a14:hiddenLine>
-            </a:ext>
-          </a:extLst>
+          <a:ln w="8890">
+            <a:solidFill>
+              <a:srgbClr val="6E6052"/>
+            </a:solidFill>
+          </a:ln>
         </p:spPr>
         <p:style>
           <a:lnRef idx="2">
@@ -13163,16 +11547,103 @@
           <a:lstStyle/>
           <a:p>
             <a:pPr algn="ctr"/>
-            <a:endParaRPr lang="en-US"/>
-          </a:p>
-        </p:txBody>
-      </p:sp>
-      <p:sp>
-        <p:nvSpPr>
-          <p:cNvPr id="20" name="Matching P100 Map Detail Background">
-            <a:extLst>
-              <a:ext uri="{FF2B5EF4-FFF2-40B4-BE49-F238E27FC236}">
-                <a16:creationId xmlns:a16="http://schemas.microsoft.com/office/drawing/2014/main" id="{5CEF202E-B754-A271-22D6-351167702F2F}"/>
+            <a:endParaRPr lang="en-US" sz="2566"/>
+          </a:p>
+        </p:txBody>
+      </p:sp>
+      <p:sp>
+        <p:nvSpPr>
+          <p:cNvPr id="21" name="Matching P100 Map Detail Title">
+            <a:extLst>
+              <a:ext uri="{FF2B5EF4-FFF2-40B4-BE49-F238E27FC236}">
+                <a16:creationId xmlns:a16="http://schemas.microsoft.com/office/drawing/2014/main" id="{AD756550-ED54-A3C6-39A3-0CF332046ED4}"/>
+              </a:ext>
+            </a:extLst>
+          </p:cNvPr>
+          <p:cNvSpPr txBox="1"/>
+          <p:nvPr/>
+        </p:nvSpPr>
+        <p:spPr>
+          <a:xfrm>
+            <a:off x="5866645" y="1833327"/>
+            <a:ext cx="2752254" cy="164554"/>
+          </a:xfrm>
+          <a:prstGeom prst="rect">
+            <a:avLst/>
+          </a:prstGeom>
+          <a:noFill/>
+        </p:spPr>
+        <p:txBody>
+          <a:bodyPr vert="horz" lIns="0" tIns="0" rIns="0" bIns="0" rtlCol="0">
+            <a:spAutoFit/>
+          </a:bodyPr>
+          <a:lstStyle/>
+          <a:p>
+            <a:r>
+              <a:rPr lang="en-US" sz="1069" b="1">
+                <a:solidFill>
+                  <a:srgbClr val="FFCC66"/>
+                </a:solidFill>
+                <a:latin typeface="Aptos" panose="020B0004020202020204" pitchFamily="34" charset="0"/>
+              </a:rPr>
+              <a:t>1. Start command</a:t>
+            </a:r>
+          </a:p>
+        </p:txBody>
+      </p:sp>
+      <p:sp>
+        <p:nvSpPr>
+          <p:cNvPr id="22" name="Matching P100 Map Detail Body">
+            <a:extLst>
+              <a:ext uri="{FF2B5EF4-FFF2-40B4-BE49-F238E27FC236}">
+                <a16:creationId xmlns:a16="http://schemas.microsoft.com/office/drawing/2014/main" id="{8B807CB2-EC82-3A18-09AF-01ADA23DEF0C}"/>
+              </a:ext>
+            </a:extLst>
+          </p:cNvPr>
+          <p:cNvSpPr txBox="1"/>
+          <p:nvPr/>
+        </p:nvSpPr>
+        <p:spPr>
+          <a:xfrm>
+            <a:off x="5866645" y="2123037"/>
+            <a:ext cx="2752254" cy="1263774"/>
+          </a:xfrm>
+          <a:prstGeom prst="rect">
+            <a:avLst/>
+          </a:prstGeom>
+          <a:noFill/>
+        </p:spPr>
+        <p:txBody>
+          <a:bodyPr vert="horz" lIns="0" tIns="0" rIns="0" bIns="0" rtlCol="0">
+            <a:spAutoFit/>
+          </a:bodyPr>
+          <a:lstStyle/>
+          <a:p>
+            <a:r>
+              <a:rPr lang="en-US" sz="912">
+                <a:solidFill>
+                  <a:srgbClr val="F7F4F0"/>
+                </a:solidFill>
+                <a:latin typeface="Aptos" panose="020B0004020202020204" pitchFamily="34" charset="0"/>
+              </a:rPr>
+              <a:t>Command
+ioSender → RP23CNC: G65 P100 Q0
+Decision owner
+RP23CNC / grblHAL starts P100 locally.
+Not moved
+HX711 force samples stay inside the Pro Micro toolhead.</a:t>
+            </a:r>
+          </a:p>
+        </p:txBody>
+      </p:sp>
+      <p:sp>
+        <p:nvSpPr>
+          <p:cNvPr id="7" name="P100 Back Button">
+            <a:hlinkClick r:id="rId10" action="ppaction://hlinksldjump"/>
+            <a:hlinkHover r:id="rId10" action="ppaction://hlinksldjump"/>
+            <a:extLst>
+              <a:ext uri="{FF2B5EF4-FFF2-40B4-BE49-F238E27FC236}">
+                <a16:creationId xmlns:a16="http://schemas.microsoft.com/office/drawing/2014/main" id="{279E1C06-C5FC-7771-BB9B-D9DA1CB5D1C4}"/>
               </a:ext>
             </a:extLst>
           </p:cNvPr>
@@ -13181,18 +11652,18 @@
         </p:nvSpPr>
         <p:spPr>
           <a:xfrm>
-            <a:off x="4953000" y="2552700"/>
-            <a:ext cx="2159000" cy="1574800"/>
-          </a:xfrm>
-          <a:prstGeom prst="rect">
+            <a:off x="10058400" y="6172200"/>
+            <a:ext cx="1714500" cy="304800"/>
+          </a:xfrm>
+          <a:prstGeom prst="roundRect">
             <a:avLst/>
           </a:prstGeom>
           <a:solidFill>
-            <a:srgbClr val="2B251F"/>
+            <a:srgbClr val="F4F4F4"/>
           </a:solidFill>
-          <a:ln w="8890">
+          <a:ln w="12700">
             <a:solidFill>
-              <a:srgbClr val="6E6052"/>
+              <a:srgbClr val="FFA533"/>
             </a:solidFill>
           </a:ln>
         </p:spPr>
@@ -13217,91 +11688,14 @@
           <a:lstStyle/>
           <a:p>
             <a:pPr algn="ctr"/>
-            <a:endParaRPr lang="en-US"/>
-          </a:p>
-        </p:txBody>
-      </p:sp>
-      <p:sp>
-        <p:nvSpPr>
-          <p:cNvPr id="21" name="Matching P100 Map Detail Title">
-            <a:extLst>
-              <a:ext uri="{FF2B5EF4-FFF2-40B4-BE49-F238E27FC236}">
-                <a16:creationId xmlns:a16="http://schemas.microsoft.com/office/drawing/2014/main" id="{AD756550-ED54-A3C6-39A3-0CF332046ED4}"/>
-              </a:ext>
-            </a:extLst>
-          </p:cNvPr>
-          <p:cNvSpPr txBox="1"/>
-          <p:nvPr/>
-        </p:nvSpPr>
-        <p:spPr>
-          <a:xfrm>
-            <a:off x="5067300" y="2667000"/>
-            <a:ext cx="1930400" cy="115416"/>
-          </a:xfrm>
-          <a:prstGeom prst="rect">
-            <a:avLst/>
-          </a:prstGeom>
-          <a:noFill/>
-        </p:spPr>
-        <p:txBody>
-          <a:bodyPr vert="horz" lIns="0" tIns="0" rIns="0" bIns="0" rtlCol="0">
-            <a:spAutoFit/>
-          </a:bodyPr>
-          <a:lstStyle/>
-          <a:p>
-            <a:r>
-              <a:rPr lang="en-US" sz="750" b="1">
-                <a:solidFill>
-                  <a:srgbClr val="FFCC66"/>
+            <a:r>
+              <a:rPr lang="en-US" sz="1000" b="1">
+                <a:solidFill>
+                  <a:srgbClr val="FFA533"/>
                 </a:solidFill>
                 <a:latin typeface="Aptos" panose="020B0004020202020204" pitchFamily="34" charset="0"/>
               </a:rPr>
-              <a:t>1. Start command</a:t>
-            </a:r>
-          </a:p>
-        </p:txBody>
-      </p:sp>
-      <p:sp>
-        <p:nvSpPr>
-          <p:cNvPr id="22" name="Matching P100 Map Detail Body">
-            <a:extLst>
-              <a:ext uri="{FF2B5EF4-FFF2-40B4-BE49-F238E27FC236}">
-                <a16:creationId xmlns:a16="http://schemas.microsoft.com/office/drawing/2014/main" id="{8B807CB2-EC82-3A18-09AF-01ADA23DEF0C}"/>
-              </a:ext>
-            </a:extLst>
-          </p:cNvPr>
-          <p:cNvSpPr txBox="1"/>
-          <p:nvPr/>
-        </p:nvSpPr>
-        <p:spPr>
-          <a:xfrm>
-            <a:off x="5067300" y="2870200"/>
-            <a:ext cx="1930400" cy="886397"/>
-          </a:xfrm>
-          <a:prstGeom prst="rect">
-            <a:avLst/>
-          </a:prstGeom>
-          <a:noFill/>
-        </p:spPr>
-        <p:txBody>
-          <a:bodyPr vert="horz" lIns="0" tIns="0" rIns="0" bIns="0" rtlCol="0">
-            <a:spAutoFit/>
-          </a:bodyPr>
-          <a:lstStyle/>
-          <a:p>
-            <a:r>
-              <a:rPr lang="en-US" sz="640">
-                <a:solidFill>
-                  <a:srgbClr val="F7F4F0"/>
-                </a:solidFill>
-                <a:latin typeface="Aptos" panose="020B0004020202020204" pitchFamily="34" charset="0"/>
-              </a:rPr>
-              <a:t>Command
-ioSender → RP23CNC: G65 P100 Q0
-Decision owner
-RP23CNC / grblHAL starts P100 locally.
-Not moved
-HX711 force samples stay inside the Pro Micro toolhead.</a:t>
+              <a:t>BACK</a:t>
             </a:r>
           </a:p>
         </p:txBody>
@@ -13325,7 +11719,7 @@
     <p:bg>
       <p:bgPr>
         <a:solidFill>
-          <a:srgbClr val="FFFFFF"/>
+          <a:srgbClr val="141A20"/>
         </a:solidFill>
         <a:effectLst/>
       </p:bgPr>
@@ -13344,278 +11738,6 @@
           <a:chExt cx="0" cy="0"/>
         </a:xfrm>
       </p:grpSpPr>
-      <p:sp>
-        <p:nvSpPr>
-          <p:cNvPr id="11" name="Rectangle 10">
-            <a:extLst>
-              <a:ext uri="{FF2B5EF4-FFF2-40B4-BE49-F238E27FC236}">
-                <a16:creationId xmlns:a16="http://schemas.microsoft.com/office/drawing/2014/main" id="{6E709A68-3D0F-4C65-A32B-A1E7C3547699}"/>
-              </a:ext>
-            </a:extLst>
-          </p:cNvPr>
-          <p:cNvSpPr>
-            <a:spLocks noGrp="1"/>
-          </p:cNvSpPr>
-          <p:nvPr/>
-        </p:nvSpPr>
-        <p:spPr>
-          <a:xfrm>
-            <a:off x="400050" y="342900"/>
-            <a:ext cx="5334000" cy="228600"/>
-          </a:xfrm>
-          <a:prstGeom prst="rect">
-            <a:avLst/>
-          </a:prstGeom>
-          <a:noFill/>
-          <a:ln w="0">
-            <a:noFill/>
-            <a:prstDash val="solid"/>
-          </a:ln>
-        </p:spPr>
-        <p:txBody>
-          <a:bodyPr lIns="0" tIns="0" rIns="0" bIns="0" anchor="t">
-            <a:normAutofit/>
-          </a:bodyPr>
-          <a:lstStyle/>
-          <a:p>
-            <a:pPr algn="l">
-              <a:defRPr sz="1050" b="1">
-                <a:solidFill>
-                  <a:srgbClr val="3D8DFF"/>
-                </a:solidFill>
-                <a:latin typeface="Helvetica Neue"/>
-                <a:ea typeface="Helvetica Neue"/>
-                <a:cs typeface="Helvetica Neue"/>
-              </a:defRPr>
-            </a:pPr>
-            <a:r>
-              <a:rPr sz="1050" b="1">
-                <a:solidFill>
-                  <a:srgbClr val="3D8DFF"/>
-                </a:solidFill>
-                <a:latin typeface="Helvetica Neue"/>
-                <a:ea typeface="Helvetica Neue"/>
-                <a:cs typeface="Helvetica Neue"/>
-              </a:rPr>
-              <a:t>P100 PROCESS MAP</a:t>
-            </a:r>
-          </a:p>
-        </p:txBody>
-      </p:sp>
-      <p:sp>
-        <p:nvSpPr>
-          <p:cNvPr id="2" name="Rectangle 1">
-            <a:extLst>
-              <a:ext uri="{FF2B5EF4-FFF2-40B4-BE49-F238E27FC236}">
-                <a16:creationId xmlns:a16="http://schemas.microsoft.com/office/drawing/2014/main" id="{E2B39075-10DC-4D61-AB16-D8458CE12055}"/>
-              </a:ext>
-            </a:extLst>
-          </p:cNvPr>
-          <p:cNvSpPr>
-            <a:spLocks noGrp="1"/>
-          </p:cNvSpPr>
-          <p:nvPr/>
-        </p:nvSpPr>
-        <p:spPr>
-          <a:xfrm>
-            <a:off x="400050" y="685800"/>
-            <a:ext cx="10668000" cy="590550"/>
-          </a:xfrm>
-          <a:prstGeom prst="rect">
-            <a:avLst/>
-          </a:prstGeom>
-          <a:noFill/>
-          <a:ln w="0">
-            <a:noFill/>
-            <a:prstDash val="solid"/>
-          </a:ln>
-        </p:spPr>
-        <p:txBody>
-          <a:bodyPr lIns="0" tIns="0" rIns="0" bIns="0" anchor="t">
-            <a:normAutofit/>
-          </a:bodyPr>
-          <a:lstStyle/>
-          <a:p>
-            <a:pPr algn="l">
-              <a:defRPr sz="2700" b="1">
-                <a:solidFill>
-                  <a:srgbClr val="000000"/>
-                </a:solidFill>
-                <a:latin typeface="Helvetica Neue"/>
-                <a:ea typeface="Helvetica Neue"/>
-                <a:cs typeface="Helvetica Neue"/>
-              </a:defRPr>
-            </a:pPr>
-            <a:r>
-              <a:rPr sz="2700" b="1">
-                <a:solidFill>
-                  <a:srgbClr val="000000"/>
-                </a:solidFill>
-                <a:latin typeface="Helvetica Neue"/>
-                <a:ea typeface="Helvetica Neue"/>
-                <a:cs typeface="Helvetica Neue"/>
-              </a:rPr>
-              <a:t>P100 is the repeatable startup routine before a drawing begins</a:t>
-            </a:r>
-          </a:p>
-        </p:txBody>
-      </p:sp>
-      <p:sp>
-        <p:nvSpPr>
-          <p:cNvPr id="3" name="Rectangle 2">
-            <a:extLst>
-              <a:ext uri="{FF2B5EF4-FFF2-40B4-BE49-F238E27FC236}">
-                <a16:creationId xmlns:a16="http://schemas.microsoft.com/office/drawing/2014/main" id="{4ACC2074-F48C-4553-A601-F6B254548577}"/>
-              </a:ext>
-            </a:extLst>
-          </p:cNvPr>
-          <p:cNvSpPr>
-            <a:spLocks noGrp="1"/>
-          </p:cNvSpPr>
-          <p:nvPr/>
-        </p:nvSpPr>
-        <p:spPr>
-          <a:xfrm>
-            <a:off x="400050" y="6343650"/>
-            <a:ext cx="11391900" cy="9525"/>
-          </a:xfrm>
-          <a:prstGeom prst="rect">
-            <a:avLst/>
-          </a:prstGeom>
-          <a:solidFill>
-            <a:srgbClr val="B8BCC4"/>
-          </a:solidFill>
-          <a:ln w="0">
-            <a:solidFill>
-              <a:srgbClr val="B8BCC4"/>
-            </a:solidFill>
-            <a:prstDash val="solid"/>
-          </a:ln>
-        </p:spPr>
-        <p:txBody>
-          <a:bodyPr/>
-          <a:lstStyle/>
-          <a:p>
-            <a:endParaRPr lang="en-US"/>
-          </a:p>
-        </p:txBody>
-      </p:sp>
-      <p:sp>
-        <p:nvSpPr>
-          <p:cNvPr id="4" name="Rectangle 3">
-            <a:extLst>
-              <a:ext uri="{FF2B5EF4-FFF2-40B4-BE49-F238E27FC236}">
-                <a16:creationId xmlns:a16="http://schemas.microsoft.com/office/drawing/2014/main" id="{6A21AB0F-01B7-4655-B05E-1D59444D1E2F}"/>
-              </a:ext>
-            </a:extLst>
-          </p:cNvPr>
-          <p:cNvSpPr>
-            <a:spLocks noGrp="1"/>
-          </p:cNvSpPr>
-          <p:nvPr/>
-        </p:nvSpPr>
-        <p:spPr>
-          <a:xfrm>
-            <a:off x="400050" y="6477000"/>
-            <a:ext cx="6191250" cy="171450"/>
-          </a:xfrm>
-          <a:prstGeom prst="rect">
-            <a:avLst/>
-          </a:prstGeom>
-          <a:noFill/>
-          <a:ln w="0">
-            <a:noFill/>
-            <a:prstDash val="solid"/>
-          </a:ln>
-        </p:spPr>
-        <p:txBody>
-          <a:bodyPr lIns="0" tIns="0" rIns="0" bIns="0" anchor="t">
-            <a:normAutofit/>
-          </a:bodyPr>
-          <a:lstStyle/>
-          <a:p>
-            <a:pPr algn="l">
-              <a:defRPr sz="900" b="0">
-                <a:solidFill>
-                  <a:srgbClr val="59616B"/>
-                </a:solidFill>
-                <a:latin typeface="Helvetica Neue"/>
-                <a:ea typeface="Helvetica Neue"/>
-                <a:cs typeface="Helvetica Neue"/>
-              </a:defRPr>
-            </a:pPr>
-            <a:r>
-              <a:rPr sz="900" b="0">
-                <a:solidFill>
-                  <a:srgbClr val="59616B"/>
-                </a:solidFill>
-                <a:latin typeface="Helvetica Neue"/>
-                <a:ea typeface="Helvetica Neue"/>
-                <a:cs typeface="Helvetica Neue"/>
-              </a:rPr>
-              <a:t>THETA PEN PLOTTER  •  SUMMER PROGRESS UPDATE</a:t>
-            </a:r>
-          </a:p>
-        </p:txBody>
-      </p:sp>
-      <p:sp>
-        <p:nvSpPr>
-          <p:cNvPr id="5" name="Rectangle 4">
-            <a:extLst>
-              <a:ext uri="{FF2B5EF4-FFF2-40B4-BE49-F238E27FC236}">
-                <a16:creationId xmlns:a16="http://schemas.microsoft.com/office/drawing/2014/main" id="{38C47507-02D7-4895-8794-10C0666EFEA1}"/>
-              </a:ext>
-            </a:extLst>
-          </p:cNvPr>
-          <p:cNvSpPr>
-            <a:spLocks noGrp="1"/>
-          </p:cNvSpPr>
-          <p:nvPr/>
-        </p:nvSpPr>
-        <p:spPr>
-          <a:xfrm>
-            <a:off x="11287125" y="6477000"/>
-            <a:ext cx="495300" cy="171450"/>
-          </a:xfrm>
-          <a:prstGeom prst="rect">
-            <a:avLst/>
-          </a:prstGeom>
-          <a:noFill/>
-          <a:ln w="0">
-            <a:noFill/>
-            <a:prstDash val="solid"/>
-          </a:ln>
-        </p:spPr>
-        <p:txBody>
-          <a:bodyPr lIns="0" tIns="0" rIns="0" bIns="0" anchor="t">
-            <a:normAutofit/>
-          </a:bodyPr>
-          <a:lstStyle/>
-          <a:p>
-            <a:pPr algn="r">
-              <a:defRPr sz="900" b="0">
-                <a:solidFill>
-                  <a:srgbClr val="59616B"/>
-                </a:solidFill>
-                <a:latin typeface="Helvetica Neue"/>
-                <a:ea typeface="Helvetica Neue"/>
-                <a:cs typeface="Helvetica Neue"/>
-              </a:defRPr>
-            </a:pPr>
-            <a:r>
-              <a:rPr sz="900" b="0">
-                <a:solidFill>
-                  <a:srgbClr val="59616B"/>
-                </a:solidFill>
-                <a:latin typeface="Helvetica Neue"/>
-                <a:ea typeface="Helvetica Neue"/>
-                <a:cs typeface="Helvetica Neue"/>
-              </a:rPr>
-              <a:t>5</a:t>
-            </a:r>
-          </a:p>
-        </p:txBody>
-      </p:sp>
       <p:pic>
         <p:nvPicPr>
           <p:cNvPr id="16" name="Picture 15"/>
@@ -13630,8 +11752,8 @@
         </p:blipFill>
         <p:spPr>
           <a:xfrm>
-            <a:off x="951442" y="1381125"/>
-            <a:ext cx="6841067" cy="4810125"/>
+            <a:off x="-1" y="-1"/>
+            <a:ext cx="9753600" cy="6858000"/>
           </a:xfrm>
           <a:prstGeom prst="rect">
             <a:avLst/>
@@ -13640,72 +11762,6 @@
       </p:pic>
       <p:sp>
         <p:nvSpPr>
-          <p:cNvPr id="10" name="Rectangle 9">
-            <a:extLst>
-              <a:ext uri="{FF2B5EF4-FFF2-40B4-BE49-F238E27FC236}">
-                <a16:creationId xmlns:a16="http://schemas.microsoft.com/office/drawing/2014/main" id="{96D81758-CD88-4EF5-A7F6-B3CD03B93DBF}"/>
-              </a:ext>
-            </a:extLst>
-          </p:cNvPr>
-          <p:cNvSpPr>
-            <a:spLocks noGrp="1"/>
-          </p:cNvSpPr>
-          <p:nvPr/>
-        </p:nvSpPr>
-        <p:spPr>
-          <a:xfrm>
-            <a:off x="8572500" y="3238500"/>
-            <a:ext cx="2540000" cy="508000"/>
-          </a:xfrm>
-          <a:prstGeom prst="rect">
-            <a:avLst/>
-          </a:prstGeom>
-          <a:noFill/>
-          <a:ln w="0">
-            <a:noFill/>
-            <a:prstDash val="solid"/>
-          </a:ln>
-        </p:spPr>
-        <p:txBody>
-          <a:bodyPr lIns="0" tIns="0" rIns="0" bIns="0" anchor="t">
-            <a:normAutofit/>
-          </a:bodyPr>
-          <a:lstStyle/>
-          <a:p>
-            <a:pPr algn="l">
-              <a:defRPr sz="1050" b="0">
-                <a:solidFill>
-                  <a:srgbClr val="59616B"/>
-                </a:solidFill>
-                <a:latin typeface="Helvetica Neue"/>
-                <a:ea typeface="Helvetica Neue"/>
-                <a:cs typeface="Helvetica Neue"/>
-              </a:defRPr>
-            </a:pPr>
-            <a:r>
-              <a:rPr lang="en-US" sz="1100" b="0">
-                <a:solidFill>
-                  <a:srgbClr val="80726B"/>
-                </a:solidFill>
-                <a:latin typeface="Helvetica Neue"/>
-                <a:ea typeface="Helvetica Neue"/>
-                <a:cs typeface="Helvetica Neue"/>
-              </a:rPr>
-              <a:t>Detail shown inside the map. Hover or click another process to compare.</a:t>
-            </a:r>
-            <a:endParaRPr sz="1100" b="0">
-              <a:solidFill>
-                <a:srgbClr val="80726B"/>
-              </a:solidFill>
-              <a:latin typeface="Helvetica Neue"/>
-              <a:ea typeface="Helvetica Neue"/>
-              <a:cs typeface="Helvetica Neue"/>
-            </a:endParaRPr>
-          </a:p>
-        </p:txBody>
-      </p:sp>
-      <p:sp>
-        <p:nvSpPr>
           <p:cNvPr id="6" name="P100 Step 2 Highlight">
             <a:extLst>
               <a:ext uri="{FF2B5EF4-FFF2-40B4-BE49-F238E27FC236}">
@@ -13718,8 +11774,8 @@
         </p:nvSpPr>
         <p:spPr>
           <a:xfrm>
-            <a:off x="1628775" y="3105150"/>
-            <a:ext cx="3238500" cy="400050"/>
+            <a:off x="964194" y="2458016"/>
+            <a:ext cx="4617267" cy="570368"/>
           </a:xfrm>
           <a:prstGeom prst="rect">
             <a:avLst/>
@@ -13756,18 +11812,18 @@
           <a:lstStyle/>
           <a:p>
             <a:pPr algn="ctr"/>
-            <a:endParaRPr lang="en-US"/>
-          </a:p>
-        </p:txBody>
-      </p:sp>
-      <p:sp>
-        <p:nvSpPr>
-          <p:cNvPr id="12" name="P100 Back Button">
+            <a:endParaRPr lang="en-US" sz="2566"/>
+          </a:p>
+        </p:txBody>
+      </p:sp>
+      <p:sp>
+        <p:nvSpPr>
+          <p:cNvPr id="13" name="P100 Step 1 Hit Area">
             <a:hlinkClick r:id="rId4" action="ppaction://hlinksldjump"/>
             <a:hlinkHover r:id="rId4" action="ppaction://hlinksldjump"/>
             <a:extLst>
               <a:ext uri="{FF2B5EF4-FFF2-40B4-BE49-F238E27FC236}">
-                <a16:creationId xmlns:a16="http://schemas.microsoft.com/office/drawing/2014/main" id="{B80E63A2-D247-5BDD-7416-87D65F24DF1A}"/>
+                <a16:creationId xmlns:a16="http://schemas.microsoft.com/office/drawing/2014/main" id="{FB3E871B-5449-B11D-191B-9BCE52C1BC26}"/>
               </a:ext>
             </a:extLst>
           </p:cNvPr>
@@ -13776,20 +11832,34 @@
         </p:nvSpPr>
         <p:spPr>
           <a:xfrm>
-            <a:off x="9429750" y="5905500"/>
-            <a:ext cx="2000250" cy="285750"/>
-          </a:xfrm>
-          <a:prstGeom prst="roundRect">
+            <a:off x="964194" y="1616044"/>
+            <a:ext cx="4617267" cy="570368"/>
+          </a:xfrm>
+          <a:prstGeom prst="rect">
             <a:avLst/>
           </a:prstGeom>
           <a:solidFill>
-            <a:srgbClr val="FFF9F3"/>
+            <a:schemeClr val="accent1">
+              <a:alpha val="0"/>
+            </a:schemeClr>
           </a:solidFill>
-          <a:ln w="12700">
-            <a:solidFill>
-              <a:srgbClr val="FF8833"/>
-            </a:solidFill>
-          </a:ln>
+          <a:ln w="19050">
+            <a:noFill/>
+            <a:prstDash val="solid"/>
+          </a:ln>
+          <a:effectLst/>
+          <a:extLst>
+            <a:ext uri="{91240B29-F687-4F45-9708-019B960494DF}">
+              <a14:hiddenLine xmlns:a14="http://schemas.microsoft.com/office/drawing/2010/main" w="19050">
+                <a:solidFill>
+                  <a:schemeClr val="accent1">
+                    <a:shade val="15000"/>
+                  </a:schemeClr>
+                </a:solidFill>
+                <a:prstDash val="solid"/>
+              </a14:hiddenLine>
+            </a:ext>
+          </a:extLst>
         </p:spPr>
         <p:style>
           <a:lnRef idx="2">
@@ -13812,25 +11882,18 @@
           <a:lstStyle/>
           <a:p>
             <a:pPr algn="ctr"/>
-            <a:r>
-              <a:rPr lang="en-US" sz="1200" b="1">
-                <a:solidFill>
-                  <a:srgbClr val="FF8833"/>
-                </a:solidFill>
-              </a:rPr>
-              <a:t>BACK TO OVERVIEW</a:t>
-            </a:r>
-          </a:p>
-        </p:txBody>
-      </p:sp>
-      <p:sp>
-        <p:nvSpPr>
-          <p:cNvPr id="13" name="P100 Step 1 Hit Area">
+            <a:endParaRPr lang="en-US" sz="2566"/>
+          </a:p>
+        </p:txBody>
+      </p:sp>
+      <p:sp>
+        <p:nvSpPr>
+          <p:cNvPr id="14" name="P100 Step 2 Hit Area">
             <a:hlinkClick r:id="rId5" action="ppaction://hlinksldjump"/>
             <a:hlinkHover r:id="rId5" action="ppaction://hlinksldjump"/>
             <a:extLst>
               <a:ext uri="{FF2B5EF4-FFF2-40B4-BE49-F238E27FC236}">
-                <a16:creationId xmlns:a16="http://schemas.microsoft.com/office/drawing/2014/main" id="{FB3E871B-5449-B11D-191B-9BCE52C1BC26}"/>
+                <a16:creationId xmlns:a16="http://schemas.microsoft.com/office/drawing/2014/main" id="{69B28F5D-9DBA-B653-FEC4-93D4B11BBA08}"/>
               </a:ext>
             </a:extLst>
           </p:cNvPr>
@@ -13839,8 +11902,8 @@
         </p:nvSpPr>
         <p:spPr>
           <a:xfrm>
-            <a:off x="1628775" y="2514600"/>
-            <a:ext cx="3238500" cy="400050"/>
+            <a:off x="964194" y="2458016"/>
+            <a:ext cx="4617267" cy="570368"/>
           </a:xfrm>
           <a:prstGeom prst="rect">
             <a:avLst/>
@@ -13889,18 +11952,18 @@
           <a:lstStyle/>
           <a:p>
             <a:pPr algn="ctr"/>
-            <a:endParaRPr lang="en-US"/>
-          </a:p>
-        </p:txBody>
-      </p:sp>
-      <p:sp>
-        <p:nvSpPr>
-          <p:cNvPr id="14" name="P100 Step 2 Hit Area">
+            <a:endParaRPr lang="en-US" sz="2566"/>
+          </a:p>
+        </p:txBody>
+      </p:sp>
+      <p:sp>
+        <p:nvSpPr>
+          <p:cNvPr id="15" name="P100 Step 3 Hit Area">
             <a:hlinkClick r:id="rId6" action="ppaction://hlinksldjump"/>
             <a:hlinkHover r:id="rId6" action="ppaction://hlinksldjump"/>
             <a:extLst>
               <a:ext uri="{FF2B5EF4-FFF2-40B4-BE49-F238E27FC236}">
-                <a16:creationId xmlns:a16="http://schemas.microsoft.com/office/drawing/2014/main" id="{69B28F5D-9DBA-B653-FEC4-93D4B11BBA08}"/>
+                <a16:creationId xmlns:a16="http://schemas.microsoft.com/office/drawing/2014/main" id="{A64CB45D-EBD0-3491-7A52-C2392361F9C3}"/>
               </a:ext>
             </a:extLst>
           </p:cNvPr>
@@ -13909,8 +11972,8 @@
         </p:nvSpPr>
         <p:spPr>
           <a:xfrm>
-            <a:off x="1628775" y="3105150"/>
-            <a:ext cx="3238500" cy="400050"/>
+            <a:off x="964194" y="3299988"/>
+            <a:ext cx="4617267" cy="570368"/>
           </a:xfrm>
           <a:prstGeom prst="rect">
             <a:avLst/>
@@ -13959,18 +12022,18 @@
           <a:lstStyle/>
           <a:p>
             <a:pPr algn="ctr"/>
-            <a:endParaRPr lang="en-US"/>
-          </a:p>
-        </p:txBody>
-      </p:sp>
-      <p:sp>
-        <p:nvSpPr>
-          <p:cNvPr id="15" name="P100 Step 3 Hit Area">
+            <a:endParaRPr lang="en-US" sz="2566"/>
+          </a:p>
+        </p:txBody>
+      </p:sp>
+      <p:sp>
+        <p:nvSpPr>
+          <p:cNvPr id="17" name="P100 Step 4 Hit Area">
             <a:hlinkClick r:id="rId7" action="ppaction://hlinksldjump"/>
             <a:hlinkHover r:id="rId7" action="ppaction://hlinksldjump"/>
             <a:extLst>
               <a:ext uri="{FF2B5EF4-FFF2-40B4-BE49-F238E27FC236}">
-                <a16:creationId xmlns:a16="http://schemas.microsoft.com/office/drawing/2014/main" id="{A64CB45D-EBD0-3491-7A52-C2392361F9C3}"/>
+                <a16:creationId xmlns:a16="http://schemas.microsoft.com/office/drawing/2014/main" id="{03E1BE0F-05DC-6A92-6ABD-AEDDCFD725BD}"/>
               </a:ext>
             </a:extLst>
           </p:cNvPr>
@@ -13979,8 +12042,8 @@
         </p:nvSpPr>
         <p:spPr>
           <a:xfrm>
-            <a:off x="1628775" y="3695700"/>
-            <a:ext cx="3238500" cy="400050"/>
+            <a:off x="964194" y="4141960"/>
+            <a:ext cx="4617267" cy="570368"/>
           </a:xfrm>
           <a:prstGeom prst="rect">
             <a:avLst/>
@@ -14029,18 +12092,18 @@
           <a:lstStyle/>
           <a:p>
             <a:pPr algn="ctr"/>
-            <a:endParaRPr lang="en-US"/>
-          </a:p>
-        </p:txBody>
-      </p:sp>
-      <p:sp>
-        <p:nvSpPr>
-          <p:cNvPr id="17" name="P100 Step 4 Hit Area">
+            <a:endParaRPr lang="en-US" sz="2566"/>
+          </a:p>
+        </p:txBody>
+      </p:sp>
+      <p:sp>
+        <p:nvSpPr>
+          <p:cNvPr id="18" name="P100 Step 5 Hit Area">
             <a:hlinkClick r:id="rId8" action="ppaction://hlinksldjump"/>
             <a:hlinkHover r:id="rId8" action="ppaction://hlinksldjump"/>
             <a:extLst>
               <a:ext uri="{FF2B5EF4-FFF2-40B4-BE49-F238E27FC236}">
-                <a16:creationId xmlns:a16="http://schemas.microsoft.com/office/drawing/2014/main" id="{03E1BE0F-05DC-6A92-6ABD-AEDDCFD725BD}"/>
+                <a16:creationId xmlns:a16="http://schemas.microsoft.com/office/drawing/2014/main" id="{13BEC0F0-DC05-D29D-C036-21F0ED96E4B0}"/>
               </a:ext>
             </a:extLst>
           </p:cNvPr>
@@ -14049,8 +12112,8 @@
         </p:nvSpPr>
         <p:spPr>
           <a:xfrm>
-            <a:off x="1628775" y="4286250"/>
-            <a:ext cx="3238500" cy="400050"/>
+            <a:off x="964194" y="4983933"/>
+            <a:ext cx="4617267" cy="570368"/>
           </a:xfrm>
           <a:prstGeom prst="rect">
             <a:avLst/>
@@ -14099,18 +12162,18 @@
           <a:lstStyle/>
           <a:p>
             <a:pPr algn="ctr"/>
-            <a:endParaRPr lang="en-US"/>
-          </a:p>
-        </p:txBody>
-      </p:sp>
-      <p:sp>
-        <p:nvSpPr>
-          <p:cNvPr id="18" name="P100 Step 5 Hit Area">
+            <a:endParaRPr lang="en-US" sz="2566"/>
+          </a:p>
+        </p:txBody>
+      </p:sp>
+      <p:sp>
+        <p:nvSpPr>
+          <p:cNvPr id="19" name="P100 Step 6 Hit Area">
             <a:hlinkClick r:id="rId9" action="ppaction://hlinksldjump"/>
             <a:hlinkHover r:id="rId9" action="ppaction://hlinksldjump"/>
             <a:extLst>
               <a:ext uri="{FF2B5EF4-FFF2-40B4-BE49-F238E27FC236}">
-                <a16:creationId xmlns:a16="http://schemas.microsoft.com/office/drawing/2014/main" id="{13BEC0F0-DC05-D29D-C036-21F0ED96E4B0}"/>
+                <a16:creationId xmlns:a16="http://schemas.microsoft.com/office/drawing/2014/main" id="{68E6EFC2-E3EF-CFBF-6F39-43890952236E}"/>
               </a:ext>
             </a:extLst>
           </p:cNvPr>
@@ -14119,8 +12182,8 @@
         </p:nvSpPr>
         <p:spPr>
           <a:xfrm>
-            <a:off x="1628775" y="4876800"/>
-            <a:ext cx="3238500" cy="400050"/>
+            <a:off x="964194" y="5825905"/>
+            <a:ext cx="4617267" cy="570368"/>
           </a:xfrm>
           <a:prstGeom prst="rect">
             <a:avLst/>
@@ -14169,18 +12232,16 @@
           <a:lstStyle/>
           <a:p>
             <a:pPr algn="ctr"/>
-            <a:endParaRPr lang="en-US"/>
-          </a:p>
-        </p:txBody>
-      </p:sp>
-      <p:sp>
-        <p:nvSpPr>
-          <p:cNvPr id="19" name="P100 Step 6 Hit Area">
-            <a:hlinkClick r:id="rId10" action="ppaction://hlinksldjump"/>
-            <a:hlinkHover r:id="rId10" action="ppaction://hlinksldjump"/>
-            <a:extLst>
-              <a:ext uri="{FF2B5EF4-FFF2-40B4-BE49-F238E27FC236}">
-                <a16:creationId xmlns:a16="http://schemas.microsoft.com/office/drawing/2014/main" id="{68E6EFC2-E3EF-CFBF-6F39-43890952236E}"/>
+            <a:endParaRPr lang="en-US" sz="2566"/>
+          </a:p>
+        </p:txBody>
+      </p:sp>
+      <p:sp>
+        <p:nvSpPr>
+          <p:cNvPr id="20" name="Matching P100 Map Detail Background">
+            <a:extLst>
+              <a:ext uri="{FF2B5EF4-FFF2-40B4-BE49-F238E27FC236}">
+                <a16:creationId xmlns:a16="http://schemas.microsoft.com/office/drawing/2014/main" id="{DB4135CC-F384-E5B7-5CBA-F519475E9B21}"/>
               </a:ext>
             </a:extLst>
           </p:cNvPr>
@@ -14189,34 +12250,20 @@
         </p:nvSpPr>
         <p:spPr>
           <a:xfrm>
-            <a:off x="1628775" y="5467350"/>
-            <a:ext cx="3238500" cy="400050"/>
+            <a:off x="5703683" y="1670364"/>
+            <a:ext cx="3078178" cy="2245259"/>
           </a:xfrm>
           <a:prstGeom prst="rect">
             <a:avLst/>
           </a:prstGeom>
           <a:solidFill>
-            <a:schemeClr val="accent1">
-              <a:alpha val="0"/>
-            </a:schemeClr>
+            <a:srgbClr val="2B251F"/>
           </a:solidFill>
-          <a:ln w="19050">
-            <a:noFill/>
-            <a:prstDash val="solid"/>
-          </a:ln>
-          <a:effectLst/>
-          <a:extLst>
-            <a:ext uri="{91240B29-F687-4F45-9708-019B960494DF}">
-              <a14:hiddenLine xmlns:a14="http://schemas.microsoft.com/office/drawing/2010/main" w="19050">
-                <a:solidFill>
-                  <a:schemeClr val="accent1">
-                    <a:shade val="15000"/>
-                  </a:schemeClr>
-                </a:solidFill>
-                <a:prstDash val="solid"/>
-              </a14:hiddenLine>
-            </a:ext>
-          </a:extLst>
+          <a:ln w="8890">
+            <a:solidFill>
+              <a:srgbClr val="6E6052"/>
+            </a:solidFill>
+          </a:ln>
         </p:spPr>
         <p:style>
           <a:lnRef idx="2">
@@ -14239,16 +12286,103 @@
           <a:lstStyle/>
           <a:p>
             <a:pPr algn="ctr"/>
-            <a:endParaRPr lang="en-US"/>
-          </a:p>
-        </p:txBody>
-      </p:sp>
-      <p:sp>
-        <p:nvSpPr>
-          <p:cNvPr id="20" name="Matching P100 Map Detail Background">
-            <a:extLst>
-              <a:ext uri="{FF2B5EF4-FFF2-40B4-BE49-F238E27FC236}">
-                <a16:creationId xmlns:a16="http://schemas.microsoft.com/office/drawing/2014/main" id="{DB4135CC-F384-E5B7-5CBA-F519475E9B21}"/>
+            <a:endParaRPr lang="en-US" sz="2566"/>
+          </a:p>
+        </p:txBody>
+      </p:sp>
+      <p:sp>
+        <p:nvSpPr>
+          <p:cNvPr id="21" name="Matching P100 Map Detail Title">
+            <a:extLst>
+              <a:ext uri="{FF2B5EF4-FFF2-40B4-BE49-F238E27FC236}">
+                <a16:creationId xmlns:a16="http://schemas.microsoft.com/office/drawing/2014/main" id="{8344B0EB-E729-240C-B272-5DC27A7A0657}"/>
+              </a:ext>
+            </a:extLst>
+          </p:cNvPr>
+          <p:cNvSpPr txBox="1"/>
+          <p:nvPr/>
+        </p:nvSpPr>
+        <p:spPr>
+          <a:xfrm>
+            <a:off x="5866645" y="1833327"/>
+            <a:ext cx="2752254" cy="164554"/>
+          </a:xfrm>
+          <a:prstGeom prst="rect">
+            <a:avLst/>
+          </a:prstGeom>
+          <a:noFill/>
+        </p:spPr>
+        <p:txBody>
+          <a:bodyPr vert="horz" lIns="0" tIns="0" rIns="0" bIns="0" rtlCol="0">
+            <a:spAutoFit/>
+          </a:bodyPr>
+          <a:lstStyle/>
+          <a:p>
+            <a:r>
+              <a:rPr lang="en-US" sz="1069" b="1">
+                <a:solidFill>
+                  <a:srgbClr val="FFCC66"/>
+                </a:solidFill>
+                <a:latin typeface="Aptos" panose="020B0004020202020204" pitchFamily="34" charset="0"/>
+              </a:rPr>
+              <a:t>2. Toolhead home</a:t>
+            </a:r>
+          </a:p>
+        </p:txBody>
+      </p:sp>
+      <p:sp>
+        <p:nvSpPr>
+          <p:cNvPr id="22" name="Matching P100 Map Detail Body">
+            <a:extLst>
+              <a:ext uri="{FF2B5EF4-FFF2-40B4-BE49-F238E27FC236}">
+                <a16:creationId xmlns:a16="http://schemas.microsoft.com/office/drawing/2014/main" id="{8382FCCD-CCED-A0F4-474A-19C33B23658D}"/>
+              </a:ext>
+            </a:extLst>
+          </p:cNvPr>
+          <p:cNvSpPr txBox="1"/>
+          <p:nvPr/>
+        </p:nvSpPr>
+        <p:spPr>
+          <a:xfrm>
+            <a:off x="5866645" y="2123038"/>
+            <a:ext cx="2752254" cy="1123354"/>
+          </a:xfrm>
+          <a:prstGeom prst="rect">
+            <a:avLst/>
+          </a:prstGeom>
+          <a:noFill/>
+        </p:spPr>
+        <p:txBody>
+          <a:bodyPr vert="horz" lIns="0" tIns="0" rIns="0" bIns="0" rtlCol="0">
+            <a:spAutoFit/>
+          </a:bodyPr>
+          <a:lstStyle/>
+          <a:p>
+            <a:r>
+              <a:rPr lang="en-US" sz="912">
+                <a:solidFill>
+                  <a:srgbClr val="F7F4F0"/>
+                </a:solidFill>
+                <a:latin typeface="Aptos" panose="020B0004020202020204" pitchFamily="34" charset="0"/>
+              </a:rPr>
+              <a:t>Request
+P100 asserts GP28.
+Pro Micro action
+N20 retracts until GP2 confirms LIFT_HOME.
+Reply
+GP27 ready, or a timeout becomes a fault.</a:t>
+            </a:r>
+          </a:p>
+        </p:txBody>
+      </p:sp>
+      <p:sp>
+        <p:nvSpPr>
+          <p:cNvPr id="7" name="P100 Back Button">
+            <a:hlinkClick r:id="rId10" action="ppaction://hlinksldjump"/>
+            <a:hlinkHover r:id="rId10" action="ppaction://hlinksldjump"/>
+            <a:extLst>
+              <a:ext uri="{FF2B5EF4-FFF2-40B4-BE49-F238E27FC236}">
+                <a16:creationId xmlns:a16="http://schemas.microsoft.com/office/drawing/2014/main" id="{7F1B5C27-86DD-3109-8218-5AB6604396E4}"/>
               </a:ext>
             </a:extLst>
           </p:cNvPr>
@@ -14257,18 +12391,18 @@
         </p:nvSpPr>
         <p:spPr>
           <a:xfrm>
-            <a:off x="4953000" y="2552700"/>
-            <a:ext cx="2159000" cy="1574800"/>
-          </a:xfrm>
-          <a:prstGeom prst="rect">
+            <a:off x="10058400" y="6172200"/>
+            <a:ext cx="1714500" cy="304800"/>
+          </a:xfrm>
+          <a:prstGeom prst="roundRect">
             <a:avLst/>
           </a:prstGeom>
           <a:solidFill>
-            <a:srgbClr val="2B251F"/>
+            <a:srgbClr val="F4F4F4"/>
           </a:solidFill>
-          <a:ln w="8890">
+          <a:ln w="12700">
             <a:solidFill>
-              <a:srgbClr val="6E6052"/>
+              <a:srgbClr val="FFA533"/>
             </a:solidFill>
           </a:ln>
         </p:spPr>
@@ -14293,91 +12427,14 @@
           <a:lstStyle/>
           <a:p>
             <a:pPr algn="ctr"/>
-            <a:endParaRPr lang="en-US"/>
-          </a:p>
-        </p:txBody>
-      </p:sp>
-      <p:sp>
-        <p:nvSpPr>
-          <p:cNvPr id="21" name="Matching P100 Map Detail Title">
-            <a:extLst>
-              <a:ext uri="{FF2B5EF4-FFF2-40B4-BE49-F238E27FC236}">
-                <a16:creationId xmlns:a16="http://schemas.microsoft.com/office/drawing/2014/main" id="{8344B0EB-E729-240C-B272-5DC27A7A0657}"/>
-              </a:ext>
-            </a:extLst>
-          </p:cNvPr>
-          <p:cNvSpPr txBox="1"/>
-          <p:nvPr/>
-        </p:nvSpPr>
-        <p:spPr>
-          <a:xfrm>
-            <a:off x="5067300" y="2667000"/>
-            <a:ext cx="1930400" cy="115416"/>
-          </a:xfrm>
-          <a:prstGeom prst="rect">
-            <a:avLst/>
-          </a:prstGeom>
-          <a:noFill/>
-        </p:spPr>
-        <p:txBody>
-          <a:bodyPr vert="horz" lIns="0" tIns="0" rIns="0" bIns="0" rtlCol="0">
-            <a:spAutoFit/>
-          </a:bodyPr>
-          <a:lstStyle/>
-          <a:p>
-            <a:r>
-              <a:rPr lang="en-US" sz="750" b="1">
-                <a:solidFill>
-                  <a:srgbClr val="FFCC66"/>
+            <a:r>
+              <a:rPr lang="en-US" sz="1000" b="1">
+                <a:solidFill>
+                  <a:srgbClr val="FFA533"/>
                 </a:solidFill>
                 <a:latin typeface="Aptos" panose="020B0004020202020204" pitchFamily="34" charset="0"/>
               </a:rPr>
-              <a:t>2. Toolhead home</a:t>
-            </a:r>
-          </a:p>
-        </p:txBody>
-      </p:sp>
-      <p:sp>
-        <p:nvSpPr>
-          <p:cNvPr id="22" name="Matching P100 Map Detail Body">
-            <a:extLst>
-              <a:ext uri="{FF2B5EF4-FFF2-40B4-BE49-F238E27FC236}">
-                <a16:creationId xmlns:a16="http://schemas.microsoft.com/office/drawing/2014/main" id="{8382FCCD-CCED-A0F4-474A-19C33B23658D}"/>
-              </a:ext>
-            </a:extLst>
-          </p:cNvPr>
-          <p:cNvSpPr txBox="1"/>
-          <p:nvPr/>
-        </p:nvSpPr>
-        <p:spPr>
-          <a:xfrm>
-            <a:off x="5067300" y="2870200"/>
-            <a:ext cx="1930400" cy="787908"/>
-          </a:xfrm>
-          <a:prstGeom prst="rect">
-            <a:avLst/>
-          </a:prstGeom>
-          <a:noFill/>
-        </p:spPr>
-        <p:txBody>
-          <a:bodyPr vert="horz" lIns="0" tIns="0" rIns="0" bIns="0" rtlCol="0">
-            <a:spAutoFit/>
-          </a:bodyPr>
-          <a:lstStyle/>
-          <a:p>
-            <a:r>
-              <a:rPr lang="en-US" sz="640">
-                <a:solidFill>
-                  <a:srgbClr val="F7F4F0"/>
-                </a:solidFill>
-                <a:latin typeface="Aptos" panose="020B0004020202020204" pitchFamily="34" charset="0"/>
-              </a:rPr>
-              <a:t>Request
-P100 asserts GP28.
-Pro Micro action
-N20 retracts until GP2 confirms LIFT_HOME.
-Reply
-GP27 ready, or a timeout becomes a fault.</a:t>
+              <a:t>BACK</a:t>
             </a:r>
           </a:p>
         </p:txBody>
@@ -14401,7 +12458,7 @@
     <p:bg>
       <p:bgPr>
         <a:solidFill>
-          <a:srgbClr val="FFFFFF"/>
+          <a:srgbClr val="141A20"/>
         </a:solidFill>
         <a:effectLst/>
       </p:bgPr>
@@ -14420,278 +12477,6 @@
           <a:chExt cx="0" cy="0"/>
         </a:xfrm>
       </p:grpSpPr>
-      <p:sp>
-        <p:nvSpPr>
-          <p:cNvPr id="11" name="Rectangle 10">
-            <a:extLst>
-              <a:ext uri="{FF2B5EF4-FFF2-40B4-BE49-F238E27FC236}">
-                <a16:creationId xmlns:a16="http://schemas.microsoft.com/office/drawing/2014/main" id="{6E709A68-3D0F-4C65-A32B-A1E7C3547699}"/>
-              </a:ext>
-            </a:extLst>
-          </p:cNvPr>
-          <p:cNvSpPr>
-            <a:spLocks noGrp="1"/>
-          </p:cNvSpPr>
-          <p:nvPr/>
-        </p:nvSpPr>
-        <p:spPr>
-          <a:xfrm>
-            <a:off x="400050" y="342900"/>
-            <a:ext cx="5334000" cy="228600"/>
-          </a:xfrm>
-          <a:prstGeom prst="rect">
-            <a:avLst/>
-          </a:prstGeom>
-          <a:noFill/>
-          <a:ln w="0">
-            <a:noFill/>
-            <a:prstDash val="solid"/>
-          </a:ln>
-        </p:spPr>
-        <p:txBody>
-          <a:bodyPr lIns="0" tIns="0" rIns="0" bIns="0" anchor="t">
-            <a:normAutofit/>
-          </a:bodyPr>
-          <a:lstStyle/>
-          <a:p>
-            <a:pPr algn="l">
-              <a:defRPr sz="1050" b="1">
-                <a:solidFill>
-                  <a:srgbClr val="3D8DFF"/>
-                </a:solidFill>
-                <a:latin typeface="Helvetica Neue"/>
-                <a:ea typeface="Helvetica Neue"/>
-                <a:cs typeface="Helvetica Neue"/>
-              </a:defRPr>
-            </a:pPr>
-            <a:r>
-              <a:rPr sz="1050" b="1">
-                <a:solidFill>
-                  <a:srgbClr val="3D8DFF"/>
-                </a:solidFill>
-                <a:latin typeface="Helvetica Neue"/>
-                <a:ea typeface="Helvetica Neue"/>
-                <a:cs typeface="Helvetica Neue"/>
-              </a:rPr>
-              <a:t>P100 PROCESS MAP</a:t>
-            </a:r>
-          </a:p>
-        </p:txBody>
-      </p:sp>
-      <p:sp>
-        <p:nvSpPr>
-          <p:cNvPr id="2" name="Rectangle 1">
-            <a:extLst>
-              <a:ext uri="{FF2B5EF4-FFF2-40B4-BE49-F238E27FC236}">
-                <a16:creationId xmlns:a16="http://schemas.microsoft.com/office/drawing/2014/main" id="{E2B39075-10DC-4D61-AB16-D8458CE12055}"/>
-              </a:ext>
-            </a:extLst>
-          </p:cNvPr>
-          <p:cNvSpPr>
-            <a:spLocks noGrp="1"/>
-          </p:cNvSpPr>
-          <p:nvPr/>
-        </p:nvSpPr>
-        <p:spPr>
-          <a:xfrm>
-            <a:off x="400050" y="685800"/>
-            <a:ext cx="10668000" cy="590550"/>
-          </a:xfrm>
-          <a:prstGeom prst="rect">
-            <a:avLst/>
-          </a:prstGeom>
-          <a:noFill/>
-          <a:ln w="0">
-            <a:noFill/>
-            <a:prstDash val="solid"/>
-          </a:ln>
-        </p:spPr>
-        <p:txBody>
-          <a:bodyPr lIns="0" tIns="0" rIns="0" bIns="0" anchor="t">
-            <a:normAutofit/>
-          </a:bodyPr>
-          <a:lstStyle/>
-          <a:p>
-            <a:pPr algn="l">
-              <a:defRPr sz="2700" b="1">
-                <a:solidFill>
-                  <a:srgbClr val="000000"/>
-                </a:solidFill>
-                <a:latin typeface="Helvetica Neue"/>
-                <a:ea typeface="Helvetica Neue"/>
-                <a:cs typeface="Helvetica Neue"/>
-              </a:defRPr>
-            </a:pPr>
-            <a:r>
-              <a:rPr sz="2700" b="1">
-                <a:solidFill>
-                  <a:srgbClr val="000000"/>
-                </a:solidFill>
-                <a:latin typeface="Helvetica Neue"/>
-                <a:ea typeface="Helvetica Neue"/>
-                <a:cs typeface="Helvetica Neue"/>
-              </a:rPr>
-              <a:t>P100 is the repeatable startup routine before a drawing begins</a:t>
-            </a:r>
-          </a:p>
-        </p:txBody>
-      </p:sp>
-      <p:sp>
-        <p:nvSpPr>
-          <p:cNvPr id="3" name="Rectangle 2">
-            <a:extLst>
-              <a:ext uri="{FF2B5EF4-FFF2-40B4-BE49-F238E27FC236}">
-                <a16:creationId xmlns:a16="http://schemas.microsoft.com/office/drawing/2014/main" id="{4ACC2074-F48C-4553-A601-F6B254548577}"/>
-              </a:ext>
-            </a:extLst>
-          </p:cNvPr>
-          <p:cNvSpPr>
-            <a:spLocks noGrp="1"/>
-          </p:cNvSpPr>
-          <p:nvPr/>
-        </p:nvSpPr>
-        <p:spPr>
-          <a:xfrm>
-            <a:off x="400050" y="6343650"/>
-            <a:ext cx="11391900" cy="9525"/>
-          </a:xfrm>
-          <a:prstGeom prst="rect">
-            <a:avLst/>
-          </a:prstGeom>
-          <a:solidFill>
-            <a:srgbClr val="B8BCC4"/>
-          </a:solidFill>
-          <a:ln w="0">
-            <a:solidFill>
-              <a:srgbClr val="B8BCC4"/>
-            </a:solidFill>
-            <a:prstDash val="solid"/>
-          </a:ln>
-        </p:spPr>
-        <p:txBody>
-          <a:bodyPr/>
-          <a:lstStyle/>
-          <a:p>
-            <a:endParaRPr lang="en-US"/>
-          </a:p>
-        </p:txBody>
-      </p:sp>
-      <p:sp>
-        <p:nvSpPr>
-          <p:cNvPr id="4" name="Rectangle 3">
-            <a:extLst>
-              <a:ext uri="{FF2B5EF4-FFF2-40B4-BE49-F238E27FC236}">
-                <a16:creationId xmlns:a16="http://schemas.microsoft.com/office/drawing/2014/main" id="{6A21AB0F-01B7-4655-B05E-1D59444D1E2F}"/>
-              </a:ext>
-            </a:extLst>
-          </p:cNvPr>
-          <p:cNvSpPr>
-            <a:spLocks noGrp="1"/>
-          </p:cNvSpPr>
-          <p:nvPr/>
-        </p:nvSpPr>
-        <p:spPr>
-          <a:xfrm>
-            <a:off x="400050" y="6477000"/>
-            <a:ext cx="6191250" cy="171450"/>
-          </a:xfrm>
-          <a:prstGeom prst="rect">
-            <a:avLst/>
-          </a:prstGeom>
-          <a:noFill/>
-          <a:ln w="0">
-            <a:noFill/>
-            <a:prstDash val="solid"/>
-          </a:ln>
-        </p:spPr>
-        <p:txBody>
-          <a:bodyPr lIns="0" tIns="0" rIns="0" bIns="0" anchor="t">
-            <a:normAutofit/>
-          </a:bodyPr>
-          <a:lstStyle/>
-          <a:p>
-            <a:pPr algn="l">
-              <a:defRPr sz="900" b="0">
-                <a:solidFill>
-                  <a:srgbClr val="59616B"/>
-                </a:solidFill>
-                <a:latin typeface="Helvetica Neue"/>
-                <a:ea typeface="Helvetica Neue"/>
-                <a:cs typeface="Helvetica Neue"/>
-              </a:defRPr>
-            </a:pPr>
-            <a:r>
-              <a:rPr sz="900" b="0">
-                <a:solidFill>
-                  <a:srgbClr val="59616B"/>
-                </a:solidFill>
-                <a:latin typeface="Helvetica Neue"/>
-                <a:ea typeface="Helvetica Neue"/>
-                <a:cs typeface="Helvetica Neue"/>
-              </a:rPr>
-              <a:t>THETA PEN PLOTTER  •  SUMMER PROGRESS UPDATE</a:t>
-            </a:r>
-          </a:p>
-        </p:txBody>
-      </p:sp>
-      <p:sp>
-        <p:nvSpPr>
-          <p:cNvPr id="5" name="Rectangle 4">
-            <a:extLst>
-              <a:ext uri="{FF2B5EF4-FFF2-40B4-BE49-F238E27FC236}">
-                <a16:creationId xmlns:a16="http://schemas.microsoft.com/office/drawing/2014/main" id="{38C47507-02D7-4895-8794-10C0666EFEA1}"/>
-              </a:ext>
-            </a:extLst>
-          </p:cNvPr>
-          <p:cNvSpPr>
-            <a:spLocks noGrp="1"/>
-          </p:cNvSpPr>
-          <p:nvPr/>
-        </p:nvSpPr>
-        <p:spPr>
-          <a:xfrm>
-            <a:off x="11287125" y="6477000"/>
-            <a:ext cx="495300" cy="171450"/>
-          </a:xfrm>
-          <a:prstGeom prst="rect">
-            <a:avLst/>
-          </a:prstGeom>
-          <a:noFill/>
-          <a:ln w="0">
-            <a:noFill/>
-            <a:prstDash val="solid"/>
-          </a:ln>
-        </p:spPr>
-        <p:txBody>
-          <a:bodyPr lIns="0" tIns="0" rIns="0" bIns="0" anchor="t">
-            <a:normAutofit/>
-          </a:bodyPr>
-          <a:lstStyle/>
-          <a:p>
-            <a:pPr algn="r">
-              <a:defRPr sz="900" b="0">
-                <a:solidFill>
-                  <a:srgbClr val="59616B"/>
-                </a:solidFill>
-                <a:latin typeface="Helvetica Neue"/>
-                <a:ea typeface="Helvetica Neue"/>
-                <a:cs typeface="Helvetica Neue"/>
-              </a:defRPr>
-            </a:pPr>
-            <a:r>
-              <a:rPr sz="900" b="0">
-                <a:solidFill>
-                  <a:srgbClr val="59616B"/>
-                </a:solidFill>
-                <a:latin typeface="Helvetica Neue"/>
-                <a:ea typeface="Helvetica Neue"/>
-                <a:cs typeface="Helvetica Neue"/>
-              </a:rPr>
-              <a:t>5</a:t>
-            </a:r>
-          </a:p>
-        </p:txBody>
-      </p:sp>
       <p:pic>
         <p:nvPicPr>
           <p:cNvPr id="16" name="Picture 15"/>
@@ -14706,8 +12491,8 @@
         </p:blipFill>
         <p:spPr>
           <a:xfrm>
-            <a:off x="951442" y="1381125"/>
-            <a:ext cx="6841067" cy="4810125"/>
+            <a:off x="-1" y="-1"/>
+            <a:ext cx="9753600" cy="6858000"/>
           </a:xfrm>
           <a:prstGeom prst="rect">
             <a:avLst/>
@@ -14716,72 +12501,6 @@
       </p:pic>
       <p:sp>
         <p:nvSpPr>
-          <p:cNvPr id="10" name="Rectangle 9">
-            <a:extLst>
-              <a:ext uri="{FF2B5EF4-FFF2-40B4-BE49-F238E27FC236}">
-                <a16:creationId xmlns:a16="http://schemas.microsoft.com/office/drawing/2014/main" id="{96D81758-CD88-4EF5-A7F6-B3CD03B93DBF}"/>
-              </a:ext>
-            </a:extLst>
-          </p:cNvPr>
-          <p:cNvSpPr>
-            <a:spLocks noGrp="1"/>
-          </p:cNvSpPr>
-          <p:nvPr/>
-        </p:nvSpPr>
-        <p:spPr>
-          <a:xfrm>
-            <a:off x="8572500" y="3238500"/>
-            <a:ext cx="2540000" cy="508000"/>
-          </a:xfrm>
-          <a:prstGeom prst="rect">
-            <a:avLst/>
-          </a:prstGeom>
-          <a:noFill/>
-          <a:ln w="0">
-            <a:noFill/>
-            <a:prstDash val="solid"/>
-          </a:ln>
-        </p:spPr>
-        <p:txBody>
-          <a:bodyPr lIns="0" tIns="0" rIns="0" bIns="0" anchor="t">
-            <a:normAutofit/>
-          </a:bodyPr>
-          <a:lstStyle/>
-          <a:p>
-            <a:pPr algn="l">
-              <a:defRPr sz="1050" b="0">
-                <a:solidFill>
-                  <a:srgbClr val="59616B"/>
-                </a:solidFill>
-                <a:latin typeface="Helvetica Neue"/>
-                <a:ea typeface="Helvetica Neue"/>
-                <a:cs typeface="Helvetica Neue"/>
-              </a:defRPr>
-            </a:pPr>
-            <a:r>
-              <a:rPr lang="en-US" sz="1100" b="0">
-                <a:solidFill>
-                  <a:srgbClr val="80726B"/>
-                </a:solidFill>
-                <a:latin typeface="Helvetica Neue"/>
-                <a:ea typeface="Helvetica Neue"/>
-                <a:cs typeface="Helvetica Neue"/>
-              </a:rPr>
-              <a:t>Detail shown inside the map. Hover or click another process to compare.</a:t>
-            </a:r>
-            <a:endParaRPr sz="1100" b="0">
-              <a:solidFill>
-                <a:srgbClr val="80726B"/>
-              </a:solidFill>
-              <a:latin typeface="Helvetica Neue"/>
-              <a:ea typeface="Helvetica Neue"/>
-              <a:cs typeface="Helvetica Neue"/>
-            </a:endParaRPr>
-          </a:p>
-        </p:txBody>
-      </p:sp>
-      <p:sp>
-        <p:nvSpPr>
           <p:cNvPr id="6" name="P100 Step 3 Highlight">
             <a:extLst>
               <a:ext uri="{FF2B5EF4-FFF2-40B4-BE49-F238E27FC236}">
@@ -14794,8 +12513,8 @@
         </p:nvSpPr>
         <p:spPr>
           <a:xfrm>
-            <a:off x="1628775" y="3695700"/>
-            <a:ext cx="3238500" cy="400050"/>
+            <a:off x="964194" y="3299988"/>
+            <a:ext cx="4617267" cy="570368"/>
           </a:xfrm>
           <a:prstGeom prst="rect">
             <a:avLst/>
@@ -14832,18 +12551,18 @@
           <a:lstStyle/>
           <a:p>
             <a:pPr algn="ctr"/>
-            <a:endParaRPr lang="en-US"/>
-          </a:p>
-        </p:txBody>
-      </p:sp>
-      <p:sp>
-        <p:nvSpPr>
-          <p:cNvPr id="12" name="P100 Back Button">
+            <a:endParaRPr lang="en-US" sz="2566"/>
+          </a:p>
+        </p:txBody>
+      </p:sp>
+      <p:sp>
+        <p:nvSpPr>
+          <p:cNvPr id="13" name="P100 Step 1 Hit Area">
             <a:hlinkClick r:id="rId4" action="ppaction://hlinksldjump"/>
             <a:hlinkHover r:id="rId4" action="ppaction://hlinksldjump"/>
             <a:extLst>
               <a:ext uri="{FF2B5EF4-FFF2-40B4-BE49-F238E27FC236}">
-                <a16:creationId xmlns:a16="http://schemas.microsoft.com/office/drawing/2014/main" id="{0708619D-AEEE-B951-BE77-DE8D72B45E51}"/>
+                <a16:creationId xmlns:a16="http://schemas.microsoft.com/office/drawing/2014/main" id="{41A311AC-FE52-4066-CD5F-63034FE44609}"/>
               </a:ext>
             </a:extLst>
           </p:cNvPr>
@@ -14852,20 +12571,34 @@
         </p:nvSpPr>
         <p:spPr>
           <a:xfrm>
-            <a:off x="9429750" y="5905500"/>
-            <a:ext cx="2000250" cy="285750"/>
-          </a:xfrm>
-          <a:prstGeom prst="roundRect">
+            <a:off x="964194" y="1616044"/>
+            <a:ext cx="4617267" cy="570368"/>
+          </a:xfrm>
+          <a:prstGeom prst="rect">
             <a:avLst/>
           </a:prstGeom>
           <a:solidFill>
-            <a:srgbClr val="FFF9F3"/>
+            <a:schemeClr val="accent1">
+              <a:alpha val="0"/>
+            </a:schemeClr>
           </a:solidFill>
-          <a:ln w="12700">
-            <a:solidFill>
-              <a:srgbClr val="FF8833"/>
-            </a:solidFill>
-          </a:ln>
+          <a:ln w="19050">
+            <a:noFill/>
+            <a:prstDash val="solid"/>
+          </a:ln>
+          <a:effectLst/>
+          <a:extLst>
+            <a:ext uri="{91240B29-F687-4F45-9708-019B960494DF}">
+              <a14:hiddenLine xmlns:a14="http://schemas.microsoft.com/office/drawing/2010/main" w="19050">
+                <a:solidFill>
+                  <a:schemeClr val="accent1">
+                    <a:shade val="15000"/>
+                  </a:schemeClr>
+                </a:solidFill>
+                <a:prstDash val="solid"/>
+              </a14:hiddenLine>
+            </a:ext>
+          </a:extLst>
         </p:spPr>
         <p:style>
           <a:lnRef idx="2">
@@ -14888,25 +12621,18 @@
           <a:lstStyle/>
           <a:p>
             <a:pPr algn="ctr"/>
-            <a:r>
-              <a:rPr lang="en-US" sz="1200" b="1">
-                <a:solidFill>
-                  <a:srgbClr val="FF8833"/>
-                </a:solidFill>
-              </a:rPr>
-              <a:t>BACK TO OVERVIEW</a:t>
-            </a:r>
-          </a:p>
-        </p:txBody>
-      </p:sp>
-      <p:sp>
-        <p:nvSpPr>
-          <p:cNvPr id="13" name="P100 Step 1 Hit Area">
+            <a:endParaRPr lang="en-US" sz="2566"/>
+          </a:p>
+        </p:txBody>
+      </p:sp>
+      <p:sp>
+        <p:nvSpPr>
+          <p:cNvPr id="14" name="P100 Step 2 Hit Area">
             <a:hlinkClick r:id="rId5" action="ppaction://hlinksldjump"/>
             <a:hlinkHover r:id="rId5" action="ppaction://hlinksldjump"/>
             <a:extLst>
               <a:ext uri="{FF2B5EF4-FFF2-40B4-BE49-F238E27FC236}">
-                <a16:creationId xmlns:a16="http://schemas.microsoft.com/office/drawing/2014/main" id="{41A311AC-FE52-4066-CD5F-63034FE44609}"/>
+                <a16:creationId xmlns:a16="http://schemas.microsoft.com/office/drawing/2014/main" id="{229D10D3-8782-98D3-CA79-9733E21A01F0}"/>
               </a:ext>
             </a:extLst>
           </p:cNvPr>
@@ -14915,8 +12641,8 @@
         </p:nvSpPr>
         <p:spPr>
           <a:xfrm>
-            <a:off x="1628775" y="2514600"/>
-            <a:ext cx="3238500" cy="400050"/>
+            <a:off x="964194" y="2458016"/>
+            <a:ext cx="4617267" cy="570368"/>
           </a:xfrm>
           <a:prstGeom prst="rect">
             <a:avLst/>
@@ -14965,18 +12691,18 @@
           <a:lstStyle/>
           <a:p>
             <a:pPr algn="ctr"/>
-            <a:endParaRPr lang="en-US"/>
-          </a:p>
-        </p:txBody>
-      </p:sp>
-      <p:sp>
-        <p:nvSpPr>
-          <p:cNvPr id="14" name="P100 Step 2 Hit Area">
+            <a:endParaRPr lang="en-US" sz="2566"/>
+          </a:p>
+        </p:txBody>
+      </p:sp>
+      <p:sp>
+        <p:nvSpPr>
+          <p:cNvPr id="15" name="P100 Step 3 Hit Area">
             <a:hlinkClick r:id="rId6" action="ppaction://hlinksldjump"/>
             <a:hlinkHover r:id="rId6" action="ppaction://hlinksldjump"/>
             <a:extLst>
               <a:ext uri="{FF2B5EF4-FFF2-40B4-BE49-F238E27FC236}">
-                <a16:creationId xmlns:a16="http://schemas.microsoft.com/office/drawing/2014/main" id="{229D10D3-8782-98D3-CA79-9733E21A01F0}"/>
+                <a16:creationId xmlns:a16="http://schemas.microsoft.com/office/drawing/2014/main" id="{57602AAE-6504-FE90-5086-CDC50FBFD167}"/>
               </a:ext>
             </a:extLst>
           </p:cNvPr>
@@ -14985,8 +12711,8 @@
         </p:nvSpPr>
         <p:spPr>
           <a:xfrm>
-            <a:off x="1628775" y="3105150"/>
-            <a:ext cx="3238500" cy="400050"/>
+            <a:off x="964194" y="3299988"/>
+            <a:ext cx="4617267" cy="570368"/>
           </a:xfrm>
           <a:prstGeom prst="rect">
             <a:avLst/>
@@ -15035,18 +12761,18 @@
           <a:lstStyle/>
           <a:p>
             <a:pPr algn="ctr"/>
-            <a:endParaRPr lang="en-US"/>
-          </a:p>
-        </p:txBody>
-      </p:sp>
-      <p:sp>
-        <p:nvSpPr>
-          <p:cNvPr id="15" name="P100 Step 3 Hit Area">
+            <a:endParaRPr lang="en-US" sz="2566"/>
+          </a:p>
+        </p:txBody>
+      </p:sp>
+      <p:sp>
+        <p:nvSpPr>
+          <p:cNvPr id="17" name="P100 Step 4 Hit Area">
             <a:hlinkClick r:id="rId7" action="ppaction://hlinksldjump"/>
             <a:hlinkHover r:id="rId7" action="ppaction://hlinksldjump"/>
             <a:extLst>
               <a:ext uri="{FF2B5EF4-FFF2-40B4-BE49-F238E27FC236}">
-                <a16:creationId xmlns:a16="http://schemas.microsoft.com/office/drawing/2014/main" id="{57602AAE-6504-FE90-5086-CDC50FBFD167}"/>
+                <a16:creationId xmlns:a16="http://schemas.microsoft.com/office/drawing/2014/main" id="{5739D453-CCF2-8895-2811-B3827B632E99}"/>
               </a:ext>
             </a:extLst>
           </p:cNvPr>
@@ -15055,8 +12781,8 @@
         </p:nvSpPr>
         <p:spPr>
           <a:xfrm>
-            <a:off x="1628775" y="3695700"/>
-            <a:ext cx="3238500" cy="400050"/>
+            <a:off x="964194" y="4141960"/>
+            <a:ext cx="4617267" cy="570368"/>
           </a:xfrm>
           <a:prstGeom prst="rect">
             <a:avLst/>
@@ -15105,18 +12831,18 @@
           <a:lstStyle/>
           <a:p>
             <a:pPr algn="ctr"/>
-            <a:endParaRPr lang="en-US"/>
-          </a:p>
-        </p:txBody>
-      </p:sp>
-      <p:sp>
-        <p:nvSpPr>
-          <p:cNvPr id="17" name="P100 Step 4 Hit Area">
+            <a:endParaRPr lang="en-US" sz="2566"/>
+          </a:p>
+        </p:txBody>
+      </p:sp>
+      <p:sp>
+        <p:nvSpPr>
+          <p:cNvPr id="18" name="P100 Step 5 Hit Area">
             <a:hlinkClick r:id="rId8" action="ppaction://hlinksldjump"/>
             <a:hlinkHover r:id="rId8" action="ppaction://hlinksldjump"/>
             <a:extLst>
               <a:ext uri="{FF2B5EF4-FFF2-40B4-BE49-F238E27FC236}">
-                <a16:creationId xmlns:a16="http://schemas.microsoft.com/office/drawing/2014/main" id="{5739D453-CCF2-8895-2811-B3827B632E99}"/>
+                <a16:creationId xmlns:a16="http://schemas.microsoft.com/office/drawing/2014/main" id="{4F2F32F3-9AB2-7C13-1A3D-8F2AB8384548}"/>
               </a:ext>
             </a:extLst>
           </p:cNvPr>
@@ -15125,8 +12851,8 @@
         </p:nvSpPr>
         <p:spPr>
           <a:xfrm>
-            <a:off x="1628775" y="4286250"/>
-            <a:ext cx="3238500" cy="400050"/>
+            <a:off x="964194" y="4983933"/>
+            <a:ext cx="4617267" cy="570368"/>
           </a:xfrm>
           <a:prstGeom prst="rect">
             <a:avLst/>
@@ -15175,18 +12901,18 @@
           <a:lstStyle/>
           <a:p>
             <a:pPr algn="ctr"/>
-            <a:endParaRPr lang="en-US"/>
-          </a:p>
-        </p:txBody>
-      </p:sp>
-      <p:sp>
-        <p:nvSpPr>
-          <p:cNvPr id="18" name="P100 Step 5 Hit Area">
+            <a:endParaRPr lang="en-US" sz="2566"/>
+          </a:p>
+        </p:txBody>
+      </p:sp>
+      <p:sp>
+        <p:nvSpPr>
+          <p:cNvPr id="19" name="P100 Step 6 Hit Area">
             <a:hlinkClick r:id="rId9" action="ppaction://hlinksldjump"/>
             <a:hlinkHover r:id="rId9" action="ppaction://hlinksldjump"/>
             <a:extLst>
               <a:ext uri="{FF2B5EF4-FFF2-40B4-BE49-F238E27FC236}">
-                <a16:creationId xmlns:a16="http://schemas.microsoft.com/office/drawing/2014/main" id="{4F2F32F3-9AB2-7C13-1A3D-8F2AB8384548}"/>
+                <a16:creationId xmlns:a16="http://schemas.microsoft.com/office/drawing/2014/main" id="{3BD89E2F-BDDE-3193-2D38-2F39E5CB6867}"/>
               </a:ext>
             </a:extLst>
           </p:cNvPr>
@@ -15195,8 +12921,8 @@
         </p:nvSpPr>
         <p:spPr>
           <a:xfrm>
-            <a:off x="1628775" y="4876800"/>
-            <a:ext cx="3238500" cy="400050"/>
+            <a:off x="964194" y="5825905"/>
+            <a:ext cx="4617267" cy="570368"/>
           </a:xfrm>
           <a:prstGeom prst="rect">
             <a:avLst/>
@@ -15245,18 +12971,16 @@
           <a:lstStyle/>
           <a:p>
             <a:pPr algn="ctr"/>
-            <a:endParaRPr lang="en-US"/>
-          </a:p>
-        </p:txBody>
-      </p:sp>
-      <p:sp>
-        <p:nvSpPr>
-          <p:cNvPr id="19" name="P100 Step 6 Hit Area">
-            <a:hlinkClick r:id="rId10" action="ppaction://hlinksldjump"/>
-            <a:hlinkHover r:id="rId10" action="ppaction://hlinksldjump"/>
-            <a:extLst>
-              <a:ext uri="{FF2B5EF4-FFF2-40B4-BE49-F238E27FC236}">
-                <a16:creationId xmlns:a16="http://schemas.microsoft.com/office/drawing/2014/main" id="{3BD89E2F-BDDE-3193-2D38-2F39E5CB6867}"/>
+            <a:endParaRPr lang="en-US" sz="2566"/>
+          </a:p>
+        </p:txBody>
+      </p:sp>
+      <p:sp>
+        <p:nvSpPr>
+          <p:cNvPr id="20" name="Matching P100 Map Detail Background">
+            <a:extLst>
+              <a:ext uri="{FF2B5EF4-FFF2-40B4-BE49-F238E27FC236}">
+                <a16:creationId xmlns:a16="http://schemas.microsoft.com/office/drawing/2014/main" id="{F716E644-4D7F-57F9-C447-5F26B4D7EA2B}"/>
               </a:ext>
             </a:extLst>
           </p:cNvPr>
@@ -15265,34 +12989,20 @@
         </p:nvSpPr>
         <p:spPr>
           <a:xfrm>
-            <a:off x="1628775" y="5467350"/>
-            <a:ext cx="3238500" cy="400050"/>
+            <a:off x="5703683" y="1670364"/>
+            <a:ext cx="3078178" cy="2245259"/>
           </a:xfrm>
           <a:prstGeom prst="rect">
             <a:avLst/>
           </a:prstGeom>
           <a:solidFill>
-            <a:schemeClr val="accent1">
-              <a:alpha val="0"/>
-            </a:schemeClr>
+            <a:srgbClr val="2B251F"/>
           </a:solidFill>
-          <a:ln w="19050">
-            <a:noFill/>
-            <a:prstDash val="solid"/>
-          </a:ln>
-          <a:effectLst/>
-          <a:extLst>
-            <a:ext uri="{91240B29-F687-4F45-9708-019B960494DF}">
-              <a14:hiddenLine xmlns:a14="http://schemas.microsoft.com/office/drawing/2010/main" w="19050">
-                <a:solidFill>
-                  <a:schemeClr val="accent1">
-                    <a:shade val="15000"/>
-                  </a:schemeClr>
-                </a:solidFill>
-                <a:prstDash val="solid"/>
-              </a14:hiddenLine>
-            </a:ext>
-          </a:extLst>
+          <a:ln w="8890">
+            <a:solidFill>
+              <a:srgbClr val="6E6052"/>
+            </a:solidFill>
+          </a:ln>
         </p:spPr>
         <p:style>
           <a:lnRef idx="2">
@@ -15315,16 +13025,102 @@
           <a:lstStyle/>
           <a:p>
             <a:pPr algn="ctr"/>
-            <a:endParaRPr lang="en-US"/>
-          </a:p>
-        </p:txBody>
-      </p:sp>
-      <p:sp>
-        <p:nvSpPr>
-          <p:cNvPr id="20" name="Matching P100 Map Detail Background">
-            <a:extLst>
-              <a:ext uri="{FF2B5EF4-FFF2-40B4-BE49-F238E27FC236}">
-                <a16:creationId xmlns:a16="http://schemas.microsoft.com/office/drawing/2014/main" id="{F716E644-4D7F-57F9-C447-5F26B4D7EA2B}"/>
+            <a:endParaRPr lang="en-US" sz="2566"/>
+          </a:p>
+        </p:txBody>
+      </p:sp>
+      <p:sp>
+        <p:nvSpPr>
+          <p:cNvPr id="21" name="Matching P100 Map Detail Title">
+            <a:extLst>
+              <a:ext uri="{FF2B5EF4-FFF2-40B4-BE49-F238E27FC236}">
+                <a16:creationId xmlns:a16="http://schemas.microsoft.com/office/drawing/2014/main" id="{44103440-044D-FE0D-28C4-DF8B7A91468B}"/>
+              </a:ext>
+            </a:extLst>
+          </p:cNvPr>
+          <p:cNvSpPr txBox="1"/>
+          <p:nvPr/>
+        </p:nvSpPr>
+        <p:spPr>
+          <a:xfrm>
+            <a:off x="5866645" y="1833327"/>
+            <a:ext cx="2752254" cy="164554"/>
+          </a:xfrm>
+          <a:prstGeom prst="rect">
+            <a:avLst/>
+          </a:prstGeom>
+          <a:noFill/>
+        </p:spPr>
+        <p:txBody>
+          <a:bodyPr vert="horz" lIns="0" tIns="0" rIns="0" bIns="0" rtlCol="0">
+            <a:spAutoFit/>
+          </a:bodyPr>
+          <a:lstStyle/>
+          <a:p>
+            <a:r>
+              <a:rPr lang="en-US" sz="1069" b="1">
+                <a:solidFill>
+                  <a:srgbClr val="FFCC66"/>
+                </a:solidFill>
+                <a:latin typeface="Aptos" panose="020B0004020202020204" pitchFamily="34" charset="0"/>
+              </a:rPr>
+              <a:t>3. Machine home</a:t>
+            </a:r>
+          </a:p>
+        </p:txBody>
+      </p:sp>
+      <p:sp>
+        <p:nvSpPr>
+          <p:cNvPr id="22" name="Matching P100 Map Detail Body">
+            <a:extLst>
+              <a:ext uri="{FF2B5EF4-FFF2-40B4-BE49-F238E27FC236}">
+                <a16:creationId xmlns:a16="http://schemas.microsoft.com/office/drawing/2014/main" id="{3B504EB3-11C8-5707-6204-5B06E0033E18}"/>
+              </a:ext>
+            </a:extLst>
+          </p:cNvPr>
+          <p:cNvSpPr txBox="1"/>
+          <p:nvPr/>
+        </p:nvSpPr>
+        <p:spPr>
+          <a:xfrm>
+            <a:off x="5866645" y="2123038"/>
+            <a:ext cx="2752254" cy="982935"/>
+          </a:xfrm>
+          <a:prstGeom prst="rect">
+            <a:avLst/>
+          </a:prstGeom>
+          <a:noFill/>
+        </p:spPr>
+        <p:txBody>
+          <a:bodyPr vert="horz" lIns="0" tIns="0" rIns="0" bIns="0" rtlCol="0">
+            <a:spAutoFit/>
+          </a:bodyPr>
+          <a:lstStyle/>
+          <a:p>
+            <a:r>
+              <a:rPr lang="en-US" sz="912">
+                <a:solidFill>
+                  <a:srgbClr val="F7F4F0"/>
+                </a:solidFill>
+                <a:latin typeface="Aptos" panose="020B0004020202020204" pitchFamily="34" charset="0"/>
+              </a:rPr>
+              <a:t>Command
+RP23CNC runs .
+Result
+Physical X/Y switches establish gantry coordinates.
+Toolhead stays at LIFT_HOME.</a:t>
+            </a:r>
+          </a:p>
+        </p:txBody>
+      </p:sp>
+      <p:sp>
+        <p:nvSpPr>
+          <p:cNvPr id="7" name="P100 Back Button">
+            <a:hlinkClick r:id="rId10" action="ppaction://hlinksldjump"/>
+            <a:hlinkHover r:id="rId10" action="ppaction://hlinksldjump"/>
+            <a:extLst>
+              <a:ext uri="{FF2B5EF4-FFF2-40B4-BE49-F238E27FC236}">
+                <a16:creationId xmlns:a16="http://schemas.microsoft.com/office/drawing/2014/main" id="{8CBA725B-6CE2-AB54-38CD-CB7E9BAC0533}"/>
               </a:ext>
             </a:extLst>
           </p:cNvPr>
@@ -15333,18 +13129,18 @@
         </p:nvSpPr>
         <p:spPr>
           <a:xfrm>
-            <a:off x="4953000" y="2552700"/>
-            <a:ext cx="2159000" cy="1574800"/>
-          </a:xfrm>
-          <a:prstGeom prst="rect">
+            <a:off x="10058400" y="6172200"/>
+            <a:ext cx="1714500" cy="304800"/>
+          </a:xfrm>
+          <a:prstGeom prst="roundRect">
             <a:avLst/>
           </a:prstGeom>
           <a:solidFill>
-            <a:srgbClr val="2B251F"/>
+            <a:srgbClr val="F4F4F4"/>
           </a:solidFill>
-          <a:ln w="8890">
+          <a:ln w="12700">
             <a:solidFill>
-              <a:srgbClr val="6E6052"/>
+              <a:srgbClr val="FFA533"/>
             </a:solidFill>
           </a:ln>
         </p:spPr>
@@ -15369,90 +13165,14 @@
           <a:lstStyle/>
           <a:p>
             <a:pPr algn="ctr"/>
-            <a:endParaRPr lang="en-US"/>
-          </a:p>
-        </p:txBody>
-      </p:sp>
-      <p:sp>
-        <p:nvSpPr>
-          <p:cNvPr id="21" name="Matching P100 Map Detail Title">
-            <a:extLst>
-              <a:ext uri="{FF2B5EF4-FFF2-40B4-BE49-F238E27FC236}">
-                <a16:creationId xmlns:a16="http://schemas.microsoft.com/office/drawing/2014/main" id="{44103440-044D-FE0D-28C4-DF8B7A91468B}"/>
-              </a:ext>
-            </a:extLst>
-          </p:cNvPr>
-          <p:cNvSpPr txBox="1"/>
-          <p:nvPr/>
-        </p:nvSpPr>
-        <p:spPr>
-          <a:xfrm>
-            <a:off x="5067300" y="2667000"/>
-            <a:ext cx="1930400" cy="115416"/>
-          </a:xfrm>
-          <a:prstGeom prst="rect">
-            <a:avLst/>
-          </a:prstGeom>
-          <a:noFill/>
-        </p:spPr>
-        <p:txBody>
-          <a:bodyPr vert="horz" lIns="0" tIns="0" rIns="0" bIns="0" rtlCol="0">
-            <a:spAutoFit/>
-          </a:bodyPr>
-          <a:lstStyle/>
-          <a:p>
-            <a:r>
-              <a:rPr lang="en-US" sz="750" b="1">
-                <a:solidFill>
-                  <a:srgbClr val="FFCC66"/>
+            <a:r>
+              <a:rPr lang="en-US" sz="1000" b="1">
+                <a:solidFill>
+                  <a:srgbClr val="FFA533"/>
                 </a:solidFill>
                 <a:latin typeface="Aptos" panose="020B0004020202020204" pitchFamily="34" charset="0"/>
               </a:rPr>
-              <a:t>3. Machine home</a:t>
-            </a:r>
-          </a:p>
-        </p:txBody>
-      </p:sp>
-      <p:sp>
-        <p:nvSpPr>
-          <p:cNvPr id="22" name="Matching P100 Map Detail Body">
-            <a:extLst>
-              <a:ext uri="{FF2B5EF4-FFF2-40B4-BE49-F238E27FC236}">
-                <a16:creationId xmlns:a16="http://schemas.microsoft.com/office/drawing/2014/main" id="{3B504EB3-11C8-5707-6204-5B06E0033E18}"/>
-              </a:ext>
-            </a:extLst>
-          </p:cNvPr>
-          <p:cNvSpPr txBox="1"/>
-          <p:nvPr/>
-        </p:nvSpPr>
-        <p:spPr>
-          <a:xfrm>
-            <a:off x="5067300" y="2870200"/>
-            <a:ext cx="1930400" cy="689420"/>
-          </a:xfrm>
-          <a:prstGeom prst="rect">
-            <a:avLst/>
-          </a:prstGeom>
-          <a:noFill/>
-        </p:spPr>
-        <p:txBody>
-          <a:bodyPr vert="horz" lIns="0" tIns="0" rIns="0" bIns="0" rtlCol="0">
-            <a:spAutoFit/>
-          </a:bodyPr>
-          <a:lstStyle/>
-          <a:p>
-            <a:r>
-              <a:rPr lang="en-US" sz="640">
-                <a:solidFill>
-                  <a:srgbClr val="F7F4F0"/>
-                </a:solidFill>
-                <a:latin typeface="Aptos" panose="020B0004020202020204" pitchFamily="34" charset="0"/>
-              </a:rPr>
-              <a:t>Command
-RP23CNC runs .
-Result
-Physical X/Y switches establish gantry coordinates.
-Toolhead stays at LIFT_HOME.</a:t>
+              <a:t>BACK</a:t>
             </a:r>
           </a:p>
         </p:txBody>
@@ -15476,7 +13196,7 @@
     <p:bg>
       <p:bgPr>
         <a:solidFill>
-          <a:srgbClr val="FFFFFF"/>
+          <a:srgbClr val="141A20"/>
         </a:solidFill>
         <a:effectLst/>
       </p:bgPr>
@@ -15495,278 +13215,6 @@
           <a:chExt cx="0" cy="0"/>
         </a:xfrm>
       </p:grpSpPr>
-      <p:sp>
-        <p:nvSpPr>
-          <p:cNvPr id="11" name="Rectangle 10">
-            <a:extLst>
-              <a:ext uri="{FF2B5EF4-FFF2-40B4-BE49-F238E27FC236}">
-                <a16:creationId xmlns:a16="http://schemas.microsoft.com/office/drawing/2014/main" id="{6E709A68-3D0F-4C65-A32B-A1E7C3547699}"/>
-              </a:ext>
-            </a:extLst>
-          </p:cNvPr>
-          <p:cNvSpPr>
-            <a:spLocks noGrp="1"/>
-          </p:cNvSpPr>
-          <p:nvPr/>
-        </p:nvSpPr>
-        <p:spPr>
-          <a:xfrm>
-            <a:off x="400050" y="342900"/>
-            <a:ext cx="5334000" cy="228600"/>
-          </a:xfrm>
-          <a:prstGeom prst="rect">
-            <a:avLst/>
-          </a:prstGeom>
-          <a:noFill/>
-          <a:ln w="0">
-            <a:noFill/>
-            <a:prstDash val="solid"/>
-          </a:ln>
-        </p:spPr>
-        <p:txBody>
-          <a:bodyPr lIns="0" tIns="0" rIns="0" bIns="0" anchor="t">
-            <a:normAutofit/>
-          </a:bodyPr>
-          <a:lstStyle/>
-          <a:p>
-            <a:pPr algn="l">
-              <a:defRPr sz="1050" b="1">
-                <a:solidFill>
-                  <a:srgbClr val="3D8DFF"/>
-                </a:solidFill>
-                <a:latin typeface="Helvetica Neue"/>
-                <a:ea typeface="Helvetica Neue"/>
-                <a:cs typeface="Helvetica Neue"/>
-              </a:defRPr>
-            </a:pPr>
-            <a:r>
-              <a:rPr sz="1050" b="1">
-                <a:solidFill>
-                  <a:srgbClr val="3D8DFF"/>
-                </a:solidFill>
-                <a:latin typeface="Helvetica Neue"/>
-                <a:ea typeface="Helvetica Neue"/>
-                <a:cs typeface="Helvetica Neue"/>
-              </a:rPr>
-              <a:t>P100 PROCESS MAP</a:t>
-            </a:r>
-          </a:p>
-        </p:txBody>
-      </p:sp>
-      <p:sp>
-        <p:nvSpPr>
-          <p:cNvPr id="2" name="Rectangle 1">
-            <a:extLst>
-              <a:ext uri="{FF2B5EF4-FFF2-40B4-BE49-F238E27FC236}">
-                <a16:creationId xmlns:a16="http://schemas.microsoft.com/office/drawing/2014/main" id="{E2B39075-10DC-4D61-AB16-D8458CE12055}"/>
-              </a:ext>
-            </a:extLst>
-          </p:cNvPr>
-          <p:cNvSpPr>
-            <a:spLocks noGrp="1"/>
-          </p:cNvSpPr>
-          <p:nvPr/>
-        </p:nvSpPr>
-        <p:spPr>
-          <a:xfrm>
-            <a:off x="400050" y="685800"/>
-            <a:ext cx="10668000" cy="590550"/>
-          </a:xfrm>
-          <a:prstGeom prst="rect">
-            <a:avLst/>
-          </a:prstGeom>
-          <a:noFill/>
-          <a:ln w="0">
-            <a:noFill/>
-            <a:prstDash val="solid"/>
-          </a:ln>
-        </p:spPr>
-        <p:txBody>
-          <a:bodyPr lIns="0" tIns="0" rIns="0" bIns="0" anchor="t">
-            <a:normAutofit/>
-          </a:bodyPr>
-          <a:lstStyle/>
-          <a:p>
-            <a:pPr algn="l">
-              <a:defRPr sz="2700" b="1">
-                <a:solidFill>
-                  <a:srgbClr val="000000"/>
-                </a:solidFill>
-                <a:latin typeface="Helvetica Neue"/>
-                <a:ea typeface="Helvetica Neue"/>
-                <a:cs typeface="Helvetica Neue"/>
-              </a:defRPr>
-            </a:pPr>
-            <a:r>
-              <a:rPr sz="2700" b="1">
-                <a:solidFill>
-                  <a:srgbClr val="000000"/>
-                </a:solidFill>
-                <a:latin typeface="Helvetica Neue"/>
-                <a:ea typeface="Helvetica Neue"/>
-                <a:cs typeface="Helvetica Neue"/>
-              </a:rPr>
-              <a:t>P100 is the repeatable startup routine before a drawing begins</a:t>
-            </a:r>
-          </a:p>
-        </p:txBody>
-      </p:sp>
-      <p:sp>
-        <p:nvSpPr>
-          <p:cNvPr id="3" name="Rectangle 2">
-            <a:extLst>
-              <a:ext uri="{FF2B5EF4-FFF2-40B4-BE49-F238E27FC236}">
-                <a16:creationId xmlns:a16="http://schemas.microsoft.com/office/drawing/2014/main" id="{4ACC2074-F48C-4553-A601-F6B254548577}"/>
-              </a:ext>
-            </a:extLst>
-          </p:cNvPr>
-          <p:cNvSpPr>
-            <a:spLocks noGrp="1"/>
-          </p:cNvSpPr>
-          <p:nvPr/>
-        </p:nvSpPr>
-        <p:spPr>
-          <a:xfrm>
-            <a:off x="400050" y="6343650"/>
-            <a:ext cx="11391900" cy="9525"/>
-          </a:xfrm>
-          <a:prstGeom prst="rect">
-            <a:avLst/>
-          </a:prstGeom>
-          <a:solidFill>
-            <a:srgbClr val="B8BCC4"/>
-          </a:solidFill>
-          <a:ln w="0">
-            <a:solidFill>
-              <a:srgbClr val="B8BCC4"/>
-            </a:solidFill>
-            <a:prstDash val="solid"/>
-          </a:ln>
-        </p:spPr>
-        <p:txBody>
-          <a:bodyPr/>
-          <a:lstStyle/>
-          <a:p>
-            <a:endParaRPr lang="en-US"/>
-          </a:p>
-        </p:txBody>
-      </p:sp>
-      <p:sp>
-        <p:nvSpPr>
-          <p:cNvPr id="4" name="Rectangle 3">
-            <a:extLst>
-              <a:ext uri="{FF2B5EF4-FFF2-40B4-BE49-F238E27FC236}">
-                <a16:creationId xmlns:a16="http://schemas.microsoft.com/office/drawing/2014/main" id="{6A21AB0F-01B7-4655-B05E-1D59444D1E2F}"/>
-              </a:ext>
-            </a:extLst>
-          </p:cNvPr>
-          <p:cNvSpPr>
-            <a:spLocks noGrp="1"/>
-          </p:cNvSpPr>
-          <p:nvPr/>
-        </p:nvSpPr>
-        <p:spPr>
-          <a:xfrm>
-            <a:off x="400050" y="6477000"/>
-            <a:ext cx="6191250" cy="171450"/>
-          </a:xfrm>
-          <a:prstGeom prst="rect">
-            <a:avLst/>
-          </a:prstGeom>
-          <a:noFill/>
-          <a:ln w="0">
-            <a:noFill/>
-            <a:prstDash val="solid"/>
-          </a:ln>
-        </p:spPr>
-        <p:txBody>
-          <a:bodyPr lIns="0" tIns="0" rIns="0" bIns="0" anchor="t">
-            <a:normAutofit/>
-          </a:bodyPr>
-          <a:lstStyle/>
-          <a:p>
-            <a:pPr algn="l">
-              <a:defRPr sz="900" b="0">
-                <a:solidFill>
-                  <a:srgbClr val="59616B"/>
-                </a:solidFill>
-                <a:latin typeface="Helvetica Neue"/>
-                <a:ea typeface="Helvetica Neue"/>
-                <a:cs typeface="Helvetica Neue"/>
-              </a:defRPr>
-            </a:pPr>
-            <a:r>
-              <a:rPr sz="900" b="0">
-                <a:solidFill>
-                  <a:srgbClr val="59616B"/>
-                </a:solidFill>
-                <a:latin typeface="Helvetica Neue"/>
-                <a:ea typeface="Helvetica Neue"/>
-                <a:cs typeface="Helvetica Neue"/>
-              </a:rPr>
-              <a:t>THETA PEN PLOTTER  •  SUMMER PROGRESS UPDATE</a:t>
-            </a:r>
-          </a:p>
-        </p:txBody>
-      </p:sp>
-      <p:sp>
-        <p:nvSpPr>
-          <p:cNvPr id="5" name="Rectangle 4">
-            <a:extLst>
-              <a:ext uri="{FF2B5EF4-FFF2-40B4-BE49-F238E27FC236}">
-                <a16:creationId xmlns:a16="http://schemas.microsoft.com/office/drawing/2014/main" id="{38C47507-02D7-4895-8794-10C0666EFEA1}"/>
-              </a:ext>
-            </a:extLst>
-          </p:cNvPr>
-          <p:cNvSpPr>
-            <a:spLocks noGrp="1"/>
-          </p:cNvSpPr>
-          <p:nvPr/>
-        </p:nvSpPr>
-        <p:spPr>
-          <a:xfrm>
-            <a:off x="11287125" y="6477000"/>
-            <a:ext cx="495300" cy="171450"/>
-          </a:xfrm>
-          <a:prstGeom prst="rect">
-            <a:avLst/>
-          </a:prstGeom>
-          <a:noFill/>
-          <a:ln w="0">
-            <a:noFill/>
-            <a:prstDash val="solid"/>
-          </a:ln>
-        </p:spPr>
-        <p:txBody>
-          <a:bodyPr lIns="0" tIns="0" rIns="0" bIns="0" anchor="t">
-            <a:normAutofit/>
-          </a:bodyPr>
-          <a:lstStyle/>
-          <a:p>
-            <a:pPr algn="r">
-              <a:defRPr sz="900" b="0">
-                <a:solidFill>
-                  <a:srgbClr val="59616B"/>
-                </a:solidFill>
-                <a:latin typeface="Helvetica Neue"/>
-                <a:ea typeface="Helvetica Neue"/>
-                <a:cs typeface="Helvetica Neue"/>
-              </a:defRPr>
-            </a:pPr>
-            <a:r>
-              <a:rPr sz="900" b="0">
-                <a:solidFill>
-                  <a:srgbClr val="59616B"/>
-                </a:solidFill>
-                <a:latin typeface="Helvetica Neue"/>
-                <a:ea typeface="Helvetica Neue"/>
-                <a:cs typeface="Helvetica Neue"/>
-              </a:rPr>
-              <a:t>5</a:t>
-            </a:r>
-          </a:p>
-        </p:txBody>
-      </p:sp>
       <p:pic>
         <p:nvPicPr>
           <p:cNvPr id="16" name="Picture 15"/>
@@ -15781,8 +13229,8 @@
         </p:blipFill>
         <p:spPr>
           <a:xfrm>
-            <a:off x="951442" y="1381125"/>
-            <a:ext cx="6841067" cy="4810125"/>
+            <a:off x="-1" y="-1"/>
+            <a:ext cx="9753600" cy="6858000"/>
           </a:xfrm>
           <a:prstGeom prst="rect">
             <a:avLst/>
@@ -15791,72 +13239,6 @@
       </p:pic>
       <p:sp>
         <p:nvSpPr>
-          <p:cNvPr id="10" name="Rectangle 9">
-            <a:extLst>
-              <a:ext uri="{FF2B5EF4-FFF2-40B4-BE49-F238E27FC236}">
-                <a16:creationId xmlns:a16="http://schemas.microsoft.com/office/drawing/2014/main" id="{96D81758-CD88-4EF5-A7F6-B3CD03B93DBF}"/>
-              </a:ext>
-            </a:extLst>
-          </p:cNvPr>
-          <p:cNvSpPr>
-            <a:spLocks noGrp="1"/>
-          </p:cNvSpPr>
-          <p:nvPr/>
-        </p:nvSpPr>
-        <p:spPr>
-          <a:xfrm>
-            <a:off x="8572500" y="3238500"/>
-            <a:ext cx="2540000" cy="508000"/>
-          </a:xfrm>
-          <a:prstGeom prst="rect">
-            <a:avLst/>
-          </a:prstGeom>
-          <a:noFill/>
-          <a:ln w="0">
-            <a:noFill/>
-            <a:prstDash val="solid"/>
-          </a:ln>
-        </p:spPr>
-        <p:txBody>
-          <a:bodyPr lIns="0" tIns="0" rIns="0" bIns="0" anchor="t">
-            <a:normAutofit/>
-          </a:bodyPr>
-          <a:lstStyle/>
-          <a:p>
-            <a:pPr algn="l">
-              <a:defRPr sz="1050" b="0">
-                <a:solidFill>
-                  <a:srgbClr val="59616B"/>
-                </a:solidFill>
-                <a:latin typeface="Helvetica Neue"/>
-                <a:ea typeface="Helvetica Neue"/>
-                <a:cs typeface="Helvetica Neue"/>
-              </a:defRPr>
-            </a:pPr>
-            <a:r>
-              <a:rPr lang="en-US" sz="1100" b="0">
-                <a:solidFill>
-                  <a:srgbClr val="80726B"/>
-                </a:solidFill>
-                <a:latin typeface="Helvetica Neue"/>
-                <a:ea typeface="Helvetica Neue"/>
-                <a:cs typeface="Helvetica Neue"/>
-              </a:rPr>
-              <a:t>Detail shown inside the map. Hover or click another process to compare.</a:t>
-            </a:r>
-            <a:endParaRPr sz="1100" b="0">
-              <a:solidFill>
-                <a:srgbClr val="80726B"/>
-              </a:solidFill>
-              <a:latin typeface="Helvetica Neue"/>
-              <a:ea typeface="Helvetica Neue"/>
-              <a:cs typeface="Helvetica Neue"/>
-            </a:endParaRPr>
-          </a:p>
-        </p:txBody>
-      </p:sp>
-      <p:sp>
-        <p:nvSpPr>
           <p:cNvPr id="6" name="P100 Step 4 Highlight">
             <a:extLst>
               <a:ext uri="{FF2B5EF4-FFF2-40B4-BE49-F238E27FC236}">
@@ -15869,8 +13251,8 @@
         </p:nvSpPr>
         <p:spPr>
           <a:xfrm>
-            <a:off x="1628775" y="4286250"/>
-            <a:ext cx="3238500" cy="400050"/>
+            <a:off x="964194" y="4141960"/>
+            <a:ext cx="4617267" cy="570368"/>
           </a:xfrm>
           <a:prstGeom prst="rect">
             <a:avLst/>
@@ -15907,18 +13289,18 @@
           <a:lstStyle/>
           <a:p>
             <a:pPr algn="ctr"/>
-            <a:endParaRPr lang="en-US"/>
-          </a:p>
-        </p:txBody>
-      </p:sp>
-      <p:sp>
-        <p:nvSpPr>
-          <p:cNvPr id="12" name="P100 Back Button">
+            <a:endParaRPr lang="en-US" sz="2566"/>
+          </a:p>
+        </p:txBody>
+      </p:sp>
+      <p:sp>
+        <p:nvSpPr>
+          <p:cNvPr id="13" name="P100 Step 1 Hit Area">
             <a:hlinkClick r:id="rId4" action="ppaction://hlinksldjump"/>
             <a:hlinkHover r:id="rId4" action="ppaction://hlinksldjump"/>
             <a:extLst>
               <a:ext uri="{FF2B5EF4-FFF2-40B4-BE49-F238E27FC236}">
-                <a16:creationId xmlns:a16="http://schemas.microsoft.com/office/drawing/2014/main" id="{12358768-196A-E6C8-BB1F-26C2EA15FC46}"/>
+                <a16:creationId xmlns:a16="http://schemas.microsoft.com/office/drawing/2014/main" id="{6239FFE8-1983-751C-FF74-4DAD5061664C}"/>
               </a:ext>
             </a:extLst>
           </p:cNvPr>
@@ -15927,20 +13309,34 @@
         </p:nvSpPr>
         <p:spPr>
           <a:xfrm>
-            <a:off x="9429750" y="5905500"/>
-            <a:ext cx="2000250" cy="285750"/>
-          </a:xfrm>
-          <a:prstGeom prst="roundRect">
+            <a:off x="964194" y="1616044"/>
+            <a:ext cx="4617267" cy="570368"/>
+          </a:xfrm>
+          <a:prstGeom prst="rect">
             <a:avLst/>
           </a:prstGeom>
           <a:solidFill>
-            <a:srgbClr val="FFF9F3"/>
+            <a:schemeClr val="accent1">
+              <a:alpha val="0"/>
+            </a:schemeClr>
           </a:solidFill>
-          <a:ln w="12700">
-            <a:solidFill>
-              <a:srgbClr val="FF8833"/>
-            </a:solidFill>
-          </a:ln>
+          <a:ln w="19050">
+            <a:noFill/>
+            <a:prstDash val="solid"/>
+          </a:ln>
+          <a:effectLst/>
+          <a:extLst>
+            <a:ext uri="{91240B29-F687-4F45-9708-019B960494DF}">
+              <a14:hiddenLine xmlns:a14="http://schemas.microsoft.com/office/drawing/2010/main" w="19050">
+                <a:solidFill>
+                  <a:schemeClr val="accent1">
+                    <a:shade val="15000"/>
+                  </a:schemeClr>
+                </a:solidFill>
+                <a:prstDash val="solid"/>
+              </a14:hiddenLine>
+            </a:ext>
+          </a:extLst>
         </p:spPr>
         <p:style>
           <a:lnRef idx="2">
@@ -15963,25 +13359,18 @@
           <a:lstStyle/>
           <a:p>
             <a:pPr algn="ctr"/>
-            <a:r>
-              <a:rPr lang="en-US" sz="1200" b="1">
-                <a:solidFill>
-                  <a:srgbClr val="FF8833"/>
-                </a:solidFill>
-              </a:rPr>
-              <a:t>BACK TO OVERVIEW</a:t>
-            </a:r>
-          </a:p>
-        </p:txBody>
-      </p:sp>
-      <p:sp>
-        <p:nvSpPr>
-          <p:cNvPr id="13" name="P100 Step 1 Hit Area">
+            <a:endParaRPr lang="en-US" sz="2566"/>
+          </a:p>
+        </p:txBody>
+      </p:sp>
+      <p:sp>
+        <p:nvSpPr>
+          <p:cNvPr id="14" name="P100 Step 2 Hit Area">
             <a:hlinkClick r:id="rId5" action="ppaction://hlinksldjump"/>
             <a:hlinkHover r:id="rId5" action="ppaction://hlinksldjump"/>
             <a:extLst>
               <a:ext uri="{FF2B5EF4-FFF2-40B4-BE49-F238E27FC236}">
-                <a16:creationId xmlns:a16="http://schemas.microsoft.com/office/drawing/2014/main" id="{6239FFE8-1983-751C-FF74-4DAD5061664C}"/>
+                <a16:creationId xmlns:a16="http://schemas.microsoft.com/office/drawing/2014/main" id="{F6539B36-8038-6018-9D89-C18FCE14828A}"/>
               </a:ext>
             </a:extLst>
           </p:cNvPr>
@@ -15990,8 +13379,8 @@
         </p:nvSpPr>
         <p:spPr>
           <a:xfrm>
-            <a:off x="1628775" y="2514600"/>
-            <a:ext cx="3238500" cy="400050"/>
+            <a:off x="964194" y="2458016"/>
+            <a:ext cx="4617267" cy="570368"/>
           </a:xfrm>
           <a:prstGeom prst="rect">
             <a:avLst/>
@@ -16040,18 +13429,18 @@
           <a:lstStyle/>
           <a:p>
             <a:pPr algn="ctr"/>
-            <a:endParaRPr lang="en-US"/>
-          </a:p>
-        </p:txBody>
-      </p:sp>
-      <p:sp>
-        <p:nvSpPr>
-          <p:cNvPr id="14" name="P100 Step 2 Hit Area">
+            <a:endParaRPr lang="en-US" sz="2566"/>
+          </a:p>
+        </p:txBody>
+      </p:sp>
+      <p:sp>
+        <p:nvSpPr>
+          <p:cNvPr id="15" name="P100 Step 3 Hit Area">
             <a:hlinkClick r:id="rId6" action="ppaction://hlinksldjump"/>
             <a:hlinkHover r:id="rId6" action="ppaction://hlinksldjump"/>
             <a:extLst>
               <a:ext uri="{FF2B5EF4-FFF2-40B4-BE49-F238E27FC236}">
-                <a16:creationId xmlns:a16="http://schemas.microsoft.com/office/drawing/2014/main" id="{F6539B36-8038-6018-9D89-C18FCE14828A}"/>
+                <a16:creationId xmlns:a16="http://schemas.microsoft.com/office/drawing/2014/main" id="{10A44E18-05A7-8D3D-14D9-DBAA4BDD58D3}"/>
               </a:ext>
             </a:extLst>
           </p:cNvPr>
@@ -16060,8 +13449,8 @@
         </p:nvSpPr>
         <p:spPr>
           <a:xfrm>
-            <a:off x="1628775" y="3105150"/>
-            <a:ext cx="3238500" cy="400050"/>
+            <a:off x="964194" y="3299988"/>
+            <a:ext cx="4617267" cy="570368"/>
           </a:xfrm>
           <a:prstGeom prst="rect">
             <a:avLst/>
@@ -16110,18 +13499,18 @@
           <a:lstStyle/>
           <a:p>
             <a:pPr algn="ctr"/>
-            <a:endParaRPr lang="en-US"/>
-          </a:p>
-        </p:txBody>
-      </p:sp>
-      <p:sp>
-        <p:nvSpPr>
-          <p:cNvPr id="15" name="P100 Step 3 Hit Area">
+            <a:endParaRPr lang="en-US" sz="2566"/>
+          </a:p>
+        </p:txBody>
+      </p:sp>
+      <p:sp>
+        <p:nvSpPr>
+          <p:cNvPr id="17" name="P100 Step 4 Hit Area">
             <a:hlinkClick r:id="rId7" action="ppaction://hlinksldjump"/>
             <a:hlinkHover r:id="rId7" action="ppaction://hlinksldjump"/>
             <a:extLst>
               <a:ext uri="{FF2B5EF4-FFF2-40B4-BE49-F238E27FC236}">
-                <a16:creationId xmlns:a16="http://schemas.microsoft.com/office/drawing/2014/main" id="{10A44E18-05A7-8D3D-14D9-DBAA4BDD58D3}"/>
+                <a16:creationId xmlns:a16="http://schemas.microsoft.com/office/drawing/2014/main" id="{66EFFB9C-DAB1-BB22-6C35-9BFE282472EC}"/>
               </a:ext>
             </a:extLst>
           </p:cNvPr>
@@ -16130,8 +13519,8 @@
         </p:nvSpPr>
         <p:spPr>
           <a:xfrm>
-            <a:off x="1628775" y="3695700"/>
-            <a:ext cx="3238500" cy="400050"/>
+            <a:off x="964194" y="4141960"/>
+            <a:ext cx="4617267" cy="570368"/>
           </a:xfrm>
           <a:prstGeom prst="rect">
             <a:avLst/>
@@ -16180,18 +13569,18 @@
           <a:lstStyle/>
           <a:p>
             <a:pPr algn="ctr"/>
-            <a:endParaRPr lang="en-US"/>
-          </a:p>
-        </p:txBody>
-      </p:sp>
-      <p:sp>
-        <p:nvSpPr>
-          <p:cNvPr id="17" name="P100 Step 4 Hit Area">
+            <a:endParaRPr lang="en-US" sz="2566"/>
+          </a:p>
+        </p:txBody>
+      </p:sp>
+      <p:sp>
+        <p:nvSpPr>
+          <p:cNvPr id="18" name="P100 Step 5 Hit Area">
             <a:hlinkClick r:id="rId8" action="ppaction://hlinksldjump"/>
             <a:hlinkHover r:id="rId8" action="ppaction://hlinksldjump"/>
             <a:extLst>
               <a:ext uri="{FF2B5EF4-FFF2-40B4-BE49-F238E27FC236}">
-                <a16:creationId xmlns:a16="http://schemas.microsoft.com/office/drawing/2014/main" id="{66EFFB9C-DAB1-BB22-6C35-9BFE282472EC}"/>
+                <a16:creationId xmlns:a16="http://schemas.microsoft.com/office/drawing/2014/main" id="{9F7A191D-127E-3976-D652-2AA8B41DBBD9}"/>
               </a:ext>
             </a:extLst>
           </p:cNvPr>
@@ -16200,8 +13589,8 @@
         </p:nvSpPr>
         <p:spPr>
           <a:xfrm>
-            <a:off x="1628775" y="4286250"/>
-            <a:ext cx="3238500" cy="400050"/>
+            <a:off x="964194" y="4983933"/>
+            <a:ext cx="4617267" cy="570368"/>
           </a:xfrm>
           <a:prstGeom prst="rect">
             <a:avLst/>
@@ -16250,18 +13639,18 @@
           <a:lstStyle/>
           <a:p>
             <a:pPr algn="ctr"/>
-            <a:endParaRPr lang="en-US"/>
-          </a:p>
-        </p:txBody>
-      </p:sp>
-      <p:sp>
-        <p:nvSpPr>
-          <p:cNvPr id="18" name="P100 Step 5 Hit Area">
+            <a:endParaRPr lang="en-US" sz="2566"/>
+          </a:p>
+        </p:txBody>
+      </p:sp>
+      <p:sp>
+        <p:nvSpPr>
+          <p:cNvPr id="19" name="P100 Step 6 Hit Area">
             <a:hlinkClick r:id="rId9" action="ppaction://hlinksldjump"/>
             <a:hlinkHover r:id="rId9" action="ppaction://hlinksldjump"/>
             <a:extLst>
               <a:ext uri="{FF2B5EF4-FFF2-40B4-BE49-F238E27FC236}">
-                <a16:creationId xmlns:a16="http://schemas.microsoft.com/office/drawing/2014/main" id="{9F7A191D-127E-3976-D652-2AA8B41DBBD9}"/>
+                <a16:creationId xmlns:a16="http://schemas.microsoft.com/office/drawing/2014/main" id="{56C96F40-7BFA-4421-A10E-8F3E1257BA61}"/>
               </a:ext>
             </a:extLst>
           </p:cNvPr>
@@ -16270,8 +13659,8 @@
         </p:nvSpPr>
         <p:spPr>
           <a:xfrm>
-            <a:off x="1628775" y="4876800"/>
-            <a:ext cx="3238500" cy="400050"/>
+            <a:off x="964194" y="5825905"/>
+            <a:ext cx="4617267" cy="570368"/>
           </a:xfrm>
           <a:prstGeom prst="rect">
             <a:avLst/>
@@ -16320,18 +13709,16 @@
           <a:lstStyle/>
           <a:p>
             <a:pPr algn="ctr"/>
-            <a:endParaRPr lang="en-US"/>
-          </a:p>
-        </p:txBody>
-      </p:sp>
-      <p:sp>
-        <p:nvSpPr>
-          <p:cNvPr id="19" name="P100 Step 6 Hit Area">
-            <a:hlinkClick r:id="rId10" action="ppaction://hlinksldjump"/>
-            <a:hlinkHover r:id="rId10" action="ppaction://hlinksldjump"/>
-            <a:extLst>
-              <a:ext uri="{FF2B5EF4-FFF2-40B4-BE49-F238E27FC236}">
-                <a16:creationId xmlns:a16="http://schemas.microsoft.com/office/drawing/2014/main" id="{56C96F40-7BFA-4421-A10E-8F3E1257BA61}"/>
+            <a:endParaRPr lang="en-US" sz="2566"/>
+          </a:p>
+        </p:txBody>
+      </p:sp>
+      <p:sp>
+        <p:nvSpPr>
+          <p:cNvPr id="20" name="Matching P100 Map Detail Background">
+            <a:extLst>
+              <a:ext uri="{FF2B5EF4-FFF2-40B4-BE49-F238E27FC236}">
+                <a16:creationId xmlns:a16="http://schemas.microsoft.com/office/drawing/2014/main" id="{5F1B77DF-9D79-05EF-5F40-16D2A8667562}"/>
               </a:ext>
             </a:extLst>
           </p:cNvPr>
@@ -16340,34 +13727,20 @@
         </p:nvSpPr>
         <p:spPr>
           <a:xfrm>
-            <a:off x="1628775" y="5467350"/>
-            <a:ext cx="3238500" cy="400050"/>
+            <a:off x="5703683" y="1670364"/>
+            <a:ext cx="3078178" cy="2245259"/>
           </a:xfrm>
           <a:prstGeom prst="rect">
             <a:avLst/>
           </a:prstGeom>
           <a:solidFill>
-            <a:schemeClr val="accent1">
-              <a:alpha val="0"/>
-            </a:schemeClr>
+            <a:srgbClr val="2B251F"/>
           </a:solidFill>
-          <a:ln w="19050">
-            <a:noFill/>
-            <a:prstDash val="solid"/>
-          </a:ln>
-          <a:effectLst/>
-          <a:extLst>
-            <a:ext uri="{91240B29-F687-4F45-9708-019B960494DF}">
-              <a14:hiddenLine xmlns:a14="http://schemas.microsoft.com/office/drawing/2010/main" w="19050">
-                <a:solidFill>
-                  <a:schemeClr val="accent1">
-                    <a:shade val="15000"/>
-                  </a:schemeClr>
-                </a:solidFill>
-                <a:prstDash val="solid"/>
-              </a14:hiddenLine>
-            </a:ext>
-          </a:extLst>
+          <a:ln w="8890">
+            <a:solidFill>
+              <a:srgbClr val="6E6052"/>
+            </a:solidFill>
+          </a:ln>
         </p:spPr>
         <p:style>
           <a:lnRef idx="2">
@@ -16390,16 +13763,102 @@
           <a:lstStyle/>
           <a:p>
             <a:pPr algn="ctr"/>
-            <a:endParaRPr lang="en-US"/>
-          </a:p>
-        </p:txBody>
-      </p:sp>
-      <p:sp>
-        <p:nvSpPr>
-          <p:cNvPr id="20" name="Matching P100 Map Detail Background">
-            <a:extLst>
-              <a:ext uri="{FF2B5EF4-FFF2-40B4-BE49-F238E27FC236}">
-                <a16:creationId xmlns:a16="http://schemas.microsoft.com/office/drawing/2014/main" id="{5F1B77DF-9D79-05EF-5F40-16D2A8667562}"/>
+            <a:endParaRPr lang="en-US" sz="2566"/>
+          </a:p>
+        </p:txBody>
+      </p:sp>
+      <p:sp>
+        <p:nvSpPr>
+          <p:cNvPr id="21" name="Matching P100 Map Detail Title">
+            <a:extLst>
+              <a:ext uri="{FF2B5EF4-FFF2-40B4-BE49-F238E27FC236}">
+                <a16:creationId xmlns:a16="http://schemas.microsoft.com/office/drawing/2014/main" id="{55434FDA-96C4-A8CC-98E6-504B3F8E5A5A}"/>
+              </a:ext>
+            </a:extLst>
+          </p:cNvPr>
+          <p:cNvSpPr txBox="1"/>
+          <p:nvPr/>
+        </p:nvSpPr>
+        <p:spPr>
+          <a:xfrm>
+            <a:off x="5866645" y="1833327"/>
+            <a:ext cx="2752254" cy="164554"/>
+          </a:xfrm>
+          <a:prstGeom prst="rect">
+            <a:avLst/>
+          </a:prstGeom>
+          <a:noFill/>
+        </p:spPr>
+        <p:txBody>
+          <a:bodyPr vert="horz" lIns="0" tIns="0" rIns="0" bIns="0" rtlCol="0">
+            <a:spAutoFit/>
+          </a:bodyPr>
+          <a:lstStyle/>
+          <a:p>
+            <a:r>
+              <a:rPr lang="en-US" sz="1069" b="1">
+                <a:solidFill>
+                  <a:srgbClr val="FFCC66"/>
+                </a:solidFill>
+                <a:latin typeface="Aptos" panose="020B0004020202020204" pitchFamily="34" charset="0"/>
+              </a:rPr>
+              <a:t>4. Magnetic registration</a:t>
+            </a:r>
+          </a:p>
+        </p:txBody>
+      </p:sp>
+      <p:sp>
+        <p:nvSpPr>
+          <p:cNvPr id="22" name="Matching P100 Map Detail Body">
+            <a:extLst>
+              <a:ext uri="{FF2B5EF4-FFF2-40B4-BE49-F238E27FC236}">
+                <a16:creationId xmlns:a16="http://schemas.microsoft.com/office/drawing/2014/main" id="{156CB25D-77C0-DA0C-4FEB-87867AF2EDB9}"/>
+              </a:ext>
+            </a:extLst>
+          </p:cNvPr>
+          <p:cNvSpPr txBox="1"/>
+          <p:nvPr/>
+        </p:nvSpPr>
+        <p:spPr>
+          <a:xfrm>
+            <a:off x="5866645" y="2123038"/>
+            <a:ext cx="2752254" cy="842515"/>
+          </a:xfrm>
+          <a:prstGeom prst="rect">
+            <a:avLst/>
+          </a:prstGeom>
+          <a:noFill/>
+        </p:spPr>
+        <p:txBody>
+          <a:bodyPr vert="horz" lIns="0" tIns="0" rIns="0" bIns="0" rtlCol="0">
+            <a:spAutoFit/>
+          </a:bodyPr>
+          <a:lstStyle/>
+          <a:p>
+            <a:r>
+              <a:rPr lang="en-US" sz="912">
+                <a:solidFill>
+                  <a:srgbClr val="F7F4F0"/>
+                </a:solidFill>
+                <a:latin typeface="Aptos" panose="020B0004020202020204" pitchFamily="34" charset="0"/>
+              </a:rPr>
+              <a:t>Request / reply
+GP28 requests the scan; GP27 reports TMAG.
+Result
+Center magnet sets G54 X/Y zero.
+Outer magnet sets A zero.</a:t>
+            </a:r>
+          </a:p>
+        </p:txBody>
+      </p:sp>
+      <p:sp>
+        <p:nvSpPr>
+          <p:cNvPr id="7" name="P100 Back Button">
+            <a:hlinkClick r:id="rId10" action="ppaction://hlinksldjump"/>
+            <a:hlinkHover r:id="rId10" action="ppaction://hlinksldjump"/>
+            <a:extLst>
+              <a:ext uri="{FF2B5EF4-FFF2-40B4-BE49-F238E27FC236}">
+                <a16:creationId xmlns:a16="http://schemas.microsoft.com/office/drawing/2014/main" id="{86FD7CDA-8052-A1AD-18B3-88194A2EE39A}"/>
               </a:ext>
             </a:extLst>
           </p:cNvPr>
@@ -16408,18 +13867,18 @@
         </p:nvSpPr>
         <p:spPr>
           <a:xfrm>
-            <a:off x="4953000" y="2552700"/>
-            <a:ext cx="2159000" cy="1574800"/>
-          </a:xfrm>
-          <a:prstGeom prst="rect">
+            <a:off x="10058400" y="6172200"/>
+            <a:ext cx="1714500" cy="304800"/>
+          </a:xfrm>
+          <a:prstGeom prst="roundRect">
             <a:avLst/>
           </a:prstGeom>
           <a:solidFill>
-            <a:srgbClr val="2B251F"/>
+            <a:srgbClr val="F4F4F4"/>
           </a:solidFill>
-          <a:ln w="8890">
+          <a:ln w="12700">
             <a:solidFill>
-              <a:srgbClr val="6E6052"/>
+              <a:srgbClr val="FFA533"/>
             </a:solidFill>
           </a:ln>
         </p:spPr>
@@ -16444,90 +13903,14 @@
           <a:lstStyle/>
           <a:p>
             <a:pPr algn="ctr"/>
-            <a:endParaRPr lang="en-US"/>
-          </a:p>
-        </p:txBody>
-      </p:sp>
-      <p:sp>
-        <p:nvSpPr>
-          <p:cNvPr id="21" name="Matching P100 Map Detail Title">
-            <a:extLst>
-              <a:ext uri="{FF2B5EF4-FFF2-40B4-BE49-F238E27FC236}">
-                <a16:creationId xmlns:a16="http://schemas.microsoft.com/office/drawing/2014/main" id="{55434FDA-96C4-A8CC-98E6-504B3F8E5A5A}"/>
-              </a:ext>
-            </a:extLst>
-          </p:cNvPr>
-          <p:cNvSpPr txBox="1"/>
-          <p:nvPr/>
-        </p:nvSpPr>
-        <p:spPr>
-          <a:xfrm>
-            <a:off x="5067300" y="2667000"/>
-            <a:ext cx="1930400" cy="115416"/>
-          </a:xfrm>
-          <a:prstGeom prst="rect">
-            <a:avLst/>
-          </a:prstGeom>
-          <a:noFill/>
-        </p:spPr>
-        <p:txBody>
-          <a:bodyPr vert="horz" lIns="0" tIns="0" rIns="0" bIns="0" rtlCol="0">
-            <a:spAutoFit/>
-          </a:bodyPr>
-          <a:lstStyle/>
-          <a:p>
-            <a:r>
-              <a:rPr lang="en-US" sz="750" b="1">
-                <a:solidFill>
-                  <a:srgbClr val="FFCC66"/>
+            <a:r>
+              <a:rPr lang="en-US" sz="1000" b="1">
+                <a:solidFill>
+                  <a:srgbClr val="FFA533"/>
                 </a:solidFill>
                 <a:latin typeface="Aptos" panose="020B0004020202020204" pitchFamily="34" charset="0"/>
               </a:rPr>
-              <a:t>4. Magnetic registration</a:t>
-            </a:r>
-          </a:p>
-        </p:txBody>
-      </p:sp>
-      <p:sp>
-        <p:nvSpPr>
-          <p:cNvPr id="22" name="Matching P100 Map Detail Body">
-            <a:extLst>
-              <a:ext uri="{FF2B5EF4-FFF2-40B4-BE49-F238E27FC236}">
-                <a16:creationId xmlns:a16="http://schemas.microsoft.com/office/drawing/2014/main" id="{156CB25D-77C0-DA0C-4FEB-87867AF2EDB9}"/>
-              </a:ext>
-            </a:extLst>
-          </p:cNvPr>
-          <p:cNvSpPr txBox="1"/>
-          <p:nvPr/>
-        </p:nvSpPr>
-        <p:spPr>
-          <a:xfrm>
-            <a:off x="5067300" y="2870200"/>
-            <a:ext cx="1930400" cy="590931"/>
-          </a:xfrm>
-          <a:prstGeom prst="rect">
-            <a:avLst/>
-          </a:prstGeom>
-          <a:noFill/>
-        </p:spPr>
-        <p:txBody>
-          <a:bodyPr vert="horz" lIns="0" tIns="0" rIns="0" bIns="0" rtlCol="0">
-            <a:spAutoFit/>
-          </a:bodyPr>
-          <a:lstStyle/>
-          <a:p>
-            <a:r>
-              <a:rPr lang="en-US" sz="640">
-                <a:solidFill>
-                  <a:srgbClr val="F7F4F0"/>
-                </a:solidFill>
-                <a:latin typeface="Aptos" panose="020B0004020202020204" pitchFamily="34" charset="0"/>
-              </a:rPr>
-              <a:t>Request / reply
-GP28 requests the scan; GP27 reports TMAG.
-Result
-Center magnet sets G54 X/Y zero.
-Outer magnet sets A zero.</a:t>
+              <a:t>BACK</a:t>
             </a:r>
           </a:p>
         </p:txBody>

--- a/docs/report/Theta_Pen_Plotter_Summer_Progress_Update.pptx
+++ b/docs/report/Theta_Pen_Plotter_Summer_Progress_Update.pptx
@@ -2124,28 +2124,6 @@
           </a:p>
         </p:txBody>
       </p:sp>
-      <p:pic>
-        <p:nvPicPr>
-          <p:cNvPr id="13" name="Picture 12"/>
-          <p:cNvPicPr>
-            <a:picLocks noChangeAspect="1"/>
-          </p:cNvPicPr>
-          <p:nvPr/>
-        </p:nvPicPr>
-        <p:blipFill>
-          <a:blip r:embed="rId3"/>
-          <a:stretch/>
-        </p:blipFill>
-        <p:spPr>
-          <a:xfrm>
-            <a:off x="6603919" y="552450"/>
-            <a:ext cx="4413411" cy="5334000"/>
-          </a:xfrm>
-          <a:prstGeom prst="rect">
-            <a:avLst/>
-          </a:prstGeom>
-        </p:spPr>
-      </p:pic>
       <p:sp>
         <p:nvSpPr>
           <p:cNvPr id="7" name="Rectangle 6">
@@ -2204,6 +2182,42 @@
           </a:p>
         </p:txBody>
       </p:sp>
+      <p:pic>
+        <p:nvPicPr>
+          <p:cNvPr id="9" name="Picture 12">
+            <a:extLst>
+              <a:ext uri="{FF2B5EF4-FFF2-40B4-BE49-F238E27FC236}">
+                <a16:creationId xmlns:a16="http://schemas.microsoft.com/office/drawing/2014/main" id="{0052B775-B4A3-8E7A-30E8-112F7D9C5314}"/>
+              </a:ext>
+            </a:extLst>
+          </p:cNvPr>
+          <p:cNvPicPr>
+            <a:picLocks/>
+          </p:cNvPicPr>
+          <p:nvPr/>
+        </p:nvPicPr>
+        <p:blipFill>
+          <a:blip r:embed="rId3">
+            <a:extLst>
+              <a:ext uri="{28A0092B-C50C-407E-A947-70E740481C1C}">
+                <a14:useLocalDpi xmlns:a14="http://schemas.microsoft.com/office/drawing/2010/main" val="0"/>
+              </a:ext>
+            </a:extLst>
+          </a:blip>
+          <a:stretch>
+            <a:fillRect/>
+          </a:stretch>
+        </p:blipFill>
+        <p:spPr>
+          <a:xfrm>
+            <a:off x="6882583" y="552450"/>
+            <a:ext cx="3856084" cy="5334000"/>
+          </a:xfrm>
+          <a:prstGeom prst="rect">
+            <a:avLst/>
+          </a:prstGeom>
+        </p:spPr>
+      </p:pic>
     </p:spTree>
     <p:extLst>
       <p:ext uri="{BB962C8B-B14F-4D97-AF65-F5344CB8AC3E}">
@@ -3807,7 +3821,7 @@
         </p:spPr>
         <p:txBody>
           <a:bodyPr lIns="0" tIns="0" rIns="0" bIns="0" anchor="t">
-            <a:normAutofit/>
+            <a:normAutofit fontScale="85000" lnSpcReduction="10000"/>
           </a:bodyPr>
           <a:lstStyle/>
           <a:p>
@@ -4345,7 +4359,7 @@
         </p:spPr>
         <p:txBody>
           <a:bodyPr lIns="0" tIns="0" rIns="0" bIns="0" anchor="t">
-            <a:normAutofit/>
+            <a:normAutofit lnSpcReduction="10000"/>
           </a:bodyPr>
           <a:lstStyle/>
           <a:p>
@@ -5504,7 +5518,7 @@
               </a:defRPr>
             </a:pPr>
             <a:r>
-              <a:rPr sz="1575" b="1">
+              <a:rPr sz="1575" b="1" dirty="0">
                 <a:solidFill>
                   <a:srgbClr val="000000"/>
                 </a:solidFill>
@@ -5512,7 +5526,7 @@
                 <a:ea typeface="Helvetica Neue"/>
                 <a:cs typeface="Helvetica Neue"/>
               </a:rPr>
-              <a:t>Check each writing tool</a:t>
+              <a:t>Check writing tool</a:t>
             </a:r>
           </a:p>
         </p:txBody>
@@ -5562,7 +5576,7 @@
               </a:defRPr>
             </a:pPr>
             <a:r>
-              <a:rPr sz="1200" b="0">
+              <a:rPr sz="1200" b="0" dirty="0">
                 <a:solidFill>
                   <a:srgbClr val="59616B"/>
                 </a:solidFill>
@@ -5570,8 +5584,27 @@
                 <a:ea typeface="Helvetica Neue"/>
                 <a:cs typeface="Helvetica Neue"/>
               </a:rPr>
-              <a:t>Touch and clear before every run; validate pens and pencils.</a:t>
-            </a:r>
+              <a:t>Touch and clear before every run; </a:t>
+            </a:r>
+            <a:r>
+              <a:rPr lang="en-US" sz="1200" b="0" dirty="0">
+                <a:solidFill>
+                  <a:srgbClr val="59616B"/>
+                </a:solidFill>
+                <a:latin typeface="Helvetica Neue"/>
+                <a:ea typeface="Helvetica Neue"/>
+                <a:cs typeface="Helvetica Neue"/>
+              </a:rPr>
+              <a:t>works with pens or pencils.</a:t>
+            </a:r>
+            <a:endParaRPr sz="1200" b="0" dirty="0">
+              <a:solidFill>
+                <a:srgbClr val="59616B"/>
+              </a:solidFill>
+              <a:latin typeface="Helvetica Neue"/>
+              <a:ea typeface="Helvetica Neue"/>
+              <a:cs typeface="Helvetica Neue"/>
+            </a:endParaRPr>
           </a:p>
         </p:txBody>
       </p:sp>
@@ -5687,7 +5720,7 @@
         </p:spPr>
         <p:txBody>
           <a:bodyPr lIns="0" tIns="0" rIns="0" bIns="0" anchor="t">
-            <a:normAutofit fontScale="64653"/>
+            <a:normAutofit fontScale="64653" lnSpcReduction="10000"/>
           </a:bodyPr>
           <a:lstStyle/>
           <a:p>
@@ -5943,7 +5976,7 @@
         </p:spPr>
         <p:txBody>
           <a:bodyPr lIns="0" tIns="0" rIns="0" bIns="0" anchor="t">
-            <a:normAutofit fontScale="60185"/>
+            <a:normAutofit fontScale="67685" lnSpcReduction="10000"/>
           </a:bodyPr>
           <a:lstStyle/>
           <a:p>
@@ -6117,7 +6150,7 @@
         </p:spPr>
         <p:txBody>
           <a:bodyPr lIns="0" tIns="0" rIns="0" bIns="0" anchor="t">
-            <a:normAutofit fontScale="83333"/>
+            <a:normAutofit fontScale="90833" lnSpcReduction="10000"/>
           </a:bodyPr>
           <a:lstStyle/>
           <a:p>
@@ -6286,7 +6319,7 @@
               </a:defRPr>
             </a:pPr>
             <a:r>
-              <a:rPr sz="2700" b="1" dirty="0">
+              <a:rPr lang="en-US" sz="2700" b="1" dirty="0">
                 <a:solidFill>
                   <a:srgbClr val="000000"/>
                 </a:solidFill>
@@ -6294,8 +6327,16 @@
                 <a:ea typeface="Helvetica Neue"/>
                 <a:cs typeface="Helvetica Neue"/>
               </a:rPr>
-              <a:t>The project now has a testable machine architecture—not just a concept</a:t>
-            </a:r>
+              <a:t>Mechanical portion built, wiring in progress</a:t>
+            </a:r>
+            <a:endParaRPr sz="2700" b="1" dirty="0">
+              <a:solidFill>
+                <a:srgbClr val="000000"/>
+              </a:solidFill>
+              <a:latin typeface="Helvetica Neue"/>
+              <a:ea typeface="Helvetica Neue"/>
+              <a:cs typeface="Helvetica Neue"/>
+            </a:endParaRPr>
           </a:p>
         </p:txBody>
       </p:sp>
@@ -6647,7 +6688,9 @@
           </a:bodyPr>
           <a:lstStyle/>
           <a:p>
-            <a:pPr algn="l">
+            <a:pPr marL="285750" indent="-285750" algn="l">
+              <a:buFont typeface="Arial" panose="020B0604020202020204" pitchFamily="34" charset="0"/>
+              <a:buChar char="•"/>
               <a:defRPr sz="1425" b="0">
                 <a:solidFill>
                   <a:srgbClr val="59616B"/>
@@ -6658,7 +6701,7 @@
               </a:defRPr>
             </a:pPr>
             <a:r>
-              <a:rPr sz="1425" b="0">
+              <a:rPr sz="1425" b="0" dirty="0">
                 <a:solidFill>
                   <a:srgbClr val="59616B"/>
                 </a:solidFill>
@@ -6666,7 +6709,194 @@
                 <a:ea typeface="Helvetica Neue"/>
                 <a:cs typeface="Helvetica Neue"/>
               </a:rPr>
-              <a:t>Guided pen carriage, N20 lead-screw actuator, spring compliance, load-cell force path, and printed mounting concepts.</a:t>
+              <a:t>Guided pen carriage</a:t>
+            </a:r>
+            <a:endParaRPr lang="en-US" sz="1425" dirty="0">
+              <a:solidFill>
+                <a:srgbClr val="59616B"/>
+              </a:solidFill>
+              <a:latin typeface="Helvetica Neue"/>
+              <a:ea typeface="Helvetica Neue"/>
+              <a:cs typeface="Helvetica Neue"/>
+            </a:endParaRPr>
+          </a:p>
+          <a:p>
+            <a:pPr marL="285750" indent="-285750" algn="l">
+              <a:buFont typeface="Arial" panose="020B0604020202020204" pitchFamily="34" charset="0"/>
+              <a:buChar char="•"/>
+              <a:defRPr sz="1425" b="0">
+                <a:solidFill>
+                  <a:srgbClr val="59616B"/>
+                </a:solidFill>
+                <a:latin typeface="Helvetica Neue"/>
+                <a:ea typeface="Helvetica Neue"/>
+                <a:cs typeface="Helvetica Neue"/>
+              </a:defRPr>
+            </a:pPr>
+            <a:r>
+              <a:rPr sz="1425" b="0" dirty="0">
+                <a:solidFill>
+                  <a:srgbClr val="59616B"/>
+                </a:solidFill>
+                <a:latin typeface="Helvetica Neue"/>
+                <a:ea typeface="Helvetica Neue"/>
+                <a:cs typeface="Helvetica Neue"/>
+              </a:rPr>
+              <a:t>N20 lead-screw actuator</a:t>
+            </a:r>
+            <a:endParaRPr lang="en-US" sz="1425" dirty="0">
+              <a:solidFill>
+                <a:srgbClr val="59616B"/>
+              </a:solidFill>
+              <a:latin typeface="Helvetica Neue"/>
+              <a:ea typeface="Helvetica Neue"/>
+              <a:cs typeface="Helvetica Neue"/>
+            </a:endParaRPr>
+          </a:p>
+          <a:p>
+            <a:pPr marL="285750" indent="-285750" algn="l">
+              <a:buFont typeface="Arial" panose="020B0604020202020204" pitchFamily="34" charset="0"/>
+              <a:buChar char="•"/>
+              <a:defRPr sz="1425" b="0">
+                <a:solidFill>
+                  <a:srgbClr val="59616B"/>
+                </a:solidFill>
+                <a:latin typeface="Helvetica Neue"/>
+                <a:ea typeface="Helvetica Neue"/>
+                <a:cs typeface="Helvetica Neue"/>
+              </a:defRPr>
+            </a:pPr>
+            <a:r>
+              <a:rPr lang="en-US" sz="1425" b="0" dirty="0">
+                <a:solidFill>
+                  <a:srgbClr val="59616B"/>
+                </a:solidFill>
+                <a:latin typeface="Helvetica Neue"/>
+                <a:ea typeface="Helvetica Neue"/>
+                <a:cs typeface="Helvetica Neue"/>
+              </a:rPr>
+              <a:t>S</a:t>
+            </a:r>
+            <a:r>
+              <a:rPr sz="1425" b="0" dirty="0">
+                <a:solidFill>
+                  <a:srgbClr val="59616B"/>
+                </a:solidFill>
+                <a:latin typeface="Helvetica Neue"/>
+                <a:ea typeface="Helvetica Neue"/>
+                <a:cs typeface="Helvetica Neue"/>
+              </a:rPr>
+              <a:t>pring compliance</a:t>
+            </a:r>
+            <a:endParaRPr lang="en-US" sz="1425" dirty="0">
+              <a:solidFill>
+                <a:srgbClr val="59616B"/>
+              </a:solidFill>
+              <a:latin typeface="Helvetica Neue"/>
+              <a:ea typeface="Helvetica Neue"/>
+              <a:cs typeface="Helvetica Neue"/>
+            </a:endParaRPr>
+          </a:p>
+          <a:p>
+            <a:pPr marL="285750" indent="-285750" algn="l">
+              <a:buFont typeface="Arial" panose="020B0604020202020204" pitchFamily="34" charset="0"/>
+              <a:buChar char="•"/>
+              <a:defRPr sz="1425" b="0">
+                <a:solidFill>
+                  <a:srgbClr val="59616B"/>
+                </a:solidFill>
+                <a:latin typeface="Helvetica Neue"/>
+                <a:ea typeface="Helvetica Neue"/>
+                <a:cs typeface="Helvetica Neue"/>
+              </a:defRPr>
+            </a:pPr>
+            <a:r>
+              <a:rPr lang="en-US" sz="1425" b="0" dirty="0">
+                <a:solidFill>
+                  <a:srgbClr val="59616B"/>
+                </a:solidFill>
+                <a:latin typeface="Helvetica Neue"/>
+                <a:ea typeface="Helvetica Neue"/>
+                <a:cs typeface="Helvetica Neue"/>
+              </a:rPr>
+              <a:t>L</a:t>
+            </a:r>
+            <a:r>
+              <a:rPr sz="1425" b="0" dirty="0">
+                <a:solidFill>
+                  <a:srgbClr val="59616B"/>
+                </a:solidFill>
+                <a:latin typeface="Helvetica Neue"/>
+                <a:ea typeface="Helvetica Neue"/>
+                <a:cs typeface="Helvetica Neue"/>
+              </a:rPr>
+              <a:t>oad</a:t>
+            </a:r>
+            <a:r>
+              <a:rPr lang="en-US" sz="1425" dirty="0">
+                <a:solidFill>
+                  <a:srgbClr val="59616B"/>
+                </a:solidFill>
+                <a:latin typeface="Helvetica Neue"/>
+                <a:ea typeface="Helvetica Neue"/>
+                <a:cs typeface="Helvetica Neue"/>
+              </a:rPr>
+              <a:t>-</a:t>
+            </a:r>
+            <a:r>
+              <a:rPr sz="1425" b="0" dirty="0">
+                <a:solidFill>
+                  <a:srgbClr val="59616B"/>
+                </a:solidFill>
+                <a:latin typeface="Helvetica Neue"/>
+                <a:ea typeface="Helvetica Neue"/>
+                <a:cs typeface="Helvetica Neue"/>
+              </a:rPr>
+              <a:t>cell force path</a:t>
+            </a:r>
+            <a:endParaRPr lang="en-US" sz="1425" b="0" dirty="0">
+              <a:solidFill>
+                <a:srgbClr val="59616B"/>
+              </a:solidFill>
+              <a:latin typeface="Helvetica Neue"/>
+              <a:ea typeface="Helvetica Neue"/>
+              <a:cs typeface="Helvetica Neue"/>
+            </a:endParaRPr>
+          </a:p>
+          <a:p>
+            <a:pPr marL="285750" indent="-285750" algn="l">
+              <a:buFont typeface="Arial" panose="020B0604020202020204" pitchFamily="34" charset="0"/>
+              <a:buChar char="•"/>
+              <a:defRPr sz="1425" b="0">
+                <a:solidFill>
+                  <a:srgbClr val="59616B"/>
+                </a:solidFill>
+                <a:latin typeface="Helvetica Neue"/>
+                <a:ea typeface="Helvetica Neue"/>
+                <a:cs typeface="Helvetica Neue"/>
+              </a:defRPr>
+            </a:pPr>
+            <a:r>
+              <a:rPr lang="en-US" sz="1425" dirty="0">
+                <a:solidFill>
+                  <a:srgbClr val="59616B"/>
+                </a:solidFill>
+                <a:latin typeface="Helvetica Neue"/>
+                <a:ea typeface="Helvetica Neue"/>
+                <a:cs typeface="Helvetica Neue"/>
+              </a:rPr>
+              <a:t>P</a:t>
+            </a:r>
+            <a:r>
+              <a:rPr sz="1425" b="0" dirty="0">
+                <a:solidFill>
+                  <a:srgbClr val="59616B"/>
+                </a:solidFill>
+                <a:latin typeface="Helvetica Neue"/>
+                <a:ea typeface="Helvetica Neue"/>
+                <a:cs typeface="Helvetica Neue"/>
+              </a:rPr>
+              <a:t>rinted mounting concepts.</a:t>
             </a:r>
           </a:p>
         </p:txBody>
@@ -6816,7 +7046,7 @@
               </a:defRPr>
             </a:pPr>
             <a:r>
-              <a:rPr sz="2025" b="1">
+              <a:rPr lang="en-US" sz="2025" b="1" dirty="0">
                 <a:solidFill>
                   <a:srgbClr val="000000"/>
                 </a:solidFill>
@@ -6824,8 +7054,16 @@
                 <a:ea typeface="Helvetica Neue"/>
                 <a:cs typeface="Helvetica Neue"/>
               </a:rPr>
-              <a:t>Defined ownership</a:t>
-            </a:r>
+              <a:t>Ownership definitions</a:t>
+            </a:r>
+            <a:endParaRPr sz="2025" b="1" dirty="0">
+              <a:solidFill>
+                <a:srgbClr val="000000"/>
+              </a:solidFill>
+              <a:latin typeface="Helvetica Neue"/>
+              <a:ea typeface="Helvetica Neue"/>
+              <a:cs typeface="Helvetica Neue"/>
+            </a:endParaRPr>
           </a:p>
         </p:txBody>
       </p:sp>
@@ -6859,11 +7097,13 @@
         </p:spPr>
         <p:txBody>
           <a:bodyPr lIns="0" tIns="0" rIns="0" bIns="0" anchor="t">
-            <a:normAutofit/>
+            <a:normAutofit lnSpcReduction="10000"/>
           </a:bodyPr>
           <a:lstStyle/>
           <a:p>
-            <a:pPr algn="l">
+            <a:pPr marL="285750" indent="-285750" algn="l">
+              <a:buFont typeface="Arial" panose="020B0604020202020204" pitchFamily="34" charset="0"/>
+              <a:buChar char="•"/>
               <a:defRPr sz="1425" b="0">
                 <a:solidFill>
                   <a:srgbClr val="59616B"/>
@@ -6874,7 +7114,7 @@
               </a:defRPr>
             </a:pPr>
             <a:r>
-              <a:rPr sz="1425" b="0">
+              <a:rPr sz="1425" b="0" dirty="0">
                 <a:solidFill>
                   <a:srgbClr val="59616B"/>
                 </a:solidFill>
@@ -6882,7 +7122,84 @@
                 <a:ea typeface="Helvetica Neue"/>
                 <a:cs typeface="Helvetica Neue"/>
               </a:rPr>
-              <a:t>RP23CNC owns X/Y/A motion and registration. The Pro Micro owns N20 motion, force sensing, and toolhead safety.</a:t>
+              <a:t>RP23CNC owns X/Y/A motion </a:t>
+            </a:r>
+            <a:r>
+              <a:rPr lang="en-US" sz="1425" b="0" dirty="0">
+                <a:solidFill>
+                  <a:srgbClr val="59616B"/>
+                </a:solidFill>
+                <a:latin typeface="Helvetica Neue"/>
+                <a:ea typeface="Helvetica Neue"/>
+                <a:cs typeface="Helvetica Neue"/>
+              </a:rPr>
+              <a:t>orchestration</a:t>
+            </a:r>
+            <a:r>
+              <a:rPr sz="1425" b="0" dirty="0">
+                <a:solidFill>
+                  <a:srgbClr val="59616B"/>
+                </a:solidFill>
+                <a:latin typeface="Helvetica Neue"/>
+                <a:ea typeface="Helvetica Neue"/>
+                <a:cs typeface="Helvetica Neue"/>
+              </a:rPr>
+              <a:t>. </a:t>
+            </a:r>
+            <a:endParaRPr lang="en-US" sz="1425" b="0" dirty="0">
+              <a:solidFill>
+                <a:srgbClr val="59616B"/>
+              </a:solidFill>
+              <a:latin typeface="Helvetica Neue"/>
+              <a:ea typeface="Helvetica Neue"/>
+              <a:cs typeface="Helvetica Neue"/>
+            </a:endParaRPr>
+          </a:p>
+          <a:p>
+            <a:pPr marL="285750" indent="-285750" algn="l">
+              <a:buFont typeface="Arial" panose="020B0604020202020204" pitchFamily="34" charset="0"/>
+              <a:buChar char="•"/>
+              <a:defRPr sz="1425" b="0">
+                <a:solidFill>
+                  <a:srgbClr val="59616B"/>
+                </a:solidFill>
+                <a:latin typeface="Helvetica Neue"/>
+                <a:ea typeface="Helvetica Neue"/>
+                <a:cs typeface="Helvetica Neue"/>
+              </a:defRPr>
+            </a:pPr>
+            <a:endParaRPr lang="en-US" sz="1425" b="0" dirty="0">
+              <a:solidFill>
+                <a:srgbClr val="59616B"/>
+              </a:solidFill>
+              <a:latin typeface="Helvetica Neue"/>
+              <a:ea typeface="Helvetica Neue"/>
+              <a:cs typeface="Helvetica Neue"/>
+            </a:endParaRPr>
+          </a:p>
+          <a:p>
+            <a:pPr marL="285750" indent="-285750" algn="l">
+              <a:buFont typeface="Arial" panose="020B0604020202020204" pitchFamily="34" charset="0"/>
+              <a:buChar char="•"/>
+              <a:defRPr sz="1425" b="0">
+                <a:solidFill>
+                  <a:srgbClr val="59616B"/>
+                </a:solidFill>
+                <a:latin typeface="Helvetica Neue"/>
+                <a:ea typeface="Helvetica Neue"/>
+                <a:cs typeface="Helvetica Neue"/>
+              </a:defRPr>
+            </a:pPr>
+            <a:r>
+              <a:rPr sz="1425" b="0" dirty="0">
+                <a:solidFill>
+                  <a:srgbClr val="59616B"/>
+                </a:solidFill>
+                <a:latin typeface="Helvetica Neue"/>
+                <a:ea typeface="Helvetica Neue"/>
+                <a:cs typeface="Helvetica Neue"/>
+              </a:rPr>
+              <a:t>Pro Micro owns N20 motion, force sensing and toolhead safety.</a:t>
             </a:r>
           </a:p>
         </p:txBody>
@@ -6903,7 +7220,7 @@
         </p:nvSpPr>
         <p:spPr>
           <a:xfrm>
-            <a:off x="7867650" y="1809750"/>
+            <a:off x="7858125" y="1809750"/>
             <a:ext cx="3333750" cy="3143250"/>
           </a:xfrm>
           <a:prstGeom prst="roundRect">
@@ -7032,7 +7349,7 @@
               </a:defRPr>
             </a:pPr>
             <a:r>
-              <a:rPr sz="2025" b="1">
+              <a:rPr sz="2025" b="1" dirty="0">
                 <a:solidFill>
                   <a:srgbClr val="000000"/>
                 </a:solidFill>
@@ -7040,8 +7357,27 @@
                 <a:ea typeface="Helvetica Neue"/>
                 <a:cs typeface="Helvetica Neue"/>
               </a:rPr>
-              <a:t>Planned with gates</a:t>
-            </a:r>
+              <a:t>Planne</a:t>
+            </a:r>
+            <a:r>
+              <a:rPr lang="en-US" sz="2025" b="1" dirty="0">
+                <a:solidFill>
+                  <a:srgbClr val="000000"/>
+                </a:solidFill>
+                <a:latin typeface="Helvetica Neue"/>
+                <a:ea typeface="Helvetica Neue"/>
+                <a:cs typeface="Helvetica Neue"/>
+              </a:rPr>
+              <a:t>d</a:t>
+            </a:r>
+            <a:endParaRPr sz="2025" b="1" dirty="0">
+              <a:solidFill>
+                <a:srgbClr val="000000"/>
+              </a:solidFill>
+              <a:latin typeface="Helvetica Neue"/>
+              <a:ea typeface="Helvetica Neue"/>
+              <a:cs typeface="Helvetica Neue"/>
+            </a:endParaRPr>
           </a:p>
         </p:txBody>
       </p:sp>
@@ -7075,7 +7411,7 @@
         </p:spPr>
         <p:txBody>
           <a:bodyPr lIns="0" tIns="0" rIns="0" bIns="0" anchor="t">
-            <a:normAutofit/>
+            <a:normAutofit fontScale="92500" lnSpcReduction="20000"/>
           </a:bodyPr>
           <a:lstStyle/>
           <a:p>
@@ -7090,7 +7426,7 @@
               </a:defRPr>
             </a:pPr>
             <a:r>
-              <a:rPr sz="1425" b="0">
+              <a:rPr lang="en-US" sz="1425" b="0" dirty="0">
                 <a:solidFill>
                   <a:srgbClr val="59616B"/>
                 </a:solidFill>
@@ -7098,8 +7434,248 @@
                 <a:ea typeface="Helvetica Neue"/>
                 <a:cs typeface="Helvetica Neue"/>
               </a:rPr>
-              <a:t>Named bench tests define force calibration, lift-home repeatability, M5 clearance, and interchangeable-tool checks.</a:t>
-            </a:r>
+              <a:t>Test definitions for:</a:t>
+            </a:r>
+          </a:p>
+          <a:p>
+            <a:pPr algn="l">
+              <a:defRPr sz="1425" b="0">
+                <a:solidFill>
+                  <a:srgbClr val="59616B"/>
+                </a:solidFill>
+                <a:latin typeface="Helvetica Neue"/>
+                <a:ea typeface="Helvetica Neue"/>
+                <a:cs typeface="Helvetica Neue"/>
+              </a:defRPr>
+            </a:pPr>
+            <a:endParaRPr lang="en-US" sz="1425" b="0" dirty="0">
+              <a:solidFill>
+                <a:srgbClr val="59616B"/>
+              </a:solidFill>
+              <a:latin typeface="Helvetica Neue"/>
+              <a:ea typeface="Helvetica Neue"/>
+              <a:cs typeface="Helvetica Neue"/>
+            </a:endParaRPr>
+          </a:p>
+          <a:p>
+            <a:pPr marL="285750" indent="-285750" algn="l">
+              <a:buFont typeface="Arial" panose="020B0604020202020204" pitchFamily="34" charset="0"/>
+              <a:buChar char="•"/>
+              <a:defRPr sz="1425" b="0">
+                <a:solidFill>
+                  <a:srgbClr val="59616B"/>
+                </a:solidFill>
+                <a:latin typeface="Helvetica Neue"/>
+                <a:ea typeface="Helvetica Neue"/>
+                <a:cs typeface="Helvetica Neue"/>
+              </a:defRPr>
+            </a:pPr>
+            <a:r>
+              <a:rPr lang="en-US" sz="1425" dirty="0">
+                <a:solidFill>
+                  <a:srgbClr val="59616B"/>
+                </a:solidFill>
+                <a:latin typeface="Helvetica Neue"/>
+                <a:ea typeface="Helvetica Neue"/>
+                <a:cs typeface="Helvetica Neue"/>
+              </a:rPr>
+              <a:t>F</a:t>
+            </a:r>
+            <a:r>
+              <a:rPr sz="1425" b="0" dirty="0">
+                <a:solidFill>
+                  <a:srgbClr val="59616B"/>
+                </a:solidFill>
+                <a:latin typeface="Helvetica Neue"/>
+                <a:ea typeface="Helvetica Neue"/>
+                <a:cs typeface="Helvetica Neue"/>
+              </a:rPr>
+              <a:t>orce calibration</a:t>
+            </a:r>
+            <a:endParaRPr lang="en-US" sz="1425" dirty="0">
+              <a:solidFill>
+                <a:srgbClr val="59616B"/>
+              </a:solidFill>
+              <a:latin typeface="Helvetica Neue"/>
+              <a:ea typeface="Helvetica Neue"/>
+              <a:cs typeface="Helvetica Neue"/>
+            </a:endParaRPr>
+          </a:p>
+          <a:p>
+            <a:pPr marL="285750" indent="-285750" algn="l">
+              <a:buFont typeface="Arial" panose="020B0604020202020204" pitchFamily="34" charset="0"/>
+              <a:buChar char="•"/>
+              <a:defRPr sz="1425" b="0">
+                <a:solidFill>
+                  <a:srgbClr val="59616B"/>
+                </a:solidFill>
+                <a:latin typeface="Helvetica Neue"/>
+                <a:ea typeface="Helvetica Neue"/>
+                <a:cs typeface="Helvetica Neue"/>
+              </a:defRPr>
+            </a:pPr>
+            <a:r>
+              <a:rPr lang="en-US" sz="1425" dirty="0">
+                <a:solidFill>
+                  <a:srgbClr val="59616B"/>
+                </a:solidFill>
+                <a:latin typeface="Helvetica Neue"/>
+                <a:ea typeface="Helvetica Neue"/>
+                <a:cs typeface="Helvetica Neue"/>
+              </a:rPr>
+              <a:t>L</a:t>
+            </a:r>
+            <a:r>
+              <a:rPr sz="1425" b="0" dirty="0">
+                <a:solidFill>
+                  <a:srgbClr val="59616B"/>
+                </a:solidFill>
+                <a:latin typeface="Helvetica Neue"/>
+                <a:ea typeface="Helvetica Neue"/>
+                <a:cs typeface="Helvetica Neue"/>
+              </a:rPr>
+              <a:t>ift</a:t>
+            </a:r>
+            <a:r>
+              <a:rPr lang="en-US" sz="1425" dirty="0">
+                <a:solidFill>
+                  <a:srgbClr val="59616B"/>
+                </a:solidFill>
+                <a:latin typeface="Helvetica Neue"/>
+                <a:ea typeface="Helvetica Neue"/>
+                <a:cs typeface="Helvetica Neue"/>
+              </a:rPr>
+              <a:t>-</a:t>
+            </a:r>
+            <a:r>
+              <a:rPr sz="1425" b="0" dirty="0">
+                <a:solidFill>
+                  <a:srgbClr val="59616B"/>
+                </a:solidFill>
+                <a:latin typeface="Helvetica Neue"/>
+                <a:ea typeface="Helvetica Neue"/>
+                <a:cs typeface="Helvetica Neue"/>
+              </a:rPr>
+              <a:t>home repeatability</a:t>
+            </a:r>
+            <a:endParaRPr lang="en-US" sz="1425" b="0" dirty="0">
+              <a:solidFill>
+                <a:srgbClr val="59616B"/>
+              </a:solidFill>
+              <a:latin typeface="Helvetica Neue"/>
+              <a:ea typeface="Helvetica Neue"/>
+              <a:cs typeface="Helvetica Neue"/>
+            </a:endParaRPr>
+          </a:p>
+          <a:p>
+            <a:pPr marL="285750" indent="-285750" algn="l">
+              <a:buFont typeface="Arial" panose="020B0604020202020204" pitchFamily="34" charset="0"/>
+              <a:buChar char="•"/>
+              <a:defRPr sz="1425" b="0">
+                <a:solidFill>
+                  <a:srgbClr val="59616B"/>
+                </a:solidFill>
+                <a:latin typeface="Helvetica Neue"/>
+                <a:ea typeface="Helvetica Neue"/>
+                <a:cs typeface="Helvetica Neue"/>
+              </a:defRPr>
+            </a:pPr>
+            <a:r>
+              <a:rPr sz="1425" b="0" dirty="0">
+                <a:solidFill>
+                  <a:srgbClr val="59616B"/>
+                </a:solidFill>
+                <a:latin typeface="Helvetica Neue"/>
+                <a:ea typeface="Helvetica Neue"/>
+                <a:cs typeface="Helvetica Neue"/>
+              </a:rPr>
+              <a:t>M5 clearance</a:t>
+            </a:r>
+            <a:endParaRPr lang="en-US" sz="1425" b="0" dirty="0">
+              <a:solidFill>
+                <a:srgbClr val="59616B"/>
+              </a:solidFill>
+              <a:latin typeface="Helvetica Neue"/>
+              <a:ea typeface="Helvetica Neue"/>
+              <a:cs typeface="Helvetica Neue"/>
+            </a:endParaRPr>
+          </a:p>
+          <a:p>
+            <a:pPr marL="285750" indent="-285750" algn="l">
+              <a:buFont typeface="Arial" panose="020B0604020202020204" pitchFamily="34" charset="0"/>
+              <a:buChar char="•"/>
+              <a:defRPr sz="1425" b="0">
+                <a:solidFill>
+                  <a:srgbClr val="59616B"/>
+                </a:solidFill>
+                <a:latin typeface="Helvetica Neue"/>
+                <a:ea typeface="Helvetica Neue"/>
+                <a:cs typeface="Helvetica Neue"/>
+              </a:defRPr>
+            </a:pPr>
+            <a:r>
+              <a:rPr lang="en-US" sz="1425" dirty="0">
+                <a:solidFill>
+                  <a:srgbClr val="59616B"/>
+                </a:solidFill>
+                <a:latin typeface="Helvetica Neue"/>
+                <a:ea typeface="Helvetica Neue"/>
+                <a:cs typeface="Helvetica Neue"/>
+              </a:rPr>
+              <a:t>I</a:t>
+            </a:r>
+            <a:r>
+              <a:rPr sz="1425" b="0" dirty="0">
+                <a:solidFill>
+                  <a:srgbClr val="59616B"/>
+                </a:solidFill>
+                <a:latin typeface="Helvetica Neue"/>
+                <a:ea typeface="Helvetica Neue"/>
+                <a:cs typeface="Helvetica Neue"/>
+              </a:rPr>
+              <a:t>nterchangeable-tool checks</a:t>
+            </a:r>
+            <a:endParaRPr lang="en-US" sz="1425" b="0" dirty="0">
+              <a:solidFill>
+                <a:srgbClr val="59616B"/>
+              </a:solidFill>
+              <a:latin typeface="Helvetica Neue"/>
+              <a:ea typeface="Helvetica Neue"/>
+              <a:cs typeface="Helvetica Neue"/>
+            </a:endParaRPr>
+          </a:p>
+          <a:p>
+            <a:pPr marL="285750" indent="-285750" algn="l">
+              <a:buFont typeface="Arial" panose="020B0604020202020204" pitchFamily="34" charset="0"/>
+              <a:buChar char="•"/>
+              <a:defRPr sz="1425" b="0">
+                <a:solidFill>
+                  <a:srgbClr val="59616B"/>
+                </a:solidFill>
+                <a:latin typeface="Helvetica Neue"/>
+                <a:ea typeface="Helvetica Neue"/>
+                <a:cs typeface="Helvetica Neue"/>
+              </a:defRPr>
+            </a:pPr>
+            <a:r>
+              <a:rPr lang="en-US" sz="1425" dirty="0">
+                <a:solidFill>
+                  <a:srgbClr val="59616B"/>
+                </a:solidFill>
+                <a:latin typeface="Helvetica Neue"/>
+                <a:ea typeface="Helvetica Neue"/>
+                <a:cs typeface="Helvetica Neue"/>
+              </a:rPr>
+              <a:t>Finish motor wiring</a:t>
+            </a:r>
+            <a:endParaRPr sz="1425" b="0" dirty="0">
+              <a:solidFill>
+                <a:srgbClr val="59616B"/>
+              </a:solidFill>
+              <a:latin typeface="Helvetica Neue"/>
+              <a:ea typeface="Helvetica Neue"/>
+              <a:cs typeface="Helvetica Neue"/>
+            </a:endParaRPr>
           </a:p>
         </p:txBody>
       </p:sp>
@@ -7148,7 +7724,7 @@
               </a:defRPr>
             </a:pPr>
             <a:r>
-              <a:rPr sz="1800" b="1">
+              <a:rPr lang="en-US" sz="1800" b="1" dirty="0">
                 <a:solidFill>
                   <a:srgbClr val="000000"/>
                 </a:solidFill>
@@ -7156,8 +7732,38 @@
                 <a:ea typeface="Helvetica Neue"/>
                 <a:cs typeface="Helvetica Neue"/>
               </a:rPr>
-              <a:t>Key point: progress is being documented as measured, test-gated behavior rather than assumed capability.</a:t>
-            </a:r>
+              <a:t>Progress </a:t>
+            </a:r>
+            <a:r>
+              <a:rPr sz="1800" b="1" dirty="0">
+                <a:solidFill>
+                  <a:srgbClr val="000000"/>
+                </a:solidFill>
+                <a:latin typeface="Helvetica Neue"/>
+                <a:ea typeface="Helvetica Neue"/>
+                <a:cs typeface="Helvetica Neue"/>
+              </a:rPr>
+              <a:t>is being documented as measured</a:t>
+            </a:r>
+            <a:r>
+              <a:rPr lang="en-US" sz="1800" b="1" dirty="0">
+                <a:solidFill>
+                  <a:srgbClr val="000000"/>
+                </a:solidFill>
+                <a:latin typeface="Helvetica Neue"/>
+                <a:ea typeface="Helvetica Neue"/>
+                <a:cs typeface="Helvetica Neue"/>
+              </a:rPr>
+              <a:t> tests</a:t>
+            </a:r>
+            <a:endParaRPr sz="1800" b="1" dirty="0">
+              <a:solidFill>
+                <a:srgbClr val="000000"/>
+              </a:solidFill>
+              <a:latin typeface="Helvetica Neue"/>
+              <a:ea typeface="Helvetica Neue"/>
+              <a:cs typeface="Helvetica Neue"/>
+            </a:endParaRPr>
           </a:p>
         </p:txBody>
       </p:sp>
@@ -7849,7 +8455,7 @@
         </p:nvSpPr>
         <p:spPr>
           <a:xfrm>
-            <a:off x="7086600" y="2476500"/>
+            <a:off x="7164777" y="2476500"/>
             <a:ext cx="1809750" cy="1619250"/>
           </a:xfrm>
           <a:prstGeom prst="roundRect">
@@ -7891,7 +8497,7 @@
         </p:nvSpPr>
         <p:spPr>
           <a:xfrm>
-            <a:off x="7258050" y="2724150"/>
+            <a:off x="7336227" y="2724150"/>
             <a:ext cx="1466850" cy="285750"/>
           </a:xfrm>
           <a:prstGeom prst="rect">
@@ -7905,7 +8511,7 @@
         </p:spPr>
         <p:txBody>
           <a:bodyPr lIns="0" tIns="0" rIns="0" bIns="0" anchor="t">
-            <a:normAutofit fontScale="90745"/>
+            <a:normAutofit fontScale="75745" lnSpcReduction="20000"/>
           </a:bodyPr>
           <a:lstStyle/>
           <a:p>
@@ -7949,7 +8555,7 @@
         </p:nvSpPr>
         <p:spPr>
           <a:xfrm>
-            <a:off x="7258050" y="3219450"/>
+            <a:off x="7336227" y="3219450"/>
             <a:ext cx="1466850" cy="666750"/>
           </a:xfrm>
           <a:prstGeom prst="rect">
@@ -8159,7 +8765,7 @@
               </a:defRPr>
             </a:pPr>
             <a:r>
-              <a:rPr sz="1200" b="0">
+              <a:rPr sz="1200" b="0" dirty="0">
                 <a:solidFill>
                   <a:srgbClr val="59616B"/>
                 </a:solidFill>
@@ -8182,7 +8788,7 @@
               </a:defRPr>
             </a:pPr>
             <a:r>
-              <a:rPr sz="1200" b="0">
+              <a:rPr sz="1200" b="0" dirty="0">
                 <a:solidFill>
                   <a:srgbClr val="59616B"/>
                 </a:solidFill>
@@ -8197,10 +8803,10 @@
       </p:sp>
       <p:sp>
         <p:nvSpPr>
-          <p:cNvPr id="18" name="Rectangle 17">
-            <a:extLst>
-              <a:ext uri="{FF2B5EF4-FFF2-40B4-BE49-F238E27FC236}">
-                <a16:creationId xmlns:a16="http://schemas.microsoft.com/office/drawing/2014/main" id="{E82F4AA5-48B0-424F-947B-4A3F28F2125D}"/>
+          <p:cNvPr id="19" name="Rectangle 18">
+            <a:extLst>
+              <a:ext uri="{FF2B5EF4-FFF2-40B4-BE49-F238E27FC236}">
+                <a16:creationId xmlns:a16="http://schemas.microsoft.com/office/drawing/2014/main" id="{12ADFD08-C19E-4DD4-B440-0EDCCE5E0062}"/>
               </a:ext>
             </a:extLst>
           </p:cNvPr>
@@ -8211,48 +8817,8 @@
         </p:nvSpPr>
         <p:spPr>
           <a:xfrm>
-            <a:off x="2209800" y="3067050"/>
-            <a:ext cx="876300" cy="28575"/>
-          </a:xfrm>
-          <a:prstGeom prst="rect">
-            <a:avLst/>
-          </a:prstGeom>
-          <a:solidFill>
-            <a:srgbClr val="3D8DFF"/>
-          </a:solidFill>
-          <a:ln w="0">
-            <a:solidFill>
-              <a:srgbClr val="3D8DFF"/>
-            </a:solidFill>
-            <a:prstDash val="solid"/>
-          </a:ln>
-        </p:spPr>
-        <p:txBody>
-          <a:bodyPr/>
-          <a:lstStyle/>
-          <a:p>
-            <a:endParaRPr lang="en-US"/>
-          </a:p>
-        </p:txBody>
-      </p:sp>
-      <p:sp>
-        <p:nvSpPr>
-          <p:cNvPr id="19" name="Rectangle 18">
-            <a:extLst>
-              <a:ext uri="{FF2B5EF4-FFF2-40B4-BE49-F238E27FC236}">
-                <a16:creationId xmlns:a16="http://schemas.microsoft.com/office/drawing/2014/main" id="{12ADFD08-C19E-4DD4-B440-0EDCCE5E0062}"/>
-              </a:ext>
-            </a:extLst>
-          </p:cNvPr>
-          <p:cNvSpPr>
-            <a:spLocks noGrp="1"/>
-          </p:cNvSpPr>
-          <p:nvPr/>
-        </p:nvSpPr>
-        <p:spPr>
-          <a:xfrm>
-            <a:off x="3105150" y="2933700"/>
-            <a:ext cx="209550" cy="247650"/>
+            <a:off x="2571750" y="2933700"/>
+            <a:ext cx="742950" cy="247650"/>
           </a:xfrm>
           <a:prstGeom prst="rect">
             <a:avLst/>
@@ -8265,7 +8831,7 @@
         </p:spPr>
         <p:txBody>
           <a:bodyPr lIns="0" tIns="0" rIns="0" bIns="0" anchor="t">
-            <a:normAutofit/>
+            <a:noAutofit/>
           </a:bodyPr>
           <a:lstStyle/>
           <a:p>
@@ -8280,7 +8846,7 @@
               </a:defRPr>
             </a:pPr>
             <a:r>
-              <a:rPr sz="1500" b="1">
+              <a:rPr sz="4000" b="1" dirty="0">
                 <a:solidFill>
                   <a:srgbClr val="3D8DFF"/>
                 </a:solidFill>
@@ -8309,7 +8875,7 @@
         </p:nvSpPr>
         <p:spPr>
           <a:xfrm>
-            <a:off x="2133600" y="2667000"/>
+            <a:off x="2245923" y="2667000"/>
             <a:ext cx="1066800" cy="171450"/>
           </a:xfrm>
           <a:prstGeom prst="rect">
@@ -8338,7 +8904,7 @@
               </a:defRPr>
             </a:pPr>
             <a:r>
-              <a:rPr sz="975" b="0">
+              <a:rPr sz="975" b="0" dirty="0">
                 <a:solidFill>
                   <a:srgbClr val="59616B"/>
                 </a:solidFill>
@@ -8353,10 +8919,10 @@
       </p:sp>
       <p:sp>
         <p:nvSpPr>
-          <p:cNvPr id="21" name="Rectangle 20">
-            <a:extLst>
-              <a:ext uri="{FF2B5EF4-FFF2-40B4-BE49-F238E27FC236}">
-                <a16:creationId xmlns:a16="http://schemas.microsoft.com/office/drawing/2014/main" id="{6E227CC2-7CF7-470A-978E-62CD81BF66E3}"/>
+          <p:cNvPr id="22" name="Rectangle 21">
+            <a:extLst>
+              <a:ext uri="{FF2B5EF4-FFF2-40B4-BE49-F238E27FC236}">
+                <a16:creationId xmlns:a16="http://schemas.microsoft.com/office/drawing/2014/main" id="{FB1625C7-F60D-4DBE-9478-34A2FA926DBF}"/>
               </a:ext>
             </a:extLst>
           </p:cNvPr>
@@ -8367,48 +8933,8 @@
         </p:nvSpPr>
         <p:spPr>
           <a:xfrm>
-            <a:off x="6515100" y="3067050"/>
-            <a:ext cx="381000" cy="28575"/>
-          </a:xfrm>
-          <a:prstGeom prst="rect">
-            <a:avLst/>
-          </a:prstGeom>
-          <a:solidFill>
-            <a:srgbClr val="3D8DFF"/>
-          </a:solidFill>
-          <a:ln w="0">
-            <a:solidFill>
-              <a:srgbClr val="3D8DFF"/>
-            </a:solidFill>
-            <a:prstDash val="solid"/>
-          </a:ln>
-        </p:spPr>
-        <p:txBody>
-          <a:bodyPr/>
-          <a:lstStyle/>
-          <a:p>
-            <a:endParaRPr lang="en-US"/>
-          </a:p>
-        </p:txBody>
-      </p:sp>
-      <p:sp>
-        <p:nvSpPr>
-          <p:cNvPr id="22" name="Rectangle 21">
-            <a:extLst>
-              <a:ext uri="{FF2B5EF4-FFF2-40B4-BE49-F238E27FC236}">
-                <a16:creationId xmlns:a16="http://schemas.microsoft.com/office/drawing/2014/main" id="{FB1625C7-F60D-4DBE-9478-34A2FA926DBF}"/>
-              </a:ext>
-            </a:extLst>
-          </p:cNvPr>
-          <p:cNvSpPr>
-            <a:spLocks noGrp="1"/>
-          </p:cNvSpPr>
-          <p:nvPr/>
-        </p:nvSpPr>
-        <p:spPr>
-          <a:xfrm>
-            <a:off x="6915150" y="2933700"/>
-            <a:ext cx="209550" cy="247650"/>
+            <a:off x="6515100" y="2914650"/>
+            <a:ext cx="456481" cy="247650"/>
           </a:xfrm>
           <a:prstGeom prst="rect">
             <a:avLst/>
@@ -8421,7 +8947,7 @@
         </p:spPr>
         <p:txBody>
           <a:bodyPr lIns="0" tIns="0" rIns="0" bIns="0" anchor="t">
-            <a:normAutofit/>
+            <a:noAutofit/>
           </a:bodyPr>
           <a:lstStyle/>
           <a:p>
@@ -8436,7 +8962,7 @@
               </a:defRPr>
             </a:pPr>
             <a:r>
-              <a:rPr sz="1500" b="1">
+              <a:rPr sz="4000" b="1" dirty="0">
                 <a:solidFill>
                   <a:srgbClr val="3D8DFF"/>
                 </a:solidFill>
@@ -8509,10 +9035,10 @@
       </p:sp>
       <p:sp>
         <p:nvSpPr>
-          <p:cNvPr id="24" name="Rectangle 23">
-            <a:extLst>
-              <a:ext uri="{FF2B5EF4-FFF2-40B4-BE49-F238E27FC236}">
-                <a16:creationId xmlns:a16="http://schemas.microsoft.com/office/drawing/2014/main" id="{DB0E7C54-3185-42B7-915D-99B59E0D99B6}"/>
+          <p:cNvPr id="25" name="Rectangle 24">
+            <a:extLst>
+              <a:ext uri="{FF2B5EF4-FFF2-40B4-BE49-F238E27FC236}">
+                <a16:creationId xmlns:a16="http://schemas.microsoft.com/office/drawing/2014/main" id="{979895A4-BAFC-4E3D-9428-DDF97F096842}"/>
               </a:ext>
             </a:extLst>
           </p:cNvPr>
@@ -8523,48 +9049,8 @@
         </p:nvSpPr>
         <p:spPr>
           <a:xfrm>
-            <a:off x="9067800" y="3067050"/>
-            <a:ext cx="876300" cy="28575"/>
-          </a:xfrm>
-          <a:prstGeom prst="rect">
-            <a:avLst/>
-          </a:prstGeom>
-          <a:solidFill>
-            <a:srgbClr val="3D8DFF"/>
-          </a:solidFill>
-          <a:ln w="0">
-            <a:solidFill>
-              <a:srgbClr val="3D8DFF"/>
-            </a:solidFill>
-            <a:prstDash val="solid"/>
-          </a:ln>
-        </p:spPr>
-        <p:txBody>
-          <a:bodyPr/>
-          <a:lstStyle/>
-          <a:p>
-            <a:endParaRPr lang="en-US"/>
-          </a:p>
-        </p:txBody>
-      </p:sp>
-      <p:sp>
-        <p:nvSpPr>
-          <p:cNvPr id="25" name="Rectangle 24">
-            <a:extLst>
-              <a:ext uri="{FF2B5EF4-FFF2-40B4-BE49-F238E27FC236}">
-                <a16:creationId xmlns:a16="http://schemas.microsoft.com/office/drawing/2014/main" id="{979895A4-BAFC-4E3D-9428-DDF97F096842}"/>
-              </a:ext>
-            </a:extLst>
-          </p:cNvPr>
-          <p:cNvSpPr>
-            <a:spLocks noGrp="1"/>
-          </p:cNvSpPr>
-          <p:nvPr/>
-        </p:nvSpPr>
-        <p:spPr>
-          <a:xfrm>
-            <a:off x="9963150" y="2933700"/>
-            <a:ext cx="209550" cy="247650"/>
+            <a:off x="9219481" y="2914650"/>
+            <a:ext cx="686519" cy="285749"/>
           </a:xfrm>
           <a:prstGeom prst="rect">
             <a:avLst/>
@@ -8577,7 +9063,7 @@
         </p:spPr>
         <p:txBody>
           <a:bodyPr lIns="0" tIns="0" rIns="0" bIns="0" anchor="t">
-            <a:normAutofit/>
+            <a:noAutofit/>
           </a:bodyPr>
           <a:lstStyle/>
           <a:p>
@@ -8592,7 +9078,7 @@
               </a:defRPr>
             </a:pPr>
             <a:r>
-              <a:rPr sz="1500" b="1">
+              <a:rPr sz="4000" b="1" dirty="0">
                 <a:solidFill>
                   <a:srgbClr val="3D8DFF"/>
                 </a:solidFill>
@@ -8665,86 +9151,6 @@
       </p:sp>
       <p:sp>
         <p:nvSpPr>
-          <p:cNvPr id="27" name="Rectangle 26">
-            <a:extLst>
-              <a:ext uri="{FF2B5EF4-FFF2-40B4-BE49-F238E27FC236}">
-                <a16:creationId xmlns:a16="http://schemas.microsoft.com/office/drawing/2014/main" id="{19B0D567-13C3-4904-8E80-3E47221EA51D}"/>
-              </a:ext>
-            </a:extLst>
-          </p:cNvPr>
-          <p:cNvSpPr>
-            <a:spLocks noGrp="1"/>
-          </p:cNvSpPr>
-          <p:nvPr/>
-        </p:nvSpPr>
-        <p:spPr>
-          <a:xfrm>
-            <a:off x="8001000" y="4476750"/>
-            <a:ext cx="28575" cy="742950"/>
-          </a:xfrm>
-          <a:prstGeom prst="rect">
-            <a:avLst/>
-          </a:prstGeom>
-          <a:solidFill>
-            <a:srgbClr val="23865B"/>
-          </a:solidFill>
-          <a:ln w="0">
-            <a:solidFill>
-              <a:srgbClr val="23865B"/>
-            </a:solidFill>
-            <a:prstDash val="solid"/>
-          </a:ln>
-        </p:spPr>
-        <p:txBody>
-          <a:bodyPr/>
-          <a:lstStyle/>
-          <a:p>
-            <a:endParaRPr lang="en-US"/>
-          </a:p>
-        </p:txBody>
-      </p:sp>
-      <p:sp>
-        <p:nvSpPr>
-          <p:cNvPr id="28" name="Rectangle 27">
-            <a:extLst>
-              <a:ext uri="{FF2B5EF4-FFF2-40B4-BE49-F238E27FC236}">
-                <a16:creationId xmlns:a16="http://schemas.microsoft.com/office/drawing/2014/main" id="{37EE0DE2-2193-4F59-8C27-772C482F9DA0}"/>
-              </a:ext>
-            </a:extLst>
-          </p:cNvPr>
-          <p:cNvSpPr>
-            <a:spLocks noGrp="1"/>
-          </p:cNvSpPr>
-          <p:nvPr/>
-        </p:nvSpPr>
-        <p:spPr>
-          <a:xfrm>
-            <a:off x="8001000" y="5200650"/>
-            <a:ext cx="3714750" cy="28575"/>
-          </a:xfrm>
-          <a:prstGeom prst="rect">
-            <a:avLst/>
-          </a:prstGeom>
-          <a:solidFill>
-            <a:srgbClr val="23865B"/>
-          </a:solidFill>
-          <a:ln w="0">
-            <a:solidFill>
-              <a:srgbClr val="23865B"/>
-            </a:solidFill>
-            <a:prstDash val="solid"/>
-          </a:ln>
-        </p:spPr>
-        <p:txBody>
-          <a:bodyPr/>
-          <a:lstStyle/>
-          <a:p>
-            <a:endParaRPr lang="en-US"/>
-          </a:p>
-        </p:txBody>
-      </p:sp>
-      <p:sp>
-        <p:nvSpPr>
           <p:cNvPr id="29" name="Rectangle 28">
             <a:extLst>
               <a:ext uri="{FF2B5EF4-FFF2-40B4-BE49-F238E27FC236}">
@@ -8787,20 +9193,582 @@
                 <a:cs typeface="Helvetica Neue"/>
               </a:defRPr>
             </a:pPr>
-            <a:r>
-              <a:rPr sz="1575" b="1">
-                <a:solidFill>
-                  <a:srgbClr val="23865B"/>
-                </a:solidFill>
-                <a:latin typeface="Helvetica Neue"/>
-                <a:ea typeface="Helvetica Neue"/>
-                <a:cs typeface="Helvetica Neue"/>
-              </a:rPr>
-              <a:t>Load-cell feedback stays local to the toolhead; it does not burden the motion controller.</a:t>
-            </a:r>
-          </a:p>
-        </p:txBody>
-      </p:sp>
+            <a:endParaRPr sz="1575" b="1" dirty="0">
+              <a:solidFill>
+                <a:srgbClr val="23865B"/>
+              </a:solidFill>
+              <a:latin typeface="Helvetica Neue"/>
+              <a:ea typeface="Helvetica Neue"/>
+              <a:cs typeface="Helvetica Neue"/>
+            </a:endParaRPr>
+          </a:p>
+        </p:txBody>
+      </p:sp>
+      <p:sp>
+        <p:nvSpPr>
+          <p:cNvPr id="31" name="TextBox 30">
+            <a:extLst>
+              <a:ext uri="{FF2B5EF4-FFF2-40B4-BE49-F238E27FC236}">
+                <a16:creationId xmlns:a16="http://schemas.microsoft.com/office/drawing/2014/main" id="{0D3A7BAC-054A-A2D9-FF0E-359B6DFC8D80}"/>
+              </a:ext>
+            </a:extLst>
+          </p:cNvPr>
+          <p:cNvSpPr txBox="1"/>
+          <p:nvPr/>
+        </p:nvSpPr>
+        <p:spPr>
+          <a:xfrm>
+            <a:off x="7538268" y="1589127"/>
+            <a:ext cx="2462982" cy="369332"/>
+          </a:xfrm>
+          <a:prstGeom prst="rect">
+            <a:avLst/>
+          </a:prstGeom>
+          <a:noFill/>
+        </p:spPr>
+        <p:txBody>
+          <a:bodyPr wrap="none" rtlCol="0">
+            <a:spAutoFit/>
+          </a:bodyPr>
+          <a:lstStyle/>
+          <a:p>
+            <a:r>
+              <a:rPr lang="en-US" dirty="0"/>
+              <a:t>Toolhead control system</a:t>
+            </a:r>
+          </a:p>
+        </p:txBody>
+      </p:sp>
+      <p:sp>
+        <p:nvSpPr>
+          <p:cNvPr id="32" name="TextBox 31">
+            <a:extLst>
+              <a:ext uri="{FF2B5EF4-FFF2-40B4-BE49-F238E27FC236}">
+                <a16:creationId xmlns:a16="http://schemas.microsoft.com/office/drawing/2014/main" id="{D4BD05B5-A0C4-0A1D-F899-0DB6AB6DB2DC}"/>
+              </a:ext>
+            </a:extLst>
+          </p:cNvPr>
+          <p:cNvSpPr txBox="1"/>
+          <p:nvPr/>
+        </p:nvSpPr>
+        <p:spPr>
+          <a:xfrm>
+            <a:off x="599103" y="1586984"/>
+            <a:ext cx="1610697" cy="369332"/>
+          </a:xfrm>
+          <a:prstGeom prst="rect">
+            <a:avLst/>
+          </a:prstGeom>
+          <a:noFill/>
+        </p:spPr>
+        <p:txBody>
+          <a:bodyPr wrap="none" rtlCol="0">
+            <a:spAutoFit/>
+          </a:bodyPr>
+          <a:lstStyle/>
+          <a:p>
+            <a:r>
+              <a:rPr lang="en-US" dirty="0" err="1"/>
+              <a:t>Gcode</a:t>
+            </a:r>
+            <a:r>
+              <a:rPr lang="en-US" dirty="0"/>
+              <a:t> creation</a:t>
+            </a:r>
+          </a:p>
+        </p:txBody>
+      </p:sp>
+      <p:sp>
+        <p:nvSpPr>
+          <p:cNvPr id="33" name="TextBox 32">
+            <a:extLst>
+              <a:ext uri="{FF2B5EF4-FFF2-40B4-BE49-F238E27FC236}">
+                <a16:creationId xmlns:a16="http://schemas.microsoft.com/office/drawing/2014/main" id="{9B8E5E04-7CB0-72FA-D318-4A55F9341DF2}"/>
+              </a:ext>
+            </a:extLst>
+          </p:cNvPr>
+          <p:cNvSpPr txBox="1"/>
+          <p:nvPr/>
+        </p:nvSpPr>
+        <p:spPr>
+          <a:xfrm>
+            <a:off x="4223089" y="1583293"/>
+            <a:ext cx="1269322" cy="369332"/>
+          </a:xfrm>
+          <a:prstGeom prst="rect">
+            <a:avLst/>
+          </a:prstGeom>
+          <a:noFill/>
+        </p:spPr>
+        <p:txBody>
+          <a:bodyPr wrap="none" rtlCol="0">
+            <a:spAutoFit/>
+          </a:bodyPr>
+          <a:lstStyle/>
+          <a:p>
+            <a:r>
+              <a:rPr lang="en-US" dirty="0"/>
+              <a:t>Movement </a:t>
+            </a:r>
+          </a:p>
+        </p:txBody>
+      </p:sp>
+      <p:cxnSp>
+        <p:nvCxnSpPr>
+          <p:cNvPr id="35" name="Straight Connector 34">
+            <a:extLst>
+              <a:ext uri="{FF2B5EF4-FFF2-40B4-BE49-F238E27FC236}">
+                <a16:creationId xmlns:a16="http://schemas.microsoft.com/office/drawing/2014/main" id="{E955FDB0-DDC8-C5C8-A8B8-08EB424FA541}"/>
+              </a:ext>
+            </a:extLst>
+          </p:cNvPr>
+          <p:cNvCxnSpPr>
+            <a:cxnSpLocks/>
+          </p:cNvCxnSpPr>
+          <p:nvPr/>
+        </p:nvCxnSpPr>
+        <p:spPr>
+          <a:xfrm flipV="1">
+            <a:off x="5650302" y="1767959"/>
+            <a:ext cx="1360098" cy="3691"/>
+          </a:xfrm>
+          <a:prstGeom prst="line">
+            <a:avLst/>
+          </a:prstGeom>
+        </p:spPr>
+        <p:style>
+          <a:lnRef idx="1">
+            <a:schemeClr val="accent1"/>
+          </a:lnRef>
+          <a:fillRef idx="0">
+            <a:schemeClr val="accent1"/>
+          </a:fillRef>
+          <a:effectRef idx="0">
+            <a:schemeClr val="accent1"/>
+          </a:effectRef>
+          <a:fontRef idx="minor">
+            <a:schemeClr val="tx1"/>
+          </a:fontRef>
+        </p:style>
+      </p:cxnSp>
+      <p:cxnSp>
+        <p:nvCxnSpPr>
+          <p:cNvPr id="38" name="Straight Connector 37">
+            <a:extLst>
+              <a:ext uri="{FF2B5EF4-FFF2-40B4-BE49-F238E27FC236}">
+                <a16:creationId xmlns:a16="http://schemas.microsoft.com/office/drawing/2014/main" id="{E357C412-84B9-6F1B-C162-0223C1FB42D1}"/>
+              </a:ext>
+            </a:extLst>
+          </p:cNvPr>
+          <p:cNvCxnSpPr>
+            <a:cxnSpLocks/>
+          </p:cNvCxnSpPr>
+          <p:nvPr/>
+        </p:nvCxnSpPr>
+        <p:spPr>
+          <a:xfrm>
+            <a:off x="7010400" y="1767959"/>
+            <a:ext cx="0" cy="518041"/>
+          </a:xfrm>
+          <a:prstGeom prst="line">
+            <a:avLst/>
+          </a:prstGeom>
+        </p:spPr>
+        <p:style>
+          <a:lnRef idx="1">
+            <a:schemeClr val="accent1"/>
+          </a:lnRef>
+          <a:fillRef idx="0">
+            <a:schemeClr val="accent1"/>
+          </a:fillRef>
+          <a:effectRef idx="0">
+            <a:schemeClr val="accent1"/>
+          </a:effectRef>
+          <a:fontRef idx="minor">
+            <a:schemeClr val="tx1"/>
+          </a:fontRef>
+        </p:style>
+      </p:cxnSp>
+      <p:cxnSp>
+        <p:nvCxnSpPr>
+          <p:cNvPr id="40" name="Straight Connector 39">
+            <a:extLst>
+              <a:ext uri="{FF2B5EF4-FFF2-40B4-BE49-F238E27FC236}">
+                <a16:creationId xmlns:a16="http://schemas.microsoft.com/office/drawing/2014/main" id="{E02FA32B-5236-35B6-6B7E-FE20E1817A37}"/>
+              </a:ext>
+            </a:extLst>
+          </p:cNvPr>
+          <p:cNvCxnSpPr>
+            <a:cxnSpLocks/>
+          </p:cNvCxnSpPr>
+          <p:nvPr/>
+        </p:nvCxnSpPr>
+        <p:spPr>
+          <a:xfrm>
+            <a:off x="3336625" y="1767959"/>
+            <a:ext cx="680049" cy="0"/>
+          </a:xfrm>
+          <a:prstGeom prst="line">
+            <a:avLst/>
+          </a:prstGeom>
+        </p:spPr>
+        <p:style>
+          <a:lnRef idx="1">
+            <a:schemeClr val="accent1"/>
+          </a:lnRef>
+          <a:fillRef idx="0">
+            <a:schemeClr val="accent1"/>
+          </a:fillRef>
+          <a:effectRef idx="0">
+            <a:schemeClr val="accent1"/>
+          </a:effectRef>
+          <a:fontRef idx="minor">
+            <a:schemeClr val="tx1"/>
+          </a:fontRef>
+        </p:style>
+      </p:cxnSp>
+      <p:cxnSp>
+        <p:nvCxnSpPr>
+          <p:cNvPr id="43" name="Straight Connector 42">
+            <a:extLst>
+              <a:ext uri="{FF2B5EF4-FFF2-40B4-BE49-F238E27FC236}">
+                <a16:creationId xmlns:a16="http://schemas.microsoft.com/office/drawing/2014/main" id="{29407F56-2D95-693D-921E-554F59250BA0}"/>
+              </a:ext>
+            </a:extLst>
+          </p:cNvPr>
+          <p:cNvCxnSpPr>
+            <a:cxnSpLocks/>
+          </p:cNvCxnSpPr>
+          <p:nvPr/>
+        </p:nvCxnSpPr>
+        <p:spPr>
+          <a:xfrm>
+            <a:off x="3345252" y="1767959"/>
+            <a:ext cx="0" cy="518041"/>
+          </a:xfrm>
+          <a:prstGeom prst="line">
+            <a:avLst/>
+          </a:prstGeom>
+        </p:spPr>
+        <p:style>
+          <a:lnRef idx="1">
+            <a:schemeClr val="accent1"/>
+          </a:lnRef>
+          <a:fillRef idx="0">
+            <a:schemeClr val="accent1"/>
+          </a:fillRef>
+          <a:effectRef idx="0">
+            <a:schemeClr val="accent1"/>
+          </a:effectRef>
+          <a:fontRef idx="minor">
+            <a:schemeClr val="tx1"/>
+          </a:fontRef>
+        </p:style>
+      </p:cxnSp>
+      <p:cxnSp>
+        <p:nvCxnSpPr>
+          <p:cNvPr id="44" name="Straight Connector 43">
+            <a:extLst>
+              <a:ext uri="{FF2B5EF4-FFF2-40B4-BE49-F238E27FC236}">
+                <a16:creationId xmlns:a16="http://schemas.microsoft.com/office/drawing/2014/main" id="{7BA17C8C-D580-937E-19C0-082D6F033052}"/>
+              </a:ext>
+            </a:extLst>
+          </p:cNvPr>
+          <p:cNvCxnSpPr>
+            <a:cxnSpLocks/>
+          </p:cNvCxnSpPr>
+          <p:nvPr/>
+        </p:nvCxnSpPr>
+        <p:spPr>
+          <a:xfrm>
+            <a:off x="7142851" y="1767959"/>
+            <a:ext cx="310372" cy="0"/>
+          </a:xfrm>
+          <a:prstGeom prst="line">
+            <a:avLst/>
+          </a:prstGeom>
+        </p:spPr>
+        <p:style>
+          <a:lnRef idx="1">
+            <a:schemeClr val="accent1"/>
+          </a:lnRef>
+          <a:fillRef idx="0">
+            <a:schemeClr val="accent1"/>
+          </a:fillRef>
+          <a:effectRef idx="0">
+            <a:schemeClr val="accent1"/>
+          </a:effectRef>
+          <a:fontRef idx="minor">
+            <a:schemeClr val="tx1"/>
+          </a:fontRef>
+        </p:style>
+      </p:cxnSp>
+      <p:cxnSp>
+        <p:nvCxnSpPr>
+          <p:cNvPr id="45" name="Straight Connector 44">
+            <a:extLst>
+              <a:ext uri="{FF2B5EF4-FFF2-40B4-BE49-F238E27FC236}">
+                <a16:creationId xmlns:a16="http://schemas.microsoft.com/office/drawing/2014/main" id="{575A4A5E-9B01-71CE-F590-571AC4A58CDC}"/>
+              </a:ext>
+            </a:extLst>
+          </p:cNvPr>
+          <p:cNvCxnSpPr>
+            <a:cxnSpLocks/>
+          </p:cNvCxnSpPr>
+          <p:nvPr/>
+        </p:nvCxnSpPr>
+        <p:spPr>
+          <a:xfrm>
+            <a:off x="7151478" y="1767959"/>
+            <a:ext cx="0" cy="518041"/>
+          </a:xfrm>
+          <a:prstGeom prst="line">
+            <a:avLst/>
+          </a:prstGeom>
+        </p:spPr>
+        <p:style>
+          <a:lnRef idx="1">
+            <a:schemeClr val="accent1"/>
+          </a:lnRef>
+          <a:fillRef idx="0">
+            <a:schemeClr val="accent1"/>
+          </a:fillRef>
+          <a:effectRef idx="0">
+            <a:schemeClr val="accent1"/>
+          </a:effectRef>
+          <a:fontRef idx="minor">
+            <a:schemeClr val="tx1"/>
+          </a:fontRef>
+        </p:style>
+      </p:cxnSp>
+      <p:cxnSp>
+        <p:nvCxnSpPr>
+          <p:cNvPr id="47" name="Straight Connector 46">
+            <a:extLst>
+              <a:ext uri="{FF2B5EF4-FFF2-40B4-BE49-F238E27FC236}">
+                <a16:creationId xmlns:a16="http://schemas.microsoft.com/office/drawing/2014/main" id="{BFFC8D22-746A-CE42-186B-8EA1FBE3DE00}"/>
+              </a:ext>
+            </a:extLst>
+          </p:cNvPr>
+          <p:cNvCxnSpPr>
+            <a:cxnSpLocks/>
+          </p:cNvCxnSpPr>
+          <p:nvPr/>
+        </p:nvCxnSpPr>
+        <p:spPr>
+          <a:xfrm>
+            <a:off x="10086295" y="1764268"/>
+            <a:ext cx="1696130" cy="0"/>
+          </a:xfrm>
+          <a:prstGeom prst="line">
+            <a:avLst/>
+          </a:prstGeom>
+        </p:spPr>
+        <p:style>
+          <a:lnRef idx="1">
+            <a:schemeClr val="accent1"/>
+          </a:lnRef>
+          <a:fillRef idx="0">
+            <a:schemeClr val="accent1"/>
+          </a:fillRef>
+          <a:effectRef idx="0">
+            <a:schemeClr val="accent1"/>
+          </a:effectRef>
+          <a:fontRef idx="minor">
+            <a:schemeClr val="tx1"/>
+          </a:fontRef>
+        </p:style>
+      </p:cxnSp>
+      <p:cxnSp>
+        <p:nvCxnSpPr>
+          <p:cNvPr id="48" name="Straight Connector 47">
+            <a:extLst>
+              <a:ext uri="{FF2B5EF4-FFF2-40B4-BE49-F238E27FC236}">
+                <a16:creationId xmlns:a16="http://schemas.microsoft.com/office/drawing/2014/main" id="{30B1708B-7705-026C-BE7C-93FF0AB8FE31}"/>
+              </a:ext>
+            </a:extLst>
+          </p:cNvPr>
+          <p:cNvCxnSpPr>
+            <a:cxnSpLocks/>
+          </p:cNvCxnSpPr>
+          <p:nvPr/>
+        </p:nvCxnSpPr>
+        <p:spPr>
+          <a:xfrm>
+            <a:off x="11782425" y="1764268"/>
+            <a:ext cx="0" cy="518041"/>
+          </a:xfrm>
+          <a:prstGeom prst="line">
+            <a:avLst/>
+          </a:prstGeom>
+        </p:spPr>
+        <p:style>
+          <a:lnRef idx="1">
+            <a:schemeClr val="accent1"/>
+          </a:lnRef>
+          <a:fillRef idx="0">
+            <a:schemeClr val="accent1"/>
+          </a:fillRef>
+          <a:effectRef idx="0">
+            <a:schemeClr val="accent1"/>
+          </a:effectRef>
+          <a:fontRef idx="minor">
+            <a:schemeClr val="tx1"/>
+          </a:fontRef>
+        </p:style>
+      </p:cxnSp>
+      <p:cxnSp>
+        <p:nvCxnSpPr>
+          <p:cNvPr id="50" name="Straight Connector 49">
+            <a:extLst>
+              <a:ext uri="{FF2B5EF4-FFF2-40B4-BE49-F238E27FC236}">
+                <a16:creationId xmlns:a16="http://schemas.microsoft.com/office/drawing/2014/main" id="{72A3932B-CCA3-5A25-A68A-B951A027AF50}"/>
+              </a:ext>
+            </a:extLst>
+          </p:cNvPr>
+          <p:cNvCxnSpPr>
+            <a:cxnSpLocks/>
+          </p:cNvCxnSpPr>
+          <p:nvPr/>
+        </p:nvCxnSpPr>
+        <p:spPr>
+          <a:xfrm>
+            <a:off x="213144" y="1764268"/>
+            <a:ext cx="295814" cy="7382"/>
+          </a:xfrm>
+          <a:prstGeom prst="line">
+            <a:avLst/>
+          </a:prstGeom>
+        </p:spPr>
+        <p:style>
+          <a:lnRef idx="1">
+            <a:schemeClr val="accent1"/>
+          </a:lnRef>
+          <a:fillRef idx="0">
+            <a:schemeClr val="accent1"/>
+          </a:fillRef>
+          <a:effectRef idx="0">
+            <a:schemeClr val="accent1"/>
+          </a:effectRef>
+          <a:fontRef idx="minor">
+            <a:schemeClr val="tx1"/>
+          </a:fontRef>
+        </p:style>
+      </p:cxnSp>
+      <p:cxnSp>
+        <p:nvCxnSpPr>
+          <p:cNvPr id="51" name="Straight Connector 50">
+            <a:extLst>
+              <a:ext uri="{FF2B5EF4-FFF2-40B4-BE49-F238E27FC236}">
+                <a16:creationId xmlns:a16="http://schemas.microsoft.com/office/drawing/2014/main" id="{1BEFD1C8-ED86-36D3-4E2D-0E0F131FF231}"/>
+              </a:ext>
+            </a:extLst>
+          </p:cNvPr>
+          <p:cNvCxnSpPr>
+            <a:cxnSpLocks/>
+          </p:cNvCxnSpPr>
+          <p:nvPr/>
+        </p:nvCxnSpPr>
+        <p:spPr>
+          <a:xfrm>
+            <a:off x="221771" y="1764268"/>
+            <a:ext cx="0" cy="518041"/>
+          </a:xfrm>
+          <a:prstGeom prst="line">
+            <a:avLst/>
+          </a:prstGeom>
+        </p:spPr>
+        <p:style>
+          <a:lnRef idx="1">
+            <a:schemeClr val="accent1"/>
+          </a:lnRef>
+          <a:fillRef idx="0">
+            <a:schemeClr val="accent1"/>
+          </a:fillRef>
+          <a:effectRef idx="0">
+            <a:schemeClr val="accent1"/>
+          </a:effectRef>
+          <a:fontRef idx="minor">
+            <a:schemeClr val="tx1"/>
+          </a:fontRef>
+        </p:style>
+      </p:cxnSp>
+      <p:cxnSp>
+        <p:nvCxnSpPr>
+          <p:cNvPr id="53" name="Straight Connector 52">
+            <a:extLst>
+              <a:ext uri="{FF2B5EF4-FFF2-40B4-BE49-F238E27FC236}">
+                <a16:creationId xmlns:a16="http://schemas.microsoft.com/office/drawing/2014/main" id="{0685462D-C93E-8BA5-1982-DF52469C66EC}"/>
+              </a:ext>
+            </a:extLst>
+          </p:cNvPr>
+          <p:cNvCxnSpPr>
+            <a:cxnSpLocks/>
+          </p:cNvCxnSpPr>
+          <p:nvPr/>
+        </p:nvCxnSpPr>
+        <p:spPr>
+          <a:xfrm>
+            <a:off x="2290133" y="1764268"/>
+            <a:ext cx="813989" cy="0"/>
+          </a:xfrm>
+          <a:prstGeom prst="line">
+            <a:avLst/>
+          </a:prstGeom>
+        </p:spPr>
+        <p:style>
+          <a:lnRef idx="1">
+            <a:schemeClr val="accent1"/>
+          </a:lnRef>
+          <a:fillRef idx="0">
+            <a:schemeClr val="accent1"/>
+          </a:fillRef>
+          <a:effectRef idx="0">
+            <a:schemeClr val="accent1"/>
+          </a:effectRef>
+          <a:fontRef idx="minor">
+            <a:schemeClr val="tx1"/>
+          </a:fontRef>
+        </p:style>
+      </p:cxnSp>
+      <p:cxnSp>
+        <p:nvCxnSpPr>
+          <p:cNvPr id="54" name="Straight Connector 53">
+            <a:extLst>
+              <a:ext uri="{FF2B5EF4-FFF2-40B4-BE49-F238E27FC236}">
+                <a16:creationId xmlns:a16="http://schemas.microsoft.com/office/drawing/2014/main" id="{6EAE1648-79C4-BEBA-4B8F-734B2A7B3DC6}"/>
+              </a:ext>
+            </a:extLst>
+          </p:cNvPr>
+          <p:cNvCxnSpPr>
+            <a:cxnSpLocks/>
+          </p:cNvCxnSpPr>
+          <p:nvPr/>
+        </p:nvCxnSpPr>
+        <p:spPr>
+          <a:xfrm>
+            <a:off x="3104122" y="1764268"/>
+            <a:ext cx="0" cy="518041"/>
+          </a:xfrm>
+          <a:prstGeom prst="line">
+            <a:avLst/>
+          </a:prstGeom>
+        </p:spPr>
+        <p:style>
+          <a:lnRef idx="1">
+            <a:schemeClr val="accent1"/>
+          </a:lnRef>
+          <a:fillRef idx="0">
+            <a:schemeClr val="accent1"/>
+          </a:fillRef>
+          <a:effectRef idx="0">
+            <a:schemeClr val="accent1"/>
+          </a:effectRef>
+          <a:fontRef idx="minor">
+            <a:schemeClr val="tx1"/>
+          </a:fontRef>
+        </p:style>
+      </p:cxnSp>
     </p:spTree>
     <p:extLst>
       <p:ext uri="{BB962C8B-B14F-4D97-AF65-F5344CB8AC3E}">
@@ -8927,7 +9895,7 @@
         </p:spPr>
         <p:txBody>
           <a:bodyPr lIns="0" tIns="0" rIns="0" bIns="0" anchor="t">
-            <a:normAutofit fontScale="90443"/>
+            <a:normAutofit fontScale="90443" lnSpcReduction="20000"/>
           </a:bodyPr>
           <a:lstStyle/>
           <a:p>
@@ -8942,7 +9910,7 @@
               </a:defRPr>
             </a:pPr>
             <a:r>
-              <a:rPr sz="2700" b="1">
+              <a:rPr sz="2700" b="1" dirty="0">
                 <a:solidFill>
                   <a:srgbClr val="000000"/>
                 </a:solidFill>
@@ -8950,8 +9918,27 @@
                 <a:ea typeface="Helvetica Neue"/>
                 <a:cs typeface="Helvetica Neue"/>
               </a:rPr>
-              <a:t>Homing establishes two different references: machine position and toolhead safety</a:t>
-            </a:r>
+              <a:t>Homing establishes two different references: machine position and toolhead </a:t>
+            </a:r>
+            <a:r>
+              <a:rPr lang="en-US" sz="2700" b="1" dirty="0">
+                <a:solidFill>
+                  <a:srgbClr val="000000"/>
+                </a:solidFill>
+                <a:latin typeface="Helvetica Neue"/>
+                <a:ea typeface="Helvetica Neue"/>
+                <a:cs typeface="Helvetica Neue"/>
+              </a:rPr>
+              <a:t>touch calibration</a:t>
+            </a:r>
+            <a:endParaRPr sz="2700" b="1" dirty="0">
+              <a:solidFill>
+                <a:srgbClr val="000000"/>
+              </a:solidFill>
+              <a:latin typeface="Helvetica Neue"/>
+              <a:ea typeface="Helvetica Neue"/>
+              <a:cs typeface="Helvetica Neue"/>
+            </a:endParaRPr>
           </a:p>
         </p:txBody>
       </p:sp>
@@ -9256,7 +10243,7 @@
               </a:defRPr>
             </a:pPr>
             <a:r>
-              <a:rPr sz="1425" b="1">
+              <a:rPr sz="1425" b="1" dirty="0">
                 <a:solidFill>
                   <a:srgbClr val="000000"/>
                 </a:solidFill>
@@ -9515,7 +10502,7 @@
         </p:spPr>
         <p:txBody>
           <a:bodyPr lIns="0" tIns="0" rIns="0" bIns="0" anchor="t">
-            <a:normAutofit/>
+            <a:normAutofit lnSpcReduction="10000"/>
           </a:bodyPr>
           <a:lstStyle/>
           <a:p>
@@ -9530,7 +10517,7 @@
               </a:defRPr>
             </a:pPr>
             <a:r>
-              <a:rPr sz="1425" b="1">
+              <a:rPr sz="1425" b="1" dirty="0">
                 <a:solidFill>
                   <a:srgbClr val="000000"/>
                 </a:solidFill>
@@ -9538,8 +10525,49 @@
                 <a:ea typeface="Helvetica Neue"/>
                 <a:cs typeface="Helvetica Neue"/>
               </a:rPr>
-              <a:t>Pro Micro verifies GP2 switch</a:t>
-            </a:r>
+              <a:t>Pro Micro verifies </a:t>
+            </a:r>
+            <a:r>
+              <a:rPr lang="en-US" sz="1425" b="1" dirty="0">
+                <a:solidFill>
+                  <a:srgbClr val="000000"/>
+                </a:solidFill>
+                <a:latin typeface="Helvetica Neue"/>
+                <a:ea typeface="Helvetica Neue"/>
+                <a:cs typeface="Helvetica Neue"/>
+              </a:rPr>
+              <a:t>toolhead</a:t>
+            </a:r>
+            <a:r>
+              <a:rPr sz="1425" b="1" dirty="0">
+                <a:solidFill>
+                  <a:srgbClr val="000000"/>
+                </a:solidFill>
+                <a:latin typeface="Helvetica Neue"/>
+                <a:ea typeface="Helvetica Neue"/>
+                <a:cs typeface="Helvetica Neue"/>
+              </a:rPr>
+              <a:t> switch</a:t>
+            </a:r>
+            <a:r>
+              <a:rPr lang="en-US" sz="1425" b="1" dirty="0">
+                <a:solidFill>
+                  <a:srgbClr val="000000"/>
+                </a:solidFill>
+                <a:latin typeface="Helvetica Neue"/>
+                <a:ea typeface="Helvetica Neue"/>
+                <a:cs typeface="Helvetica Neue"/>
+              </a:rPr>
+              <a:t> trigger</a:t>
+            </a:r>
+            <a:endParaRPr sz="1425" b="1" dirty="0">
+              <a:solidFill>
+                <a:srgbClr val="000000"/>
+              </a:solidFill>
+              <a:latin typeface="Helvetica Neue"/>
+              <a:ea typeface="Helvetica Neue"/>
+              <a:cs typeface="Helvetica Neue"/>
+            </a:endParaRPr>
           </a:p>
         </p:txBody>
       </p:sp>
@@ -9804,7 +10832,7 @@
               </a:defRPr>
             </a:pPr>
             <a:r>
-              <a:rPr sz="1425" b="1">
+              <a:rPr sz="1425" b="1" dirty="0">
                 <a:solidFill>
                   <a:srgbClr val="000000"/>
                 </a:solidFill>
@@ -10468,7 +11496,7 @@
               </a:defRPr>
             </a:pPr>
             <a:r>
-              <a:rPr sz="1650" b="1">
+              <a:rPr sz="1650" b="1" dirty="0">
                 <a:solidFill>
                   <a:srgbClr val="000000"/>
                 </a:solidFill>
@@ -10476,7 +11504,29 @@
                 <a:ea typeface="Helvetica Neue"/>
                 <a:cs typeface="Helvetica Neue"/>
               </a:rPr>
-              <a:t>The GP2 switch remains local to the Pro Micro; the existing GP28/GP27 pair lets P100 receive the result without another RP23CNC pin.</a:t>
+              <a:t>The </a:t>
+            </a:r>
+            <a:r>
+              <a:rPr lang="en-US" sz="1650" b="1" dirty="0">
+                <a:solidFill>
+                  <a:srgbClr val="000000"/>
+                </a:solidFill>
+                <a:latin typeface="Helvetica Neue"/>
+                <a:ea typeface="Helvetica Neue"/>
+                <a:cs typeface="Helvetica Neue"/>
+              </a:rPr>
+              <a:t>toolhead</a:t>
+            </a:r>
+            <a:r>
+              <a:rPr sz="1650" b="1" dirty="0">
+                <a:solidFill>
+                  <a:srgbClr val="000000"/>
+                </a:solidFill>
+                <a:latin typeface="Helvetica Neue"/>
+                <a:ea typeface="Helvetica Neue"/>
+                <a:cs typeface="Helvetica Neue"/>
+              </a:rPr>
+              <a:t> switch remains local to the Pro Micro; the existing GP28/GP27 pair lets P100 receive the result without another RP23CNC pin.</a:t>
             </a:r>
           </a:p>
         </p:txBody>

--- a/docs/report/Theta_Pen_Plotter_Summer_Progress_Update.pptx
+++ b/docs/report/Theta_Pen_Plotter_Summer_Progress_Update.pptx
@@ -1824,210 +1824,6 @@
       </p:grpSpPr>
       <p:sp>
         <p:nvSpPr>
-          <p:cNvPr id="8" name="Rectangle 7">
-            <a:extLst>
-              <a:ext uri="{FF2B5EF4-FFF2-40B4-BE49-F238E27FC236}">
-                <a16:creationId xmlns:a16="http://schemas.microsoft.com/office/drawing/2014/main" id="{7A7D2EF2-BFA3-4766-B942-23E570E48309}"/>
-              </a:ext>
-            </a:extLst>
-          </p:cNvPr>
-          <p:cNvSpPr>
-            <a:spLocks noGrp="1"/>
-          </p:cNvSpPr>
-          <p:nvPr/>
-        </p:nvSpPr>
-        <p:spPr>
-          <a:xfrm>
-            <a:off x="400050" y="419100"/>
-            <a:ext cx="4953000" cy="266700"/>
-          </a:xfrm>
-          <a:prstGeom prst="rect">
-            <a:avLst/>
-          </a:prstGeom>
-          <a:noFill/>
-          <a:ln w="0">
-            <a:noFill/>
-            <a:prstDash val="solid"/>
-          </a:ln>
-        </p:spPr>
-        <p:txBody>
-          <a:bodyPr lIns="0" tIns="0" rIns="0" bIns="0" anchor="t">
-            <a:normAutofit/>
-          </a:bodyPr>
-          <a:lstStyle/>
-          <a:p>
-            <a:pPr algn="l">
-              <a:defRPr sz="1200" b="1">
-                <a:solidFill>
-                  <a:srgbClr val="3D8DFF"/>
-                </a:solidFill>
-                <a:latin typeface="Helvetica Neue"/>
-                <a:ea typeface="Helvetica Neue"/>
-                <a:cs typeface="Helvetica Neue"/>
-              </a:defRPr>
-            </a:pPr>
-            <a:r>
-              <a:rPr sz="1200" b="1">
-                <a:solidFill>
-                  <a:srgbClr val="3D8DFF"/>
-                </a:solidFill>
-                <a:latin typeface="Helvetica Neue"/>
-                <a:ea typeface="Helvetica Neue"/>
-                <a:cs typeface="Helvetica Neue"/>
-              </a:rPr>
-              <a:t>SUMMER PROGRESS UPDATE</a:t>
-            </a:r>
-          </a:p>
-        </p:txBody>
-      </p:sp>
-      <p:sp>
-        <p:nvSpPr>
-          <p:cNvPr id="2" name="Rectangle 1">
-            <a:extLst>
-              <a:ext uri="{FF2B5EF4-FFF2-40B4-BE49-F238E27FC236}">
-                <a16:creationId xmlns:a16="http://schemas.microsoft.com/office/drawing/2014/main" id="{6C209B30-5687-4D31-B45B-B18289FD1874}"/>
-              </a:ext>
-            </a:extLst>
-          </p:cNvPr>
-          <p:cNvSpPr>
-            <a:spLocks noGrp="1"/>
-          </p:cNvSpPr>
-          <p:nvPr/>
-        </p:nvSpPr>
-        <p:spPr>
-          <a:xfrm>
-            <a:off x="400050" y="1104900"/>
-            <a:ext cx="5334000" cy="1066800"/>
-          </a:xfrm>
-          <a:prstGeom prst="rect">
-            <a:avLst/>
-          </a:prstGeom>
-          <a:noFill/>
-          <a:ln w="0">
-            <a:noFill/>
-            <a:prstDash val="solid"/>
-          </a:ln>
-        </p:spPr>
-        <p:txBody>
-          <a:bodyPr lIns="0" tIns="0" rIns="0" bIns="0" anchor="t">
-            <a:normAutofit fontScale="85000" lnSpcReduction="10000"/>
-          </a:bodyPr>
-          <a:lstStyle/>
-          <a:p>
-            <a:pPr algn="l">
-              <a:defRPr sz="4800" b="1">
-                <a:solidFill>
-                  <a:srgbClr val="000000"/>
-                </a:solidFill>
-                <a:latin typeface="Helvetica Neue"/>
-                <a:ea typeface="Helvetica Neue"/>
-                <a:cs typeface="Helvetica Neue"/>
-              </a:defRPr>
-            </a:pPr>
-            <a:r>
-              <a:rPr lang="en-US" sz="4800" b="1" dirty="0">
-                <a:solidFill>
-                  <a:srgbClr val="000000"/>
-                </a:solidFill>
-                <a:latin typeface="Helvetica Neue"/>
-                <a:ea typeface="Helvetica Neue"/>
-                <a:cs typeface="Helvetica Neue"/>
-              </a:rPr>
-              <a:t>XY </a:t>
-            </a:r>
-            <a:r>
-              <a:rPr sz="4800" b="1" dirty="0">
-                <a:solidFill>
-                  <a:srgbClr val="000000"/>
-                </a:solidFill>
-                <a:latin typeface="Helvetica Neue"/>
-                <a:ea typeface="Helvetica Neue"/>
-                <a:cs typeface="Helvetica Neue"/>
-              </a:rPr>
-              <a:t>Theta Pen Plotter</a:t>
-            </a:r>
-          </a:p>
-        </p:txBody>
-      </p:sp>
-      <p:sp>
-        <p:nvSpPr>
-          <p:cNvPr id="3" name="Rectangle 2">
-            <a:extLst>
-              <a:ext uri="{FF2B5EF4-FFF2-40B4-BE49-F238E27FC236}">
-                <a16:creationId xmlns:a16="http://schemas.microsoft.com/office/drawing/2014/main" id="{D7D776E8-8ED9-48FA-BCA2-259250FFD263}"/>
-              </a:ext>
-            </a:extLst>
-          </p:cNvPr>
-          <p:cNvSpPr>
-            <a:spLocks noGrp="1"/>
-          </p:cNvSpPr>
-          <p:nvPr/>
-        </p:nvSpPr>
-        <p:spPr>
-          <a:xfrm>
-            <a:off x="400050" y="2438400"/>
-            <a:ext cx="4953000" cy="1104900"/>
-          </a:xfrm>
-          <a:prstGeom prst="rect">
-            <a:avLst/>
-          </a:prstGeom>
-          <a:noFill/>
-          <a:ln w="0">
-            <a:noFill/>
-            <a:prstDash val="solid"/>
-          </a:ln>
-        </p:spPr>
-        <p:txBody>
-          <a:bodyPr lIns="0" tIns="0" rIns="0" bIns="0" anchor="t">
-            <a:normAutofit/>
-          </a:bodyPr>
-          <a:lstStyle/>
-          <a:p>
-            <a:pPr algn="l">
-              <a:defRPr sz="2025" b="0">
-                <a:solidFill>
-                  <a:srgbClr val="59616B"/>
-                </a:solidFill>
-                <a:latin typeface="Helvetica Neue"/>
-                <a:ea typeface="Helvetica Neue"/>
-                <a:cs typeface="Helvetica Neue"/>
-              </a:defRPr>
-            </a:pPr>
-            <a:r>
-              <a:rPr lang="en-US" sz="2025" b="0" dirty="0">
-                <a:solidFill>
-                  <a:srgbClr val="59616B"/>
-                </a:solidFill>
-                <a:latin typeface="Helvetica Neue"/>
-                <a:ea typeface="Helvetica Neue"/>
-                <a:cs typeface="Helvetica Neue"/>
-              </a:rPr>
-              <a:t>Path to </a:t>
-            </a:r>
-            <a:r>
-              <a:rPr lang="en-US" sz="2025" b="0" dirty="0" err="1">
-                <a:solidFill>
-                  <a:srgbClr val="59616B"/>
-                </a:solidFill>
-                <a:latin typeface="Helvetica Neue"/>
-                <a:ea typeface="Helvetica Neue"/>
-                <a:cs typeface="Helvetica Neue"/>
-              </a:rPr>
-              <a:t>commisioning</a:t>
-            </a:r>
-            <a:endParaRPr sz="2025" b="0" dirty="0">
-              <a:solidFill>
-                <a:srgbClr val="59616B"/>
-              </a:solidFill>
-              <a:latin typeface="Helvetica Neue"/>
-              <a:ea typeface="Helvetica Neue"/>
-              <a:cs typeface="Helvetica Neue"/>
-            </a:endParaRPr>
-          </a:p>
-        </p:txBody>
-      </p:sp>
-      <p:sp>
-        <p:nvSpPr>
           <p:cNvPr id="4" name="Rectangle 3">
             <a:extLst>
               <a:ext uri="{FF2B5EF4-FFF2-40B4-BE49-F238E27FC236}">
@@ -2066,128 +1862,12 @@
           </a:p>
         </p:txBody>
       </p:sp>
-      <p:sp>
-        <p:nvSpPr>
-          <p:cNvPr id="5" name="Rectangle 4">
-            <a:extLst>
-              <a:ext uri="{FF2B5EF4-FFF2-40B4-BE49-F238E27FC236}">
-                <a16:creationId xmlns:a16="http://schemas.microsoft.com/office/drawing/2014/main" id="{FD70773F-8C93-41F1-9E9B-6EE3F437BD4A}"/>
-              </a:ext>
-            </a:extLst>
-          </p:cNvPr>
-          <p:cNvSpPr>
-            <a:spLocks noGrp="1"/>
-          </p:cNvSpPr>
-          <p:nvPr/>
-        </p:nvSpPr>
-        <p:spPr>
-          <a:xfrm>
-            <a:off x="400050" y="4171950"/>
-            <a:ext cx="4762500" cy="266700"/>
-          </a:xfrm>
-          <a:prstGeom prst="rect">
-            <a:avLst/>
-          </a:prstGeom>
-          <a:noFill/>
-          <a:ln w="0">
-            <a:noFill/>
-            <a:prstDash val="solid"/>
-          </a:ln>
-        </p:spPr>
-        <p:txBody>
-          <a:bodyPr lIns="0" tIns="0" rIns="0" bIns="0" anchor="t">
-            <a:normAutofit/>
-          </a:bodyPr>
-          <a:lstStyle/>
-          <a:p>
-            <a:pPr algn="l">
-              <a:defRPr sz="1350" b="0">
-                <a:solidFill>
-                  <a:srgbClr val="000000"/>
-                </a:solidFill>
-                <a:latin typeface="Helvetica Neue"/>
-                <a:ea typeface="Helvetica Neue"/>
-                <a:cs typeface="Helvetica Neue"/>
-              </a:defRPr>
-            </a:pPr>
-            <a:r>
-              <a:rPr sz="1350" b="0">
-                <a:solidFill>
-                  <a:srgbClr val="000000"/>
-                </a:solidFill>
-                <a:latin typeface="Helvetica Neue"/>
-                <a:ea typeface="Helvetica Neue"/>
-                <a:cs typeface="Helvetica Neue"/>
-              </a:rPr>
-              <a:t>Course progress update  •  September 2026</a:t>
-            </a:r>
-          </a:p>
-        </p:txBody>
-      </p:sp>
-      <p:sp>
-        <p:nvSpPr>
-          <p:cNvPr id="7" name="Rectangle 6">
-            <a:extLst>
-              <a:ext uri="{FF2B5EF4-FFF2-40B4-BE49-F238E27FC236}">
-                <a16:creationId xmlns:a16="http://schemas.microsoft.com/office/drawing/2014/main" id="{105FB2DD-B9EE-4E50-ACD4-DD43F4B76831}"/>
-              </a:ext>
-            </a:extLst>
-          </p:cNvPr>
-          <p:cNvSpPr>
-            <a:spLocks noGrp="1"/>
-          </p:cNvSpPr>
-          <p:nvPr/>
-        </p:nvSpPr>
-        <p:spPr>
-          <a:xfrm>
-            <a:off x="6191250" y="5829300"/>
-            <a:ext cx="5238750" cy="342900"/>
-          </a:xfrm>
-          <a:prstGeom prst="rect">
-            <a:avLst/>
-          </a:prstGeom>
-          <a:noFill/>
-          <a:ln w="0">
-            <a:noFill/>
-            <a:prstDash val="solid"/>
-          </a:ln>
-        </p:spPr>
-        <p:txBody>
-          <a:bodyPr lIns="0" tIns="0" rIns="0" bIns="0" anchor="t">
-            <a:normAutofit/>
-          </a:bodyPr>
-          <a:lstStyle/>
-          <a:p>
-            <a:pPr algn="l">
-              <a:defRPr sz="1050" b="0">
-                <a:solidFill>
-                  <a:srgbClr val="59616B"/>
-                </a:solidFill>
-                <a:latin typeface="Helvetica Neue"/>
-                <a:ea typeface="Helvetica Neue"/>
-                <a:cs typeface="Helvetica Neue"/>
-              </a:defRPr>
-            </a:pPr>
-            <a:r>
-              <a:rPr sz="1050" b="0">
-                <a:solidFill>
-                  <a:srgbClr val="59616B"/>
-                </a:solidFill>
-                <a:latin typeface="Helvetica Neue"/>
-                <a:ea typeface="Helvetica Neue"/>
-                <a:cs typeface="Helvetica Neue"/>
-              </a:rPr>
-              <a:t>The toolhead combines an N20 lead-screw actuator, spring compliance, load cell, and guided pen carriage.</a:t>
-            </a:r>
-          </a:p>
-        </p:txBody>
-      </p:sp>
       <p:pic>
         <p:nvPicPr>
-          <p:cNvPr id="9" name="Picture 12">
-            <a:extLst>
-              <a:ext uri="{FF2B5EF4-FFF2-40B4-BE49-F238E27FC236}">
-                <a16:creationId xmlns:a16="http://schemas.microsoft.com/office/drawing/2014/main" id="{0052B775-B4A3-8E7A-30E8-112F7D9C5314}"/>
+          <p:cNvPr id="10" name="Opening Toolhead Full Bleed">
+            <a:extLst>
+              <a:ext uri="{FF2B5EF4-FFF2-40B4-BE49-F238E27FC236}">
+                <a16:creationId xmlns:a16="http://schemas.microsoft.com/office/drawing/2014/main" id="{DA8C5DBD-3C34-FC5A-DF05-78EDD8B1E610}"/>
               </a:ext>
             </a:extLst>
           </p:cNvPr>
@@ -2204,20 +1884,475 @@
               </a:ext>
             </a:extLst>
           </a:blip>
+          <a:srcRect t="4477" b="4477"/>
           <a:stretch>
             <a:fillRect/>
           </a:stretch>
         </p:blipFill>
         <p:spPr>
           <a:xfrm>
-            <a:off x="6882583" y="552450"/>
-            <a:ext cx="3856084" cy="5334000"/>
+            <a:off x="0" y="307031"/>
+            <a:ext cx="12192000" cy="6243938"/>
           </a:xfrm>
           <a:prstGeom prst="rect">
             <a:avLst/>
           </a:prstGeom>
         </p:spPr>
       </p:pic>
+      <p:sp>
+        <p:nvSpPr>
+          <p:cNvPr id="11" name="Opening Title Readability Panel">
+            <a:extLst>
+              <a:ext uri="{FF2B5EF4-FFF2-40B4-BE49-F238E27FC236}">
+                <a16:creationId xmlns:a16="http://schemas.microsoft.com/office/drawing/2014/main" id="{395FC5DE-808B-9D4B-47B9-D54C0F32F3AD}"/>
+              </a:ext>
+            </a:extLst>
+          </p:cNvPr>
+          <p:cNvSpPr/>
+          <p:nvPr/>
+        </p:nvSpPr>
+        <p:spPr>
+          <a:xfrm>
+            <a:off x="0" y="0"/>
+            <a:ext cx="6667500" cy="6858000"/>
+          </a:xfrm>
+          <a:prstGeom prst="rect">
+            <a:avLst/>
+          </a:prstGeom>
+          <a:solidFill>
+            <a:srgbClr val="081420">
+              <a:alpha val="82000"/>
+            </a:srgbClr>
+          </a:solidFill>
+          <a:ln w="19050">
+            <a:noFill/>
+            <a:prstDash val="solid"/>
+          </a:ln>
+          <a:effectLst/>
+          <a:extLst>
+            <a:ext uri="{91240B29-F687-4F45-9708-019B960494DF}">
+              <a14:hiddenLine xmlns:a14="http://schemas.microsoft.com/office/drawing/2010/main" w="19050">
+                <a:solidFill>
+                  <a:schemeClr val="accent1">
+                    <a:shade val="15000"/>
+                  </a:schemeClr>
+                </a:solidFill>
+                <a:prstDash val="solid"/>
+              </a14:hiddenLine>
+            </a:ext>
+          </a:extLst>
+        </p:spPr>
+        <p:style>
+          <a:lnRef idx="2">
+            <a:schemeClr val="accent1">
+              <a:shade val="15000"/>
+            </a:schemeClr>
+          </a:lnRef>
+          <a:fillRef idx="1">
+            <a:schemeClr val="accent1"/>
+          </a:fillRef>
+          <a:effectRef idx="0">
+            <a:schemeClr val="accent1"/>
+          </a:effectRef>
+          <a:fontRef idx="minor">
+            <a:schemeClr val="lt1"/>
+          </a:fontRef>
+        </p:style>
+        <p:txBody>
+          <a:bodyPr rtlCol="0" anchor="ctr"/>
+          <a:lstStyle/>
+          <a:p>
+            <a:pPr algn="ctr"/>
+            <a:endParaRPr lang="en-US"/>
+          </a:p>
+        </p:txBody>
+      </p:sp>
+      <p:sp>
+        <p:nvSpPr>
+          <p:cNvPr id="8" name="Rectangle 7">
+            <a:extLst>
+              <a:ext uri="{FF2B5EF4-FFF2-40B4-BE49-F238E27FC236}">
+                <a16:creationId xmlns:a16="http://schemas.microsoft.com/office/drawing/2014/main" id="{7A7D2EF2-BFA3-4766-B942-23E570E48309}"/>
+              </a:ext>
+            </a:extLst>
+          </p:cNvPr>
+          <p:cNvSpPr>
+            <a:spLocks noGrp="1"/>
+          </p:cNvSpPr>
+          <p:nvPr/>
+        </p:nvSpPr>
+        <p:spPr>
+          <a:xfrm>
+            <a:off x="609600" y="482600"/>
+            <a:ext cx="5334000" cy="304800"/>
+          </a:xfrm>
+          <a:prstGeom prst="rect">
+            <a:avLst/>
+          </a:prstGeom>
+          <a:noFill/>
+          <a:ln w="0">
+            <a:noFill/>
+            <a:prstDash val="solid"/>
+          </a:ln>
+        </p:spPr>
+        <p:txBody>
+          <a:bodyPr wrap="square" lIns="0" tIns="0" rIns="0" bIns="0" anchor="t">
+            <a:normAutofit/>
+          </a:bodyPr>
+          <a:lstStyle/>
+          <a:p>
+            <a:pPr algn="l">
+              <a:defRPr sz="1200" b="1">
+                <a:solidFill>
+                  <a:srgbClr val="3D8DFF"/>
+                </a:solidFill>
+                <a:latin typeface="Helvetica Neue"/>
+                <a:ea typeface="Helvetica Neue"/>
+                <a:cs typeface="Helvetica Neue"/>
+              </a:defRPr>
+            </a:pPr>
+            <a:r>
+              <a:rPr sz="1700" b="1">
+                <a:solidFill>
+                  <a:srgbClr val="71B4FF"/>
+                </a:solidFill>
+                <a:latin typeface="Aptos" panose="020B0004020202020204" pitchFamily="34" charset="0"/>
+                <a:ea typeface="Helvetica Neue"/>
+                <a:cs typeface="Helvetica Neue"/>
+              </a:rPr>
+              <a:t>SUMMER PROGRESS UPDATE</a:t>
+            </a:r>
+          </a:p>
+        </p:txBody>
+      </p:sp>
+      <p:sp>
+        <p:nvSpPr>
+          <p:cNvPr id="2" name="Rectangle 1">
+            <a:extLst>
+              <a:ext uri="{FF2B5EF4-FFF2-40B4-BE49-F238E27FC236}">
+                <a16:creationId xmlns:a16="http://schemas.microsoft.com/office/drawing/2014/main" id="{6C209B30-5687-4D31-B45B-B18289FD1874}"/>
+              </a:ext>
+            </a:extLst>
+          </p:cNvPr>
+          <p:cNvSpPr>
+            <a:spLocks noGrp="1"/>
+          </p:cNvSpPr>
+          <p:nvPr/>
+        </p:nvSpPr>
+        <p:spPr>
+          <a:xfrm>
+            <a:off x="609600" y="1333500"/>
+            <a:ext cx="5588000" cy="889000"/>
+          </a:xfrm>
+          <a:prstGeom prst="rect">
+            <a:avLst/>
+          </a:prstGeom>
+          <a:noFill/>
+          <a:ln w="0">
+            <a:noFill/>
+            <a:prstDash val="solid"/>
+          </a:ln>
+        </p:spPr>
+        <p:txBody>
+          <a:bodyPr wrap="square" lIns="0" tIns="0" rIns="0" bIns="0" anchor="t">
+            <a:normAutofit fontScale="85000" lnSpcReduction="10000"/>
+          </a:bodyPr>
+          <a:lstStyle/>
+          <a:p>
+            <a:pPr algn="l">
+              <a:defRPr sz="4800" b="1">
+                <a:solidFill>
+                  <a:srgbClr val="000000"/>
+                </a:solidFill>
+                <a:latin typeface="Helvetica Neue"/>
+                <a:ea typeface="Helvetica Neue"/>
+                <a:cs typeface="Helvetica Neue"/>
+              </a:defRPr>
+            </a:pPr>
+            <a:r>
+              <a:rPr lang="en-US" sz="3400" b="1" dirty="0">
+                <a:solidFill>
+                  <a:srgbClr val="FFFFFF"/>
+                </a:solidFill>
+                <a:latin typeface="Aptos" panose="020B0004020202020204" pitchFamily="34" charset="0"/>
+                <a:ea typeface="Helvetica Neue"/>
+                <a:cs typeface="Helvetica Neue"/>
+              </a:rPr>
+              <a:t>XY </a:t>
+            </a:r>
+            <a:r>
+              <a:rPr sz="3400" b="1" dirty="0">
+                <a:solidFill>
+                  <a:srgbClr val="FFFFFF"/>
+                </a:solidFill>
+                <a:latin typeface="Aptos" panose="020B0004020202020204" pitchFamily="34" charset="0"/>
+                <a:ea typeface="Helvetica Neue"/>
+                <a:cs typeface="Helvetica Neue"/>
+              </a:rPr>
+              <a:t>Theta Pen Plotter</a:t>
+            </a:r>
+          </a:p>
+        </p:txBody>
+      </p:sp>
+      <p:sp>
+        <p:nvSpPr>
+          <p:cNvPr id="3" name="Rectangle 2">
+            <a:extLst>
+              <a:ext uri="{FF2B5EF4-FFF2-40B4-BE49-F238E27FC236}">
+                <a16:creationId xmlns:a16="http://schemas.microsoft.com/office/drawing/2014/main" id="{D7D776E8-8ED9-48FA-BCA2-259250FFD263}"/>
+              </a:ext>
+            </a:extLst>
+          </p:cNvPr>
+          <p:cNvSpPr>
+            <a:spLocks noGrp="1"/>
+          </p:cNvSpPr>
+          <p:nvPr/>
+        </p:nvSpPr>
+        <p:spPr>
+          <a:xfrm>
+            <a:off x="609600" y="2794000"/>
+            <a:ext cx="5461000" cy="533400"/>
+          </a:xfrm>
+          <a:prstGeom prst="rect">
+            <a:avLst/>
+          </a:prstGeom>
+          <a:noFill/>
+          <a:ln w="0">
+            <a:noFill/>
+            <a:prstDash val="solid"/>
+          </a:ln>
+        </p:spPr>
+        <p:txBody>
+          <a:bodyPr wrap="square" lIns="0" tIns="0" rIns="0" bIns="0" anchor="t">
+            <a:normAutofit/>
+          </a:bodyPr>
+          <a:lstStyle/>
+          <a:p>
+            <a:pPr algn="l">
+              <a:defRPr sz="2025" b="0">
+                <a:solidFill>
+                  <a:srgbClr val="59616B"/>
+                </a:solidFill>
+                <a:latin typeface="Helvetica Neue"/>
+                <a:ea typeface="Helvetica Neue"/>
+                <a:cs typeface="Helvetica Neue"/>
+              </a:defRPr>
+            </a:pPr>
+            <a:r>
+              <a:rPr lang="en-US" sz="2200" b="0" dirty="0">
+                <a:solidFill>
+                  <a:srgbClr val="DEE8F2"/>
+                </a:solidFill>
+                <a:latin typeface="Aptos" panose="020B0004020202020204" pitchFamily="34" charset="0"/>
+                <a:ea typeface="Helvetica Neue"/>
+                <a:cs typeface="Helvetica Neue"/>
+              </a:rPr>
+              <a:t>Path to </a:t>
+            </a:r>
+            <a:r>
+              <a:rPr lang="en-US" sz="2200" b="0" dirty="0" err="1">
+                <a:solidFill>
+                  <a:srgbClr val="DEE8F2"/>
+                </a:solidFill>
+                <a:latin typeface="Aptos" panose="020B0004020202020204" pitchFamily="34" charset="0"/>
+                <a:ea typeface="Helvetica Neue"/>
+                <a:cs typeface="Helvetica Neue"/>
+              </a:rPr>
+              <a:t>commisioning</a:t>
+            </a:r>
+            <a:endParaRPr sz="2200" b="0" dirty="0">
+              <a:solidFill>
+                <a:srgbClr val="DEE8F2"/>
+              </a:solidFill>
+              <a:latin typeface="Aptos" panose="020B0004020202020204" pitchFamily="34" charset="0"/>
+              <a:ea typeface="Helvetica Neue"/>
+              <a:cs typeface="Helvetica Neue"/>
+            </a:endParaRPr>
+          </a:p>
+        </p:txBody>
+      </p:sp>
+      <p:sp>
+        <p:nvSpPr>
+          <p:cNvPr id="5" name="Rectangle 4">
+            <a:extLst>
+              <a:ext uri="{FF2B5EF4-FFF2-40B4-BE49-F238E27FC236}">
+                <a16:creationId xmlns:a16="http://schemas.microsoft.com/office/drawing/2014/main" id="{FD70773F-8C93-41F1-9E9B-6EE3F437BD4A}"/>
+              </a:ext>
+            </a:extLst>
+          </p:cNvPr>
+          <p:cNvSpPr>
+            <a:spLocks noGrp="1"/>
+          </p:cNvSpPr>
+          <p:nvPr/>
+        </p:nvSpPr>
+        <p:spPr>
+          <a:xfrm>
+            <a:off x="609600" y="5969000"/>
+            <a:ext cx="5588000" cy="355600"/>
+          </a:xfrm>
+          <a:prstGeom prst="rect">
+            <a:avLst/>
+          </a:prstGeom>
+          <a:noFill/>
+          <a:ln w="0">
+            <a:noFill/>
+            <a:prstDash val="solid"/>
+          </a:ln>
+        </p:spPr>
+        <p:txBody>
+          <a:bodyPr wrap="square" lIns="0" tIns="0" rIns="0" bIns="0" anchor="t">
+            <a:normAutofit/>
+          </a:bodyPr>
+          <a:lstStyle/>
+          <a:p>
+            <a:pPr algn="l">
+              <a:defRPr sz="1350" b="0">
+                <a:solidFill>
+                  <a:srgbClr val="000000"/>
+                </a:solidFill>
+                <a:latin typeface="Helvetica Neue"/>
+                <a:ea typeface="Helvetica Neue"/>
+                <a:cs typeface="Helvetica Neue"/>
+              </a:defRPr>
+            </a:pPr>
+            <a:r>
+              <a:rPr sz="1500" b="0">
+                <a:solidFill>
+                  <a:srgbClr val="DAE6F2"/>
+                </a:solidFill>
+                <a:latin typeface="Aptos" panose="020B0004020202020204" pitchFamily="34" charset="0"/>
+                <a:ea typeface="Helvetica Neue"/>
+                <a:cs typeface="Helvetica Neue"/>
+              </a:rPr>
+              <a:t>Course progress update  •  September 2026</a:t>
+            </a:r>
+          </a:p>
+        </p:txBody>
+      </p:sp>
+      <p:sp>
+        <p:nvSpPr>
+          <p:cNvPr id="7" name="Rectangle 6">
+            <a:extLst>
+              <a:ext uri="{FF2B5EF4-FFF2-40B4-BE49-F238E27FC236}">
+                <a16:creationId xmlns:a16="http://schemas.microsoft.com/office/drawing/2014/main" id="{105FB2DD-B9EE-4E50-ACD4-DD43F4B76831}"/>
+              </a:ext>
+            </a:extLst>
+          </p:cNvPr>
+          <p:cNvSpPr>
+            <a:spLocks noGrp="1"/>
+          </p:cNvSpPr>
+          <p:nvPr/>
+        </p:nvSpPr>
+        <p:spPr>
+          <a:xfrm>
+            <a:off x="609600" y="4978400"/>
+            <a:ext cx="5588000" cy="685800"/>
+          </a:xfrm>
+          <a:prstGeom prst="rect">
+            <a:avLst/>
+          </a:prstGeom>
+          <a:noFill/>
+          <a:ln w="0">
+            <a:noFill/>
+            <a:prstDash val="solid"/>
+          </a:ln>
+        </p:spPr>
+        <p:txBody>
+          <a:bodyPr wrap="square" lIns="0" tIns="0" rIns="0" bIns="0" anchor="t">
+            <a:normAutofit/>
+          </a:bodyPr>
+          <a:lstStyle/>
+          <a:p>
+            <a:pPr algn="l">
+              <a:defRPr sz="1050" b="0">
+                <a:solidFill>
+                  <a:srgbClr val="59616B"/>
+                </a:solidFill>
+                <a:latin typeface="Helvetica Neue"/>
+                <a:ea typeface="Helvetica Neue"/>
+                <a:cs typeface="Helvetica Neue"/>
+              </a:defRPr>
+            </a:pPr>
+            <a:r>
+              <a:rPr sz="1300" b="0">
+                <a:solidFill>
+                  <a:srgbClr val="DCE8F2"/>
+                </a:solidFill>
+                <a:latin typeface="Aptos" panose="020B0004020202020204" pitchFamily="34" charset="0"/>
+                <a:ea typeface="Helvetica Neue"/>
+                <a:cs typeface="Helvetica Neue"/>
+              </a:rPr>
+              <a:t>The toolhead combines an N20 lead-screw actuator, spring compliance, load cell, and guided pen carriage.</a:t>
+            </a:r>
+          </a:p>
+        </p:txBody>
+      </p:sp>
+      <p:sp>
+        <p:nvSpPr>
+          <p:cNvPr id="12" name="Opening Title Divider">
+            <a:extLst>
+              <a:ext uri="{FF2B5EF4-FFF2-40B4-BE49-F238E27FC236}">
+                <a16:creationId xmlns:a16="http://schemas.microsoft.com/office/drawing/2014/main" id="{EE4DA868-0CB6-CA6E-219B-CADE9894FC57}"/>
+              </a:ext>
+            </a:extLst>
+          </p:cNvPr>
+          <p:cNvSpPr/>
+          <p:nvPr/>
+        </p:nvSpPr>
+        <p:spPr>
+          <a:xfrm>
+            <a:off x="609600" y="3937000"/>
+            <a:ext cx="5334000" cy="38100"/>
+          </a:xfrm>
+          <a:prstGeom prst="rect">
+            <a:avLst/>
+          </a:prstGeom>
+          <a:solidFill>
+            <a:srgbClr val="71B4FF"/>
+          </a:solidFill>
+          <a:ln w="19050">
+            <a:noFill/>
+            <a:prstDash val="solid"/>
+          </a:ln>
+          <a:effectLst/>
+          <a:extLst>
+            <a:ext uri="{91240B29-F687-4F45-9708-019B960494DF}">
+              <a14:hiddenLine xmlns:a14="http://schemas.microsoft.com/office/drawing/2010/main" w="19050">
+                <a:solidFill>
+                  <a:schemeClr val="accent1">
+                    <a:shade val="15000"/>
+                  </a:schemeClr>
+                </a:solidFill>
+                <a:prstDash val="solid"/>
+              </a14:hiddenLine>
+            </a:ext>
+          </a:extLst>
+        </p:spPr>
+        <p:style>
+          <a:lnRef idx="2">
+            <a:schemeClr val="accent1">
+              <a:shade val="15000"/>
+            </a:schemeClr>
+          </a:lnRef>
+          <a:fillRef idx="1">
+            <a:schemeClr val="accent1"/>
+          </a:fillRef>
+          <a:effectRef idx="0">
+            <a:schemeClr val="accent1"/>
+          </a:effectRef>
+          <a:fontRef idx="minor">
+            <a:schemeClr val="lt1"/>
+          </a:fontRef>
+        </p:style>
+        <p:txBody>
+          <a:bodyPr rtlCol="0" anchor="ctr"/>
+          <a:lstStyle/>
+          <a:p>
+            <a:pPr algn="ctr"/>
+            <a:endParaRPr lang="en-US"/>
+          </a:p>
+        </p:txBody>
+      </p:sp>
     </p:spTree>
     <p:extLst>
       <p:ext uri="{BB962C8B-B14F-4D97-AF65-F5344CB8AC3E}">

--- a/docs/report/Theta_Pen_Plotter_Summer_Progress_Update.pptx
+++ b/docs/report/Theta_Pen_Plotter_Summer_Progress_Update.pptx
@@ -11,8 +11,8 @@
     <p:sldId id="256" r:id="rId2"/>
     <p:sldId id="257" r:id="rId3"/>
     <p:sldId id="258" r:id="rId4"/>
-    <p:sldId id="259" r:id="rId5"/>
-    <p:sldId id="260" r:id="rId6"/>
+    <p:sldId id="269" r:id="rId5"/>
+    <p:sldId id="259" r:id="rId6"/>
     <p:sldId id="268" r:id="rId7"/>
     <p:sldId id="267" r:id="rId8"/>
     <p:sldId id="266" r:id="rId9"/>
@@ -343,16 +343,19 @@
           <a:lstStyle/>
           <a:p>
             <a:r>
+              <a:rPr dirty="0"/>
               <a:t>[Sources]</a:t>
             </a:r>
           </a:p>
           <a:p>
             <a:r>
+              <a:rPr dirty="0"/>
               <a:t>- User-provided toolhead CAD render.</a:t>
             </a:r>
           </a:p>
           <a:p>
             <a:r>
+              <a:rPr dirty="0"/>
               <a:t>- No external assets or claims.</a:t>
             </a:r>
           </a:p>
@@ -922,7 +925,13 @@
   <p:cSld>
     <p:spTree>
       <p:nvGrpSpPr>
-        <p:cNvPr id="1" name=""/>
+        <p:cNvPr id="1" name="">
+          <a:extLst>
+            <a:ext uri="{FF2B5EF4-FFF2-40B4-BE49-F238E27FC236}">
+              <a16:creationId xmlns:a16="http://schemas.microsoft.com/office/drawing/2014/main" id="{F18CAE23-1C99-2F05-FC33-A664BBBFC7DE}"/>
+            </a:ext>
+          </a:extLst>
+        </p:cNvPr>
         <p:cNvGrpSpPr/>
         <p:nvPr/>
       </p:nvGrpSpPr>
@@ -936,7 +945,13 @@
       </p:grpSpPr>
       <p:sp>
         <p:nvSpPr>
-          <p:cNvPr id="2" name="Slide Image Placeholder 1"/>
+          <p:cNvPr id="2" name="Slide Image Placeholder 1">
+            <a:extLst>
+              <a:ext uri="{FF2B5EF4-FFF2-40B4-BE49-F238E27FC236}">
+                <a16:creationId xmlns:a16="http://schemas.microsoft.com/office/drawing/2014/main" id="{C656873B-710E-08FD-3A21-C392CE482902}"/>
+              </a:ext>
+            </a:extLst>
+          </p:cNvPr>
           <p:cNvSpPr>
             <a:spLocks noGrp="1" noRot="1" noChangeAspect="1"/>
           </p:cNvSpPr>
@@ -948,7 +963,13 @@
       </p:sp>
       <p:sp>
         <p:nvSpPr>
-          <p:cNvPr id="3" name="Notes Placeholder 2"/>
+          <p:cNvPr id="3" name="Notes Placeholder 2">
+            <a:extLst>
+              <a:ext uri="{FF2B5EF4-FFF2-40B4-BE49-F238E27FC236}">
+                <a16:creationId xmlns:a16="http://schemas.microsoft.com/office/drawing/2014/main" id="{7F48939E-D08B-EF4B-54B6-2CA3176D0ECE}"/>
+              </a:ext>
+            </a:extLst>
+          </p:cNvPr>
           <p:cNvSpPr>
             <a:spLocks noGrp="1"/>
           </p:cNvSpPr>
@@ -967,7 +988,7 @@
           </a:p>
           <a:p>
             <a:r>
-              <a:t>- firmware/grblhal/HOMING_AND_MAGNETIC_CALIBRATION.md</a:t>
+              <a:t>- Internal system architecture and interface documents.</a:t>
             </a:r>
           </a:p>
           <a:p>
@@ -979,7 +1000,13 @@
       </p:sp>
       <p:sp>
         <p:nvSpPr>
-          <p:cNvPr id="4" name="Slide Number Placeholder 3"/>
+          <p:cNvPr id="4" name="Slide Number Placeholder 3">
+            <a:extLst>
+              <a:ext uri="{FF2B5EF4-FFF2-40B4-BE49-F238E27FC236}">
+                <a16:creationId xmlns:a16="http://schemas.microsoft.com/office/drawing/2014/main" id="{DEDCB0C2-DFD2-A233-B494-2BAD0C9A233C}"/>
+              </a:ext>
+            </a:extLst>
+          </p:cNvPr>
           <p:cNvSpPr>
             <a:spLocks noGrp="1"/>
           </p:cNvSpPr>
@@ -997,6 +1024,11 @@
         </p:txBody>
       </p:sp>
     </p:spTree>
+    <p:extLst>
+      <p:ext uri="{BB962C8B-B14F-4D97-AF65-F5344CB8AC3E}">
+        <p14:creationId xmlns:p14="http://schemas.microsoft.com/office/powerpoint/2010/main" val="1185017489"/>
+      </p:ext>
+    </p:extLst>
   </p:cSld>
   <p:clrMapOvr>
     <a:masterClrMapping/>
@@ -1050,11 +1082,6 @@
           <a:p>
             <a:r>
               <a:t>[Sources]</a:t>
-            </a:r>
-          </a:p>
-          <a:p>
-            <a:r>
-              <a:t>- docs/p100-data-movement.html rendered as a static image.</a:t>
             </a:r>
           </a:p>
           <a:p>
@@ -1891,7 +1918,7 @@
         </p:blipFill>
         <p:spPr>
           <a:xfrm>
-            <a:off x="0" y="307031"/>
+            <a:off x="0" y="614062"/>
             <a:ext cx="12192000" cy="6243938"/>
           </a:xfrm>
           <a:prstGeom prst="rect">
@@ -1913,8 +1940,8 @@
         </p:nvSpPr>
         <p:spPr>
           <a:xfrm>
-            <a:off x="0" y="0"/>
-            <a:ext cx="6667500" cy="6858000"/>
+            <a:off x="0" y="5807074"/>
+            <a:ext cx="12192000" cy="1050925"/>
           </a:xfrm>
           <a:prstGeom prst="rect">
             <a:avLst/>
@@ -1983,7 +2010,7 @@
         </p:nvSpPr>
         <p:spPr>
           <a:xfrm>
-            <a:off x="609600" y="482600"/>
+            <a:off x="400050" y="6438900"/>
             <a:ext cx="5334000" cy="304800"/>
           </a:xfrm>
           <a:prstGeom prst="rect">
@@ -2012,7 +2039,7 @@
               </a:defRPr>
             </a:pPr>
             <a:r>
-              <a:rPr sz="1700" b="1">
+              <a:rPr sz="1700" b="1" dirty="0">
                 <a:solidFill>
                   <a:srgbClr val="71B4FF"/>
                 </a:solidFill>
@@ -2041,7 +2068,7 @@
         </p:nvSpPr>
         <p:spPr>
           <a:xfrm>
-            <a:off x="609600" y="1333500"/>
+            <a:off x="400050" y="5884672"/>
             <a:ext cx="5588000" cy="889000"/>
           </a:xfrm>
           <a:prstGeom prst="rect">
@@ -2055,7 +2082,7 @@
         </p:spPr>
         <p:txBody>
           <a:bodyPr wrap="square" lIns="0" tIns="0" rIns="0" bIns="0" anchor="t">
-            <a:normAutofit fontScale="85000" lnSpcReduction="10000"/>
+            <a:normAutofit/>
           </a:bodyPr>
           <a:lstStyle/>
           <a:p>
@@ -2110,7 +2137,7 @@
         </p:nvSpPr>
         <p:spPr>
           <a:xfrm>
-            <a:off x="609600" y="2794000"/>
+            <a:off x="400050" y="6048756"/>
             <a:ext cx="5461000" cy="533400"/>
           </a:xfrm>
           <a:prstGeom prst="rect">
@@ -2138,28 +2165,6 @@
                 <a:cs typeface="Helvetica Neue"/>
               </a:defRPr>
             </a:pPr>
-            <a:r>
-              <a:rPr lang="en-US" sz="2200" b="0" dirty="0">
-                <a:solidFill>
-                  <a:srgbClr val="DEE8F2"/>
-                </a:solidFill>
-                <a:latin typeface="Aptos" panose="020B0004020202020204" pitchFamily="34" charset="0"/>
-                <a:ea typeface="Helvetica Neue"/>
-                <a:cs typeface="Helvetica Neue"/>
-              </a:rPr>
-              <a:t>Path to </a:t>
-            </a:r>
-            <a:r>
-              <a:rPr lang="en-US" sz="2200" b="0" dirty="0" err="1">
-                <a:solidFill>
-                  <a:srgbClr val="DEE8F2"/>
-                </a:solidFill>
-                <a:latin typeface="Aptos" panose="020B0004020202020204" pitchFamily="34" charset="0"/>
-                <a:ea typeface="Helvetica Neue"/>
-                <a:cs typeface="Helvetica Neue"/>
-              </a:rPr>
-              <a:t>commisioning</a:t>
-            </a:r>
             <a:endParaRPr sz="2200" b="0" dirty="0">
               <a:solidFill>
                 <a:srgbClr val="DEE8F2"/>
@@ -2173,10 +2178,10 @@
       </p:sp>
       <p:sp>
         <p:nvSpPr>
-          <p:cNvPr id="5" name="Rectangle 4">
-            <a:extLst>
-              <a:ext uri="{FF2B5EF4-FFF2-40B4-BE49-F238E27FC236}">
-                <a16:creationId xmlns:a16="http://schemas.microsoft.com/office/drawing/2014/main" id="{FD70773F-8C93-41F1-9E9B-6EE3F437BD4A}"/>
+          <p:cNvPr id="7" name="Rectangle 6">
+            <a:extLst>
+              <a:ext uri="{FF2B5EF4-FFF2-40B4-BE49-F238E27FC236}">
+                <a16:creationId xmlns:a16="http://schemas.microsoft.com/office/drawing/2014/main" id="{105FB2DD-B9EE-4E50-ACD4-DD43F4B76831}"/>
               </a:ext>
             </a:extLst>
           </p:cNvPr>
@@ -2187,8 +2192,8 @@
         </p:nvSpPr>
         <p:spPr>
           <a:xfrm>
-            <a:off x="609600" y="5969000"/>
-            <a:ext cx="5588000" cy="355600"/>
+            <a:off x="609600" y="4978400"/>
+            <a:ext cx="5588000" cy="685800"/>
           </a:xfrm>
           <a:prstGeom prst="rect">
             <a:avLst/>
@@ -2206,84 +2211,23 @@
           <a:lstStyle/>
           <a:p>
             <a:pPr algn="l">
-              <a:defRPr sz="1350" b="0">
-                <a:solidFill>
-                  <a:srgbClr val="000000"/>
+              <a:defRPr sz="1050" b="0">
+                <a:solidFill>
+                  <a:srgbClr val="59616B"/>
                 </a:solidFill>
                 <a:latin typeface="Helvetica Neue"/>
                 <a:ea typeface="Helvetica Neue"/>
                 <a:cs typeface="Helvetica Neue"/>
               </a:defRPr>
             </a:pPr>
-            <a:r>
-              <a:rPr sz="1500" b="0">
-                <a:solidFill>
-                  <a:srgbClr val="DAE6F2"/>
-                </a:solidFill>
-                <a:latin typeface="Aptos" panose="020B0004020202020204" pitchFamily="34" charset="0"/>
-                <a:ea typeface="Helvetica Neue"/>
-                <a:cs typeface="Helvetica Neue"/>
-              </a:rPr>
-              <a:t>Course progress update  •  September 2026</a:t>
-            </a:r>
-          </a:p>
-        </p:txBody>
-      </p:sp>
-      <p:sp>
-        <p:nvSpPr>
-          <p:cNvPr id="7" name="Rectangle 6">
-            <a:extLst>
-              <a:ext uri="{FF2B5EF4-FFF2-40B4-BE49-F238E27FC236}">
-                <a16:creationId xmlns:a16="http://schemas.microsoft.com/office/drawing/2014/main" id="{105FB2DD-B9EE-4E50-ACD4-DD43F4B76831}"/>
-              </a:ext>
-            </a:extLst>
-          </p:cNvPr>
-          <p:cNvSpPr>
-            <a:spLocks noGrp="1"/>
-          </p:cNvSpPr>
-          <p:nvPr/>
-        </p:nvSpPr>
-        <p:spPr>
-          <a:xfrm>
-            <a:off x="609600" y="4978400"/>
-            <a:ext cx="5588000" cy="685800"/>
-          </a:xfrm>
-          <a:prstGeom prst="rect">
-            <a:avLst/>
-          </a:prstGeom>
-          <a:noFill/>
-          <a:ln w="0">
-            <a:noFill/>
-            <a:prstDash val="solid"/>
-          </a:ln>
-        </p:spPr>
-        <p:txBody>
-          <a:bodyPr wrap="square" lIns="0" tIns="0" rIns="0" bIns="0" anchor="t">
-            <a:normAutofit/>
-          </a:bodyPr>
-          <a:lstStyle/>
-          <a:p>
-            <a:pPr algn="l">
-              <a:defRPr sz="1050" b="0">
-                <a:solidFill>
-                  <a:srgbClr val="59616B"/>
-                </a:solidFill>
-                <a:latin typeface="Helvetica Neue"/>
-                <a:ea typeface="Helvetica Neue"/>
-                <a:cs typeface="Helvetica Neue"/>
-              </a:defRPr>
-            </a:pPr>
-            <a:r>
-              <a:rPr sz="1300" b="0">
-                <a:solidFill>
-                  <a:srgbClr val="DCE8F2"/>
-                </a:solidFill>
-                <a:latin typeface="Aptos" panose="020B0004020202020204" pitchFamily="34" charset="0"/>
-                <a:ea typeface="Helvetica Neue"/>
-                <a:cs typeface="Helvetica Neue"/>
-              </a:rPr>
-              <a:t>The toolhead combines an N20 lead-screw actuator, spring compliance, load cell, and guided pen carriage.</a:t>
-            </a:r>
+            <a:endParaRPr sz="1300" b="0" dirty="0">
+              <a:solidFill>
+                <a:srgbClr val="DCE8F2"/>
+              </a:solidFill>
+              <a:latin typeface="Aptos" panose="020B0004020202020204" pitchFamily="34" charset="0"/>
+              <a:ea typeface="Helvetica Neue"/>
+              <a:cs typeface="Helvetica Neue"/>
+            </a:endParaRPr>
           </a:p>
         </p:txBody>
       </p:sp>
@@ -2301,7 +2245,7 @@
         </p:nvSpPr>
         <p:spPr>
           <a:xfrm>
-            <a:off x="609600" y="3937000"/>
+            <a:off x="400050" y="6371226"/>
             <a:ext cx="5334000" cy="38100"/>
           </a:xfrm>
           <a:prstGeom prst="rect">
@@ -3028,70 +2972,6 @@
           </a:p>
         </p:txBody>
       </p:sp>
-      <p:sp>
-        <p:nvSpPr>
-          <p:cNvPr id="7" name="P100 Back Button">
-            <a:hlinkClick r:id="rId10" action="ppaction://hlinksldjump"/>
-            <a:hlinkHover r:id="rId10" action="ppaction://hlinksldjump"/>
-            <a:extLst>
-              <a:ext uri="{FF2B5EF4-FFF2-40B4-BE49-F238E27FC236}">
-                <a16:creationId xmlns:a16="http://schemas.microsoft.com/office/drawing/2014/main" id="{35959FFA-F53B-CA42-A932-B1A9960B530B}"/>
-              </a:ext>
-            </a:extLst>
-          </p:cNvPr>
-          <p:cNvSpPr/>
-          <p:nvPr/>
-        </p:nvSpPr>
-        <p:spPr>
-          <a:xfrm>
-            <a:off x="10058400" y="6172200"/>
-            <a:ext cx="1714500" cy="304800"/>
-          </a:xfrm>
-          <a:prstGeom prst="roundRect">
-            <a:avLst/>
-          </a:prstGeom>
-          <a:solidFill>
-            <a:srgbClr val="F4F4F4"/>
-          </a:solidFill>
-          <a:ln w="12700">
-            <a:solidFill>
-              <a:srgbClr val="FFA533"/>
-            </a:solidFill>
-          </a:ln>
-        </p:spPr>
-        <p:style>
-          <a:lnRef idx="2">
-            <a:schemeClr val="accent1">
-              <a:shade val="15000"/>
-            </a:schemeClr>
-          </a:lnRef>
-          <a:fillRef idx="1">
-            <a:schemeClr val="accent1"/>
-          </a:fillRef>
-          <a:effectRef idx="0">
-            <a:schemeClr val="accent1"/>
-          </a:effectRef>
-          <a:fontRef idx="minor">
-            <a:schemeClr val="lt1"/>
-          </a:fontRef>
-        </p:style>
-        <p:txBody>
-          <a:bodyPr rtlCol="0" anchor="ctr"/>
-          <a:lstStyle/>
-          <a:p>
-            <a:pPr algn="ctr"/>
-            <a:r>
-              <a:rPr lang="en-US" sz="1000" b="1">
-                <a:solidFill>
-                  <a:srgbClr val="FFA533"/>
-                </a:solidFill>
-                <a:latin typeface="Aptos" panose="020B0004020202020204" pitchFamily="34" charset="0"/>
-              </a:rPr>
-              <a:t>BACK</a:t>
-            </a:r>
-          </a:p>
-        </p:txBody>
-      </p:sp>
     </p:spTree>
     <p:extLst>
       <p:ext uri="{BB962C8B-B14F-4D97-AF65-F5344CB8AC3E}">
@@ -3766,70 +3646,6 @@
           </a:p>
         </p:txBody>
       </p:sp>
-      <p:sp>
-        <p:nvSpPr>
-          <p:cNvPr id="7" name="P100 Back Button">
-            <a:hlinkClick r:id="rId10" action="ppaction://hlinksldjump"/>
-            <a:hlinkHover r:id="rId10" action="ppaction://hlinksldjump"/>
-            <a:extLst>
-              <a:ext uri="{FF2B5EF4-FFF2-40B4-BE49-F238E27FC236}">
-                <a16:creationId xmlns:a16="http://schemas.microsoft.com/office/drawing/2014/main" id="{43817E0E-2D88-6DF8-F1C7-93B18E4DC589}"/>
-              </a:ext>
-            </a:extLst>
-          </p:cNvPr>
-          <p:cNvSpPr/>
-          <p:nvPr/>
-        </p:nvSpPr>
-        <p:spPr>
-          <a:xfrm>
-            <a:off x="10058400" y="6172200"/>
-            <a:ext cx="1714500" cy="304800"/>
-          </a:xfrm>
-          <a:prstGeom prst="roundRect">
-            <a:avLst/>
-          </a:prstGeom>
-          <a:solidFill>
-            <a:srgbClr val="F4F4F4"/>
-          </a:solidFill>
-          <a:ln w="12700">
-            <a:solidFill>
-              <a:srgbClr val="FFA533"/>
-            </a:solidFill>
-          </a:ln>
-        </p:spPr>
-        <p:style>
-          <a:lnRef idx="2">
-            <a:schemeClr val="accent1">
-              <a:shade val="15000"/>
-            </a:schemeClr>
-          </a:lnRef>
-          <a:fillRef idx="1">
-            <a:schemeClr val="accent1"/>
-          </a:fillRef>
-          <a:effectRef idx="0">
-            <a:schemeClr val="accent1"/>
-          </a:effectRef>
-          <a:fontRef idx="minor">
-            <a:schemeClr val="lt1"/>
-          </a:fontRef>
-        </p:style>
-        <p:txBody>
-          <a:bodyPr rtlCol="0" anchor="ctr"/>
-          <a:lstStyle/>
-          <a:p>
-            <a:pPr algn="ctr"/>
-            <a:r>
-              <a:rPr lang="en-US" sz="1000" b="1">
-                <a:solidFill>
-                  <a:srgbClr val="FFA533"/>
-                </a:solidFill>
-                <a:latin typeface="Aptos" panose="020B0004020202020204" pitchFamily="34" charset="0"/>
-              </a:rPr>
-              <a:t>BACK</a:t>
-            </a:r>
-          </a:p>
-        </p:txBody>
-      </p:sp>
     </p:spTree>
     <p:extLst>
       <p:ext uri="{BB962C8B-B14F-4D97-AF65-F5344CB8AC3E}">
@@ -4127,7 +3943,7 @@
               </a:defRPr>
             </a:pPr>
             <a:r>
-              <a:rPr sz="900" b="0">
+              <a:rPr lang="en-US" sz="900" b="0">
                 <a:solidFill>
                   <a:srgbClr val="59616B"/>
                 </a:solidFill>
@@ -4135,8 +3951,16 @@
                 <a:ea typeface="Helvetica Neue"/>
                 <a:cs typeface="Helvetica Neue"/>
               </a:rPr>
-              <a:t>6</a:t>
-            </a:r>
+              <a:t>7</a:t>
+            </a:r>
+            <a:endParaRPr sz="900" b="0">
+              <a:solidFill>
+                <a:srgbClr val="59616B"/>
+              </a:solidFill>
+              <a:latin typeface="Helvetica Neue"/>
+              <a:ea typeface="Helvetica Neue"/>
+              <a:cs typeface="Helvetica Neue"/>
+            </a:endParaRPr>
           </a:p>
         </p:txBody>
       </p:sp>
@@ -4787,7 +4611,7 @@
               </a:defRPr>
             </a:pPr>
             <a:r>
-              <a:rPr sz="2700" b="1">
+              <a:rPr sz="2700" b="1" dirty="0">
                 <a:solidFill>
                   <a:srgbClr val="000000"/>
                 </a:solidFill>
@@ -4795,8 +4619,27 @@
                 <a:ea typeface="Helvetica Neue"/>
                 <a:cs typeface="Helvetica Neue"/>
               </a:rPr>
-              <a:t>Next: measure, verify, then make a calibration drawing</a:t>
-            </a:r>
+              <a:t>Next: </a:t>
+            </a:r>
+            <a:r>
+              <a:rPr lang="en-US" sz="2700" b="1" dirty="0">
+                <a:solidFill>
+                  <a:srgbClr val="000000"/>
+                </a:solidFill>
+                <a:latin typeface="Helvetica Neue"/>
+                <a:ea typeface="Helvetica Neue"/>
+                <a:cs typeface="Helvetica Neue"/>
+              </a:rPr>
+              <a:t>toolhead-home step completion</a:t>
+            </a:r>
+            <a:endParaRPr sz="2700" b="1" dirty="0">
+              <a:solidFill>
+                <a:srgbClr val="000000"/>
+              </a:solidFill>
+              <a:latin typeface="Helvetica Neue"/>
+              <a:ea typeface="Helvetica Neue"/>
+              <a:cs typeface="Helvetica Neue"/>
+            </a:endParaRPr>
           </a:p>
         </p:txBody>
       </p:sp>
@@ -4943,7 +4786,7 @@
               </a:defRPr>
             </a:pPr>
             <a:r>
-              <a:rPr sz="900" b="0">
+              <a:rPr lang="en-US" sz="900" b="0">
                 <a:solidFill>
                   <a:srgbClr val="59616B"/>
                 </a:solidFill>
@@ -4951,8 +4794,16 @@
                 <a:ea typeface="Helvetica Neue"/>
                 <a:cs typeface="Helvetica Neue"/>
               </a:rPr>
-              <a:t>7</a:t>
-            </a:r>
+              <a:t>8</a:t>
+            </a:r>
+            <a:endParaRPr sz="900" b="0">
+              <a:solidFill>
+                <a:srgbClr val="59616B"/>
+              </a:solidFill>
+              <a:latin typeface="Helvetica Neue"/>
+              <a:ea typeface="Helvetica Neue"/>
+              <a:cs typeface="Helvetica Neue"/>
+            </a:endParaRPr>
           </a:p>
         </p:txBody>
       </p:sp>
@@ -5855,7 +5706,7 @@
         </p:spPr>
         <p:txBody>
           <a:bodyPr lIns="0" tIns="0" rIns="0" bIns="0" anchor="t">
-            <a:normAutofit fontScale="64653" lnSpcReduction="10000"/>
+            <a:normAutofit fontScale="72153" lnSpcReduction="20000"/>
           </a:bodyPr>
           <a:lstStyle/>
           <a:p>
@@ -5996,46 +5847,6 @@
               </a:rPr>
               <a:t>Verify the motion controller and toolhead work together.</a:t>
             </a:r>
-          </a:p>
-        </p:txBody>
-      </p:sp>
-      <p:sp>
-        <p:nvSpPr>
-          <p:cNvPr id="26" name="Rectangle 25">
-            <a:extLst>
-              <a:ext uri="{FF2B5EF4-FFF2-40B4-BE49-F238E27FC236}">
-                <a16:creationId xmlns:a16="http://schemas.microsoft.com/office/drawing/2014/main" id="{0B9CBB77-16D5-4B38-9BD4-F9DA9EAB7C80}"/>
-              </a:ext>
-            </a:extLst>
-          </p:cNvPr>
-          <p:cNvSpPr>
-            <a:spLocks noGrp="1"/>
-          </p:cNvSpPr>
-          <p:nvPr/>
-        </p:nvSpPr>
-        <p:spPr>
-          <a:xfrm>
-            <a:off x="962025" y="5162550"/>
-            <a:ext cx="38100" cy="666750"/>
-          </a:xfrm>
-          <a:prstGeom prst="rect">
-            <a:avLst/>
-          </a:prstGeom>
-          <a:solidFill>
-            <a:srgbClr val="B8BCC4"/>
-          </a:solidFill>
-          <a:ln w="0">
-            <a:solidFill>
-              <a:srgbClr val="B8BCC4"/>
-            </a:solidFill>
-            <a:prstDash val="solid"/>
-          </a:ln>
-        </p:spPr>
-        <p:txBody>
-          <a:bodyPr/>
-          <a:lstStyle/>
-          <a:p>
-            <a:endParaRPr lang="en-US"/>
           </a:p>
         </p:txBody>
       </p:sp>
@@ -6111,7 +5922,7 @@
         </p:spPr>
         <p:txBody>
           <a:bodyPr lIns="0" tIns="0" rIns="0" bIns="0" anchor="t">
-            <a:normAutofit fontScale="67685" lnSpcReduction="10000"/>
+            <a:normAutofit fontScale="75185" lnSpcReduction="20000"/>
           </a:bodyPr>
           <a:lstStyle/>
           <a:p>
@@ -6156,7 +5967,7 @@
         <p:spPr>
           <a:xfrm>
             <a:off x="1752600" y="4876800"/>
-            <a:ext cx="3219450" cy="266700"/>
+            <a:ext cx="4453128" cy="285750"/>
           </a:xfrm>
           <a:prstGeom prst="rect">
             <a:avLst/>
@@ -6184,7 +5995,7 @@
               </a:defRPr>
             </a:pPr>
             <a:r>
-              <a:rPr sz="1575" b="1">
+              <a:rPr lang="en-US" sz="1575" b="1" dirty="0">
                 <a:solidFill>
                   <a:srgbClr val="000000"/>
                 </a:solidFill>
@@ -6192,8 +6003,16 @@
                 <a:ea typeface="Helvetica Neue"/>
                 <a:cs typeface="Helvetica Neue"/>
               </a:rPr>
-              <a:t>Demonstrate the system</a:t>
-            </a:r>
+              <a:t>Adjust system based on calibration results</a:t>
+            </a:r>
+            <a:endParaRPr sz="1575" b="1" dirty="0">
+              <a:solidFill>
+                <a:srgbClr val="000000"/>
+              </a:solidFill>
+              <a:latin typeface="Helvetica Neue"/>
+              <a:ea typeface="Helvetica Neue"/>
+              <a:cs typeface="Helvetica Neue"/>
+            </a:endParaRPr>
           </a:p>
         </p:txBody>
       </p:sp>
@@ -6285,7 +6104,7 @@
         </p:spPr>
         <p:txBody>
           <a:bodyPr lIns="0" tIns="0" rIns="0" bIns="0" anchor="t">
-            <a:normAutofit fontScale="90833" lnSpcReduction="10000"/>
+            <a:normAutofit fontScale="98333"/>
           </a:bodyPr>
           <a:lstStyle/>
           <a:p>
@@ -6299,17 +6118,14 @@
                 <a:cs typeface="Helvetica Neue"/>
               </a:defRPr>
             </a:pPr>
-            <a:r>
-              <a:rPr sz="1575" b="1">
-                <a:solidFill>
-                  <a:srgbClr val="000000"/>
-                </a:solidFill>
-                <a:latin typeface="Helvetica Neue"/>
-                <a:ea typeface="Helvetica Neue"/>
-                <a:cs typeface="Helvetica Neue"/>
-              </a:rPr>
-              <a:t>Current status: the design has defined ownership, safe states, and tests. The remaining work is to measure and verify those decisions on the installed machine.</a:t>
-            </a:r>
+            <a:endParaRPr sz="1575" b="1" dirty="0">
+              <a:solidFill>
+                <a:srgbClr val="000000"/>
+              </a:solidFill>
+              <a:latin typeface="Helvetica Neue"/>
+              <a:ea typeface="Helvetica Neue"/>
+              <a:cs typeface="Helvetica Neue"/>
+            </a:endParaRPr>
           </a:p>
         </p:txBody>
       </p:sp>
@@ -6411,72 +6227,6 @@
       </p:sp>
       <p:sp>
         <p:nvSpPr>
-          <p:cNvPr id="2" name="Rectangle 1">
-            <a:extLst>
-              <a:ext uri="{FF2B5EF4-FFF2-40B4-BE49-F238E27FC236}">
-                <a16:creationId xmlns:a16="http://schemas.microsoft.com/office/drawing/2014/main" id="{991DDECE-ED75-4D68-B915-72CBDC91319D}"/>
-              </a:ext>
-            </a:extLst>
-          </p:cNvPr>
-          <p:cNvSpPr>
-            <a:spLocks noGrp="1"/>
-          </p:cNvSpPr>
-          <p:nvPr/>
-        </p:nvSpPr>
-        <p:spPr>
-          <a:xfrm>
-            <a:off x="400050" y="685800"/>
-            <a:ext cx="10668000" cy="590550"/>
-          </a:xfrm>
-          <a:prstGeom prst="rect">
-            <a:avLst/>
-          </a:prstGeom>
-          <a:noFill/>
-          <a:ln w="0">
-            <a:noFill/>
-            <a:prstDash val="solid"/>
-          </a:ln>
-        </p:spPr>
-        <p:txBody>
-          <a:bodyPr lIns="0" tIns="0" rIns="0" bIns="0" anchor="t">
-            <a:normAutofit/>
-          </a:bodyPr>
-          <a:lstStyle/>
-          <a:p>
-            <a:pPr algn="l">
-              <a:defRPr sz="2700" b="1">
-                <a:solidFill>
-                  <a:srgbClr val="000000"/>
-                </a:solidFill>
-                <a:latin typeface="Helvetica Neue"/>
-                <a:ea typeface="Helvetica Neue"/>
-                <a:cs typeface="Helvetica Neue"/>
-              </a:defRPr>
-            </a:pPr>
-            <a:r>
-              <a:rPr lang="en-US" sz="2700" b="1" dirty="0">
-                <a:solidFill>
-                  <a:srgbClr val="000000"/>
-                </a:solidFill>
-                <a:latin typeface="Helvetica Neue"/>
-                <a:ea typeface="Helvetica Neue"/>
-                <a:cs typeface="Helvetica Neue"/>
-              </a:rPr>
-              <a:t>Mechanical portion built, wiring in progress</a:t>
-            </a:r>
-            <a:endParaRPr sz="2700" b="1" dirty="0">
-              <a:solidFill>
-                <a:srgbClr val="000000"/>
-              </a:solidFill>
-              <a:latin typeface="Helvetica Neue"/>
-              <a:ea typeface="Helvetica Neue"/>
-              <a:cs typeface="Helvetica Neue"/>
-            </a:endParaRPr>
-          </a:p>
-        </p:txBody>
-      </p:sp>
-      <p:sp>
-        <p:nvSpPr>
           <p:cNvPr id="3" name="Rectangle 2">
             <a:extLst>
               <a:ext uri="{FF2B5EF4-FFF2-40B4-BE49-F238E27FC236}">
@@ -6647,7 +6397,7 @@
         </p:nvSpPr>
         <p:spPr>
           <a:xfrm>
-            <a:off x="400050" y="1809750"/>
+            <a:off x="400050" y="1343025"/>
             <a:ext cx="3333750" cy="3143250"/>
           </a:xfrm>
           <a:prstGeom prst="roundRect">
@@ -6689,7 +6439,7 @@
         </p:nvSpPr>
         <p:spPr>
           <a:xfrm>
-            <a:off x="628650" y="2095500"/>
+            <a:off x="628650" y="1628775"/>
             <a:ext cx="2857500" cy="228600"/>
           </a:xfrm>
           <a:prstGeom prst="rect">
@@ -6747,7 +6497,7 @@
         </p:nvSpPr>
         <p:spPr>
           <a:xfrm>
-            <a:off x="628650" y="2552700"/>
+            <a:off x="628650" y="2085975"/>
             <a:ext cx="2857500" cy="514350"/>
           </a:xfrm>
           <a:prstGeom prst="rect">
@@ -6805,7 +6555,7 @@
         </p:nvSpPr>
         <p:spPr>
           <a:xfrm>
-            <a:off x="628650" y="3333750"/>
+            <a:off x="628650" y="2867025"/>
             <a:ext cx="2857500" cy="1200150"/>
           </a:xfrm>
           <a:prstGeom prst="rect">
@@ -6844,7 +6594,7 @@
                 <a:ea typeface="Helvetica Neue"/>
                 <a:cs typeface="Helvetica Neue"/>
               </a:rPr>
-              <a:t>Guided pen carriage</a:t>
+              <a:t>N20 lead-screw actuator</a:t>
             </a:r>
             <a:endParaRPr lang="en-US" sz="1425" dirty="0">
               <a:solidFill>
@@ -6869,6 +6619,17 @@
               </a:defRPr>
             </a:pPr>
             <a:r>
+              <a:rPr lang="en-US" sz="1425" b="0" dirty="0">
+                <a:solidFill>
+                  <a:srgbClr val="59616B"/>
+                </a:solidFill>
+                <a:latin typeface="Helvetica Neue"/>
+                <a:ea typeface="Helvetica Neue"/>
+                <a:cs typeface="Helvetica Neue"/>
+              </a:rPr>
+              <a:t>S</a:t>
+            </a:r>
+            <a:r>
               <a:rPr sz="1425" b="0" dirty="0">
                 <a:solidFill>
                   <a:srgbClr val="59616B"/>
@@ -6877,7 +6638,18 @@
                 <a:ea typeface="Helvetica Neue"/>
                 <a:cs typeface="Helvetica Neue"/>
               </a:rPr>
-              <a:t>N20 lead-screw actuator</a:t>
+              <a:t>pring </a:t>
+            </a:r>
+            <a:r>
+              <a:rPr lang="en-US" sz="1425" b="0" dirty="0">
+                <a:solidFill>
+                  <a:srgbClr val="59616B"/>
+                </a:solidFill>
+                <a:latin typeface="Helvetica Neue"/>
+                <a:ea typeface="Helvetica Neue"/>
+                <a:cs typeface="Helvetica Neue"/>
+              </a:rPr>
+              <a:t>preload</a:t>
             </a:r>
             <a:endParaRPr lang="en-US" sz="1425" dirty="0">
               <a:solidFill>
@@ -6910,7 +6682,7 @@
                 <a:ea typeface="Helvetica Neue"/>
                 <a:cs typeface="Helvetica Neue"/>
               </a:rPr>
-              <a:t>S</a:t>
+              <a:t>L</a:t>
             </a:r>
             <a:r>
               <a:rPr sz="1425" b="0" dirty="0">
@@ -6921,7 +6693,346 @@
                 <a:ea typeface="Helvetica Neue"/>
                 <a:cs typeface="Helvetica Neue"/>
               </a:rPr>
-              <a:t>pring compliance</a:t>
+              <a:t>oad</a:t>
+            </a:r>
+            <a:r>
+              <a:rPr lang="en-US" sz="1425" dirty="0">
+                <a:solidFill>
+                  <a:srgbClr val="59616B"/>
+                </a:solidFill>
+                <a:latin typeface="Helvetica Neue"/>
+                <a:ea typeface="Helvetica Neue"/>
+                <a:cs typeface="Helvetica Neue"/>
+              </a:rPr>
+              <a:t>-</a:t>
+            </a:r>
+            <a:r>
+              <a:rPr sz="1425" b="0" dirty="0">
+                <a:solidFill>
+                  <a:srgbClr val="59616B"/>
+                </a:solidFill>
+                <a:latin typeface="Helvetica Neue"/>
+                <a:ea typeface="Helvetica Neue"/>
+                <a:cs typeface="Helvetica Neue"/>
+              </a:rPr>
+              <a:t>cell force path</a:t>
+            </a:r>
+            <a:endParaRPr lang="en-US" sz="1425" b="0" dirty="0">
+              <a:solidFill>
+                <a:srgbClr val="59616B"/>
+              </a:solidFill>
+              <a:latin typeface="Helvetica Neue"/>
+              <a:ea typeface="Helvetica Neue"/>
+              <a:cs typeface="Helvetica Neue"/>
+            </a:endParaRPr>
+          </a:p>
+          <a:p>
+            <a:pPr marL="285750" indent="-285750" algn="l">
+              <a:buFont typeface="Arial" panose="020B0604020202020204" pitchFamily="34" charset="0"/>
+              <a:buChar char="•"/>
+              <a:defRPr sz="1425" b="0">
+                <a:solidFill>
+                  <a:srgbClr val="59616B"/>
+                </a:solidFill>
+                <a:latin typeface="Helvetica Neue"/>
+                <a:ea typeface="Helvetica Neue"/>
+                <a:cs typeface="Helvetica Neue"/>
+              </a:defRPr>
+            </a:pPr>
+            <a:r>
+              <a:rPr lang="en-US" sz="1425" b="0" dirty="0">
+                <a:solidFill>
+                  <a:srgbClr val="59616B"/>
+                </a:solidFill>
+                <a:latin typeface="Helvetica Neue"/>
+                <a:ea typeface="Helvetica Neue"/>
+                <a:cs typeface="Helvetica Neue"/>
+              </a:rPr>
+              <a:t>Finalized X Y Theta frame</a:t>
+            </a:r>
+          </a:p>
+          <a:p>
+            <a:pPr marL="285750" indent="-285750" algn="l">
+              <a:buFont typeface="Arial" panose="020B0604020202020204" pitchFamily="34" charset="0"/>
+              <a:buChar char="•"/>
+              <a:defRPr sz="1425" b="0">
+                <a:solidFill>
+                  <a:srgbClr val="59616B"/>
+                </a:solidFill>
+                <a:latin typeface="Helvetica Neue"/>
+                <a:ea typeface="Helvetica Neue"/>
+                <a:cs typeface="Helvetica Neue"/>
+              </a:defRPr>
+            </a:pPr>
+            <a:r>
+              <a:rPr lang="en-US" sz="1425" dirty="0">
+                <a:solidFill>
+                  <a:srgbClr val="59616B"/>
+                </a:solidFill>
+                <a:latin typeface="Helvetica Neue"/>
+                <a:ea typeface="Helvetica Neue"/>
+                <a:cs typeface="Helvetica Neue"/>
+              </a:rPr>
+              <a:t>18” Diameter 720 tooth bed</a:t>
+            </a:r>
+            <a:r>
+              <a:rPr sz="1425" b="0" dirty="0">
+                <a:solidFill>
+                  <a:srgbClr val="59616B"/>
+                </a:solidFill>
+                <a:latin typeface="Helvetica Neue"/>
+                <a:ea typeface="Helvetica Neue"/>
+                <a:cs typeface="Helvetica Neue"/>
+              </a:rPr>
+              <a:t>.</a:t>
+            </a:r>
+          </a:p>
+        </p:txBody>
+      </p:sp>
+      <p:sp>
+        <p:nvSpPr>
+          <p:cNvPr id="10" name="Rectangle: Rounded Corners 9">
+            <a:extLst>
+              <a:ext uri="{FF2B5EF4-FFF2-40B4-BE49-F238E27FC236}">
+                <a16:creationId xmlns:a16="http://schemas.microsoft.com/office/drawing/2014/main" id="{158BD53D-1252-45CC-B3BC-A547ACBF2210}"/>
+              </a:ext>
+            </a:extLst>
+          </p:cNvPr>
+          <p:cNvSpPr>
+            <a:spLocks noGrp="1"/>
+          </p:cNvSpPr>
+          <p:nvPr/>
+        </p:nvSpPr>
+        <p:spPr>
+          <a:xfrm>
+            <a:off x="4133850" y="1343025"/>
+            <a:ext cx="3333750" cy="3143250"/>
+          </a:xfrm>
+          <a:prstGeom prst="roundRect">
+            <a:avLst>
+              <a:gd name="adj" fmla="val 2424"/>
+            </a:avLst>
+          </a:prstGeom>
+          <a:solidFill>
+            <a:srgbClr val="EDEDED"/>
+          </a:solidFill>
+          <a:ln w="9525">
+            <a:solidFill>
+              <a:srgbClr val="B8BCC4"/>
+            </a:solidFill>
+            <a:prstDash val="solid"/>
+          </a:ln>
+        </p:spPr>
+        <p:txBody>
+          <a:bodyPr/>
+          <a:lstStyle/>
+          <a:p>
+            <a:endParaRPr lang="en-US" dirty="0"/>
+          </a:p>
+        </p:txBody>
+      </p:sp>
+      <p:sp>
+        <p:nvSpPr>
+          <p:cNvPr id="11" name="Rectangle 10">
+            <a:extLst>
+              <a:ext uri="{FF2B5EF4-FFF2-40B4-BE49-F238E27FC236}">
+                <a16:creationId xmlns:a16="http://schemas.microsoft.com/office/drawing/2014/main" id="{A6A0FED7-933E-4FC8-8769-A68A4B75DF46}"/>
+              </a:ext>
+            </a:extLst>
+          </p:cNvPr>
+          <p:cNvSpPr>
+            <a:spLocks noGrp="1"/>
+          </p:cNvSpPr>
+          <p:nvPr/>
+        </p:nvSpPr>
+        <p:spPr>
+          <a:xfrm>
+            <a:off x="4362450" y="1628775"/>
+            <a:ext cx="2857500" cy="228600"/>
+          </a:xfrm>
+          <a:prstGeom prst="rect">
+            <a:avLst/>
+          </a:prstGeom>
+          <a:noFill/>
+          <a:ln w="0">
+            <a:noFill/>
+            <a:prstDash val="solid"/>
+          </a:ln>
+        </p:spPr>
+        <p:txBody>
+          <a:bodyPr lIns="0" tIns="0" rIns="0" bIns="0" anchor="t">
+            <a:normAutofit/>
+          </a:bodyPr>
+          <a:lstStyle/>
+          <a:p>
+            <a:pPr algn="l">
+              <a:defRPr sz="1050" b="1">
+                <a:solidFill>
+                  <a:srgbClr val="3D8DFF"/>
+                </a:solidFill>
+                <a:latin typeface="Helvetica Neue"/>
+                <a:ea typeface="Helvetica Neue"/>
+                <a:cs typeface="Helvetica Neue"/>
+              </a:defRPr>
+            </a:pPr>
+            <a:r>
+              <a:rPr sz="1050" b="1">
+                <a:solidFill>
+                  <a:srgbClr val="3D8DFF"/>
+                </a:solidFill>
+                <a:latin typeface="Helvetica Neue"/>
+                <a:ea typeface="Helvetica Neue"/>
+                <a:cs typeface="Helvetica Neue"/>
+              </a:rPr>
+              <a:t>CONTROL SPLIT</a:t>
+            </a:r>
+          </a:p>
+        </p:txBody>
+      </p:sp>
+      <p:sp>
+        <p:nvSpPr>
+          <p:cNvPr id="12" name="Rectangle 11">
+            <a:extLst>
+              <a:ext uri="{FF2B5EF4-FFF2-40B4-BE49-F238E27FC236}">
+                <a16:creationId xmlns:a16="http://schemas.microsoft.com/office/drawing/2014/main" id="{CF232C66-4EA1-4BAF-AD75-5FFC5C2E698D}"/>
+              </a:ext>
+            </a:extLst>
+          </p:cNvPr>
+          <p:cNvSpPr>
+            <a:spLocks noGrp="1"/>
+          </p:cNvSpPr>
+          <p:nvPr/>
+        </p:nvSpPr>
+        <p:spPr>
+          <a:xfrm>
+            <a:off x="4362450" y="2085975"/>
+            <a:ext cx="2857500" cy="514350"/>
+          </a:xfrm>
+          <a:prstGeom prst="rect">
+            <a:avLst/>
+          </a:prstGeom>
+          <a:noFill/>
+          <a:ln w="0">
+            <a:noFill/>
+            <a:prstDash val="solid"/>
+          </a:ln>
+        </p:spPr>
+        <p:txBody>
+          <a:bodyPr lIns="0" tIns="0" rIns="0" bIns="0" anchor="t">
+            <a:normAutofit/>
+          </a:bodyPr>
+          <a:lstStyle/>
+          <a:p>
+            <a:pPr algn="l">
+              <a:defRPr sz="2025" b="1">
+                <a:solidFill>
+                  <a:srgbClr val="000000"/>
+                </a:solidFill>
+                <a:latin typeface="Helvetica Neue"/>
+                <a:ea typeface="Helvetica Neue"/>
+                <a:cs typeface="Helvetica Neue"/>
+              </a:defRPr>
+            </a:pPr>
+            <a:r>
+              <a:rPr lang="en-US" sz="2025" b="1" dirty="0">
+                <a:solidFill>
+                  <a:srgbClr val="000000"/>
+                </a:solidFill>
+                <a:latin typeface="Helvetica Neue"/>
+                <a:ea typeface="Helvetica Neue"/>
+                <a:cs typeface="Helvetica Neue"/>
+              </a:rPr>
+              <a:t>Ownership definitions</a:t>
+            </a:r>
+            <a:endParaRPr sz="2025" b="1" dirty="0">
+              <a:solidFill>
+                <a:srgbClr val="000000"/>
+              </a:solidFill>
+              <a:latin typeface="Helvetica Neue"/>
+              <a:ea typeface="Helvetica Neue"/>
+              <a:cs typeface="Helvetica Neue"/>
+            </a:endParaRPr>
+          </a:p>
+        </p:txBody>
+      </p:sp>
+      <p:sp>
+        <p:nvSpPr>
+          <p:cNvPr id="13" name="Rectangle 12">
+            <a:extLst>
+              <a:ext uri="{FF2B5EF4-FFF2-40B4-BE49-F238E27FC236}">
+                <a16:creationId xmlns:a16="http://schemas.microsoft.com/office/drawing/2014/main" id="{FC058906-5EC3-40B6-9147-95130B863FF4}"/>
+              </a:ext>
+            </a:extLst>
+          </p:cNvPr>
+          <p:cNvSpPr>
+            <a:spLocks noGrp="1"/>
+          </p:cNvSpPr>
+          <p:nvPr/>
+        </p:nvSpPr>
+        <p:spPr>
+          <a:xfrm>
+            <a:off x="4362450" y="2867025"/>
+            <a:ext cx="2857500" cy="1200150"/>
+          </a:xfrm>
+          <a:prstGeom prst="rect">
+            <a:avLst/>
+          </a:prstGeom>
+          <a:noFill/>
+          <a:ln w="0">
+            <a:noFill/>
+            <a:prstDash val="solid"/>
+          </a:ln>
+        </p:spPr>
+        <p:txBody>
+          <a:bodyPr lIns="0" tIns="0" rIns="0" bIns="0" anchor="t">
+            <a:normAutofit fontScale="62500" lnSpcReduction="20000"/>
+          </a:bodyPr>
+          <a:lstStyle/>
+          <a:p>
+            <a:pPr marL="285750" indent="-285750" algn="l">
+              <a:buFont typeface="Arial" panose="020B0604020202020204" pitchFamily="34" charset="0"/>
+              <a:buChar char="•"/>
+              <a:defRPr sz="1425" b="0">
+                <a:solidFill>
+                  <a:srgbClr val="59616B"/>
+                </a:solidFill>
+                <a:latin typeface="Helvetica Neue"/>
+                <a:ea typeface="Helvetica Neue"/>
+                <a:cs typeface="Helvetica Neue"/>
+              </a:defRPr>
+            </a:pPr>
+            <a:r>
+              <a:rPr lang="en-US" sz="1425" b="0" dirty="0">
+                <a:solidFill>
+                  <a:srgbClr val="59616B"/>
+                </a:solidFill>
+                <a:latin typeface="Helvetica Neue"/>
+                <a:ea typeface="Helvetica Neue"/>
+                <a:cs typeface="Helvetica Neue"/>
+              </a:rPr>
+              <a:t>Converter app converts .</a:t>
+            </a:r>
+            <a:r>
+              <a:rPr lang="en-US" sz="1425" dirty="0">
+                <a:solidFill>
+                  <a:srgbClr val="59616B"/>
+                </a:solidFill>
+                <a:latin typeface="Helvetica Neue"/>
+                <a:ea typeface="Helvetica Neue"/>
+                <a:cs typeface="Helvetica Neue"/>
+              </a:rPr>
+              <a:t>SVG files to .</a:t>
+            </a:r>
+            <a:r>
+              <a:rPr lang="en-US" sz="1425" dirty="0" err="1">
+                <a:solidFill>
+                  <a:srgbClr val="59616B"/>
+                </a:solidFill>
+                <a:latin typeface="Helvetica Neue"/>
+                <a:ea typeface="Helvetica Neue"/>
+                <a:cs typeface="Helvetica Neue"/>
+              </a:rPr>
+              <a:t>gcode</a:t>
             </a:r>
             <a:endParaRPr lang="en-US" sz="1425" dirty="0">
               <a:solidFill>
@@ -6933,367 +7044,7 @@
             </a:endParaRPr>
           </a:p>
           <a:p>
-            <a:pPr marL="285750" indent="-285750" algn="l">
-              <a:buFont typeface="Arial" panose="020B0604020202020204" pitchFamily="34" charset="0"/>
-              <a:buChar char="•"/>
-              <a:defRPr sz="1425" b="0">
-                <a:solidFill>
-                  <a:srgbClr val="59616B"/>
-                </a:solidFill>
-                <a:latin typeface="Helvetica Neue"/>
-                <a:ea typeface="Helvetica Neue"/>
-                <a:cs typeface="Helvetica Neue"/>
-              </a:defRPr>
-            </a:pPr>
-            <a:r>
-              <a:rPr lang="en-US" sz="1425" b="0" dirty="0">
-                <a:solidFill>
-                  <a:srgbClr val="59616B"/>
-                </a:solidFill>
-                <a:latin typeface="Helvetica Neue"/>
-                <a:ea typeface="Helvetica Neue"/>
-                <a:cs typeface="Helvetica Neue"/>
-              </a:rPr>
-              <a:t>L</a:t>
-            </a:r>
-            <a:r>
-              <a:rPr sz="1425" b="0" dirty="0">
-                <a:solidFill>
-                  <a:srgbClr val="59616B"/>
-                </a:solidFill>
-                <a:latin typeface="Helvetica Neue"/>
-                <a:ea typeface="Helvetica Neue"/>
-                <a:cs typeface="Helvetica Neue"/>
-              </a:rPr>
-              <a:t>oad</a:t>
-            </a:r>
-            <a:r>
-              <a:rPr lang="en-US" sz="1425" dirty="0">
-                <a:solidFill>
-                  <a:srgbClr val="59616B"/>
-                </a:solidFill>
-                <a:latin typeface="Helvetica Neue"/>
-                <a:ea typeface="Helvetica Neue"/>
-                <a:cs typeface="Helvetica Neue"/>
-              </a:rPr>
-              <a:t>-</a:t>
-            </a:r>
-            <a:r>
-              <a:rPr sz="1425" b="0" dirty="0">
-                <a:solidFill>
-                  <a:srgbClr val="59616B"/>
-                </a:solidFill>
-                <a:latin typeface="Helvetica Neue"/>
-                <a:ea typeface="Helvetica Neue"/>
-                <a:cs typeface="Helvetica Neue"/>
-              </a:rPr>
-              <a:t>cell force path</a:t>
-            </a:r>
-            <a:endParaRPr lang="en-US" sz="1425" b="0" dirty="0">
-              <a:solidFill>
-                <a:srgbClr val="59616B"/>
-              </a:solidFill>
-              <a:latin typeface="Helvetica Neue"/>
-              <a:ea typeface="Helvetica Neue"/>
-              <a:cs typeface="Helvetica Neue"/>
-            </a:endParaRPr>
-          </a:p>
-          <a:p>
-            <a:pPr marL="285750" indent="-285750" algn="l">
-              <a:buFont typeface="Arial" panose="020B0604020202020204" pitchFamily="34" charset="0"/>
-              <a:buChar char="•"/>
-              <a:defRPr sz="1425" b="0">
-                <a:solidFill>
-                  <a:srgbClr val="59616B"/>
-                </a:solidFill>
-                <a:latin typeface="Helvetica Neue"/>
-                <a:ea typeface="Helvetica Neue"/>
-                <a:cs typeface="Helvetica Neue"/>
-              </a:defRPr>
-            </a:pPr>
-            <a:r>
-              <a:rPr lang="en-US" sz="1425" dirty="0">
-                <a:solidFill>
-                  <a:srgbClr val="59616B"/>
-                </a:solidFill>
-                <a:latin typeface="Helvetica Neue"/>
-                <a:ea typeface="Helvetica Neue"/>
-                <a:cs typeface="Helvetica Neue"/>
-              </a:rPr>
-              <a:t>P</a:t>
-            </a:r>
-            <a:r>
-              <a:rPr sz="1425" b="0" dirty="0">
-                <a:solidFill>
-                  <a:srgbClr val="59616B"/>
-                </a:solidFill>
-                <a:latin typeface="Helvetica Neue"/>
-                <a:ea typeface="Helvetica Neue"/>
-                <a:cs typeface="Helvetica Neue"/>
-              </a:rPr>
-              <a:t>rinted mounting concepts.</a:t>
-            </a:r>
-          </a:p>
-        </p:txBody>
-      </p:sp>
-      <p:sp>
-        <p:nvSpPr>
-          <p:cNvPr id="10" name="Rectangle: Rounded Corners 9">
-            <a:extLst>
-              <a:ext uri="{FF2B5EF4-FFF2-40B4-BE49-F238E27FC236}">
-                <a16:creationId xmlns:a16="http://schemas.microsoft.com/office/drawing/2014/main" id="{158BD53D-1252-45CC-B3BC-A547ACBF2210}"/>
-              </a:ext>
-            </a:extLst>
-          </p:cNvPr>
-          <p:cNvSpPr>
-            <a:spLocks noGrp="1"/>
-          </p:cNvSpPr>
-          <p:nvPr/>
-        </p:nvSpPr>
-        <p:spPr>
-          <a:xfrm>
-            <a:off x="4133850" y="1809750"/>
-            <a:ext cx="3333750" cy="3143250"/>
-          </a:xfrm>
-          <a:prstGeom prst="roundRect">
-            <a:avLst>
-              <a:gd name="adj" fmla="val 2424"/>
-            </a:avLst>
-          </a:prstGeom>
-          <a:solidFill>
-            <a:srgbClr val="EDEDED"/>
-          </a:solidFill>
-          <a:ln w="9525">
-            <a:solidFill>
-              <a:srgbClr val="B8BCC4"/>
-            </a:solidFill>
-            <a:prstDash val="solid"/>
-          </a:ln>
-        </p:spPr>
-        <p:txBody>
-          <a:bodyPr/>
-          <a:lstStyle/>
-          <a:p>
-            <a:endParaRPr lang="en-US"/>
-          </a:p>
-        </p:txBody>
-      </p:sp>
-      <p:sp>
-        <p:nvSpPr>
-          <p:cNvPr id="11" name="Rectangle 10">
-            <a:extLst>
-              <a:ext uri="{FF2B5EF4-FFF2-40B4-BE49-F238E27FC236}">
-                <a16:creationId xmlns:a16="http://schemas.microsoft.com/office/drawing/2014/main" id="{A6A0FED7-933E-4FC8-8769-A68A4B75DF46}"/>
-              </a:ext>
-            </a:extLst>
-          </p:cNvPr>
-          <p:cNvSpPr>
-            <a:spLocks noGrp="1"/>
-          </p:cNvSpPr>
-          <p:nvPr/>
-        </p:nvSpPr>
-        <p:spPr>
-          <a:xfrm>
-            <a:off x="4362450" y="2095500"/>
-            <a:ext cx="2857500" cy="228600"/>
-          </a:xfrm>
-          <a:prstGeom prst="rect">
-            <a:avLst/>
-          </a:prstGeom>
-          <a:noFill/>
-          <a:ln w="0">
-            <a:noFill/>
-            <a:prstDash val="solid"/>
-          </a:ln>
-        </p:spPr>
-        <p:txBody>
-          <a:bodyPr lIns="0" tIns="0" rIns="0" bIns="0" anchor="t">
-            <a:normAutofit/>
-          </a:bodyPr>
-          <a:lstStyle/>
-          <a:p>
             <a:pPr algn="l">
-              <a:defRPr sz="1050" b="1">
-                <a:solidFill>
-                  <a:srgbClr val="3D8DFF"/>
-                </a:solidFill>
-                <a:latin typeface="Helvetica Neue"/>
-                <a:ea typeface="Helvetica Neue"/>
-                <a:cs typeface="Helvetica Neue"/>
-              </a:defRPr>
-            </a:pPr>
-            <a:r>
-              <a:rPr sz="1050" b="1">
-                <a:solidFill>
-                  <a:srgbClr val="3D8DFF"/>
-                </a:solidFill>
-                <a:latin typeface="Helvetica Neue"/>
-                <a:ea typeface="Helvetica Neue"/>
-                <a:cs typeface="Helvetica Neue"/>
-              </a:rPr>
-              <a:t>CONTROL SPLIT</a:t>
-            </a:r>
-          </a:p>
-        </p:txBody>
-      </p:sp>
-      <p:sp>
-        <p:nvSpPr>
-          <p:cNvPr id="12" name="Rectangle 11">
-            <a:extLst>
-              <a:ext uri="{FF2B5EF4-FFF2-40B4-BE49-F238E27FC236}">
-                <a16:creationId xmlns:a16="http://schemas.microsoft.com/office/drawing/2014/main" id="{CF232C66-4EA1-4BAF-AD75-5FFC5C2E698D}"/>
-              </a:ext>
-            </a:extLst>
-          </p:cNvPr>
-          <p:cNvSpPr>
-            <a:spLocks noGrp="1"/>
-          </p:cNvSpPr>
-          <p:nvPr/>
-        </p:nvSpPr>
-        <p:spPr>
-          <a:xfrm>
-            <a:off x="4362450" y="2552700"/>
-            <a:ext cx="2857500" cy="514350"/>
-          </a:xfrm>
-          <a:prstGeom prst="rect">
-            <a:avLst/>
-          </a:prstGeom>
-          <a:noFill/>
-          <a:ln w="0">
-            <a:noFill/>
-            <a:prstDash val="solid"/>
-          </a:ln>
-        </p:spPr>
-        <p:txBody>
-          <a:bodyPr lIns="0" tIns="0" rIns="0" bIns="0" anchor="t">
-            <a:normAutofit/>
-          </a:bodyPr>
-          <a:lstStyle/>
-          <a:p>
-            <a:pPr algn="l">
-              <a:defRPr sz="2025" b="1">
-                <a:solidFill>
-                  <a:srgbClr val="000000"/>
-                </a:solidFill>
-                <a:latin typeface="Helvetica Neue"/>
-                <a:ea typeface="Helvetica Neue"/>
-                <a:cs typeface="Helvetica Neue"/>
-              </a:defRPr>
-            </a:pPr>
-            <a:r>
-              <a:rPr lang="en-US" sz="2025" b="1" dirty="0">
-                <a:solidFill>
-                  <a:srgbClr val="000000"/>
-                </a:solidFill>
-                <a:latin typeface="Helvetica Neue"/>
-                <a:ea typeface="Helvetica Neue"/>
-                <a:cs typeface="Helvetica Neue"/>
-              </a:rPr>
-              <a:t>Ownership definitions</a:t>
-            </a:r>
-            <a:endParaRPr sz="2025" b="1" dirty="0">
-              <a:solidFill>
-                <a:srgbClr val="000000"/>
-              </a:solidFill>
-              <a:latin typeface="Helvetica Neue"/>
-              <a:ea typeface="Helvetica Neue"/>
-              <a:cs typeface="Helvetica Neue"/>
-            </a:endParaRPr>
-          </a:p>
-        </p:txBody>
-      </p:sp>
-      <p:sp>
-        <p:nvSpPr>
-          <p:cNvPr id="13" name="Rectangle 12">
-            <a:extLst>
-              <a:ext uri="{FF2B5EF4-FFF2-40B4-BE49-F238E27FC236}">
-                <a16:creationId xmlns:a16="http://schemas.microsoft.com/office/drawing/2014/main" id="{FC058906-5EC3-40B6-9147-95130B863FF4}"/>
-              </a:ext>
-            </a:extLst>
-          </p:cNvPr>
-          <p:cNvSpPr>
-            <a:spLocks noGrp="1"/>
-          </p:cNvSpPr>
-          <p:nvPr/>
-        </p:nvSpPr>
-        <p:spPr>
-          <a:xfrm>
-            <a:off x="4362450" y="3333750"/>
-            <a:ext cx="2857500" cy="1200150"/>
-          </a:xfrm>
-          <a:prstGeom prst="rect">
-            <a:avLst/>
-          </a:prstGeom>
-          <a:noFill/>
-          <a:ln w="0">
-            <a:noFill/>
-            <a:prstDash val="solid"/>
-          </a:ln>
-        </p:spPr>
-        <p:txBody>
-          <a:bodyPr lIns="0" tIns="0" rIns="0" bIns="0" anchor="t">
-            <a:normAutofit lnSpcReduction="10000"/>
-          </a:bodyPr>
-          <a:lstStyle/>
-          <a:p>
-            <a:pPr marL="285750" indent="-285750" algn="l">
-              <a:buFont typeface="Arial" panose="020B0604020202020204" pitchFamily="34" charset="0"/>
-              <a:buChar char="•"/>
-              <a:defRPr sz="1425" b="0">
-                <a:solidFill>
-                  <a:srgbClr val="59616B"/>
-                </a:solidFill>
-                <a:latin typeface="Helvetica Neue"/>
-                <a:ea typeface="Helvetica Neue"/>
-                <a:cs typeface="Helvetica Neue"/>
-              </a:defRPr>
-            </a:pPr>
-            <a:r>
-              <a:rPr sz="1425" b="0" dirty="0">
-                <a:solidFill>
-                  <a:srgbClr val="59616B"/>
-                </a:solidFill>
-                <a:latin typeface="Helvetica Neue"/>
-                <a:ea typeface="Helvetica Neue"/>
-                <a:cs typeface="Helvetica Neue"/>
-              </a:rPr>
-              <a:t>RP23CNC owns X/Y/A motion </a:t>
-            </a:r>
-            <a:r>
-              <a:rPr lang="en-US" sz="1425" b="0" dirty="0">
-                <a:solidFill>
-                  <a:srgbClr val="59616B"/>
-                </a:solidFill>
-                <a:latin typeface="Helvetica Neue"/>
-                <a:ea typeface="Helvetica Neue"/>
-                <a:cs typeface="Helvetica Neue"/>
-              </a:rPr>
-              <a:t>orchestration</a:t>
-            </a:r>
-            <a:r>
-              <a:rPr sz="1425" b="0" dirty="0">
-                <a:solidFill>
-                  <a:srgbClr val="59616B"/>
-                </a:solidFill>
-                <a:latin typeface="Helvetica Neue"/>
-                <a:ea typeface="Helvetica Neue"/>
-                <a:cs typeface="Helvetica Neue"/>
-              </a:rPr>
-              <a:t>. </a:t>
-            </a:r>
-            <a:endParaRPr lang="en-US" sz="1425" b="0" dirty="0">
-              <a:solidFill>
-                <a:srgbClr val="59616B"/>
-              </a:solidFill>
-              <a:latin typeface="Helvetica Neue"/>
-              <a:ea typeface="Helvetica Neue"/>
-              <a:cs typeface="Helvetica Neue"/>
-            </a:endParaRPr>
-          </a:p>
-          <a:p>
-            <a:pPr marL="285750" indent="-285750" algn="l">
-              <a:buFont typeface="Arial" panose="020B0604020202020204" pitchFamily="34" charset="0"/>
-              <a:buChar char="•"/>
               <a:defRPr sz="1425" b="0">
                 <a:solidFill>
                   <a:srgbClr val="59616B"/>
@@ -7326,7 +7077,7 @@
               </a:defRPr>
             </a:pPr>
             <a:r>
-              <a:rPr sz="1425" b="0" dirty="0">
+              <a:rPr lang="en-US" sz="1425" b="0" dirty="0" err="1">
                 <a:solidFill>
                   <a:srgbClr val="59616B"/>
                 </a:solidFill>
@@ -7334,232 +7085,30 @@
                 <a:ea typeface="Helvetica Neue"/>
                 <a:cs typeface="Helvetica Neue"/>
               </a:rPr>
-              <a:t>Pro Micro owns N20 motion, force sensing and toolhead safety.</a:t>
-            </a:r>
-          </a:p>
-        </p:txBody>
-      </p:sp>
-      <p:sp>
-        <p:nvSpPr>
-          <p:cNvPr id="14" name="Rectangle: Rounded Corners 13">
-            <a:extLst>
-              <a:ext uri="{FF2B5EF4-FFF2-40B4-BE49-F238E27FC236}">
-                <a16:creationId xmlns:a16="http://schemas.microsoft.com/office/drawing/2014/main" id="{2BE86D09-958A-4C34-9887-4AE3AFA0D884}"/>
-              </a:ext>
-            </a:extLst>
-          </p:cNvPr>
-          <p:cNvSpPr>
-            <a:spLocks noGrp="1"/>
-          </p:cNvSpPr>
-          <p:nvPr/>
-        </p:nvSpPr>
-        <p:spPr>
-          <a:xfrm>
-            <a:off x="7858125" y="1809750"/>
-            <a:ext cx="3333750" cy="3143250"/>
-          </a:xfrm>
-          <a:prstGeom prst="roundRect">
-            <a:avLst>
-              <a:gd name="adj" fmla="val 2424"/>
-            </a:avLst>
-          </a:prstGeom>
-          <a:solidFill>
-            <a:srgbClr val="EDEDED"/>
-          </a:solidFill>
-          <a:ln w="9525">
-            <a:solidFill>
-              <a:srgbClr val="B8BCC4"/>
-            </a:solidFill>
-            <a:prstDash val="solid"/>
-          </a:ln>
-        </p:spPr>
-        <p:txBody>
-          <a:bodyPr/>
-          <a:lstStyle/>
-          <a:p>
-            <a:endParaRPr lang="en-US"/>
-          </a:p>
-        </p:txBody>
-      </p:sp>
-      <p:sp>
-        <p:nvSpPr>
-          <p:cNvPr id="15" name="Rectangle 14">
-            <a:extLst>
-              <a:ext uri="{FF2B5EF4-FFF2-40B4-BE49-F238E27FC236}">
-                <a16:creationId xmlns:a16="http://schemas.microsoft.com/office/drawing/2014/main" id="{0AA3BF94-CF09-4096-BF4A-D1253318DA33}"/>
-              </a:ext>
-            </a:extLst>
-          </p:cNvPr>
-          <p:cNvSpPr>
-            <a:spLocks noGrp="1"/>
-          </p:cNvSpPr>
-          <p:nvPr/>
-        </p:nvSpPr>
-        <p:spPr>
-          <a:xfrm>
-            <a:off x="8096250" y="2095500"/>
-            <a:ext cx="2857500" cy="228600"/>
-          </a:xfrm>
-          <a:prstGeom prst="rect">
-            <a:avLst/>
-          </a:prstGeom>
-          <a:noFill/>
-          <a:ln w="0">
-            <a:noFill/>
-            <a:prstDash val="solid"/>
-          </a:ln>
-        </p:spPr>
-        <p:txBody>
-          <a:bodyPr lIns="0" tIns="0" rIns="0" bIns="0" anchor="t">
-            <a:normAutofit/>
-          </a:bodyPr>
-          <a:lstStyle/>
-          <a:p>
-            <a:pPr algn="l">
-              <a:defRPr sz="1050" b="1">
-                <a:solidFill>
-                  <a:srgbClr val="3D8DFF"/>
-                </a:solidFill>
-                <a:latin typeface="Helvetica Neue"/>
-                <a:ea typeface="Helvetica Neue"/>
-                <a:cs typeface="Helvetica Neue"/>
-              </a:defRPr>
-            </a:pPr>
-            <a:r>
-              <a:rPr sz="1050" b="1">
-                <a:solidFill>
-                  <a:srgbClr val="3D8DFF"/>
-                </a:solidFill>
-                <a:latin typeface="Helvetica Neue"/>
-                <a:ea typeface="Helvetica Neue"/>
-                <a:cs typeface="Helvetica Neue"/>
-              </a:rPr>
-              <a:t>COMMISSIONING</a:t>
-            </a:r>
-          </a:p>
-        </p:txBody>
-      </p:sp>
-      <p:sp>
-        <p:nvSpPr>
-          <p:cNvPr id="16" name="Rectangle 15">
-            <a:extLst>
-              <a:ext uri="{FF2B5EF4-FFF2-40B4-BE49-F238E27FC236}">
-                <a16:creationId xmlns:a16="http://schemas.microsoft.com/office/drawing/2014/main" id="{8C971C80-8210-4EBA-8D2A-D5071436CE56}"/>
-              </a:ext>
-            </a:extLst>
-          </p:cNvPr>
-          <p:cNvSpPr>
-            <a:spLocks noGrp="1"/>
-          </p:cNvSpPr>
-          <p:nvPr/>
-        </p:nvSpPr>
-        <p:spPr>
-          <a:xfrm>
-            <a:off x="8096250" y="2552700"/>
-            <a:ext cx="2857500" cy="514350"/>
-          </a:xfrm>
-          <a:prstGeom prst="rect">
-            <a:avLst/>
-          </a:prstGeom>
-          <a:noFill/>
-          <a:ln w="0">
-            <a:noFill/>
-            <a:prstDash val="solid"/>
-          </a:ln>
-        </p:spPr>
-        <p:txBody>
-          <a:bodyPr lIns="0" tIns="0" rIns="0" bIns="0" anchor="t">
-            <a:normAutofit/>
-          </a:bodyPr>
-          <a:lstStyle/>
-          <a:p>
-            <a:pPr algn="l">
-              <a:defRPr sz="2025" b="1">
-                <a:solidFill>
-                  <a:srgbClr val="000000"/>
-                </a:solidFill>
-                <a:latin typeface="Helvetica Neue"/>
-                <a:ea typeface="Helvetica Neue"/>
-                <a:cs typeface="Helvetica Neue"/>
-              </a:defRPr>
-            </a:pPr>
-            <a:r>
-              <a:rPr sz="2025" b="1" dirty="0">
-                <a:solidFill>
-                  <a:srgbClr val="000000"/>
-                </a:solidFill>
-                <a:latin typeface="Helvetica Neue"/>
-                <a:ea typeface="Helvetica Neue"/>
-                <a:cs typeface="Helvetica Neue"/>
-              </a:rPr>
-              <a:t>Planne</a:t>
-            </a:r>
-            <a:r>
-              <a:rPr lang="en-US" sz="2025" b="1" dirty="0">
-                <a:solidFill>
-                  <a:srgbClr val="000000"/>
-                </a:solidFill>
-                <a:latin typeface="Helvetica Neue"/>
-                <a:ea typeface="Helvetica Neue"/>
-                <a:cs typeface="Helvetica Neue"/>
-              </a:rPr>
-              <a:t>d</a:t>
-            </a:r>
-            <a:endParaRPr sz="2025" b="1" dirty="0">
-              <a:solidFill>
-                <a:srgbClr val="000000"/>
-              </a:solidFill>
-              <a:latin typeface="Helvetica Neue"/>
-              <a:ea typeface="Helvetica Neue"/>
-              <a:cs typeface="Helvetica Neue"/>
-            </a:endParaRPr>
-          </a:p>
-        </p:txBody>
-      </p:sp>
-      <p:sp>
-        <p:nvSpPr>
-          <p:cNvPr id="17" name="Rectangle 16">
-            <a:extLst>
-              <a:ext uri="{FF2B5EF4-FFF2-40B4-BE49-F238E27FC236}">
-                <a16:creationId xmlns:a16="http://schemas.microsoft.com/office/drawing/2014/main" id="{5100F6AA-3FA8-4ED0-9A38-0B2378E343B6}"/>
-              </a:ext>
-            </a:extLst>
-          </p:cNvPr>
-          <p:cNvSpPr>
-            <a:spLocks noGrp="1"/>
-          </p:cNvSpPr>
-          <p:nvPr/>
-        </p:nvSpPr>
-        <p:spPr>
-          <a:xfrm>
-            <a:off x="8096250" y="3333750"/>
-            <a:ext cx="2857500" cy="1200150"/>
-          </a:xfrm>
-          <a:prstGeom prst="rect">
-            <a:avLst/>
-          </a:prstGeom>
-          <a:noFill/>
-          <a:ln w="0">
-            <a:noFill/>
-            <a:prstDash val="solid"/>
-          </a:ln>
-        </p:spPr>
-        <p:txBody>
-          <a:bodyPr lIns="0" tIns="0" rIns="0" bIns="0" anchor="t">
-            <a:normAutofit fontScale="92500" lnSpcReduction="20000"/>
-          </a:bodyPr>
-          <a:lstStyle/>
-          <a:p>
-            <a:pPr algn="l">
-              <a:defRPr sz="1425" b="0">
+              <a:t>iosender</a:t>
+            </a:r>
+            <a:r>
+              <a:rPr lang="en-US" sz="1425" b="0" dirty="0">
                 <a:solidFill>
                   <a:srgbClr val="59616B"/>
                 </a:solidFill>
                 <a:latin typeface="Helvetica Neue"/>
                 <a:ea typeface="Helvetica Neue"/>
                 <a:cs typeface="Helvetica Neue"/>
-              </a:defRPr>
-            </a:pPr>
+              </a:rPr>
+              <a:t> sends .</a:t>
+            </a:r>
+            <a:r>
+              <a:rPr lang="en-US" sz="1425" b="0" dirty="0" err="1">
+                <a:solidFill>
+                  <a:srgbClr val="59616B"/>
+                </a:solidFill>
+                <a:latin typeface="Helvetica Neue"/>
+                <a:ea typeface="Helvetica Neue"/>
+                <a:cs typeface="Helvetica Neue"/>
+              </a:rPr>
+              <a:t>gcode</a:t>
+            </a:r>
             <a:r>
               <a:rPr lang="en-US" sz="1425" b="0" dirty="0">
                 <a:solidFill>
@@ -7569,11 +7118,13 @@
                 <a:ea typeface="Helvetica Neue"/>
                 <a:cs typeface="Helvetica Neue"/>
               </a:rPr>
-              <a:t>Test definitions for:</a:t>
-            </a:r>
-          </a:p>
-          <a:p>
-            <a:pPr algn="l">
+              <a:t> to GRBLHAL OS on RP23CNC</a:t>
+            </a:r>
+          </a:p>
+          <a:p>
+            <a:pPr marL="285750" indent="-285750" algn="l">
+              <a:buFont typeface="Arial" panose="020B0604020202020204" pitchFamily="34" charset="0"/>
+              <a:buChar char="•"/>
               <a:defRPr sz="1425" b="0">
                 <a:solidFill>
                   <a:srgbClr val="59616B"/>
@@ -7606,6 +7157,448 @@
               </a:defRPr>
             </a:pPr>
             <a:r>
+              <a:rPr sz="1425" b="0" dirty="0">
+                <a:solidFill>
+                  <a:srgbClr val="59616B"/>
+                </a:solidFill>
+                <a:latin typeface="Helvetica Neue"/>
+                <a:ea typeface="Helvetica Neue"/>
+                <a:cs typeface="Helvetica Neue"/>
+              </a:rPr>
+              <a:t>RP23CNC owns X/Y/A</a:t>
+            </a:r>
+            <a:r>
+              <a:rPr lang="en-US" sz="1425" b="0" dirty="0">
+                <a:solidFill>
+                  <a:srgbClr val="59616B"/>
+                </a:solidFill>
+                <a:latin typeface="Helvetica Neue"/>
+                <a:ea typeface="Helvetica Neue"/>
+                <a:cs typeface="Helvetica Neue"/>
+              </a:rPr>
+              <a:t>, M3/M5</a:t>
+            </a:r>
+            <a:r>
+              <a:rPr sz="1425" b="0" dirty="0">
+                <a:solidFill>
+                  <a:srgbClr val="59616B"/>
+                </a:solidFill>
+                <a:latin typeface="Helvetica Neue"/>
+                <a:ea typeface="Helvetica Neue"/>
+                <a:cs typeface="Helvetica Neue"/>
+              </a:rPr>
+              <a:t> motion </a:t>
+            </a:r>
+            <a:r>
+              <a:rPr lang="en-US" sz="1425" b="0" dirty="0">
+                <a:solidFill>
+                  <a:srgbClr val="59616B"/>
+                </a:solidFill>
+                <a:latin typeface="Helvetica Neue"/>
+                <a:ea typeface="Helvetica Neue"/>
+                <a:cs typeface="Helvetica Neue"/>
+              </a:rPr>
+              <a:t>orchestration</a:t>
+            </a:r>
+            <a:r>
+              <a:rPr sz="1425" b="0" dirty="0">
+                <a:solidFill>
+                  <a:srgbClr val="59616B"/>
+                </a:solidFill>
+                <a:latin typeface="Helvetica Neue"/>
+                <a:ea typeface="Helvetica Neue"/>
+                <a:cs typeface="Helvetica Neue"/>
+              </a:rPr>
+              <a:t>. </a:t>
+            </a:r>
+            <a:endParaRPr lang="en-US" sz="1425" b="0" dirty="0">
+              <a:solidFill>
+                <a:srgbClr val="59616B"/>
+              </a:solidFill>
+              <a:latin typeface="Helvetica Neue"/>
+              <a:ea typeface="Helvetica Neue"/>
+              <a:cs typeface="Helvetica Neue"/>
+            </a:endParaRPr>
+          </a:p>
+          <a:p>
+            <a:pPr marL="285750" indent="-285750" algn="l">
+              <a:buFont typeface="Arial" panose="020B0604020202020204" pitchFamily="34" charset="0"/>
+              <a:buChar char="•"/>
+              <a:defRPr sz="1425" b="0">
+                <a:solidFill>
+                  <a:srgbClr val="59616B"/>
+                </a:solidFill>
+                <a:latin typeface="Helvetica Neue"/>
+                <a:ea typeface="Helvetica Neue"/>
+                <a:cs typeface="Helvetica Neue"/>
+              </a:defRPr>
+            </a:pPr>
+            <a:endParaRPr lang="en-US" sz="1425" b="0" dirty="0">
+              <a:solidFill>
+                <a:srgbClr val="59616B"/>
+              </a:solidFill>
+              <a:latin typeface="Helvetica Neue"/>
+              <a:ea typeface="Helvetica Neue"/>
+              <a:cs typeface="Helvetica Neue"/>
+            </a:endParaRPr>
+          </a:p>
+          <a:p>
+            <a:pPr marL="285750" indent="-285750" algn="l">
+              <a:buFont typeface="Arial" panose="020B0604020202020204" pitchFamily="34" charset="0"/>
+              <a:buChar char="•"/>
+              <a:defRPr sz="1425" b="0">
+                <a:solidFill>
+                  <a:srgbClr val="59616B"/>
+                </a:solidFill>
+                <a:latin typeface="Helvetica Neue"/>
+                <a:ea typeface="Helvetica Neue"/>
+                <a:cs typeface="Helvetica Neue"/>
+              </a:defRPr>
+            </a:pPr>
+            <a:r>
+              <a:rPr sz="1425" b="0" dirty="0">
+                <a:solidFill>
+                  <a:srgbClr val="59616B"/>
+                </a:solidFill>
+                <a:latin typeface="Helvetica Neue"/>
+                <a:ea typeface="Helvetica Neue"/>
+                <a:cs typeface="Helvetica Neue"/>
+              </a:rPr>
+              <a:t>Pro Micro owns </a:t>
+            </a:r>
+            <a:r>
+              <a:rPr lang="en-US" sz="1425" b="0" dirty="0">
+                <a:solidFill>
+                  <a:srgbClr val="59616B"/>
+                </a:solidFill>
+                <a:latin typeface="Helvetica Neue"/>
+                <a:ea typeface="Helvetica Neue"/>
+                <a:cs typeface="Helvetica Neue"/>
+              </a:rPr>
+              <a:t>control system(</a:t>
+            </a:r>
+            <a:r>
+              <a:rPr sz="1425" b="0" dirty="0">
+                <a:solidFill>
+                  <a:srgbClr val="59616B"/>
+                </a:solidFill>
+                <a:latin typeface="Helvetica Neue"/>
+                <a:ea typeface="Helvetica Neue"/>
+                <a:cs typeface="Helvetica Neue"/>
+              </a:rPr>
+              <a:t>N20 motion, force sensing</a:t>
+            </a:r>
+            <a:r>
+              <a:rPr lang="en-US" sz="1425" b="0" dirty="0">
+                <a:solidFill>
+                  <a:srgbClr val="59616B"/>
+                </a:solidFill>
+                <a:latin typeface="Helvetica Neue"/>
+                <a:ea typeface="Helvetica Neue"/>
+                <a:cs typeface="Helvetica Neue"/>
+              </a:rPr>
+              <a:t>)</a:t>
+            </a:r>
+            <a:r>
+              <a:rPr sz="1425" b="0" dirty="0">
+                <a:solidFill>
+                  <a:srgbClr val="59616B"/>
+                </a:solidFill>
+                <a:latin typeface="Helvetica Neue"/>
+                <a:ea typeface="Helvetica Neue"/>
+                <a:cs typeface="Helvetica Neue"/>
+              </a:rPr>
+              <a:t> and toolhead safety</a:t>
+            </a:r>
+            <a:r>
+              <a:rPr lang="en-US" sz="1425" b="0" dirty="0">
+                <a:solidFill>
+                  <a:srgbClr val="59616B"/>
+                </a:solidFill>
+                <a:latin typeface="Helvetica Neue"/>
+                <a:ea typeface="Helvetica Neue"/>
+                <a:cs typeface="Helvetica Neue"/>
+              </a:rPr>
+              <a:t>.</a:t>
+            </a:r>
+            <a:endParaRPr sz="1425" b="0" dirty="0">
+              <a:solidFill>
+                <a:srgbClr val="59616B"/>
+              </a:solidFill>
+              <a:latin typeface="Helvetica Neue"/>
+              <a:ea typeface="Helvetica Neue"/>
+              <a:cs typeface="Helvetica Neue"/>
+            </a:endParaRPr>
+          </a:p>
+        </p:txBody>
+      </p:sp>
+      <p:sp>
+        <p:nvSpPr>
+          <p:cNvPr id="14" name="Rectangle: Rounded Corners 13">
+            <a:extLst>
+              <a:ext uri="{FF2B5EF4-FFF2-40B4-BE49-F238E27FC236}">
+                <a16:creationId xmlns:a16="http://schemas.microsoft.com/office/drawing/2014/main" id="{2BE86D09-958A-4C34-9887-4AE3AFA0D884}"/>
+              </a:ext>
+            </a:extLst>
+          </p:cNvPr>
+          <p:cNvSpPr>
+            <a:spLocks noGrp="1"/>
+          </p:cNvSpPr>
+          <p:nvPr/>
+        </p:nvSpPr>
+        <p:spPr>
+          <a:xfrm>
+            <a:off x="7858125" y="1343025"/>
+            <a:ext cx="3333750" cy="3143250"/>
+          </a:xfrm>
+          <a:prstGeom prst="roundRect">
+            <a:avLst>
+              <a:gd name="adj" fmla="val 2424"/>
+            </a:avLst>
+          </a:prstGeom>
+          <a:solidFill>
+            <a:srgbClr val="EDEDED"/>
+          </a:solidFill>
+          <a:ln w="9525">
+            <a:solidFill>
+              <a:srgbClr val="B8BCC4"/>
+            </a:solidFill>
+            <a:prstDash val="solid"/>
+          </a:ln>
+        </p:spPr>
+        <p:txBody>
+          <a:bodyPr/>
+          <a:lstStyle/>
+          <a:p>
+            <a:endParaRPr lang="en-US"/>
+          </a:p>
+        </p:txBody>
+      </p:sp>
+      <p:sp>
+        <p:nvSpPr>
+          <p:cNvPr id="15" name="Rectangle 14">
+            <a:extLst>
+              <a:ext uri="{FF2B5EF4-FFF2-40B4-BE49-F238E27FC236}">
+                <a16:creationId xmlns:a16="http://schemas.microsoft.com/office/drawing/2014/main" id="{0AA3BF94-CF09-4096-BF4A-D1253318DA33}"/>
+              </a:ext>
+            </a:extLst>
+          </p:cNvPr>
+          <p:cNvSpPr>
+            <a:spLocks noGrp="1"/>
+          </p:cNvSpPr>
+          <p:nvPr/>
+        </p:nvSpPr>
+        <p:spPr>
+          <a:xfrm>
+            <a:off x="8096250" y="1628775"/>
+            <a:ext cx="2857500" cy="228600"/>
+          </a:xfrm>
+          <a:prstGeom prst="rect">
+            <a:avLst/>
+          </a:prstGeom>
+          <a:noFill/>
+          <a:ln w="0">
+            <a:noFill/>
+            <a:prstDash val="solid"/>
+          </a:ln>
+        </p:spPr>
+        <p:txBody>
+          <a:bodyPr lIns="0" tIns="0" rIns="0" bIns="0" anchor="t">
+            <a:normAutofit/>
+          </a:bodyPr>
+          <a:lstStyle/>
+          <a:p>
+            <a:pPr algn="l">
+              <a:defRPr sz="1050" b="1">
+                <a:solidFill>
+                  <a:srgbClr val="3D8DFF"/>
+                </a:solidFill>
+                <a:latin typeface="Helvetica Neue"/>
+                <a:ea typeface="Helvetica Neue"/>
+                <a:cs typeface="Helvetica Neue"/>
+              </a:defRPr>
+            </a:pPr>
+            <a:r>
+              <a:rPr sz="1050" b="1">
+                <a:solidFill>
+                  <a:srgbClr val="3D8DFF"/>
+                </a:solidFill>
+                <a:latin typeface="Helvetica Neue"/>
+                <a:ea typeface="Helvetica Neue"/>
+                <a:cs typeface="Helvetica Neue"/>
+              </a:rPr>
+              <a:t>COMMISSIONING</a:t>
+            </a:r>
+          </a:p>
+        </p:txBody>
+      </p:sp>
+      <p:sp>
+        <p:nvSpPr>
+          <p:cNvPr id="16" name="Rectangle 15">
+            <a:extLst>
+              <a:ext uri="{FF2B5EF4-FFF2-40B4-BE49-F238E27FC236}">
+                <a16:creationId xmlns:a16="http://schemas.microsoft.com/office/drawing/2014/main" id="{8C971C80-8210-4EBA-8D2A-D5071436CE56}"/>
+              </a:ext>
+            </a:extLst>
+          </p:cNvPr>
+          <p:cNvSpPr>
+            <a:spLocks noGrp="1"/>
+          </p:cNvSpPr>
+          <p:nvPr/>
+        </p:nvSpPr>
+        <p:spPr>
+          <a:xfrm>
+            <a:off x="8096250" y="2085975"/>
+            <a:ext cx="2857500" cy="514350"/>
+          </a:xfrm>
+          <a:prstGeom prst="rect">
+            <a:avLst/>
+          </a:prstGeom>
+          <a:noFill/>
+          <a:ln w="0">
+            <a:noFill/>
+            <a:prstDash val="solid"/>
+          </a:ln>
+        </p:spPr>
+        <p:txBody>
+          <a:bodyPr lIns="0" tIns="0" rIns="0" bIns="0" anchor="t">
+            <a:normAutofit/>
+          </a:bodyPr>
+          <a:lstStyle/>
+          <a:p>
+            <a:pPr algn="l">
+              <a:defRPr sz="2025" b="1">
+                <a:solidFill>
+                  <a:srgbClr val="000000"/>
+                </a:solidFill>
+                <a:latin typeface="Helvetica Neue"/>
+                <a:ea typeface="Helvetica Neue"/>
+                <a:cs typeface="Helvetica Neue"/>
+              </a:defRPr>
+            </a:pPr>
+            <a:r>
+              <a:rPr sz="2025" b="1" dirty="0">
+                <a:solidFill>
+                  <a:srgbClr val="000000"/>
+                </a:solidFill>
+                <a:latin typeface="Helvetica Neue"/>
+                <a:ea typeface="Helvetica Neue"/>
+                <a:cs typeface="Helvetica Neue"/>
+              </a:rPr>
+              <a:t>Planne</a:t>
+            </a:r>
+            <a:r>
+              <a:rPr lang="en-US" sz="2025" b="1" dirty="0">
+                <a:solidFill>
+                  <a:srgbClr val="000000"/>
+                </a:solidFill>
+                <a:latin typeface="Helvetica Neue"/>
+                <a:ea typeface="Helvetica Neue"/>
+                <a:cs typeface="Helvetica Neue"/>
+              </a:rPr>
+              <a:t>d</a:t>
+            </a:r>
+            <a:endParaRPr sz="2025" b="1" dirty="0">
+              <a:solidFill>
+                <a:srgbClr val="000000"/>
+              </a:solidFill>
+              <a:latin typeface="Helvetica Neue"/>
+              <a:ea typeface="Helvetica Neue"/>
+              <a:cs typeface="Helvetica Neue"/>
+            </a:endParaRPr>
+          </a:p>
+        </p:txBody>
+      </p:sp>
+      <p:sp>
+        <p:nvSpPr>
+          <p:cNvPr id="17" name="Rectangle 16">
+            <a:extLst>
+              <a:ext uri="{FF2B5EF4-FFF2-40B4-BE49-F238E27FC236}">
+                <a16:creationId xmlns:a16="http://schemas.microsoft.com/office/drawing/2014/main" id="{5100F6AA-3FA8-4ED0-9A38-0B2378E343B6}"/>
+              </a:ext>
+            </a:extLst>
+          </p:cNvPr>
+          <p:cNvSpPr>
+            <a:spLocks noGrp="1"/>
+          </p:cNvSpPr>
+          <p:nvPr/>
+        </p:nvSpPr>
+        <p:spPr>
+          <a:xfrm>
+            <a:off x="8096250" y="2867025"/>
+            <a:ext cx="2857500" cy="1200150"/>
+          </a:xfrm>
+          <a:prstGeom prst="rect">
+            <a:avLst/>
+          </a:prstGeom>
+          <a:noFill/>
+          <a:ln w="0">
+            <a:noFill/>
+            <a:prstDash val="solid"/>
+          </a:ln>
+        </p:spPr>
+        <p:txBody>
+          <a:bodyPr lIns="0" tIns="0" rIns="0" bIns="0" anchor="t">
+            <a:normAutofit fontScale="92500" lnSpcReduction="20000"/>
+          </a:bodyPr>
+          <a:lstStyle/>
+          <a:p>
+            <a:pPr algn="l">
+              <a:defRPr sz="1425" b="0">
+                <a:solidFill>
+                  <a:srgbClr val="59616B"/>
+                </a:solidFill>
+                <a:latin typeface="Helvetica Neue"/>
+                <a:ea typeface="Helvetica Neue"/>
+                <a:cs typeface="Helvetica Neue"/>
+              </a:defRPr>
+            </a:pPr>
+            <a:r>
+              <a:rPr lang="en-US" sz="1425" b="0" dirty="0">
+                <a:solidFill>
+                  <a:srgbClr val="59616B"/>
+                </a:solidFill>
+                <a:latin typeface="Helvetica Neue"/>
+                <a:ea typeface="Helvetica Neue"/>
+                <a:cs typeface="Helvetica Neue"/>
+              </a:rPr>
+              <a:t>Test definitions for:</a:t>
+            </a:r>
+          </a:p>
+          <a:p>
+            <a:pPr algn="l">
+              <a:defRPr sz="1425" b="0">
+                <a:solidFill>
+                  <a:srgbClr val="59616B"/>
+                </a:solidFill>
+                <a:latin typeface="Helvetica Neue"/>
+                <a:ea typeface="Helvetica Neue"/>
+                <a:cs typeface="Helvetica Neue"/>
+              </a:defRPr>
+            </a:pPr>
+            <a:endParaRPr lang="en-US" sz="1425" b="0" dirty="0">
+              <a:solidFill>
+                <a:srgbClr val="59616B"/>
+              </a:solidFill>
+              <a:latin typeface="Helvetica Neue"/>
+              <a:ea typeface="Helvetica Neue"/>
+              <a:cs typeface="Helvetica Neue"/>
+            </a:endParaRPr>
+          </a:p>
+          <a:p>
+            <a:pPr marL="285750" indent="-285750" algn="l">
+              <a:buFont typeface="Arial" panose="020B0604020202020204" pitchFamily="34" charset="0"/>
+              <a:buChar char="•"/>
+              <a:defRPr sz="1425" b="0">
+                <a:solidFill>
+                  <a:srgbClr val="59616B"/>
+                </a:solidFill>
+                <a:latin typeface="Helvetica Neue"/>
+                <a:ea typeface="Helvetica Neue"/>
+                <a:cs typeface="Helvetica Neue"/>
+              </a:defRPr>
+            </a:pPr>
+            <a:r>
               <a:rPr lang="en-US" sz="1425" dirty="0">
                 <a:solidFill>
                   <a:srgbClr val="59616B"/>
@@ -7830,8 +7823,8 @@
         </p:nvSpPr>
         <p:spPr>
           <a:xfrm>
-            <a:off x="400050" y="5372100"/>
-            <a:ext cx="10382250" cy="400050"/>
+            <a:off x="400050" y="4857750"/>
+            <a:ext cx="10382250" cy="1177290"/>
           </a:xfrm>
           <a:prstGeom prst="rect">
             <a:avLst/>
@@ -7844,7 +7837,7 @@
         </p:spPr>
         <p:txBody>
           <a:bodyPr lIns="0" tIns="0" rIns="0" bIns="0" anchor="t">
-            <a:normAutofit/>
+            <a:normAutofit fontScale="85000" lnSpcReduction="20000"/>
           </a:bodyPr>
           <a:lstStyle/>
           <a:p>
@@ -7889,8 +7882,172 @@
                 <a:ea typeface="Helvetica Neue"/>
                 <a:cs typeface="Helvetica Neue"/>
               </a:rPr>
-              <a:t> tests</a:t>
-            </a:r>
+              <a:t> tests in TEST_PLAN.md</a:t>
+            </a:r>
+          </a:p>
+          <a:p>
+            <a:pPr algn="l">
+              <a:defRPr sz="1800" b="1">
+                <a:solidFill>
+                  <a:srgbClr val="000000"/>
+                </a:solidFill>
+                <a:latin typeface="Helvetica Neue"/>
+                <a:ea typeface="Helvetica Neue"/>
+                <a:cs typeface="Helvetica Neue"/>
+              </a:defRPr>
+            </a:pPr>
+            <a:endParaRPr lang="en-US" b="1" dirty="0">
+              <a:solidFill>
+                <a:srgbClr val="000000"/>
+              </a:solidFill>
+              <a:latin typeface="Helvetica Neue"/>
+              <a:ea typeface="Helvetica Neue"/>
+              <a:cs typeface="Helvetica Neue"/>
+            </a:endParaRPr>
+          </a:p>
+          <a:p>
+            <a:pPr marL="285750" indent="-285750" algn="l">
+              <a:buFont typeface="Arial" panose="020B0604020202020204" pitchFamily="34" charset="0"/>
+              <a:buChar char="•"/>
+              <a:defRPr sz="1800" b="1">
+                <a:solidFill>
+                  <a:srgbClr val="000000"/>
+                </a:solidFill>
+                <a:latin typeface="Helvetica Neue"/>
+                <a:ea typeface="Helvetica Neue"/>
+                <a:cs typeface="Helvetica Neue"/>
+              </a:defRPr>
+            </a:pPr>
+            <a:r>
+              <a:rPr lang="en-US" sz="1800" b="1" dirty="0">
+                <a:solidFill>
+                  <a:srgbClr val="000000"/>
+                </a:solidFill>
+                <a:latin typeface="Helvetica Neue"/>
+                <a:ea typeface="Helvetica Neue"/>
+                <a:cs typeface="Helvetica Neue"/>
+              </a:rPr>
+              <a:t>E – Electrical/Electronics</a:t>
+            </a:r>
+          </a:p>
+          <a:p>
+            <a:pPr marL="285750" indent="-285750" algn="l">
+              <a:buFont typeface="Arial" panose="020B0604020202020204" pitchFamily="34" charset="0"/>
+              <a:buChar char="•"/>
+              <a:defRPr sz="1800" b="1">
+                <a:solidFill>
+                  <a:srgbClr val="000000"/>
+                </a:solidFill>
+                <a:latin typeface="Helvetica Neue"/>
+                <a:ea typeface="Helvetica Neue"/>
+                <a:cs typeface="Helvetica Neue"/>
+              </a:defRPr>
+            </a:pPr>
+            <a:r>
+              <a:rPr lang="en-US" b="1" dirty="0">
+                <a:solidFill>
+                  <a:srgbClr val="000000"/>
+                </a:solidFill>
+                <a:latin typeface="Helvetica Neue"/>
+                <a:ea typeface="Helvetica Neue"/>
+                <a:cs typeface="Helvetica Neue"/>
+              </a:rPr>
+              <a:t>F – Firmware/Controller</a:t>
+            </a:r>
+          </a:p>
+          <a:p>
+            <a:pPr marL="285750" indent="-285750" algn="l">
+              <a:buFont typeface="Arial" panose="020B0604020202020204" pitchFamily="34" charset="0"/>
+              <a:buChar char="•"/>
+              <a:defRPr sz="1800" b="1">
+                <a:solidFill>
+                  <a:srgbClr val="000000"/>
+                </a:solidFill>
+                <a:latin typeface="Helvetica Neue"/>
+                <a:ea typeface="Helvetica Neue"/>
+                <a:cs typeface="Helvetica Neue"/>
+              </a:defRPr>
+            </a:pPr>
+            <a:r>
+              <a:rPr lang="en-US" sz="1800" b="1" dirty="0">
+                <a:solidFill>
+                  <a:srgbClr val="000000"/>
+                </a:solidFill>
+                <a:latin typeface="Helvetica Neue"/>
+                <a:ea typeface="Helvetica Neue"/>
+                <a:cs typeface="Helvetica Neue"/>
+              </a:rPr>
+              <a:t>M – Motion</a:t>
+            </a:r>
+          </a:p>
+          <a:p>
+            <a:pPr marL="285750" indent="-285750" algn="l">
+              <a:buFont typeface="Arial" panose="020B0604020202020204" pitchFamily="34" charset="0"/>
+              <a:buChar char="•"/>
+              <a:defRPr sz="1800" b="1">
+                <a:solidFill>
+                  <a:srgbClr val="000000"/>
+                </a:solidFill>
+                <a:latin typeface="Helvetica Neue"/>
+                <a:ea typeface="Helvetica Neue"/>
+                <a:cs typeface="Helvetica Neue"/>
+              </a:defRPr>
+            </a:pPr>
+            <a:r>
+              <a:rPr lang="en-US" b="1" dirty="0">
+                <a:solidFill>
+                  <a:srgbClr val="000000"/>
+                </a:solidFill>
+                <a:latin typeface="Helvetica Neue"/>
+                <a:ea typeface="Helvetica Neue"/>
+                <a:cs typeface="Helvetica Neue"/>
+              </a:rPr>
+              <a:t>T - Toolhead</a:t>
+            </a:r>
+            <a:endParaRPr lang="en-US" sz="1800" b="1" dirty="0">
+              <a:solidFill>
+                <a:srgbClr val="000000"/>
+              </a:solidFill>
+              <a:latin typeface="Helvetica Neue"/>
+              <a:ea typeface="Helvetica Neue"/>
+              <a:cs typeface="Helvetica Neue"/>
+            </a:endParaRPr>
+          </a:p>
+          <a:p>
+            <a:pPr marL="285750" indent="-285750" algn="l">
+              <a:buFont typeface="Arial" panose="020B0604020202020204" pitchFamily="34" charset="0"/>
+              <a:buChar char="•"/>
+              <a:defRPr sz="1800" b="1">
+                <a:solidFill>
+                  <a:srgbClr val="000000"/>
+                </a:solidFill>
+                <a:latin typeface="Helvetica Neue"/>
+                <a:ea typeface="Helvetica Neue"/>
+                <a:cs typeface="Helvetica Neue"/>
+              </a:defRPr>
+            </a:pPr>
+            <a:endParaRPr lang="en-US" b="1" dirty="0">
+              <a:solidFill>
+                <a:srgbClr val="000000"/>
+              </a:solidFill>
+              <a:latin typeface="Helvetica Neue"/>
+              <a:ea typeface="Helvetica Neue"/>
+              <a:cs typeface="Helvetica Neue"/>
+            </a:endParaRPr>
+          </a:p>
+          <a:p>
+            <a:pPr marL="285750" indent="-285750" algn="l">
+              <a:buFont typeface="Arial" panose="020B0604020202020204" pitchFamily="34" charset="0"/>
+              <a:buChar char="•"/>
+              <a:defRPr sz="1800" b="1">
+                <a:solidFill>
+                  <a:srgbClr val="000000"/>
+                </a:solidFill>
+                <a:latin typeface="Helvetica Neue"/>
+                <a:ea typeface="Helvetica Neue"/>
+                <a:cs typeface="Helvetica Neue"/>
+              </a:defRPr>
+            </a:pPr>
             <a:endParaRPr sz="1800" b="1" dirty="0">
               <a:solidFill>
                 <a:srgbClr val="000000"/>
@@ -8043,7 +8200,7 @@
               </a:defRPr>
             </a:pPr>
             <a:r>
-              <a:rPr sz="2700" b="1">
+              <a:rPr lang="en-US" sz="2700" b="1" dirty="0">
                 <a:solidFill>
                   <a:srgbClr val="000000"/>
                 </a:solidFill>
@@ -8051,7 +8208,62 @@
                 <a:ea typeface="Helvetica Neue"/>
                 <a:cs typeface="Helvetica Neue"/>
               </a:rPr>
-              <a:t>Printing separates coordinated motion from local force control</a:t>
+              <a:t>S</a:t>
+            </a:r>
+            <a:r>
+              <a:rPr sz="2700" b="1" dirty="0">
+                <a:solidFill>
+                  <a:srgbClr val="000000"/>
+                </a:solidFill>
+                <a:latin typeface="Helvetica Neue"/>
+                <a:ea typeface="Helvetica Neue"/>
+                <a:cs typeface="Helvetica Neue"/>
+              </a:rPr>
+              <a:t>eparat</a:t>
+            </a:r>
+            <a:r>
+              <a:rPr lang="en-US" sz="2700" b="1" dirty="0">
+                <a:solidFill>
+                  <a:srgbClr val="000000"/>
+                </a:solidFill>
+                <a:latin typeface="Helvetica Neue"/>
+                <a:ea typeface="Helvetica Neue"/>
+                <a:cs typeface="Helvetica Neue"/>
+              </a:rPr>
+              <a:t>ing</a:t>
+            </a:r>
+            <a:r>
+              <a:rPr sz="2700" b="1" dirty="0">
+                <a:solidFill>
+                  <a:srgbClr val="000000"/>
+                </a:solidFill>
+                <a:latin typeface="Helvetica Neue"/>
+                <a:ea typeface="Helvetica Neue"/>
+                <a:cs typeface="Helvetica Neue"/>
+              </a:rPr>
+              <a:t> coordinated motion </a:t>
+            </a:r>
+            <a:r>
+              <a:rPr lang="en-US" sz="2700" b="1" dirty="0">
+                <a:solidFill>
+                  <a:srgbClr val="000000"/>
+                </a:solidFill>
+                <a:latin typeface="Helvetica Neue"/>
+                <a:ea typeface="Helvetica Neue"/>
+                <a:cs typeface="Helvetica Neue"/>
+              </a:rPr>
+              <a:t>and</a:t>
+            </a:r>
+            <a:r>
+              <a:rPr sz="2700" b="1" dirty="0">
+                <a:solidFill>
+                  <a:srgbClr val="000000"/>
+                </a:solidFill>
+                <a:latin typeface="Helvetica Neue"/>
+                <a:ea typeface="Helvetica Neue"/>
+                <a:cs typeface="Helvetica Neue"/>
+              </a:rPr>
+              <a:t> local force control</a:t>
             </a:r>
           </a:p>
         </p:txBody>
@@ -9155,7 +9367,7 @@
               </a:defRPr>
             </a:pPr>
             <a:r>
-              <a:rPr sz="975" b="0">
+              <a:rPr sz="975" b="1" dirty="0">
                 <a:solidFill>
                   <a:srgbClr val="59616B"/>
                 </a:solidFill>
@@ -9464,8 +9676,8 @@
         </p:nvCxnSpPr>
         <p:spPr>
           <a:xfrm flipV="1">
-            <a:off x="5650302" y="1767959"/>
-            <a:ext cx="1360098" cy="3691"/>
+            <a:off x="5650302" y="1764268"/>
+            <a:ext cx="1321279" cy="7382"/>
           </a:xfrm>
           <a:prstGeom prst="line">
             <a:avLst/>
@@ -9502,7 +9714,7 @@
         </p:nvCxnSpPr>
         <p:spPr>
           <a:xfrm>
-            <a:off x="7010400" y="1767959"/>
+            <a:off x="6971581" y="1771650"/>
             <a:ext cx="0" cy="518041"/>
           </a:xfrm>
           <a:prstGeom prst="line">
@@ -9918,6 +10130,1527 @@
 </file>
 
 <file path=ppt/slides/slide4.xml><?xml version="1.0" encoding="utf-8"?>
+<p:sld xmlns:a="http://schemas.openxmlformats.org/drawingml/2006/main" xmlns:r="http://schemas.openxmlformats.org/officeDocument/2006/relationships" xmlns:p="http://schemas.openxmlformats.org/presentationml/2006/main">
+  <p:cSld>
+    <p:spTree>
+      <p:nvGrpSpPr>
+        <p:cNvPr id="1" name="">
+          <a:extLst>
+            <a:ext uri="{FF2B5EF4-FFF2-40B4-BE49-F238E27FC236}">
+              <a16:creationId xmlns:a16="http://schemas.microsoft.com/office/drawing/2014/main" id="{B83F9DE3-FB5B-8358-5A48-ED82BDCED144}"/>
+            </a:ext>
+          </a:extLst>
+        </p:cNvPr>
+        <p:cNvGrpSpPr/>
+        <p:nvPr/>
+      </p:nvGrpSpPr>
+      <p:grpSpPr>
+        <a:xfrm>
+          <a:off x="0" y="0"/>
+          <a:ext cx="0" cy="0"/>
+          <a:chOff x="0" y="0"/>
+          <a:chExt cx="0" cy="0"/>
+        </a:xfrm>
+      </p:grpSpPr>
+      <p:sp>
+        <p:nvSpPr>
+          <p:cNvPr id="3" name="Rectangle 2">
+            <a:extLst>
+              <a:ext uri="{FF2B5EF4-FFF2-40B4-BE49-F238E27FC236}">
+                <a16:creationId xmlns:a16="http://schemas.microsoft.com/office/drawing/2014/main" id="{792AB593-4818-0032-D95C-F911B79330BE}"/>
+              </a:ext>
+            </a:extLst>
+          </p:cNvPr>
+          <p:cNvSpPr>
+            <a:spLocks noGrp="1"/>
+          </p:cNvSpPr>
+          <p:nvPr/>
+        </p:nvSpPr>
+        <p:spPr>
+          <a:xfrm>
+            <a:off x="400050" y="6343650"/>
+            <a:ext cx="11391900" cy="9525"/>
+          </a:xfrm>
+          <a:prstGeom prst="rect">
+            <a:avLst/>
+          </a:prstGeom>
+          <a:solidFill>
+            <a:srgbClr val="B8BCC4"/>
+          </a:solidFill>
+          <a:ln w="0">
+            <a:solidFill>
+              <a:srgbClr val="B8BCC4"/>
+            </a:solidFill>
+            <a:prstDash val="solid"/>
+          </a:ln>
+        </p:spPr>
+        <p:txBody>
+          <a:bodyPr/>
+          <a:lstStyle/>
+          <a:p>
+            <a:endParaRPr lang="en-US"/>
+          </a:p>
+        </p:txBody>
+      </p:sp>
+      <p:sp>
+        <p:nvSpPr>
+          <p:cNvPr id="4" name="Rectangle 3">
+            <a:extLst>
+              <a:ext uri="{FF2B5EF4-FFF2-40B4-BE49-F238E27FC236}">
+                <a16:creationId xmlns:a16="http://schemas.microsoft.com/office/drawing/2014/main" id="{3BC8F8EB-FCA1-6C57-29AD-90D8F0F5190F}"/>
+              </a:ext>
+            </a:extLst>
+          </p:cNvPr>
+          <p:cNvSpPr>
+            <a:spLocks noGrp="1"/>
+          </p:cNvSpPr>
+          <p:nvPr/>
+        </p:nvSpPr>
+        <p:spPr>
+          <a:xfrm>
+            <a:off x="400050" y="6477000"/>
+            <a:ext cx="6191250" cy="171450"/>
+          </a:xfrm>
+          <a:prstGeom prst="rect">
+            <a:avLst/>
+          </a:prstGeom>
+          <a:noFill/>
+          <a:ln w="0">
+            <a:noFill/>
+            <a:prstDash val="solid"/>
+          </a:ln>
+        </p:spPr>
+        <p:txBody>
+          <a:bodyPr lIns="0" tIns="0" rIns="0" bIns="0" anchor="t">
+            <a:normAutofit/>
+          </a:bodyPr>
+          <a:lstStyle/>
+          <a:p>
+            <a:pPr algn="l">
+              <a:defRPr sz="900" b="0">
+                <a:solidFill>
+                  <a:srgbClr val="59616B"/>
+                </a:solidFill>
+                <a:latin typeface="Helvetica Neue"/>
+                <a:ea typeface="Helvetica Neue"/>
+                <a:cs typeface="Helvetica Neue"/>
+              </a:defRPr>
+            </a:pPr>
+            <a:r>
+              <a:rPr sz="900" b="0">
+                <a:solidFill>
+                  <a:srgbClr val="59616B"/>
+                </a:solidFill>
+                <a:latin typeface="Helvetica Neue"/>
+                <a:ea typeface="Helvetica Neue"/>
+                <a:cs typeface="Helvetica Neue"/>
+              </a:rPr>
+              <a:t>THETA PEN PLOTTER  •  SUMMER PROGRESS UPDATE</a:t>
+            </a:r>
+          </a:p>
+        </p:txBody>
+      </p:sp>
+      <p:sp>
+        <p:nvSpPr>
+          <p:cNvPr id="5" name="Rectangle 4">
+            <a:extLst>
+              <a:ext uri="{FF2B5EF4-FFF2-40B4-BE49-F238E27FC236}">
+                <a16:creationId xmlns:a16="http://schemas.microsoft.com/office/drawing/2014/main" id="{5A6DB36A-2D62-5E11-E1E8-D819EC76CEDE}"/>
+              </a:ext>
+            </a:extLst>
+          </p:cNvPr>
+          <p:cNvSpPr>
+            <a:spLocks noGrp="1"/>
+          </p:cNvSpPr>
+          <p:nvPr/>
+        </p:nvSpPr>
+        <p:spPr>
+          <a:xfrm>
+            <a:off x="11287125" y="6477000"/>
+            <a:ext cx="495300" cy="171450"/>
+          </a:xfrm>
+          <a:prstGeom prst="rect">
+            <a:avLst/>
+          </a:prstGeom>
+          <a:noFill/>
+          <a:ln w="0">
+            <a:noFill/>
+            <a:prstDash val="solid"/>
+          </a:ln>
+        </p:spPr>
+        <p:txBody>
+          <a:bodyPr lIns="0" tIns="0" rIns="0" bIns="0" anchor="t">
+            <a:normAutofit/>
+          </a:bodyPr>
+          <a:lstStyle/>
+          <a:p>
+            <a:pPr algn="r">
+              <a:defRPr sz="900" b="0">
+                <a:solidFill>
+                  <a:srgbClr val="59616B"/>
+                </a:solidFill>
+                <a:latin typeface="Helvetica Neue"/>
+                <a:ea typeface="Helvetica Neue"/>
+                <a:cs typeface="Helvetica Neue"/>
+              </a:defRPr>
+            </a:pPr>
+            <a:r>
+              <a:rPr lang="en-US" sz="900" b="0">
+                <a:solidFill>
+                  <a:srgbClr val="59616B"/>
+                </a:solidFill>
+                <a:latin typeface="Helvetica Neue"/>
+                <a:ea typeface="Helvetica Neue"/>
+                <a:cs typeface="Helvetica Neue"/>
+              </a:rPr>
+              <a:t>4</a:t>
+            </a:r>
+            <a:endParaRPr sz="900" b="0">
+              <a:solidFill>
+                <a:srgbClr val="59616B"/>
+              </a:solidFill>
+              <a:latin typeface="Helvetica Neue"/>
+              <a:ea typeface="Helvetica Neue"/>
+              <a:cs typeface="Helvetica Neue"/>
+            </a:endParaRPr>
+          </a:p>
+        </p:txBody>
+      </p:sp>
+      <p:sp>
+        <p:nvSpPr>
+          <p:cNvPr id="18" name="TextBox 17">
+            <a:extLst>
+              <a:ext uri="{FF2B5EF4-FFF2-40B4-BE49-F238E27FC236}">
+                <a16:creationId xmlns:a16="http://schemas.microsoft.com/office/drawing/2014/main" id="{88ECE54C-A832-F190-90CA-760434761C94}"/>
+              </a:ext>
+            </a:extLst>
+          </p:cNvPr>
+          <p:cNvSpPr txBox="1"/>
+          <p:nvPr/>
+        </p:nvSpPr>
+        <p:spPr>
+          <a:xfrm>
+            <a:off x="400050" y="381372"/>
+            <a:ext cx="6350000" cy="200055"/>
+          </a:xfrm>
+          <a:prstGeom prst="rect">
+            <a:avLst/>
+          </a:prstGeom>
+          <a:noFill/>
+        </p:spPr>
+        <p:txBody>
+          <a:bodyPr vert="horz" wrap="square" lIns="0" tIns="0" rIns="0" bIns="0" rtlCol="0" anchor="ctr">
+            <a:spAutoFit/>
+          </a:bodyPr>
+          <a:lstStyle/>
+          <a:p>
+            <a:r>
+              <a:rPr lang="en-US" sz="1300" b="1">
+                <a:solidFill>
+                  <a:srgbClr val="3F8BFF"/>
+                </a:solidFill>
+                <a:latin typeface="Aptos" panose="020B0004020202020204" pitchFamily="34" charset="0"/>
+              </a:rPr>
+              <a:t>INTERFACE PROTECTION</a:t>
+            </a:r>
+          </a:p>
+        </p:txBody>
+      </p:sp>
+      <p:sp>
+        <p:nvSpPr>
+          <p:cNvPr id="21" name="TextBox 20">
+            <a:extLst>
+              <a:ext uri="{FF2B5EF4-FFF2-40B4-BE49-F238E27FC236}">
+                <a16:creationId xmlns:a16="http://schemas.microsoft.com/office/drawing/2014/main" id="{778761C7-2188-8494-20C7-C1B67B4E8942}"/>
+              </a:ext>
+            </a:extLst>
+          </p:cNvPr>
+          <p:cNvSpPr txBox="1"/>
+          <p:nvPr/>
+        </p:nvSpPr>
+        <p:spPr>
+          <a:xfrm>
+            <a:off x="400050" y="585773"/>
+            <a:ext cx="11391900" cy="477054"/>
+          </a:xfrm>
+          <a:prstGeom prst="rect">
+            <a:avLst/>
+          </a:prstGeom>
+          <a:noFill/>
+        </p:spPr>
+        <p:txBody>
+          <a:bodyPr vert="horz" wrap="square" lIns="0" tIns="0" rIns="0" bIns="0" rtlCol="0" anchor="ctr">
+            <a:spAutoFit/>
+          </a:bodyPr>
+          <a:lstStyle/>
+          <a:p>
+            <a:r>
+              <a:rPr lang="en-US" sz="3100" b="1">
+                <a:solidFill>
+                  <a:srgbClr val="14191E"/>
+                </a:solidFill>
+                <a:latin typeface="Aptos" panose="020B0004020202020204" pitchFamily="34" charset="0"/>
+              </a:rPr>
+              <a:t>Opto-isolation keeps the controller interface safe</a:t>
+            </a:r>
+          </a:p>
+        </p:txBody>
+      </p:sp>
+      <p:sp>
+        <p:nvSpPr>
+          <p:cNvPr id="24" name="TextBox 23">
+            <a:extLst>
+              <a:ext uri="{FF2B5EF4-FFF2-40B4-BE49-F238E27FC236}">
+                <a16:creationId xmlns:a16="http://schemas.microsoft.com/office/drawing/2014/main" id="{767C1EC3-B611-D0B2-C3E2-FAA0A2EEF923}"/>
+              </a:ext>
+            </a:extLst>
+          </p:cNvPr>
+          <p:cNvSpPr txBox="1"/>
+          <p:nvPr/>
+        </p:nvSpPr>
+        <p:spPr>
+          <a:xfrm>
+            <a:off x="400050" y="1430094"/>
+            <a:ext cx="11391900" cy="261610"/>
+          </a:xfrm>
+          <a:prstGeom prst="rect">
+            <a:avLst/>
+          </a:prstGeom>
+          <a:noFill/>
+        </p:spPr>
+        <p:txBody>
+          <a:bodyPr vert="horz" wrap="square" lIns="0" tIns="0" rIns="0" bIns="0" rtlCol="0" anchor="ctr">
+            <a:spAutoFit/>
+          </a:bodyPr>
+          <a:lstStyle/>
+          <a:p>
+            <a:r>
+              <a:rPr lang="en-US" sz="1700">
+                <a:solidFill>
+                  <a:srgbClr val="5B6571"/>
+                </a:solidFill>
+                <a:latin typeface="Aptos" panose="020B0004020202020204" pitchFamily="34" charset="0"/>
+              </a:rPr>
+              <a:t>Three isolated digital paths carry commands and status without sharing grounds.</a:t>
+            </a:r>
+          </a:p>
+        </p:txBody>
+      </p:sp>
+      <p:sp>
+        <p:nvSpPr>
+          <p:cNvPr id="27" name="TextBox 26">
+            <a:extLst>
+              <a:ext uri="{FF2B5EF4-FFF2-40B4-BE49-F238E27FC236}">
+                <a16:creationId xmlns:a16="http://schemas.microsoft.com/office/drawing/2014/main" id="{879088F5-C3D2-2D3A-4B1B-458F02ABCBDB}"/>
+              </a:ext>
+            </a:extLst>
+          </p:cNvPr>
+          <p:cNvSpPr txBox="1"/>
+          <p:nvPr/>
+        </p:nvSpPr>
+        <p:spPr>
+          <a:xfrm>
+            <a:off x="660400" y="1925394"/>
+            <a:ext cx="3302000" cy="261610"/>
+          </a:xfrm>
+          <a:prstGeom prst="rect">
+            <a:avLst/>
+          </a:prstGeom>
+          <a:noFill/>
+        </p:spPr>
+        <p:txBody>
+          <a:bodyPr vert="horz" wrap="square" lIns="0" tIns="0" rIns="0" bIns="0" rtlCol="0" anchor="ctr">
+            <a:spAutoFit/>
+          </a:bodyPr>
+          <a:lstStyle/>
+          <a:p>
+            <a:pPr algn="ctr"/>
+            <a:r>
+              <a:rPr lang="en-US" sz="1700" b="1">
+                <a:solidFill>
+                  <a:srgbClr val="14191E"/>
+                </a:solidFill>
+                <a:latin typeface="Aptos" panose="020B0004020202020204" pitchFamily="34" charset="0"/>
+              </a:rPr>
+              <a:t>RP23CNC / controller</a:t>
+            </a:r>
+          </a:p>
+        </p:txBody>
+      </p:sp>
+      <p:sp>
+        <p:nvSpPr>
+          <p:cNvPr id="28" name="TextBox 27">
+            <a:extLst>
+              <a:ext uri="{FF2B5EF4-FFF2-40B4-BE49-F238E27FC236}">
+                <a16:creationId xmlns:a16="http://schemas.microsoft.com/office/drawing/2014/main" id="{9B77FEC2-E75B-E6D2-7C79-6CE2F8C45676}"/>
+              </a:ext>
+            </a:extLst>
+          </p:cNvPr>
+          <p:cNvSpPr txBox="1"/>
+          <p:nvPr/>
+        </p:nvSpPr>
+        <p:spPr>
+          <a:xfrm>
+            <a:off x="4445000" y="1925394"/>
+            <a:ext cx="3302000" cy="261610"/>
+          </a:xfrm>
+          <a:prstGeom prst="rect">
+            <a:avLst/>
+          </a:prstGeom>
+          <a:noFill/>
+        </p:spPr>
+        <p:txBody>
+          <a:bodyPr vert="horz" wrap="square" lIns="0" tIns="0" rIns="0" bIns="0" rtlCol="0" anchor="ctr">
+            <a:spAutoFit/>
+          </a:bodyPr>
+          <a:lstStyle/>
+          <a:p>
+            <a:pPr algn="ctr"/>
+            <a:r>
+              <a:rPr lang="en-US" sz="1700" b="1">
+                <a:solidFill>
+                  <a:srgbClr val="14191E"/>
+                </a:solidFill>
+                <a:latin typeface="Aptos" panose="020B0004020202020204" pitchFamily="34" charset="0"/>
+              </a:rPr>
+              <a:t>PC817C isolation</a:t>
+            </a:r>
+          </a:p>
+        </p:txBody>
+      </p:sp>
+      <p:sp>
+        <p:nvSpPr>
+          <p:cNvPr id="34" name="TextBox 33">
+            <a:extLst>
+              <a:ext uri="{FF2B5EF4-FFF2-40B4-BE49-F238E27FC236}">
+                <a16:creationId xmlns:a16="http://schemas.microsoft.com/office/drawing/2014/main" id="{63345C9F-F44E-F172-55F5-DCAA579064C4}"/>
+              </a:ext>
+            </a:extLst>
+          </p:cNvPr>
+          <p:cNvSpPr txBox="1"/>
+          <p:nvPr/>
+        </p:nvSpPr>
+        <p:spPr>
+          <a:xfrm>
+            <a:off x="8229600" y="1925394"/>
+            <a:ext cx="3302000" cy="261610"/>
+          </a:xfrm>
+          <a:prstGeom prst="rect">
+            <a:avLst/>
+          </a:prstGeom>
+          <a:noFill/>
+        </p:spPr>
+        <p:txBody>
+          <a:bodyPr vert="horz" wrap="square" lIns="0" tIns="0" rIns="0" bIns="0" rtlCol="0" anchor="ctr">
+            <a:spAutoFit/>
+          </a:bodyPr>
+          <a:lstStyle/>
+          <a:p>
+            <a:pPr algn="ctr"/>
+            <a:r>
+              <a:rPr lang="en-US" sz="1700" b="1">
+                <a:solidFill>
+                  <a:srgbClr val="14191E"/>
+                </a:solidFill>
+                <a:latin typeface="Aptos" panose="020B0004020202020204" pitchFamily="34" charset="0"/>
+              </a:rPr>
+              <a:t>Pro Micro / toolhead</a:t>
+            </a:r>
+          </a:p>
+        </p:txBody>
+      </p:sp>
+      <p:sp>
+        <p:nvSpPr>
+          <p:cNvPr id="36" name="TextBox 35">
+            <a:extLst>
+              <a:ext uri="{FF2B5EF4-FFF2-40B4-BE49-F238E27FC236}">
+                <a16:creationId xmlns:a16="http://schemas.microsoft.com/office/drawing/2014/main" id="{7F4AC496-1460-FAA8-B00C-2F2E419A4F5A}"/>
+              </a:ext>
+            </a:extLst>
+          </p:cNvPr>
+          <p:cNvSpPr txBox="1"/>
+          <p:nvPr/>
+        </p:nvSpPr>
+        <p:spPr>
+          <a:xfrm>
+            <a:off x="660400" y="2235572"/>
+            <a:ext cx="3302000" cy="200055"/>
+          </a:xfrm>
+          <a:prstGeom prst="rect">
+            <a:avLst/>
+          </a:prstGeom>
+          <a:noFill/>
+        </p:spPr>
+        <p:txBody>
+          <a:bodyPr vert="horz" wrap="square" lIns="0" tIns="0" rIns="0" bIns="0" rtlCol="0" anchor="ctr">
+            <a:spAutoFit/>
+          </a:bodyPr>
+          <a:lstStyle/>
+          <a:p>
+            <a:pPr algn="ctr"/>
+            <a:r>
+              <a:rPr lang="en-US" sz="1300">
+                <a:solidFill>
+                  <a:srgbClr val="5B6571"/>
+                </a:solidFill>
+                <a:latin typeface="Aptos" panose="020B0004020202020204" pitchFamily="34" charset="0"/>
+              </a:rPr>
+              <a:t>5 V and ~12 V domain</a:t>
+            </a:r>
+          </a:p>
+        </p:txBody>
+      </p:sp>
+      <p:sp>
+        <p:nvSpPr>
+          <p:cNvPr id="37" name="TextBox 36">
+            <a:extLst>
+              <a:ext uri="{FF2B5EF4-FFF2-40B4-BE49-F238E27FC236}">
+                <a16:creationId xmlns:a16="http://schemas.microsoft.com/office/drawing/2014/main" id="{EBD46128-4473-D098-8FA2-CC89386FB20F}"/>
+              </a:ext>
+            </a:extLst>
+          </p:cNvPr>
+          <p:cNvSpPr txBox="1"/>
+          <p:nvPr/>
+        </p:nvSpPr>
+        <p:spPr>
+          <a:xfrm>
+            <a:off x="8229600" y="2235572"/>
+            <a:ext cx="3302000" cy="200055"/>
+          </a:xfrm>
+          <a:prstGeom prst="rect">
+            <a:avLst/>
+          </a:prstGeom>
+          <a:noFill/>
+        </p:spPr>
+        <p:txBody>
+          <a:bodyPr vert="horz" wrap="square" lIns="0" tIns="0" rIns="0" bIns="0" rtlCol="0" anchor="ctr">
+            <a:spAutoFit/>
+          </a:bodyPr>
+          <a:lstStyle/>
+          <a:p>
+            <a:pPr algn="ctr"/>
+            <a:r>
+              <a:rPr lang="en-US" sz="1300">
+                <a:solidFill>
+                  <a:srgbClr val="5B6571"/>
+                </a:solidFill>
+                <a:latin typeface="Aptos" panose="020B0004020202020204" pitchFamily="34" charset="0"/>
+              </a:rPr>
+              <a:t>3.3 V domain</a:t>
+            </a:r>
+          </a:p>
+        </p:txBody>
+      </p:sp>
+      <p:cxnSp>
+        <p:nvCxnSpPr>
+          <p:cNvPr id="39" name="Straight Connector 38">
+            <a:extLst>
+              <a:ext uri="{FF2B5EF4-FFF2-40B4-BE49-F238E27FC236}">
+                <a16:creationId xmlns:a16="http://schemas.microsoft.com/office/drawing/2014/main" id="{D57DAC71-6164-DF19-A8C8-80CD1562D4E0}"/>
+              </a:ext>
+            </a:extLst>
+          </p:cNvPr>
+          <p:cNvCxnSpPr/>
+          <p:nvPr/>
+        </p:nvCxnSpPr>
+        <p:spPr>
+          <a:xfrm>
+            <a:off x="3962400" y="2946400"/>
+            <a:ext cx="762000" cy="0"/>
+          </a:xfrm>
+          <a:prstGeom prst="line">
+            <a:avLst/>
+          </a:prstGeom>
+          <a:ln w="28575">
+            <a:solidFill>
+              <a:srgbClr val="3F8BFF"/>
+            </a:solidFill>
+            <a:tailEnd type="arrow"/>
+          </a:ln>
+        </p:spPr>
+        <p:style>
+          <a:lnRef idx="1">
+            <a:schemeClr val="accent1"/>
+          </a:lnRef>
+          <a:fillRef idx="0">
+            <a:schemeClr val="accent1"/>
+          </a:fillRef>
+          <a:effectRef idx="0">
+            <a:schemeClr val="accent1"/>
+          </a:effectRef>
+          <a:fontRef idx="minor">
+            <a:schemeClr val="tx1"/>
+          </a:fontRef>
+        </p:style>
+      </p:cxnSp>
+      <p:cxnSp>
+        <p:nvCxnSpPr>
+          <p:cNvPr id="41" name="Straight Connector 40">
+            <a:extLst>
+              <a:ext uri="{FF2B5EF4-FFF2-40B4-BE49-F238E27FC236}">
+                <a16:creationId xmlns:a16="http://schemas.microsoft.com/office/drawing/2014/main" id="{ACBA5CCB-7400-E728-35C7-5D363F5F97CE}"/>
+              </a:ext>
+            </a:extLst>
+          </p:cNvPr>
+          <p:cNvCxnSpPr/>
+          <p:nvPr/>
+        </p:nvCxnSpPr>
+        <p:spPr>
+          <a:xfrm>
+            <a:off x="7467600" y="2946400"/>
+            <a:ext cx="762000" cy="0"/>
+          </a:xfrm>
+          <a:prstGeom prst="line">
+            <a:avLst/>
+          </a:prstGeom>
+          <a:ln w="28575">
+            <a:solidFill>
+              <a:srgbClr val="3F8BFF"/>
+            </a:solidFill>
+            <a:tailEnd type="arrow"/>
+          </a:ln>
+        </p:spPr>
+        <p:style>
+          <a:lnRef idx="1">
+            <a:schemeClr val="accent1"/>
+          </a:lnRef>
+          <a:fillRef idx="0">
+            <a:schemeClr val="accent1"/>
+          </a:fillRef>
+          <a:effectRef idx="0">
+            <a:schemeClr val="accent1"/>
+          </a:effectRef>
+          <a:fontRef idx="minor">
+            <a:schemeClr val="tx1"/>
+          </a:fontRef>
+        </p:style>
+      </p:cxnSp>
+      <p:cxnSp>
+        <p:nvCxnSpPr>
+          <p:cNvPr id="42" name="Straight Connector 41">
+            <a:extLst>
+              <a:ext uri="{FF2B5EF4-FFF2-40B4-BE49-F238E27FC236}">
+                <a16:creationId xmlns:a16="http://schemas.microsoft.com/office/drawing/2014/main" id="{6BDF4886-E492-1A80-37BB-3DE2E9DF938E}"/>
+              </a:ext>
+            </a:extLst>
+          </p:cNvPr>
+          <p:cNvCxnSpPr/>
+          <p:nvPr/>
+        </p:nvCxnSpPr>
+        <p:spPr>
+          <a:xfrm>
+            <a:off x="3962400" y="3771900"/>
+            <a:ext cx="762000" cy="0"/>
+          </a:xfrm>
+          <a:prstGeom prst="line">
+            <a:avLst/>
+          </a:prstGeom>
+          <a:ln w="28575">
+            <a:solidFill>
+              <a:srgbClr val="3F8BFF"/>
+            </a:solidFill>
+            <a:tailEnd type="arrow"/>
+          </a:ln>
+        </p:spPr>
+        <p:style>
+          <a:lnRef idx="1">
+            <a:schemeClr val="accent1"/>
+          </a:lnRef>
+          <a:fillRef idx="0">
+            <a:schemeClr val="accent1"/>
+          </a:fillRef>
+          <a:effectRef idx="0">
+            <a:schemeClr val="accent1"/>
+          </a:effectRef>
+          <a:fontRef idx="minor">
+            <a:schemeClr val="tx1"/>
+          </a:fontRef>
+        </p:style>
+      </p:cxnSp>
+      <p:cxnSp>
+        <p:nvCxnSpPr>
+          <p:cNvPr id="46" name="Straight Connector 45">
+            <a:extLst>
+              <a:ext uri="{FF2B5EF4-FFF2-40B4-BE49-F238E27FC236}">
+                <a16:creationId xmlns:a16="http://schemas.microsoft.com/office/drawing/2014/main" id="{17D4A29F-14B7-A7BF-66ED-6096926CA1A8}"/>
+              </a:ext>
+            </a:extLst>
+          </p:cNvPr>
+          <p:cNvCxnSpPr/>
+          <p:nvPr/>
+        </p:nvCxnSpPr>
+        <p:spPr>
+          <a:xfrm>
+            <a:off x="7467600" y="3771900"/>
+            <a:ext cx="762000" cy="0"/>
+          </a:xfrm>
+          <a:prstGeom prst="line">
+            <a:avLst/>
+          </a:prstGeom>
+          <a:ln w="28575">
+            <a:solidFill>
+              <a:srgbClr val="3F8BFF"/>
+            </a:solidFill>
+            <a:tailEnd type="arrow"/>
+          </a:ln>
+        </p:spPr>
+        <p:style>
+          <a:lnRef idx="1">
+            <a:schemeClr val="accent1"/>
+          </a:lnRef>
+          <a:fillRef idx="0">
+            <a:schemeClr val="accent1"/>
+          </a:fillRef>
+          <a:effectRef idx="0">
+            <a:schemeClr val="accent1"/>
+          </a:effectRef>
+          <a:fontRef idx="minor">
+            <a:schemeClr val="tx1"/>
+          </a:fontRef>
+        </p:style>
+      </p:cxnSp>
+      <p:cxnSp>
+        <p:nvCxnSpPr>
+          <p:cNvPr id="49" name="Straight Connector 48">
+            <a:extLst>
+              <a:ext uri="{FF2B5EF4-FFF2-40B4-BE49-F238E27FC236}">
+                <a16:creationId xmlns:a16="http://schemas.microsoft.com/office/drawing/2014/main" id="{2FA1DFFB-275F-977B-1DB2-771E01274D98}"/>
+              </a:ext>
+            </a:extLst>
+          </p:cNvPr>
+          <p:cNvCxnSpPr/>
+          <p:nvPr/>
+        </p:nvCxnSpPr>
+        <p:spPr>
+          <a:xfrm flipH="1">
+            <a:off x="3962400" y="4597400"/>
+            <a:ext cx="762000" cy="0"/>
+          </a:xfrm>
+          <a:prstGeom prst="line">
+            <a:avLst/>
+          </a:prstGeom>
+          <a:ln w="28575">
+            <a:solidFill>
+              <a:srgbClr val="3F8BFF"/>
+            </a:solidFill>
+            <a:tailEnd type="arrow"/>
+          </a:ln>
+        </p:spPr>
+        <p:style>
+          <a:lnRef idx="1">
+            <a:schemeClr val="accent1"/>
+          </a:lnRef>
+          <a:fillRef idx="0">
+            <a:schemeClr val="accent1"/>
+          </a:fillRef>
+          <a:effectRef idx="0">
+            <a:schemeClr val="accent1"/>
+          </a:effectRef>
+          <a:fontRef idx="minor">
+            <a:schemeClr val="tx1"/>
+          </a:fontRef>
+        </p:style>
+      </p:cxnSp>
+      <p:cxnSp>
+        <p:nvCxnSpPr>
+          <p:cNvPr id="52" name="Straight Connector 51">
+            <a:extLst>
+              <a:ext uri="{FF2B5EF4-FFF2-40B4-BE49-F238E27FC236}">
+                <a16:creationId xmlns:a16="http://schemas.microsoft.com/office/drawing/2014/main" id="{47C27497-F103-2442-70CA-E77298671D80}"/>
+              </a:ext>
+            </a:extLst>
+          </p:cNvPr>
+          <p:cNvCxnSpPr/>
+          <p:nvPr/>
+        </p:nvCxnSpPr>
+        <p:spPr>
+          <a:xfrm flipH="1">
+            <a:off x="7467600" y="4597400"/>
+            <a:ext cx="762000" cy="0"/>
+          </a:xfrm>
+          <a:prstGeom prst="line">
+            <a:avLst/>
+          </a:prstGeom>
+          <a:ln w="28575">
+            <a:solidFill>
+              <a:srgbClr val="3F8BFF"/>
+            </a:solidFill>
+            <a:tailEnd type="arrow"/>
+          </a:ln>
+        </p:spPr>
+        <p:style>
+          <a:lnRef idx="1">
+            <a:schemeClr val="accent1"/>
+          </a:lnRef>
+          <a:fillRef idx="0">
+            <a:schemeClr val="accent1"/>
+          </a:fillRef>
+          <a:effectRef idx="0">
+            <a:schemeClr val="accent1"/>
+          </a:effectRef>
+          <a:fontRef idx="minor">
+            <a:schemeClr val="tx1"/>
+          </a:fontRef>
+        </p:style>
+      </p:cxnSp>
+      <p:sp>
+        <p:nvSpPr>
+          <p:cNvPr id="55" name="Rectangle: Rounded Corners 54">
+            <a:extLst>
+              <a:ext uri="{FF2B5EF4-FFF2-40B4-BE49-F238E27FC236}">
+                <a16:creationId xmlns:a16="http://schemas.microsoft.com/office/drawing/2014/main" id="{54BF9163-0F16-B0C5-0D68-D6FAF8EC89B0}"/>
+              </a:ext>
+            </a:extLst>
+          </p:cNvPr>
+          <p:cNvSpPr/>
+          <p:nvPr/>
+        </p:nvSpPr>
+        <p:spPr>
+          <a:xfrm>
+            <a:off x="660400" y="2667000"/>
+            <a:ext cx="3302000" cy="558800"/>
+          </a:xfrm>
+          <a:prstGeom prst="roundRect">
+            <a:avLst/>
+          </a:prstGeom>
+          <a:solidFill>
+            <a:srgbClr val="EFF1F3"/>
+          </a:solidFill>
+          <a:ln w="13970">
+            <a:solidFill>
+              <a:srgbClr val="BCC5CD"/>
+            </a:solidFill>
+          </a:ln>
+        </p:spPr>
+        <p:style>
+          <a:lnRef idx="2">
+            <a:schemeClr val="accent1">
+              <a:shade val="15000"/>
+            </a:schemeClr>
+          </a:lnRef>
+          <a:fillRef idx="1">
+            <a:schemeClr val="accent1"/>
+          </a:fillRef>
+          <a:effectRef idx="0">
+            <a:schemeClr val="accent1"/>
+          </a:effectRef>
+          <a:fontRef idx="minor">
+            <a:schemeClr val="lt1"/>
+          </a:fontRef>
+        </p:style>
+        <p:txBody>
+          <a:bodyPr wrap="square" lIns="0" tIns="0" rIns="0" bIns="0" rtlCol="0" anchor="ctr"/>
+          <a:lstStyle/>
+          <a:p>
+            <a:pPr algn="ctr"/>
+            <a:r>
+              <a:rPr lang="en-US" sz="1600">
+                <a:solidFill>
+                  <a:srgbClr val="14191E"/>
+                </a:solidFill>
+                <a:latin typeface="Aptos" panose="020B0004020202020204" pitchFamily="34" charset="0"/>
+              </a:rPr>
+              <a:t>ENA - M3 / M5</a:t>
+            </a:r>
+          </a:p>
+        </p:txBody>
+      </p:sp>
+      <p:sp>
+        <p:nvSpPr>
+          <p:cNvPr id="56" name="Rectangle: Rounded Corners 55">
+            <a:extLst>
+              <a:ext uri="{FF2B5EF4-FFF2-40B4-BE49-F238E27FC236}">
+                <a16:creationId xmlns:a16="http://schemas.microsoft.com/office/drawing/2014/main" id="{3FB04673-995C-5197-10D8-9044431F9618}"/>
+              </a:ext>
+            </a:extLst>
+          </p:cNvPr>
+          <p:cNvSpPr/>
+          <p:nvPr/>
+        </p:nvSpPr>
+        <p:spPr>
+          <a:xfrm>
+            <a:off x="4724400" y="2667000"/>
+            <a:ext cx="2743200" cy="558800"/>
+          </a:xfrm>
+          <a:prstGeom prst="roundRect">
+            <a:avLst/>
+          </a:prstGeom>
+          <a:solidFill>
+            <a:srgbClr val="3F8BFF"/>
+          </a:solidFill>
+          <a:ln w="13970">
+            <a:solidFill>
+              <a:srgbClr val="3F8BFF"/>
+            </a:solidFill>
+          </a:ln>
+        </p:spPr>
+        <p:style>
+          <a:lnRef idx="2">
+            <a:schemeClr val="accent1">
+              <a:shade val="15000"/>
+            </a:schemeClr>
+          </a:lnRef>
+          <a:fillRef idx="1">
+            <a:schemeClr val="accent1"/>
+          </a:fillRef>
+          <a:effectRef idx="0">
+            <a:schemeClr val="accent1"/>
+          </a:effectRef>
+          <a:fontRef idx="minor">
+            <a:schemeClr val="lt1"/>
+          </a:fontRef>
+        </p:style>
+        <p:txBody>
+          <a:bodyPr wrap="square" lIns="0" tIns="0" rIns="0" bIns="0" rtlCol="0" anchor="ctr"/>
+          <a:lstStyle/>
+          <a:p>
+            <a:pPr algn="ctr"/>
+            <a:r>
+              <a:rPr lang="en-US" sz="1700">
+                <a:solidFill>
+                  <a:srgbClr val="FF0000"/>
+                </a:solidFill>
+                <a:latin typeface="Aptos" panose="020B0004020202020204" pitchFamily="34" charset="0"/>
+              </a:rPr>
+              <a:t>U1</a:t>
+            </a:r>
+          </a:p>
+        </p:txBody>
+      </p:sp>
+      <p:sp>
+        <p:nvSpPr>
+          <p:cNvPr id="57" name="Rectangle: Rounded Corners 56">
+            <a:extLst>
+              <a:ext uri="{FF2B5EF4-FFF2-40B4-BE49-F238E27FC236}">
+                <a16:creationId xmlns:a16="http://schemas.microsoft.com/office/drawing/2014/main" id="{194A4318-500F-E49C-ED80-5E735B8EF674}"/>
+              </a:ext>
+            </a:extLst>
+          </p:cNvPr>
+          <p:cNvSpPr/>
+          <p:nvPr/>
+        </p:nvSpPr>
+        <p:spPr>
+          <a:xfrm>
+            <a:off x="8229600" y="2667000"/>
+            <a:ext cx="3302000" cy="558800"/>
+          </a:xfrm>
+          <a:prstGeom prst="roundRect">
+            <a:avLst/>
+          </a:prstGeom>
+          <a:solidFill>
+            <a:srgbClr val="E6F3FF"/>
+          </a:solidFill>
+          <a:ln w="13970">
+            <a:solidFill>
+              <a:srgbClr val="3F8BFF"/>
+            </a:solidFill>
+          </a:ln>
+        </p:spPr>
+        <p:style>
+          <a:lnRef idx="2">
+            <a:schemeClr val="accent1">
+              <a:shade val="15000"/>
+            </a:schemeClr>
+          </a:lnRef>
+          <a:fillRef idx="1">
+            <a:schemeClr val="accent1"/>
+          </a:fillRef>
+          <a:effectRef idx="0">
+            <a:schemeClr val="accent1"/>
+          </a:effectRef>
+          <a:fontRef idx="minor">
+            <a:schemeClr val="lt1"/>
+          </a:fontRef>
+        </p:style>
+        <p:txBody>
+          <a:bodyPr wrap="square" lIns="0" tIns="0" rIns="0" bIns="0" rtlCol="0" anchor="ctr"/>
+          <a:lstStyle/>
+          <a:p>
+            <a:pPr algn="ctr"/>
+            <a:r>
+              <a:rPr lang="en-US" sz="1600">
+                <a:solidFill>
+                  <a:srgbClr val="14191E"/>
+                </a:solidFill>
+                <a:latin typeface="Aptos" panose="020B0004020202020204" pitchFamily="34" charset="0"/>
+              </a:rPr>
+              <a:t>GP29 - command input</a:t>
+            </a:r>
+          </a:p>
+        </p:txBody>
+      </p:sp>
+      <p:sp>
+        <p:nvSpPr>
+          <p:cNvPr id="58" name="Rectangle: Rounded Corners 57">
+            <a:extLst>
+              <a:ext uri="{FF2B5EF4-FFF2-40B4-BE49-F238E27FC236}">
+                <a16:creationId xmlns:a16="http://schemas.microsoft.com/office/drawing/2014/main" id="{F4637429-9CD6-5073-3710-2E7323B43780}"/>
+              </a:ext>
+            </a:extLst>
+          </p:cNvPr>
+          <p:cNvSpPr/>
+          <p:nvPr/>
+        </p:nvSpPr>
+        <p:spPr>
+          <a:xfrm>
+            <a:off x="660400" y="3492500"/>
+            <a:ext cx="3302000" cy="558800"/>
+          </a:xfrm>
+          <a:prstGeom prst="roundRect">
+            <a:avLst/>
+          </a:prstGeom>
+          <a:solidFill>
+            <a:srgbClr val="EFF1F3"/>
+          </a:solidFill>
+          <a:ln w="13970">
+            <a:solidFill>
+              <a:srgbClr val="BCC5CD"/>
+            </a:solidFill>
+          </a:ln>
+        </p:spPr>
+        <p:style>
+          <a:lnRef idx="2">
+            <a:schemeClr val="accent1">
+              <a:shade val="15000"/>
+            </a:schemeClr>
+          </a:lnRef>
+          <a:fillRef idx="1">
+            <a:schemeClr val="accent1"/>
+          </a:fillRef>
+          <a:effectRef idx="0">
+            <a:schemeClr val="accent1"/>
+          </a:effectRef>
+          <a:fontRef idx="minor">
+            <a:schemeClr val="lt1"/>
+          </a:fontRef>
+        </p:style>
+        <p:txBody>
+          <a:bodyPr wrap="square" lIns="0" tIns="0" rIns="0" bIns="0" rtlCol="0" anchor="ctr"/>
+          <a:lstStyle/>
+          <a:p>
+            <a:pPr algn="ctr"/>
+            <a:r>
+              <a:rPr lang="en-US" sz="1600">
+                <a:solidFill>
+                  <a:srgbClr val="14191E"/>
+                </a:solidFill>
+                <a:latin typeface="Aptos" panose="020B0004020202020204" pitchFamily="34" charset="0"/>
+              </a:rPr>
+              <a:t>Aux 0 - arm request</a:t>
+            </a:r>
+          </a:p>
+        </p:txBody>
+      </p:sp>
+      <p:sp>
+        <p:nvSpPr>
+          <p:cNvPr id="59" name="Rectangle: Rounded Corners 58">
+            <a:extLst>
+              <a:ext uri="{FF2B5EF4-FFF2-40B4-BE49-F238E27FC236}">
+                <a16:creationId xmlns:a16="http://schemas.microsoft.com/office/drawing/2014/main" id="{4D783E22-3392-8FA8-AF20-0348A5B86F90}"/>
+              </a:ext>
+            </a:extLst>
+          </p:cNvPr>
+          <p:cNvSpPr/>
+          <p:nvPr/>
+        </p:nvSpPr>
+        <p:spPr>
+          <a:xfrm>
+            <a:off x="4724400" y="3492500"/>
+            <a:ext cx="2743200" cy="558800"/>
+          </a:xfrm>
+          <a:prstGeom prst="roundRect">
+            <a:avLst/>
+          </a:prstGeom>
+          <a:solidFill>
+            <a:srgbClr val="3F8BFF"/>
+          </a:solidFill>
+          <a:ln w="13970">
+            <a:solidFill>
+              <a:srgbClr val="3F8BFF"/>
+            </a:solidFill>
+          </a:ln>
+        </p:spPr>
+        <p:style>
+          <a:lnRef idx="2">
+            <a:schemeClr val="accent1">
+              <a:shade val="15000"/>
+            </a:schemeClr>
+          </a:lnRef>
+          <a:fillRef idx="1">
+            <a:schemeClr val="accent1"/>
+          </a:fillRef>
+          <a:effectRef idx="0">
+            <a:schemeClr val="accent1"/>
+          </a:effectRef>
+          <a:fontRef idx="minor">
+            <a:schemeClr val="lt1"/>
+          </a:fontRef>
+        </p:style>
+        <p:txBody>
+          <a:bodyPr wrap="square" lIns="0" tIns="0" rIns="0" bIns="0" rtlCol="0" anchor="ctr"/>
+          <a:lstStyle/>
+          <a:p>
+            <a:pPr algn="ctr"/>
+            <a:r>
+              <a:rPr lang="en-US" sz="1700">
+                <a:solidFill>
+                  <a:srgbClr val="FF0000"/>
+                </a:solidFill>
+                <a:latin typeface="Aptos" panose="020B0004020202020204" pitchFamily="34" charset="0"/>
+              </a:rPr>
+              <a:t>U2</a:t>
+            </a:r>
+          </a:p>
+        </p:txBody>
+      </p:sp>
+      <p:sp>
+        <p:nvSpPr>
+          <p:cNvPr id="60" name="Rectangle: Rounded Corners 59">
+            <a:extLst>
+              <a:ext uri="{FF2B5EF4-FFF2-40B4-BE49-F238E27FC236}">
+                <a16:creationId xmlns:a16="http://schemas.microsoft.com/office/drawing/2014/main" id="{CA9A26F6-ED89-EC56-A8FB-99A77EEAAD85}"/>
+              </a:ext>
+            </a:extLst>
+          </p:cNvPr>
+          <p:cNvSpPr/>
+          <p:nvPr/>
+        </p:nvSpPr>
+        <p:spPr>
+          <a:xfrm>
+            <a:off x="8229600" y="3492500"/>
+            <a:ext cx="3302000" cy="558800"/>
+          </a:xfrm>
+          <a:prstGeom prst="roundRect">
+            <a:avLst/>
+          </a:prstGeom>
+          <a:solidFill>
+            <a:srgbClr val="E6F3FF"/>
+          </a:solidFill>
+          <a:ln w="13970">
+            <a:solidFill>
+              <a:srgbClr val="3F8BFF"/>
+            </a:solidFill>
+          </a:ln>
+        </p:spPr>
+        <p:style>
+          <a:lnRef idx="2">
+            <a:schemeClr val="accent1">
+              <a:shade val="15000"/>
+            </a:schemeClr>
+          </a:lnRef>
+          <a:fillRef idx="1">
+            <a:schemeClr val="accent1"/>
+          </a:fillRef>
+          <a:effectRef idx="0">
+            <a:schemeClr val="accent1"/>
+          </a:effectRef>
+          <a:fontRef idx="minor">
+            <a:schemeClr val="lt1"/>
+          </a:fontRef>
+        </p:style>
+        <p:txBody>
+          <a:bodyPr wrap="square" lIns="0" tIns="0" rIns="0" bIns="0" rtlCol="0" anchor="ctr"/>
+          <a:lstStyle/>
+          <a:p>
+            <a:pPr algn="ctr"/>
+            <a:r>
+              <a:rPr lang="en-US" sz="1600">
+                <a:solidFill>
+                  <a:srgbClr val="14191E"/>
+                </a:solidFill>
+                <a:latin typeface="Aptos" panose="020B0004020202020204" pitchFamily="34" charset="0"/>
+              </a:rPr>
+              <a:t>GP28 - request input</a:t>
+            </a:r>
+          </a:p>
+        </p:txBody>
+      </p:sp>
+      <p:sp>
+        <p:nvSpPr>
+          <p:cNvPr id="61" name="Rectangle: Rounded Corners 60">
+            <a:extLst>
+              <a:ext uri="{FF2B5EF4-FFF2-40B4-BE49-F238E27FC236}">
+                <a16:creationId xmlns:a16="http://schemas.microsoft.com/office/drawing/2014/main" id="{F53806BE-5142-8F64-FCBB-33DF8CFC879A}"/>
+              </a:ext>
+            </a:extLst>
+          </p:cNvPr>
+          <p:cNvSpPr/>
+          <p:nvPr/>
+        </p:nvSpPr>
+        <p:spPr>
+          <a:xfrm>
+            <a:off x="660400" y="4318000"/>
+            <a:ext cx="3302000" cy="558800"/>
+          </a:xfrm>
+          <a:prstGeom prst="roundRect">
+            <a:avLst/>
+          </a:prstGeom>
+          <a:solidFill>
+            <a:srgbClr val="EFF1F3"/>
+          </a:solidFill>
+          <a:ln w="13970">
+            <a:solidFill>
+              <a:srgbClr val="BCC5CD"/>
+            </a:solidFill>
+          </a:ln>
+        </p:spPr>
+        <p:style>
+          <a:lnRef idx="2">
+            <a:schemeClr val="accent1">
+              <a:shade val="15000"/>
+            </a:schemeClr>
+          </a:lnRef>
+          <a:fillRef idx="1">
+            <a:schemeClr val="accent1"/>
+          </a:fillRef>
+          <a:effectRef idx="0">
+            <a:schemeClr val="accent1"/>
+          </a:effectRef>
+          <a:fontRef idx="minor">
+            <a:schemeClr val="lt1"/>
+          </a:fontRef>
+        </p:style>
+        <p:txBody>
+          <a:bodyPr wrap="square" lIns="0" tIns="0" rIns="0" bIns="0" rtlCol="0" anchor="ctr"/>
+          <a:lstStyle/>
+          <a:p>
+            <a:pPr algn="ctr"/>
+            <a:r>
+              <a:rPr lang="en-US" sz="1600">
+                <a:solidFill>
+                  <a:srgbClr val="14191E"/>
+                </a:solidFill>
+                <a:latin typeface="Aptos" panose="020B0004020202020204" pitchFamily="34" charset="0"/>
+              </a:rPr>
+              <a:t>LIMA / PRB* - input</a:t>
+            </a:r>
+          </a:p>
+        </p:txBody>
+      </p:sp>
+      <p:sp>
+        <p:nvSpPr>
+          <p:cNvPr id="62" name="Rectangle: Rounded Corners 61">
+            <a:extLst>
+              <a:ext uri="{FF2B5EF4-FFF2-40B4-BE49-F238E27FC236}">
+                <a16:creationId xmlns:a16="http://schemas.microsoft.com/office/drawing/2014/main" id="{B2D3D29C-5B6C-3B23-5E40-093AD6577AA6}"/>
+              </a:ext>
+            </a:extLst>
+          </p:cNvPr>
+          <p:cNvSpPr/>
+          <p:nvPr/>
+        </p:nvSpPr>
+        <p:spPr>
+          <a:xfrm>
+            <a:off x="4724400" y="4318000"/>
+            <a:ext cx="2743200" cy="558800"/>
+          </a:xfrm>
+          <a:prstGeom prst="roundRect">
+            <a:avLst/>
+          </a:prstGeom>
+          <a:solidFill>
+            <a:srgbClr val="3F8BFF"/>
+          </a:solidFill>
+          <a:ln w="13970">
+            <a:solidFill>
+              <a:srgbClr val="3F8BFF"/>
+            </a:solidFill>
+          </a:ln>
+        </p:spPr>
+        <p:style>
+          <a:lnRef idx="2">
+            <a:schemeClr val="accent1">
+              <a:shade val="15000"/>
+            </a:schemeClr>
+          </a:lnRef>
+          <a:fillRef idx="1">
+            <a:schemeClr val="accent1"/>
+          </a:fillRef>
+          <a:effectRef idx="0">
+            <a:schemeClr val="accent1"/>
+          </a:effectRef>
+          <a:fontRef idx="minor">
+            <a:schemeClr val="lt1"/>
+          </a:fontRef>
+        </p:style>
+        <p:txBody>
+          <a:bodyPr wrap="square" lIns="0" tIns="0" rIns="0" bIns="0" rtlCol="0" anchor="ctr"/>
+          <a:lstStyle/>
+          <a:p>
+            <a:pPr algn="ctr"/>
+            <a:r>
+              <a:rPr lang="en-US" sz="1700">
+                <a:solidFill>
+                  <a:srgbClr val="FF0000"/>
+                </a:solidFill>
+                <a:latin typeface="Aptos" panose="020B0004020202020204" pitchFamily="34" charset="0"/>
+              </a:rPr>
+              <a:t>U3</a:t>
+            </a:r>
+          </a:p>
+        </p:txBody>
+      </p:sp>
+      <p:sp>
+        <p:nvSpPr>
+          <p:cNvPr id="63" name="Rectangle: Rounded Corners 62">
+            <a:extLst>
+              <a:ext uri="{FF2B5EF4-FFF2-40B4-BE49-F238E27FC236}">
+                <a16:creationId xmlns:a16="http://schemas.microsoft.com/office/drawing/2014/main" id="{AC355B4A-DC31-69FC-AEB4-3A1298F3A39A}"/>
+              </a:ext>
+            </a:extLst>
+          </p:cNvPr>
+          <p:cNvSpPr/>
+          <p:nvPr/>
+        </p:nvSpPr>
+        <p:spPr>
+          <a:xfrm>
+            <a:off x="8229600" y="4318000"/>
+            <a:ext cx="3302000" cy="558800"/>
+          </a:xfrm>
+          <a:prstGeom prst="roundRect">
+            <a:avLst/>
+          </a:prstGeom>
+          <a:solidFill>
+            <a:srgbClr val="E6F3FF"/>
+          </a:solidFill>
+          <a:ln w="13970">
+            <a:solidFill>
+              <a:srgbClr val="3F8BFF"/>
+            </a:solidFill>
+          </a:ln>
+        </p:spPr>
+        <p:style>
+          <a:lnRef idx="2">
+            <a:schemeClr val="accent1">
+              <a:shade val="15000"/>
+            </a:schemeClr>
+          </a:lnRef>
+          <a:fillRef idx="1">
+            <a:schemeClr val="accent1"/>
+          </a:fillRef>
+          <a:effectRef idx="0">
+            <a:schemeClr val="accent1"/>
+          </a:effectRef>
+          <a:fontRef idx="minor">
+            <a:schemeClr val="lt1"/>
+          </a:fontRef>
+        </p:style>
+        <p:txBody>
+          <a:bodyPr wrap="square" lIns="0" tIns="0" rIns="0" bIns="0" rtlCol="0" anchor="ctr"/>
+          <a:lstStyle/>
+          <a:p>
+            <a:pPr algn="ctr"/>
+            <a:r>
+              <a:rPr lang="en-US" sz="1600">
+                <a:solidFill>
+                  <a:srgbClr val="14191E"/>
+                </a:solidFill>
+                <a:latin typeface="Aptos" panose="020B0004020202020204" pitchFamily="34" charset="0"/>
+              </a:rPr>
+              <a:t>GP27 - status output</a:t>
+            </a:r>
+          </a:p>
+        </p:txBody>
+      </p:sp>
+      <p:sp>
+        <p:nvSpPr>
+          <p:cNvPr id="64" name="Rectangle: Rounded Corners 63">
+            <a:extLst>
+              <a:ext uri="{FF2B5EF4-FFF2-40B4-BE49-F238E27FC236}">
+                <a16:creationId xmlns:a16="http://schemas.microsoft.com/office/drawing/2014/main" id="{7E909289-9870-D8C1-CABE-13381B43C772}"/>
+              </a:ext>
+            </a:extLst>
+          </p:cNvPr>
+          <p:cNvSpPr/>
+          <p:nvPr/>
+        </p:nvSpPr>
+        <p:spPr>
+          <a:xfrm>
+            <a:off x="660400" y="5207000"/>
+            <a:ext cx="10871200" cy="787400"/>
+          </a:xfrm>
+          <a:prstGeom prst="roundRect">
+            <a:avLst/>
+          </a:prstGeom>
+          <a:solidFill>
+            <a:srgbClr val="ECF6FF"/>
+          </a:solidFill>
+          <a:ln w="19050">
+            <a:noFill/>
+            <a:prstDash val="solid"/>
+          </a:ln>
+          <a:effectLst/>
+          <a:extLst>
+            <a:ext uri="{91240B29-F687-4F45-9708-019B960494DF}">
+              <a14:hiddenLine xmlns:a14="http://schemas.microsoft.com/office/drawing/2010/main" w="19050">
+                <a:solidFill>
+                  <a:schemeClr val="accent1">
+                    <a:shade val="15000"/>
+                  </a:schemeClr>
+                </a:solidFill>
+                <a:prstDash val="solid"/>
+              </a14:hiddenLine>
+            </a:ext>
+          </a:extLst>
+        </p:spPr>
+        <p:style>
+          <a:lnRef idx="2">
+            <a:schemeClr val="accent1">
+              <a:shade val="15000"/>
+            </a:schemeClr>
+          </a:lnRef>
+          <a:fillRef idx="1">
+            <a:schemeClr val="accent1"/>
+          </a:fillRef>
+          <a:effectRef idx="0">
+            <a:schemeClr val="accent1"/>
+          </a:effectRef>
+          <a:fontRef idx="minor">
+            <a:schemeClr val="lt1"/>
+          </a:fontRef>
+        </p:style>
+        <p:txBody>
+          <a:bodyPr rtlCol="0" anchor="ctr"/>
+          <a:lstStyle/>
+          <a:p>
+            <a:pPr algn="ctr"/>
+            <a:endParaRPr lang="en-US"/>
+          </a:p>
+        </p:txBody>
+      </p:sp>
+      <p:sp>
+        <p:nvSpPr>
+          <p:cNvPr id="65" name="TextBox 64">
+            <a:extLst>
+              <a:ext uri="{FF2B5EF4-FFF2-40B4-BE49-F238E27FC236}">
+                <a16:creationId xmlns:a16="http://schemas.microsoft.com/office/drawing/2014/main" id="{25DCC5BC-AFA3-ACE6-E61A-0FB0D51FBA8C}"/>
+              </a:ext>
+            </a:extLst>
+          </p:cNvPr>
+          <p:cNvSpPr txBox="1"/>
+          <p:nvPr/>
+        </p:nvSpPr>
+        <p:spPr>
+          <a:xfrm>
+            <a:off x="914400" y="5367094"/>
+            <a:ext cx="10363200" cy="261610"/>
+          </a:xfrm>
+          <a:prstGeom prst="rect">
+            <a:avLst/>
+          </a:prstGeom>
+          <a:noFill/>
+        </p:spPr>
+        <p:txBody>
+          <a:bodyPr vert="horz" wrap="square" lIns="0" tIns="0" rIns="0" bIns="0" rtlCol="0" anchor="ctr">
+            <a:spAutoFit/>
+          </a:bodyPr>
+          <a:lstStyle/>
+          <a:p>
+            <a:r>
+              <a:rPr lang="en-US" sz="1700" b="1">
+                <a:solidFill>
+                  <a:srgbClr val="14191E"/>
+                </a:solidFill>
+                <a:latin typeface="Aptos" panose="020B0004020202020204" pitchFamily="34" charset="0"/>
+              </a:rPr>
+              <a:t>Why this matters</a:t>
+            </a:r>
+          </a:p>
+        </p:txBody>
+      </p:sp>
+      <p:sp>
+        <p:nvSpPr>
+          <p:cNvPr id="66" name="TextBox 65">
+            <a:extLst>
+              <a:ext uri="{FF2B5EF4-FFF2-40B4-BE49-F238E27FC236}">
+                <a16:creationId xmlns:a16="http://schemas.microsoft.com/office/drawing/2014/main" id="{08A7FCB3-6D50-AB76-76AB-0E9CB31F33DB}"/>
+              </a:ext>
+            </a:extLst>
+          </p:cNvPr>
+          <p:cNvSpPr txBox="1"/>
+          <p:nvPr/>
+        </p:nvSpPr>
+        <p:spPr>
+          <a:xfrm>
+            <a:off x="914400" y="5838483"/>
+            <a:ext cx="10363200" cy="230832"/>
+          </a:xfrm>
+          <a:prstGeom prst="rect">
+            <a:avLst/>
+          </a:prstGeom>
+          <a:noFill/>
+        </p:spPr>
+        <p:txBody>
+          <a:bodyPr vert="horz" wrap="square" lIns="0" tIns="0" rIns="0" bIns="0" rtlCol="0" anchor="ctr">
+            <a:spAutoFit/>
+          </a:bodyPr>
+          <a:lstStyle/>
+          <a:p>
+            <a:r>
+              <a:rPr lang="en-US" sz="1500">
+                <a:solidFill>
+                  <a:srgbClr val="5B6571"/>
+                </a:solidFill>
+                <a:latin typeface="Aptos" panose="020B0004020202020204" pitchFamily="34" charset="0"/>
+              </a:rPr>
+              <a:t>Only digital states cross the boundary; power, grounds, load-cell data, motor current, and UART stay in their own domains.</a:t>
+            </a:r>
+          </a:p>
+        </p:txBody>
+      </p:sp>
+      <p:sp>
+        <p:nvSpPr>
+          <p:cNvPr id="67" name="TextBox 66">
+            <a:extLst>
+              <a:ext uri="{FF2B5EF4-FFF2-40B4-BE49-F238E27FC236}">
+                <a16:creationId xmlns:a16="http://schemas.microsoft.com/office/drawing/2014/main" id="{B47A284D-1EC0-BF61-2D16-B771CA52546F}"/>
+              </a:ext>
+            </a:extLst>
+          </p:cNvPr>
+          <p:cNvSpPr txBox="1"/>
+          <p:nvPr/>
+        </p:nvSpPr>
+        <p:spPr>
+          <a:xfrm>
+            <a:off x="660400" y="6142166"/>
+            <a:ext cx="10871200" cy="184666"/>
+          </a:xfrm>
+          <a:prstGeom prst="rect">
+            <a:avLst/>
+          </a:prstGeom>
+          <a:noFill/>
+        </p:spPr>
+        <p:txBody>
+          <a:bodyPr vert="horz" wrap="square" lIns="0" tIns="0" rIns="0" bIns="0" rtlCol="0" anchor="ctr">
+            <a:spAutoFit/>
+          </a:bodyPr>
+          <a:lstStyle/>
+          <a:p>
+            <a:r>
+              <a:rPr lang="en-US" sz="1200">
+                <a:solidFill>
+                  <a:srgbClr val="5B6571"/>
+                </a:solidFill>
+                <a:latin typeface="Aptos" panose="020B0004020202020204" pitchFamily="34" charset="0"/>
+              </a:rPr>
+              <a:t>* GP27 currently returns through LIMA; PRB remains a candidate pending F-08 verification.</a:t>
+            </a:r>
+          </a:p>
+        </p:txBody>
+      </p:sp>
+    </p:spTree>
+    <p:extLst>
+      <p:ext uri="{BB962C8B-B14F-4D97-AF65-F5344CB8AC3E}">
+        <p14:creationId xmlns:p14="http://schemas.microsoft.com/office/powerpoint/2010/main" val="1369350868"/>
+      </p:ext>
+    </p:extLst>
+  </p:cSld>
+  <p:clrMapOvr>
+    <a:masterClrMapping/>
+  </p:clrMapOvr>
+</p:sld>
+</file>
+
+<file path=ppt/slides/slide5.xml><?xml version="1.0" encoding="utf-8"?>
 <p:sld xmlns:a="http://schemas.openxmlformats.org/drawingml/2006/main" xmlns:r="http://schemas.openxmlformats.org/officeDocument/2006/relationships" xmlns:p="http://schemas.openxmlformats.org/presentationml/2006/main">
   <p:cSld>
     <p:bg>
@@ -10030,7 +11763,7 @@
         </p:spPr>
         <p:txBody>
           <a:bodyPr lIns="0" tIns="0" rIns="0" bIns="0" anchor="t">
-            <a:normAutofit fontScale="90443" lnSpcReduction="20000"/>
+            <a:normAutofit fontScale="97943"/>
           </a:bodyPr>
           <a:lstStyle/>
           <a:p>
@@ -10053,7 +11786,29 @@
                 <a:ea typeface="Helvetica Neue"/>
                 <a:cs typeface="Helvetica Neue"/>
               </a:rPr>
-              <a:t>Homing establishes two different references: machine position and toolhead </a:t>
+              <a:t>Homing</a:t>
+            </a:r>
+            <a:r>
+              <a:rPr lang="en-US" sz="2700" b="1" dirty="0">
+                <a:solidFill>
+                  <a:srgbClr val="000000"/>
+                </a:solidFill>
+                <a:latin typeface="Helvetica Neue"/>
+                <a:ea typeface="Helvetica Neue"/>
+                <a:cs typeface="Helvetica Neue"/>
+              </a:rPr>
+              <a:t>: </a:t>
+            </a:r>
+            <a:r>
+              <a:rPr sz="2700" b="1" dirty="0">
+                <a:solidFill>
+                  <a:srgbClr val="000000"/>
+                </a:solidFill>
+                <a:latin typeface="Helvetica Neue"/>
+                <a:ea typeface="Helvetica Neue"/>
+                <a:cs typeface="Helvetica Neue"/>
+              </a:rPr>
+              <a:t>machine position and toolhead </a:t>
             </a:r>
             <a:r>
               <a:rPr lang="en-US" sz="2700" b="1" dirty="0">
@@ -10220,7 +11975,7 @@
               </a:defRPr>
             </a:pPr>
             <a:r>
-              <a:rPr sz="900" b="0">
+              <a:rPr lang="en-US" sz="900" b="0">
                 <a:solidFill>
                   <a:srgbClr val="59616B"/>
                 </a:solidFill>
@@ -10228,8 +11983,16 @@
                 <a:ea typeface="Helvetica Neue"/>
                 <a:cs typeface="Helvetica Neue"/>
               </a:rPr>
-              <a:t>4</a:t>
-            </a:r>
+              <a:t>5</a:t>
+            </a:r>
+            <a:endParaRPr sz="900" b="0">
+              <a:solidFill>
+                <a:srgbClr val="59616B"/>
+              </a:solidFill>
+              <a:latin typeface="Helvetica Neue"/>
+              <a:ea typeface="Helvetica Neue"/>
+              <a:cs typeface="Helvetica Neue"/>
+            </a:endParaRPr>
           </a:p>
         </p:txBody>
       </p:sp>
@@ -10363,7 +12126,7 @@
         </p:spPr>
         <p:txBody>
           <a:bodyPr lIns="0" tIns="0" rIns="0" bIns="0" anchor="t">
-            <a:normAutofit/>
+            <a:normAutofit lnSpcReduction="10000"/>
           </a:bodyPr>
           <a:lstStyle/>
           <a:p>
@@ -10386,8 +12149,49 @@
                 <a:ea typeface="Helvetica Neue"/>
                 <a:cs typeface="Helvetica Neue"/>
               </a:rPr>
-              <a:t>P100 requests toolhead home</a:t>
-            </a:r>
+              <a:t>P100 requests toolhead</a:t>
+            </a:r>
+            <a:r>
+              <a:rPr lang="en-US" sz="1425" b="1" dirty="0">
+                <a:solidFill>
+                  <a:srgbClr val="000000"/>
+                </a:solidFill>
+                <a:latin typeface="Helvetica Neue"/>
+                <a:ea typeface="Helvetica Neue"/>
+                <a:cs typeface="Helvetica Neue"/>
+              </a:rPr>
+              <a:t>-</a:t>
+            </a:r>
+            <a:r>
+              <a:rPr sz="1425" b="1" dirty="0">
+                <a:solidFill>
+                  <a:srgbClr val="000000"/>
+                </a:solidFill>
+                <a:latin typeface="Helvetica Neue"/>
+                <a:ea typeface="Helvetica Neue"/>
+                <a:cs typeface="Helvetica Neue"/>
+              </a:rPr>
+              <a:t>home</a:t>
+            </a:r>
+            <a:r>
+              <a:rPr lang="en-US" sz="1425" b="1" dirty="0">
+                <a:solidFill>
+                  <a:srgbClr val="000000"/>
+                </a:solidFill>
+                <a:latin typeface="Helvetica Neue"/>
+                <a:ea typeface="Helvetica Neue"/>
+                <a:cs typeface="Helvetica Neue"/>
+              </a:rPr>
+              <a:t> handshake</a:t>
+            </a:r>
+            <a:endParaRPr sz="1425" b="1" dirty="0">
+              <a:solidFill>
+                <a:srgbClr val="000000"/>
+              </a:solidFill>
+              <a:latin typeface="Helvetica Neue"/>
+              <a:ea typeface="Helvetica Neue"/>
+              <a:cs typeface="Helvetica Neue"/>
+            </a:endParaRPr>
           </a:p>
         </p:txBody>
       </p:sp>
@@ -10436,7 +12240,7 @@
               </a:defRPr>
             </a:pPr>
             <a:r>
-              <a:rPr sz="1050" b="0">
+              <a:rPr sz="1050" b="0" dirty="0">
                 <a:solidFill>
                   <a:srgbClr val="59616B"/>
                 </a:solidFill>
@@ -11299,7 +13103,7 @@
               </a:defRPr>
             </a:pPr>
             <a:r>
-              <a:rPr sz="1050" b="0">
+              <a:rPr lang="en-US" sz="1050" b="0" dirty="0">
                 <a:solidFill>
                   <a:srgbClr val="59616B"/>
                 </a:solidFill>
@@ -11307,8 +13111,16 @@
                 <a:ea typeface="Helvetica Neue"/>
                 <a:cs typeface="Helvetica Neue"/>
               </a:rPr>
-              <a:t>Physical axis switches establish gantry coordinates.</a:t>
-            </a:r>
+              <a:t>Physical switches</a:t>
+            </a:r>
+            <a:endParaRPr sz="1050" b="0" dirty="0">
+              <a:solidFill>
+                <a:srgbClr val="59616B"/>
+              </a:solidFill>
+              <a:latin typeface="Helvetica Neue"/>
+              <a:ea typeface="Helvetica Neue"/>
+              <a:cs typeface="Helvetica Neue"/>
+            </a:endParaRPr>
           </a:p>
         </p:txBody>
       </p:sp>
@@ -11515,7 +13327,7 @@
               </a:defRPr>
             </a:pPr>
             <a:r>
-              <a:rPr sz="1425" b="1">
+              <a:rPr sz="1425" b="1" dirty="0">
                 <a:solidFill>
                   <a:srgbClr val="000000"/>
                 </a:solidFill>
@@ -11523,7 +13335,29 @@
                 <a:ea typeface="Helvetica Neue"/>
                 <a:cs typeface="Helvetica Neue"/>
               </a:rPr>
-              <a:t>Magnetic scan registers G54</a:t>
+              <a:t>Magnetic scan </a:t>
+            </a:r>
+            <a:r>
+              <a:rPr sz="1425" dirty="0">
+                <a:solidFill>
+                  <a:srgbClr val="000000"/>
+                </a:solidFill>
+                <a:latin typeface="Helvetica Neue"/>
+                <a:ea typeface="Helvetica Neue"/>
+                <a:cs typeface="Helvetica Neue"/>
+              </a:rPr>
+              <a:t>registers </a:t>
+            </a:r>
+            <a:r>
+              <a:rPr sz="1425" u="sng" dirty="0">
+                <a:solidFill>
+                  <a:schemeClr val="accent5"/>
+                </a:solidFill>
+                <a:latin typeface="Helvetica Neue"/>
+                <a:ea typeface="Helvetica Neue"/>
+                <a:cs typeface="Helvetica Neue"/>
+              </a:rPr>
+              <a:t>G54</a:t>
             </a:r>
           </a:p>
         </p:txBody>
@@ -11558,11 +13392,13 @@
         </p:spPr>
         <p:txBody>
           <a:bodyPr lIns="0" tIns="0" rIns="0" bIns="0" anchor="t">
-            <a:normAutofit/>
+            <a:normAutofit fontScale="85000" lnSpcReduction="10000"/>
           </a:bodyPr>
           <a:lstStyle/>
           <a:p>
-            <a:pPr algn="l">
+            <a:pPr marL="171450" indent="-171450" algn="l">
+              <a:buFont typeface="Arial" panose="020B0604020202020204" pitchFamily="34" charset="0"/>
+              <a:buChar char="•"/>
               <a:defRPr sz="1050" b="0">
                 <a:solidFill>
                   <a:srgbClr val="59616B"/>
@@ -11573,7 +13409,7 @@
               </a:defRPr>
             </a:pPr>
             <a:r>
-              <a:rPr sz="1050" b="0">
+              <a:rPr sz="1050" b="0" dirty="0">
                 <a:solidFill>
                   <a:srgbClr val="59616B"/>
                 </a:solidFill>
@@ -11581,7 +13417,84 @@
                 <a:ea typeface="Helvetica Neue"/>
                 <a:cs typeface="Helvetica Neue"/>
               </a:rPr>
-              <a:t>Center magnet sets X/Y zero; outer magnet sets A zero.</a:t>
+              <a:t>Center </a:t>
+            </a:r>
+            <a:r>
+              <a:rPr lang="en-US" sz="1050" b="0" dirty="0">
+                <a:solidFill>
+                  <a:srgbClr val="59616B"/>
+                </a:solidFill>
+                <a:latin typeface="Helvetica Neue"/>
+                <a:ea typeface="Helvetica Neue"/>
+                <a:cs typeface="Helvetica Neue"/>
+              </a:rPr>
+              <a:t>point </a:t>
+            </a:r>
+            <a:r>
+              <a:rPr sz="1050" b="0" dirty="0">
+                <a:solidFill>
+                  <a:srgbClr val="59616B"/>
+                </a:solidFill>
+                <a:latin typeface="Helvetica Neue"/>
+                <a:ea typeface="Helvetica Neue"/>
+                <a:cs typeface="Helvetica Neue"/>
+              </a:rPr>
+              <a:t>magnet sets X/Y zero</a:t>
+            </a:r>
+            <a:endParaRPr lang="en-US" sz="1050" b="0" dirty="0">
+              <a:solidFill>
+                <a:srgbClr val="59616B"/>
+              </a:solidFill>
+              <a:latin typeface="Helvetica Neue"/>
+              <a:ea typeface="Helvetica Neue"/>
+              <a:cs typeface="Helvetica Neue"/>
+            </a:endParaRPr>
+          </a:p>
+          <a:p>
+            <a:pPr marL="171450" indent="-171450" algn="l">
+              <a:buFont typeface="Arial" panose="020B0604020202020204" pitchFamily="34" charset="0"/>
+              <a:buChar char="•"/>
+              <a:defRPr sz="1050" b="0">
+                <a:solidFill>
+                  <a:srgbClr val="59616B"/>
+                </a:solidFill>
+                <a:latin typeface="Helvetica Neue"/>
+                <a:ea typeface="Helvetica Neue"/>
+                <a:cs typeface="Helvetica Neue"/>
+              </a:defRPr>
+            </a:pPr>
+            <a:endParaRPr lang="en-US" sz="1050" b="0" dirty="0">
+              <a:solidFill>
+                <a:srgbClr val="59616B"/>
+              </a:solidFill>
+              <a:latin typeface="Helvetica Neue"/>
+              <a:ea typeface="Helvetica Neue"/>
+              <a:cs typeface="Helvetica Neue"/>
+            </a:endParaRPr>
+          </a:p>
+          <a:p>
+            <a:pPr marL="171450" indent="-171450" algn="l">
+              <a:buFont typeface="Arial" panose="020B0604020202020204" pitchFamily="34" charset="0"/>
+              <a:buChar char="•"/>
+              <a:defRPr sz="1050" b="0">
+                <a:solidFill>
+                  <a:srgbClr val="59616B"/>
+                </a:solidFill>
+                <a:latin typeface="Helvetica Neue"/>
+                <a:ea typeface="Helvetica Neue"/>
+                <a:cs typeface="Helvetica Neue"/>
+              </a:defRPr>
+            </a:pPr>
+            <a:r>
+              <a:rPr sz="1050" b="0" dirty="0">
+                <a:solidFill>
+                  <a:srgbClr val="59616B"/>
+                </a:solidFill>
+                <a:latin typeface="Helvetica Neue"/>
+                <a:ea typeface="Helvetica Neue"/>
+                <a:cs typeface="Helvetica Neue"/>
+              </a:rPr>
+              <a:t>outer magnet sets A zero.</a:t>
             </a:r>
           </a:p>
         </p:txBody>
@@ -11661,495 +13574,389 @@
                 <a:ea typeface="Helvetica Neue"/>
                 <a:cs typeface="Helvetica Neue"/>
               </a:rPr>
-              <a:t> switch remains local to the Pro Micro; the existing GP28/GP27 pair lets P100 receive the result without another RP23CNC pin.</a:t>
-            </a:r>
-          </a:p>
-        </p:txBody>
-      </p:sp>
+              <a:t> switch remains local to the Pro Micro; the existing GP28/GP27 pair lets P100 receive the result</a:t>
+            </a:r>
+          </a:p>
+        </p:txBody>
+      </p:sp>
+      <p:sp>
+        <p:nvSpPr>
+          <p:cNvPr id="32" name="TextBox 31">
+            <a:extLst>
+              <a:ext uri="{FF2B5EF4-FFF2-40B4-BE49-F238E27FC236}">
+                <a16:creationId xmlns:a16="http://schemas.microsoft.com/office/drawing/2014/main" id="{4F8448AA-4359-B31A-D018-913CC057850F}"/>
+              </a:ext>
+            </a:extLst>
+          </p:cNvPr>
+          <p:cNvSpPr txBox="1"/>
+          <p:nvPr/>
+        </p:nvSpPr>
+        <p:spPr>
+          <a:xfrm>
+            <a:off x="1806432" y="1529834"/>
+            <a:ext cx="2851293" cy="369332"/>
+          </a:xfrm>
+          <a:prstGeom prst="rect">
+            <a:avLst/>
+          </a:prstGeom>
+          <a:noFill/>
+        </p:spPr>
+        <p:txBody>
+          <a:bodyPr wrap="none" rtlCol="0">
+            <a:spAutoFit/>
+          </a:bodyPr>
+          <a:lstStyle/>
+          <a:p>
+            <a:r>
+              <a:rPr lang="en-US" dirty="0"/>
+              <a:t>Retraction for homing safety</a:t>
+            </a:r>
+          </a:p>
+        </p:txBody>
+      </p:sp>
+      <p:cxnSp>
+        <p:nvCxnSpPr>
+          <p:cNvPr id="33" name="Straight Connector 32">
+            <a:extLst>
+              <a:ext uri="{FF2B5EF4-FFF2-40B4-BE49-F238E27FC236}">
+                <a16:creationId xmlns:a16="http://schemas.microsoft.com/office/drawing/2014/main" id="{6150B545-5BB1-6DB4-0EEA-697E1F1443F3}"/>
+              </a:ext>
+            </a:extLst>
+          </p:cNvPr>
+          <p:cNvCxnSpPr>
+            <a:cxnSpLocks/>
+          </p:cNvCxnSpPr>
+          <p:nvPr/>
+        </p:nvCxnSpPr>
+        <p:spPr>
+          <a:xfrm flipV="1">
+            <a:off x="4743721" y="1690640"/>
+            <a:ext cx="2168381" cy="7382"/>
+          </a:xfrm>
+          <a:prstGeom prst="line">
+            <a:avLst/>
+          </a:prstGeom>
+        </p:spPr>
+        <p:style>
+          <a:lnRef idx="1">
+            <a:schemeClr val="accent1"/>
+          </a:lnRef>
+          <a:fillRef idx="0">
+            <a:schemeClr val="accent1"/>
+          </a:fillRef>
+          <a:effectRef idx="0">
+            <a:schemeClr val="accent1"/>
+          </a:effectRef>
+          <a:fontRef idx="minor">
+            <a:schemeClr val="tx1"/>
+          </a:fontRef>
+        </p:style>
+      </p:cxnSp>
+      <p:cxnSp>
+        <p:nvCxnSpPr>
+          <p:cNvPr id="34" name="Straight Connector 33">
+            <a:extLst>
+              <a:ext uri="{FF2B5EF4-FFF2-40B4-BE49-F238E27FC236}">
+                <a16:creationId xmlns:a16="http://schemas.microsoft.com/office/drawing/2014/main" id="{96FCADC0-5654-4E93-1657-93BAB4723A48}"/>
+              </a:ext>
+            </a:extLst>
+          </p:cNvPr>
+          <p:cNvCxnSpPr>
+            <a:cxnSpLocks/>
+          </p:cNvCxnSpPr>
+          <p:nvPr/>
+        </p:nvCxnSpPr>
+        <p:spPr>
+          <a:xfrm>
+            <a:off x="6912102" y="1698022"/>
+            <a:ext cx="0" cy="259020"/>
+          </a:xfrm>
+          <a:prstGeom prst="line">
+            <a:avLst/>
+          </a:prstGeom>
+        </p:spPr>
+        <p:style>
+          <a:lnRef idx="1">
+            <a:schemeClr val="accent1"/>
+          </a:lnRef>
+          <a:fillRef idx="0">
+            <a:schemeClr val="accent1"/>
+          </a:fillRef>
+          <a:effectRef idx="0">
+            <a:schemeClr val="accent1"/>
+          </a:effectRef>
+          <a:fontRef idx="minor">
+            <a:schemeClr val="tx1"/>
+          </a:fontRef>
+        </p:style>
+      </p:cxnSp>
+      <p:cxnSp>
+        <p:nvCxnSpPr>
+          <p:cNvPr id="35" name="Straight Connector 34">
+            <a:extLst>
+              <a:ext uri="{FF2B5EF4-FFF2-40B4-BE49-F238E27FC236}">
+                <a16:creationId xmlns:a16="http://schemas.microsoft.com/office/drawing/2014/main" id="{73E97018-D995-BFAC-FFD4-A5BEBC26D80E}"/>
+              </a:ext>
+            </a:extLst>
+          </p:cNvPr>
+          <p:cNvCxnSpPr>
+            <a:cxnSpLocks/>
+          </p:cNvCxnSpPr>
+          <p:nvPr/>
+        </p:nvCxnSpPr>
+        <p:spPr>
+          <a:xfrm>
+            <a:off x="400050" y="1723596"/>
+            <a:ext cx="1270254" cy="0"/>
+          </a:xfrm>
+          <a:prstGeom prst="line">
+            <a:avLst/>
+          </a:prstGeom>
+        </p:spPr>
+        <p:style>
+          <a:lnRef idx="1">
+            <a:schemeClr val="accent1"/>
+          </a:lnRef>
+          <a:fillRef idx="0">
+            <a:schemeClr val="accent1"/>
+          </a:fillRef>
+          <a:effectRef idx="0">
+            <a:schemeClr val="accent1"/>
+          </a:effectRef>
+          <a:fontRef idx="minor">
+            <a:schemeClr val="tx1"/>
+          </a:fontRef>
+        </p:style>
+      </p:cxnSp>
+      <p:cxnSp>
+        <p:nvCxnSpPr>
+          <p:cNvPr id="36" name="Straight Connector 35">
+            <a:extLst>
+              <a:ext uri="{FF2B5EF4-FFF2-40B4-BE49-F238E27FC236}">
+                <a16:creationId xmlns:a16="http://schemas.microsoft.com/office/drawing/2014/main" id="{FFF2B51B-C2CD-1576-F4FC-4CB2F05CE345}"/>
+              </a:ext>
+            </a:extLst>
+          </p:cNvPr>
+          <p:cNvCxnSpPr>
+            <a:cxnSpLocks/>
+          </p:cNvCxnSpPr>
+          <p:nvPr/>
+        </p:nvCxnSpPr>
+        <p:spPr>
+          <a:xfrm>
+            <a:off x="408677" y="1723596"/>
+            <a:ext cx="0" cy="271164"/>
+          </a:xfrm>
+          <a:prstGeom prst="line">
+            <a:avLst/>
+          </a:prstGeom>
+        </p:spPr>
+        <p:style>
+          <a:lnRef idx="1">
+            <a:schemeClr val="accent1"/>
+          </a:lnRef>
+          <a:fillRef idx="0">
+            <a:schemeClr val="accent1"/>
+          </a:fillRef>
+          <a:effectRef idx="0">
+            <a:schemeClr val="accent1"/>
+          </a:effectRef>
+          <a:fontRef idx="minor">
+            <a:schemeClr val="tx1"/>
+          </a:fontRef>
+        </p:style>
+      </p:cxnSp>
+      <p:sp>
+        <p:nvSpPr>
+          <p:cNvPr id="40" name="TextBox 39">
+            <a:extLst>
+              <a:ext uri="{FF2B5EF4-FFF2-40B4-BE49-F238E27FC236}">
+                <a16:creationId xmlns:a16="http://schemas.microsoft.com/office/drawing/2014/main" id="{C3B43731-0EAC-8ECF-506B-10684FDD9E59}"/>
+              </a:ext>
+            </a:extLst>
+          </p:cNvPr>
+          <p:cNvSpPr txBox="1"/>
+          <p:nvPr/>
+        </p:nvSpPr>
+        <p:spPr>
+          <a:xfrm>
+            <a:off x="8134215" y="1513356"/>
+            <a:ext cx="1990673" cy="369332"/>
+          </a:xfrm>
+          <a:prstGeom prst="rect">
+            <a:avLst/>
+          </a:prstGeom>
+          <a:noFill/>
+        </p:spPr>
+        <p:txBody>
+          <a:bodyPr wrap="none" rtlCol="0">
+            <a:spAutoFit/>
+          </a:bodyPr>
+          <a:lstStyle/>
+          <a:p>
+            <a:r>
+              <a:rPr lang="en-US" dirty="0"/>
+              <a:t>Homing movement</a:t>
+            </a:r>
+          </a:p>
+        </p:txBody>
+      </p:sp>
+      <p:cxnSp>
+        <p:nvCxnSpPr>
+          <p:cNvPr id="41" name="Straight Connector 40">
+            <a:extLst>
+              <a:ext uri="{FF2B5EF4-FFF2-40B4-BE49-F238E27FC236}">
+                <a16:creationId xmlns:a16="http://schemas.microsoft.com/office/drawing/2014/main" id="{BE0831D1-1A38-C718-097D-F2CD31D8710B}"/>
+              </a:ext>
+            </a:extLst>
+          </p:cNvPr>
+          <p:cNvCxnSpPr>
+            <a:cxnSpLocks/>
+          </p:cNvCxnSpPr>
+          <p:nvPr/>
+        </p:nvCxnSpPr>
+        <p:spPr>
+          <a:xfrm flipV="1">
+            <a:off x="10437495" y="1723596"/>
+            <a:ext cx="953262" cy="7382"/>
+          </a:xfrm>
+          <a:prstGeom prst="line">
+            <a:avLst/>
+          </a:prstGeom>
+        </p:spPr>
+        <p:style>
+          <a:lnRef idx="1">
+            <a:schemeClr val="accent1"/>
+          </a:lnRef>
+          <a:fillRef idx="0">
+            <a:schemeClr val="accent1"/>
+          </a:fillRef>
+          <a:effectRef idx="0">
+            <a:schemeClr val="accent1"/>
+          </a:effectRef>
+          <a:fontRef idx="minor">
+            <a:schemeClr val="tx1"/>
+          </a:fontRef>
+        </p:style>
+      </p:cxnSp>
+      <p:cxnSp>
+        <p:nvCxnSpPr>
+          <p:cNvPr id="42" name="Straight Connector 41">
+            <a:extLst>
+              <a:ext uri="{FF2B5EF4-FFF2-40B4-BE49-F238E27FC236}">
+                <a16:creationId xmlns:a16="http://schemas.microsoft.com/office/drawing/2014/main" id="{8BCA5D0D-8FF0-5B47-8687-B0D89B114034}"/>
+              </a:ext>
+            </a:extLst>
+          </p:cNvPr>
+          <p:cNvCxnSpPr>
+            <a:cxnSpLocks/>
+          </p:cNvCxnSpPr>
+          <p:nvPr/>
+        </p:nvCxnSpPr>
+        <p:spPr>
+          <a:xfrm>
+            <a:off x="11390757" y="1730978"/>
+            <a:ext cx="0" cy="259020"/>
+          </a:xfrm>
+          <a:prstGeom prst="line">
+            <a:avLst/>
+          </a:prstGeom>
+        </p:spPr>
+        <p:style>
+          <a:lnRef idx="1">
+            <a:schemeClr val="accent1"/>
+          </a:lnRef>
+          <a:fillRef idx="0">
+            <a:schemeClr val="accent1"/>
+          </a:fillRef>
+          <a:effectRef idx="0">
+            <a:schemeClr val="accent1"/>
+          </a:effectRef>
+          <a:fontRef idx="minor">
+            <a:schemeClr val="tx1"/>
+          </a:fontRef>
+        </p:style>
+      </p:cxnSp>
+      <p:cxnSp>
+        <p:nvCxnSpPr>
+          <p:cNvPr id="43" name="Straight Connector 42">
+            <a:extLst>
+              <a:ext uri="{FF2B5EF4-FFF2-40B4-BE49-F238E27FC236}">
+                <a16:creationId xmlns:a16="http://schemas.microsoft.com/office/drawing/2014/main" id="{B3704061-CFD3-EBA2-CD2B-EF2791C19BDF}"/>
+              </a:ext>
+            </a:extLst>
+          </p:cNvPr>
+          <p:cNvCxnSpPr>
+            <a:cxnSpLocks/>
+          </p:cNvCxnSpPr>
+          <p:nvPr/>
+        </p:nvCxnSpPr>
+        <p:spPr>
+          <a:xfrm>
+            <a:off x="7172325" y="1698022"/>
+            <a:ext cx="680049" cy="0"/>
+          </a:xfrm>
+          <a:prstGeom prst="line">
+            <a:avLst/>
+          </a:prstGeom>
+        </p:spPr>
+        <p:style>
+          <a:lnRef idx="1">
+            <a:schemeClr val="accent1"/>
+          </a:lnRef>
+          <a:fillRef idx="0">
+            <a:schemeClr val="accent1"/>
+          </a:fillRef>
+          <a:effectRef idx="0">
+            <a:schemeClr val="accent1"/>
+          </a:effectRef>
+          <a:fontRef idx="minor">
+            <a:schemeClr val="tx1"/>
+          </a:fontRef>
+        </p:style>
+      </p:cxnSp>
+      <p:cxnSp>
+        <p:nvCxnSpPr>
+          <p:cNvPr id="44" name="Straight Connector 43">
+            <a:extLst>
+              <a:ext uri="{FF2B5EF4-FFF2-40B4-BE49-F238E27FC236}">
+                <a16:creationId xmlns:a16="http://schemas.microsoft.com/office/drawing/2014/main" id="{70FF96DF-98E3-1ED3-1587-9A9003D7163F}"/>
+              </a:ext>
+            </a:extLst>
+          </p:cNvPr>
+          <p:cNvCxnSpPr>
+            <a:cxnSpLocks/>
+          </p:cNvCxnSpPr>
+          <p:nvPr/>
+        </p:nvCxnSpPr>
+        <p:spPr>
+          <a:xfrm>
+            <a:off x="7180952" y="1698022"/>
+            <a:ext cx="0" cy="271164"/>
+          </a:xfrm>
+          <a:prstGeom prst="line">
+            <a:avLst/>
+          </a:prstGeom>
+        </p:spPr>
+        <p:style>
+          <a:lnRef idx="1">
+            <a:schemeClr val="accent1"/>
+          </a:lnRef>
+          <a:fillRef idx="0">
+            <a:schemeClr val="accent1"/>
+          </a:fillRef>
+          <a:effectRef idx="0">
+            <a:schemeClr val="accent1"/>
+          </a:effectRef>
+          <a:fontRef idx="minor">
+            <a:schemeClr val="tx1"/>
+          </a:fontRef>
+        </p:style>
+      </p:cxnSp>
     </p:spTree>
     <p:extLst>
       <p:ext uri="{BB962C8B-B14F-4D97-AF65-F5344CB8AC3E}">
         <p14:creationId xmlns:p14="http://schemas.microsoft.com/office/powerpoint/2010/main" val="1592565433"/>
-      </p:ext>
-    </p:extLst>
-  </p:cSld>
-  <p:clrMapOvr>
-    <a:masterClrMapping/>
-  </p:clrMapOvr>
-</p:sld>
-</file>
-
-<file path=ppt/slides/slide5.xml><?xml version="1.0" encoding="utf-8"?>
-<p:sld xmlns:a="http://schemas.openxmlformats.org/drawingml/2006/main" xmlns:r="http://schemas.openxmlformats.org/officeDocument/2006/relationships" xmlns:p="http://schemas.openxmlformats.org/presentationml/2006/main">
-  <p:cSld>
-    <p:bg>
-      <p:bgPr>
-        <a:solidFill>
-          <a:srgbClr val="141A20"/>
-        </a:solidFill>
-        <a:effectLst/>
-      </p:bgPr>
-    </p:bg>
-    <p:spTree>
-      <p:nvGrpSpPr>
-        <p:cNvPr id="1" name=""/>
-        <p:cNvGrpSpPr/>
-        <p:nvPr/>
-      </p:nvGrpSpPr>
-      <p:grpSpPr>
-        <a:xfrm>
-          <a:off x="0" y="0"/>
-          <a:ext cx="0" cy="0"/>
-          <a:chOff x="0" y="0"/>
-          <a:chExt cx="0" cy="0"/>
-        </a:xfrm>
-      </p:grpSpPr>
-      <p:pic>
-        <p:nvPicPr>
-          <p:cNvPr id="16" name="Picture 15"/>
-          <p:cNvPicPr>
-            <a:picLocks noChangeAspect="1"/>
-          </p:cNvPicPr>
-          <p:nvPr/>
-        </p:nvPicPr>
-        <p:blipFill>
-          <a:blip r:embed="rId3"/>
-          <a:stretch/>
-        </p:blipFill>
-        <p:spPr>
-          <a:xfrm>
-            <a:off x="-1" y="-1"/>
-            <a:ext cx="9753600" cy="6858000"/>
-          </a:xfrm>
-          <a:prstGeom prst="rect">
-            <a:avLst/>
-          </a:prstGeom>
-        </p:spPr>
-      </p:pic>
-      <p:sp>
-        <p:nvSpPr>
-          <p:cNvPr id="6" name="P100 Step 1 Hit Area">
-            <a:hlinkClick r:id="rId4" action="ppaction://hlinksldjump"/>
-            <a:hlinkHover r:id="rId4" action="ppaction://hlinksldjump"/>
-            <a:extLst>
-              <a:ext uri="{FF2B5EF4-FFF2-40B4-BE49-F238E27FC236}">
-                <a16:creationId xmlns:a16="http://schemas.microsoft.com/office/drawing/2014/main" id="{51C760A9-4B49-6A73-4C9A-1FCCFECA19FE}"/>
-              </a:ext>
-            </a:extLst>
-          </p:cNvPr>
-          <p:cNvSpPr/>
-          <p:nvPr/>
-        </p:nvSpPr>
-        <p:spPr>
-          <a:xfrm>
-            <a:off x="964194" y="1616044"/>
-            <a:ext cx="4617267" cy="570368"/>
-          </a:xfrm>
-          <a:prstGeom prst="rect">
-            <a:avLst/>
-          </a:prstGeom>
-          <a:solidFill>
-            <a:schemeClr val="accent1">
-              <a:alpha val="0"/>
-            </a:schemeClr>
-          </a:solidFill>
-          <a:ln w="19050">
-            <a:noFill/>
-            <a:prstDash val="solid"/>
-          </a:ln>
-          <a:effectLst/>
-          <a:extLst>
-            <a:ext uri="{91240B29-F687-4F45-9708-019B960494DF}">
-              <a14:hiddenLine xmlns:a14="http://schemas.microsoft.com/office/drawing/2010/main" w="19050">
-                <a:solidFill>
-                  <a:schemeClr val="accent1">
-                    <a:shade val="15000"/>
-                  </a:schemeClr>
-                </a:solidFill>
-                <a:prstDash val="solid"/>
-              </a14:hiddenLine>
-            </a:ext>
-          </a:extLst>
-        </p:spPr>
-        <p:style>
-          <a:lnRef idx="2">
-            <a:schemeClr val="accent1">
-              <a:shade val="15000"/>
-            </a:schemeClr>
-          </a:lnRef>
-          <a:fillRef idx="1">
-            <a:schemeClr val="accent1"/>
-          </a:fillRef>
-          <a:effectRef idx="0">
-            <a:schemeClr val="accent1"/>
-          </a:effectRef>
-          <a:fontRef idx="minor">
-            <a:schemeClr val="lt1"/>
-          </a:fontRef>
-        </p:style>
-        <p:txBody>
-          <a:bodyPr rtlCol="0" anchor="ctr"/>
-          <a:lstStyle/>
-          <a:p>
-            <a:pPr algn="ctr"/>
-            <a:endParaRPr lang="en-US" sz="2566"/>
-          </a:p>
-        </p:txBody>
-      </p:sp>
-      <p:sp>
-        <p:nvSpPr>
-          <p:cNvPr id="12" name="P100 Step 2 Hit Area">
-            <a:hlinkClick r:id="rId5" action="ppaction://hlinksldjump"/>
-            <a:hlinkHover r:id="rId5" action="ppaction://hlinksldjump"/>
-            <a:extLst>
-              <a:ext uri="{FF2B5EF4-FFF2-40B4-BE49-F238E27FC236}">
-                <a16:creationId xmlns:a16="http://schemas.microsoft.com/office/drawing/2014/main" id="{02966AAC-CE77-345B-9685-363AC942F206}"/>
-              </a:ext>
-            </a:extLst>
-          </p:cNvPr>
-          <p:cNvSpPr/>
-          <p:nvPr/>
-        </p:nvSpPr>
-        <p:spPr>
-          <a:xfrm>
-            <a:off x="964194" y="2458016"/>
-            <a:ext cx="4617267" cy="570368"/>
-          </a:xfrm>
-          <a:prstGeom prst="rect">
-            <a:avLst/>
-          </a:prstGeom>
-          <a:solidFill>
-            <a:schemeClr val="accent1">
-              <a:alpha val="0"/>
-            </a:schemeClr>
-          </a:solidFill>
-          <a:ln w="19050">
-            <a:noFill/>
-            <a:prstDash val="solid"/>
-          </a:ln>
-          <a:effectLst/>
-          <a:extLst>
-            <a:ext uri="{91240B29-F687-4F45-9708-019B960494DF}">
-              <a14:hiddenLine xmlns:a14="http://schemas.microsoft.com/office/drawing/2010/main" w="19050">
-                <a:solidFill>
-                  <a:schemeClr val="accent1">
-                    <a:shade val="15000"/>
-                  </a:schemeClr>
-                </a:solidFill>
-                <a:prstDash val="solid"/>
-              </a14:hiddenLine>
-            </a:ext>
-          </a:extLst>
-        </p:spPr>
-        <p:style>
-          <a:lnRef idx="2">
-            <a:schemeClr val="accent1">
-              <a:shade val="15000"/>
-            </a:schemeClr>
-          </a:lnRef>
-          <a:fillRef idx="1">
-            <a:schemeClr val="accent1"/>
-          </a:fillRef>
-          <a:effectRef idx="0">
-            <a:schemeClr val="accent1"/>
-          </a:effectRef>
-          <a:fontRef idx="minor">
-            <a:schemeClr val="lt1"/>
-          </a:fontRef>
-        </p:style>
-        <p:txBody>
-          <a:bodyPr rtlCol="0" anchor="ctr"/>
-          <a:lstStyle/>
-          <a:p>
-            <a:pPr algn="ctr"/>
-            <a:endParaRPr lang="en-US" sz="2566"/>
-          </a:p>
-        </p:txBody>
-      </p:sp>
-      <p:sp>
-        <p:nvSpPr>
-          <p:cNvPr id="13" name="P100 Step 3 Hit Area">
-            <a:hlinkClick r:id="rId6" action="ppaction://hlinksldjump"/>
-            <a:hlinkHover r:id="rId6" action="ppaction://hlinksldjump"/>
-            <a:extLst>
-              <a:ext uri="{FF2B5EF4-FFF2-40B4-BE49-F238E27FC236}">
-                <a16:creationId xmlns:a16="http://schemas.microsoft.com/office/drawing/2014/main" id="{DC8809AD-6888-E8B1-1600-967D24442E7A}"/>
-              </a:ext>
-            </a:extLst>
-          </p:cNvPr>
-          <p:cNvSpPr/>
-          <p:nvPr/>
-        </p:nvSpPr>
-        <p:spPr>
-          <a:xfrm>
-            <a:off x="964194" y="3299988"/>
-            <a:ext cx="4617267" cy="570368"/>
-          </a:xfrm>
-          <a:prstGeom prst="rect">
-            <a:avLst/>
-          </a:prstGeom>
-          <a:solidFill>
-            <a:schemeClr val="accent1">
-              <a:alpha val="0"/>
-            </a:schemeClr>
-          </a:solidFill>
-          <a:ln w="19050">
-            <a:noFill/>
-            <a:prstDash val="solid"/>
-          </a:ln>
-          <a:effectLst/>
-          <a:extLst>
-            <a:ext uri="{91240B29-F687-4F45-9708-019B960494DF}">
-              <a14:hiddenLine xmlns:a14="http://schemas.microsoft.com/office/drawing/2010/main" w="19050">
-                <a:solidFill>
-                  <a:schemeClr val="accent1">
-                    <a:shade val="15000"/>
-                  </a:schemeClr>
-                </a:solidFill>
-                <a:prstDash val="solid"/>
-              </a14:hiddenLine>
-            </a:ext>
-          </a:extLst>
-        </p:spPr>
-        <p:style>
-          <a:lnRef idx="2">
-            <a:schemeClr val="accent1">
-              <a:shade val="15000"/>
-            </a:schemeClr>
-          </a:lnRef>
-          <a:fillRef idx="1">
-            <a:schemeClr val="accent1"/>
-          </a:fillRef>
-          <a:effectRef idx="0">
-            <a:schemeClr val="accent1"/>
-          </a:effectRef>
-          <a:fontRef idx="minor">
-            <a:schemeClr val="lt1"/>
-          </a:fontRef>
-        </p:style>
-        <p:txBody>
-          <a:bodyPr rtlCol="0" anchor="ctr"/>
-          <a:lstStyle/>
-          <a:p>
-            <a:pPr algn="ctr"/>
-            <a:endParaRPr lang="en-US" sz="2566"/>
-          </a:p>
-        </p:txBody>
-      </p:sp>
-      <p:sp>
-        <p:nvSpPr>
-          <p:cNvPr id="14" name="P100 Step 4 Hit Area">
-            <a:hlinkClick r:id="rId7" action="ppaction://hlinksldjump"/>
-            <a:hlinkHover r:id="rId7" action="ppaction://hlinksldjump"/>
-            <a:extLst>
-              <a:ext uri="{FF2B5EF4-FFF2-40B4-BE49-F238E27FC236}">
-                <a16:creationId xmlns:a16="http://schemas.microsoft.com/office/drawing/2014/main" id="{C92CA85D-B428-37AF-CF04-5E9E5D31441F}"/>
-              </a:ext>
-            </a:extLst>
-          </p:cNvPr>
-          <p:cNvSpPr/>
-          <p:nvPr/>
-        </p:nvSpPr>
-        <p:spPr>
-          <a:xfrm>
-            <a:off x="964194" y="4141960"/>
-            <a:ext cx="4617267" cy="570368"/>
-          </a:xfrm>
-          <a:prstGeom prst="rect">
-            <a:avLst/>
-          </a:prstGeom>
-          <a:solidFill>
-            <a:schemeClr val="accent1">
-              <a:alpha val="0"/>
-            </a:schemeClr>
-          </a:solidFill>
-          <a:ln w="19050">
-            <a:noFill/>
-            <a:prstDash val="solid"/>
-          </a:ln>
-          <a:effectLst/>
-          <a:extLst>
-            <a:ext uri="{91240B29-F687-4F45-9708-019B960494DF}">
-              <a14:hiddenLine xmlns:a14="http://schemas.microsoft.com/office/drawing/2010/main" w="19050">
-                <a:solidFill>
-                  <a:schemeClr val="accent1">
-                    <a:shade val="15000"/>
-                  </a:schemeClr>
-                </a:solidFill>
-                <a:prstDash val="solid"/>
-              </a14:hiddenLine>
-            </a:ext>
-          </a:extLst>
-        </p:spPr>
-        <p:style>
-          <a:lnRef idx="2">
-            <a:schemeClr val="accent1">
-              <a:shade val="15000"/>
-            </a:schemeClr>
-          </a:lnRef>
-          <a:fillRef idx="1">
-            <a:schemeClr val="accent1"/>
-          </a:fillRef>
-          <a:effectRef idx="0">
-            <a:schemeClr val="accent1"/>
-          </a:effectRef>
-          <a:fontRef idx="minor">
-            <a:schemeClr val="lt1"/>
-          </a:fontRef>
-        </p:style>
-        <p:txBody>
-          <a:bodyPr rtlCol="0" anchor="ctr"/>
-          <a:lstStyle/>
-          <a:p>
-            <a:pPr algn="ctr"/>
-            <a:endParaRPr lang="en-US" sz="2566"/>
-          </a:p>
-        </p:txBody>
-      </p:sp>
-      <p:sp>
-        <p:nvSpPr>
-          <p:cNvPr id="15" name="P100 Step 5 Hit Area">
-            <a:hlinkClick r:id="rId8" action="ppaction://hlinksldjump"/>
-            <a:hlinkHover r:id="rId8" action="ppaction://hlinksldjump"/>
-            <a:extLst>
-              <a:ext uri="{FF2B5EF4-FFF2-40B4-BE49-F238E27FC236}">
-                <a16:creationId xmlns:a16="http://schemas.microsoft.com/office/drawing/2014/main" id="{5F9A2FFD-6D3C-230B-74BD-15184D2DF4DC}"/>
-              </a:ext>
-            </a:extLst>
-          </p:cNvPr>
-          <p:cNvSpPr/>
-          <p:nvPr/>
-        </p:nvSpPr>
-        <p:spPr>
-          <a:xfrm>
-            <a:off x="964194" y="4983933"/>
-            <a:ext cx="4617267" cy="570368"/>
-          </a:xfrm>
-          <a:prstGeom prst="rect">
-            <a:avLst/>
-          </a:prstGeom>
-          <a:solidFill>
-            <a:schemeClr val="accent1">
-              <a:alpha val="0"/>
-            </a:schemeClr>
-          </a:solidFill>
-          <a:ln w="19050">
-            <a:noFill/>
-            <a:prstDash val="solid"/>
-          </a:ln>
-          <a:effectLst/>
-          <a:extLst>
-            <a:ext uri="{91240B29-F687-4F45-9708-019B960494DF}">
-              <a14:hiddenLine xmlns:a14="http://schemas.microsoft.com/office/drawing/2010/main" w="19050">
-                <a:solidFill>
-                  <a:schemeClr val="accent1">
-                    <a:shade val="15000"/>
-                  </a:schemeClr>
-                </a:solidFill>
-                <a:prstDash val="solid"/>
-              </a14:hiddenLine>
-            </a:ext>
-          </a:extLst>
-        </p:spPr>
-        <p:style>
-          <a:lnRef idx="2">
-            <a:schemeClr val="accent1">
-              <a:shade val="15000"/>
-            </a:schemeClr>
-          </a:lnRef>
-          <a:fillRef idx="1">
-            <a:schemeClr val="accent1"/>
-          </a:fillRef>
-          <a:effectRef idx="0">
-            <a:schemeClr val="accent1"/>
-          </a:effectRef>
-          <a:fontRef idx="minor">
-            <a:schemeClr val="lt1"/>
-          </a:fontRef>
-        </p:style>
-        <p:txBody>
-          <a:bodyPr rtlCol="0" anchor="ctr"/>
-          <a:lstStyle/>
-          <a:p>
-            <a:pPr algn="ctr"/>
-            <a:endParaRPr lang="en-US" sz="2566"/>
-          </a:p>
-        </p:txBody>
-      </p:sp>
-      <p:sp>
-        <p:nvSpPr>
-          <p:cNvPr id="17" name="P100 Step 6 Hit Area">
-            <a:hlinkClick r:id="rId9" action="ppaction://hlinksldjump"/>
-            <a:hlinkHover r:id="rId9" action="ppaction://hlinksldjump"/>
-            <a:extLst>
-              <a:ext uri="{FF2B5EF4-FFF2-40B4-BE49-F238E27FC236}">
-                <a16:creationId xmlns:a16="http://schemas.microsoft.com/office/drawing/2014/main" id="{5EAFDB48-C279-C4A0-6D7C-C12FC3B04D19}"/>
-              </a:ext>
-            </a:extLst>
-          </p:cNvPr>
-          <p:cNvSpPr/>
-          <p:nvPr/>
-        </p:nvSpPr>
-        <p:spPr>
-          <a:xfrm>
-            <a:off x="964194" y="5825905"/>
-            <a:ext cx="4617267" cy="570368"/>
-          </a:xfrm>
-          <a:prstGeom prst="rect">
-            <a:avLst/>
-          </a:prstGeom>
-          <a:solidFill>
-            <a:schemeClr val="accent1">
-              <a:alpha val="0"/>
-            </a:schemeClr>
-          </a:solidFill>
-          <a:ln w="19050">
-            <a:noFill/>
-            <a:prstDash val="solid"/>
-          </a:ln>
-          <a:effectLst/>
-          <a:extLst>
-            <a:ext uri="{91240B29-F687-4F45-9708-019B960494DF}">
-              <a14:hiddenLine xmlns:a14="http://schemas.microsoft.com/office/drawing/2010/main" w="19050">
-                <a:solidFill>
-                  <a:schemeClr val="accent1">
-                    <a:shade val="15000"/>
-                  </a:schemeClr>
-                </a:solidFill>
-                <a:prstDash val="solid"/>
-              </a14:hiddenLine>
-            </a:ext>
-          </a:extLst>
-        </p:spPr>
-        <p:style>
-          <a:lnRef idx="2">
-            <a:schemeClr val="accent1">
-              <a:shade val="15000"/>
-            </a:schemeClr>
-          </a:lnRef>
-          <a:fillRef idx="1">
-            <a:schemeClr val="accent1"/>
-          </a:fillRef>
-          <a:effectRef idx="0">
-            <a:schemeClr val="accent1"/>
-          </a:effectRef>
-          <a:fontRef idx="minor">
-            <a:schemeClr val="lt1"/>
-          </a:fontRef>
-        </p:style>
-        <p:txBody>
-          <a:bodyPr rtlCol="0" anchor="ctr"/>
-          <a:lstStyle/>
-          <a:p>
-            <a:pPr algn="ctr"/>
-            <a:endParaRPr lang="en-US" sz="2566"/>
-          </a:p>
-        </p:txBody>
-      </p:sp>
-    </p:spTree>
-    <p:extLst>
-      <p:ext uri="{BB962C8B-B14F-4D97-AF65-F5344CB8AC3E}">
-        <p14:creationId xmlns:p14="http://schemas.microsoft.com/office/powerpoint/2010/main" val="1510545674"/>
       </p:ext>
     </p:extLst>
   </p:cSld>
@@ -12817,70 +14624,6 @@
 RP23CNC / grblHAL starts P100 locally.
 Not moved
 HX711 force samples stay inside the Pro Micro toolhead.</a:t>
-            </a:r>
-          </a:p>
-        </p:txBody>
-      </p:sp>
-      <p:sp>
-        <p:nvSpPr>
-          <p:cNvPr id="7" name="P100 Back Button">
-            <a:hlinkClick r:id="rId10" action="ppaction://hlinksldjump"/>
-            <a:hlinkHover r:id="rId10" action="ppaction://hlinksldjump"/>
-            <a:extLst>
-              <a:ext uri="{FF2B5EF4-FFF2-40B4-BE49-F238E27FC236}">
-                <a16:creationId xmlns:a16="http://schemas.microsoft.com/office/drawing/2014/main" id="{279E1C06-C5FC-7771-BB9B-D9DA1CB5D1C4}"/>
-              </a:ext>
-            </a:extLst>
-          </p:cNvPr>
-          <p:cNvSpPr/>
-          <p:nvPr/>
-        </p:nvSpPr>
-        <p:spPr>
-          <a:xfrm>
-            <a:off x="10058400" y="6172200"/>
-            <a:ext cx="1714500" cy="304800"/>
-          </a:xfrm>
-          <a:prstGeom prst="roundRect">
-            <a:avLst/>
-          </a:prstGeom>
-          <a:solidFill>
-            <a:srgbClr val="F4F4F4"/>
-          </a:solidFill>
-          <a:ln w="12700">
-            <a:solidFill>
-              <a:srgbClr val="FFA533"/>
-            </a:solidFill>
-          </a:ln>
-        </p:spPr>
-        <p:style>
-          <a:lnRef idx="2">
-            <a:schemeClr val="accent1">
-              <a:shade val="15000"/>
-            </a:schemeClr>
-          </a:lnRef>
-          <a:fillRef idx="1">
-            <a:schemeClr val="accent1"/>
-          </a:fillRef>
-          <a:effectRef idx="0">
-            <a:schemeClr val="accent1"/>
-          </a:effectRef>
-          <a:fontRef idx="minor">
-            <a:schemeClr val="lt1"/>
-          </a:fontRef>
-        </p:style>
-        <p:txBody>
-          <a:bodyPr rtlCol="0" anchor="ctr"/>
-          <a:lstStyle/>
-          <a:p>
-            <a:pPr algn="ctr"/>
-            <a:r>
-              <a:rPr lang="en-US" sz="1000" b="1">
-                <a:solidFill>
-                  <a:srgbClr val="FFA533"/>
-                </a:solidFill>
-                <a:latin typeface="Aptos" panose="020B0004020202020204" pitchFamily="34" charset="0"/>
-              </a:rPr>
-              <a:t>BACK</a:t>
             </a:r>
           </a:p>
         </p:txBody>
@@ -13560,70 +15303,6 @@
           </a:p>
         </p:txBody>
       </p:sp>
-      <p:sp>
-        <p:nvSpPr>
-          <p:cNvPr id="7" name="P100 Back Button">
-            <a:hlinkClick r:id="rId10" action="ppaction://hlinksldjump"/>
-            <a:hlinkHover r:id="rId10" action="ppaction://hlinksldjump"/>
-            <a:extLst>
-              <a:ext uri="{FF2B5EF4-FFF2-40B4-BE49-F238E27FC236}">
-                <a16:creationId xmlns:a16="http://schemas.microsoft.com/office/drawing/2014/main" id="{7F1B5C27-86DD-3109-8218-5AB6604396E4}"/>
-              </a:ext>
-            </a:extLst>
-          </p:cNvPr>
-          <p:cNvSpPr/>
-          <p:nvPr/>
-        </p:nvSpPr>
-        <p:spPr>
-          <a:xfrm>
-            <a:off x="10058400" y="6172200"/>
-            <a:ext cx="1714500" cy="304800"/>
-          </a:xfrm>
-          <a:prstGeom prst="roundRect">
-            <a:avLst/>
-          </a:prstGeom>
-          <a:solidFill>
-            <a:srgbClr val="F4F4F4"/>
-          </a:solidFill>
-          <a:ln w="12700">
-            <a:solidFill>
-              <a:srgbClr val="FFA533"/>
-            </a:solidFill>
-          </a:ln>
-        </p:spPr>
-        <p:style>
-          <a:lnRef idx="2">
-            <a:schemeClr val="accent1">
-              <a:shade val="15000"/>
-            </a:schemeClr>
-          </a:lnRef>
-          <a:fillRef idx="1">
-            <a:schemeClr val="accent1"/>
-          </a:fillRef>
-          <a:effectRef idx="0">
-            <a:schemeClr val="accent1"/>
-          </a:effectRef>
-          <a:fontRef idx="minor">
-            <a:schemeClr val="lt1"/>
-          </a:fontRef>
-        </p:style>
-        <p:txBody>
-          <a:bodyPr rtlCol="0" anchor="ctr"/>
-          <a:lstStyle/>
-          <a:p>
-            <a:pPr algn="ctr"/>
-            <a:r>
-              <a:rPr lang="en-US" sz="1000" b="1">
-                <a:solidFill>
-                  <a:srgbClr val="FFA533"/>
-                </a:solidFill>
-                <a:latin typeface="Aptos" panose="020B0004020202020204" pitchFamily="34" charset="0"/>
-              </a:rPr>
-              <a:t>BACK</a:t>
-            </a:r>
-          </a:p>
-        </p:txBody>
-      </p:sp>
     </p:spTree>
     <p:extLst>
       <p:ext uri="{BB962C8B-B14F-4D97-AF65-F5344CB8AC3E}">
@@ -14298,70 +15977,6 @@
           </a:p>
         </p:txBody>
       </p:sp>
-      <p:sp>
-        <p:nvSpPr>
-          <p:cNvPr id="7" name="P100 Back Button">
-            <a:hlinkClick r:id="rId10" action="ppaction://hlinksldjump"/>
-            <a:hlinkHover r:id="rId10" action="ppaction://hlinksldjump"/>
-            <a:extLst>
-              <a:ext uri="{FF2B5EF4-FFF2-40B4-BE49-F238E27FC236}">
-                <a16:creationId xmlns:a16="http://schemas.microsoft.com/office/drawing/2014/main" id="{8CBA725B-6CE2-AB54-38CD-CB7E9BAC0533}"/>
-              </a:ext>
-            </a:extLst>
-          </p:cNvPr>
-          <p:cNvSpPr/>
-          <p:nvPr/>
-        </p:nvSpPr>
-        <p:spPr>
-          <a:xfrm>
-            <a:off x="10058400" y="6172200"/>
-            <a:ext cx="1714500" cy="304800"/>
-          </a:xfrm>
-          <a:prstGeom prst="roundRect">
-            <a:avLst/>
-          </a:prstGeom>
-          <a:solidFill>
-            <a:srgbClr val="F4F4F4"/>
-          </a:solidFill>
-          <a:ln w="12700">
-            <a:solidFill>
-              <a:srgbClr val="FFA533"/>
-            </a:solidFill>
-          </a:ln>
-        </p:spPr>
-        <p:style>
-          <a:lnRef idx="2">
-            <a:schemeClr val="accent1">
-              <a:shade val="15000"/>
-            </a:schemeClr>
-          </a:lnRef>
-          <a:fillRef idx="1">
-            <a:schemeClr val="accent1"/>
-          </a:fillRef>
-          <a:effectRef idx="0">
-            <a:schemeClr val="accent1"/>
-          </a:effectRef>
-          <a:fontRef idx="minor">
-            <a:schemeClr val="lt1"/>
-          </a:fontRef>
-        </p:style>
-        <p:txBody>
-          <a:bodyPr rtlCol="0" anchor="ctr"/>
-          <a:lstStyle/>
-          <a:p>
-            <a:pPr algn="ctr"/>
-            <a:r>
-              <a:rPr lang="en-US" sz="1000" b="1">
-                <a:solidFill>
-                  <a:srgbClr val="FFA533"/>
-                </a:solidFill>
-                <a:latin typeface="Aptos" panose="020B0004020202020204" pitchFamily="34" charset="0"/>
-              </a:rPr>
-              <a:t>BACK</a:t>
-            </a:r>
-          </a:p>
-        </p:txBody>
-      </p:sp>
     </p:spTree>
     <p:extLst>
       <p:ext uri="{BB962C8B-B14F-4D97-AF65-F5344CB8AC3E}">
@@ -15032,70 +16647,6 @@
 Result
 Center magnet sets G54 X/Y zero.
 Outer magnet sets A zero.</a:t>
-            </a:r>
-          </a:p>
-        </p:txBody>
-      </p:sp>
-      <p:sp>
-        <p:nvSpPr>
-          <p:cNvPr id="7" name="P100 Back Button">
-            <a:hlinkClick r:id="rId10" action="ppaction://hlinksldjump"/>
-            <a:hlinkHover r:id="rId10" action="ppaction://hlinksldjump"/>
-            <a:extLst>
-              <a:ext uri="{FF2B5EF4-FFF2-40B4-BE49-F238E27FC236}">
-                <a16:creationId xmlns:a16="http://schemas.microsoft.com/office/drawing/2014/main" id="{86FD7CDA-8052-A1AD-18B3-88194A2EE39A}"/>
-              </a:ext>
-            </a:extLst>
-          </p:cNvPr>
-          <p:cNvSpPr/>
-          <p:nvPr/>
-        </p:nvSpPr>
-        <p:spPr>
-          <a:xfrm>
-            <a:off x="10058400" y="6172200"/>
-            <a:ext cx="1714500" cy="304800"/>
-          </a:xfrm>
-          <a:prstGeom prst="roundRect">
-            <a:avLst/>
-          </a:prstGeom>
-          <a:solidFill>
-            <a:srgbClr val="F4F4F4"/>
-          </a:solidFill>
-          <a:ln w="12700">
-            <a:solidFill>
-              <a:srgbClr val="FFA533"/>
-            </a:solidFill>
-          </a:ln>
-        </p:spPr>
-        <p:style>
-          <a:lnRef idx="2">
-            <a:schemeClr val="accent1">
-              <a:shade val="15000"/>
-            </a:schemeClr>
-          </a:lnRef>
-          <a:fillRef idx="1">
-            <a:schemeClr val="accent1"/>
-          </a:fillRef>
-          <a:effectRef idx="0">
-            <a:schemeClr val="accent1"/>
-          </a:effectRef>
-          <a:fontRef idx="minor">
-            <a:schemeClr val="lt1"/>
-          </a:fontRef>
-        </p:style>
-        <p:txBody>
-          <a:bodyPr rtlCol="0" anchor="ctr"/>
-          <a:lstStyle/>
-          <a:p>
-            <a:pPr algn="ctr"/>
-            <a:r>
-              <a:rPr lang="en-US" sz="1000" b="1">
-                <a:solidFill>
-                  <a:srgbClr val="FFA533"/>
-                </a:solidFill>
-                <a:latin typeface="Aptos" panose="020B0004020202020204" pitchFamily="34" charset="0"/>
-              </a:rPr>
-              <a:t>BACK</a:t>
             </a:r>
           </a:p>
         </p:txBody>
